--- a/downloads/presentations/modules/lesson-35-organizational-change-management-for-ai-adoption.pptx
+++ b/downloads/presentations/modules/lesson-35-organizational-change-management-for-ai-adoption.pptx
@@ -23,9 +23,11 @@
     <p:sldId id="271" r:id="rId17"/>
     <p:sldId id="272" r:id="rId18"/>
     <p:sldId id="273" r:id="rId19"/>
+    <p:sldId id="274" r:id="rId20"/>
+    <p:sldId id="275" r:id="rId21"/>
   </p:sldIdLst>
   <p:notesMasterIdLst>
-    <p:notesMasterId r:id="rId20"/>
+    <p:notesMasterId r:id="rId22"/>
   </p:notesMasterIdLst>
   <p:sldSz cx="12192000" cy="6858000"/>
   <p:notesSz cx="6858000" cy="12192000"/>
@@ -608,10 +610,9 @@
           <a:p>
             <a:r>
               <a:rPr lang="en-US" dirty="0"/>
-              <a:t>Reflection Questions
-Which current or proposed AI use case in your agency raises this leadership or governance issue most clearly?
-Who currently has authority to make decisions about this issue, and is that authority documented?
-What evidence would governance or leadership need before approving the use case?</a:t>
+              <a:t>Risks, Failure Modes, and Guardrails
+One risk is adoption without understanding. Staff may use the tool incorrectly or treat outputs as authoritative because training was superficial. A guardrail is to require role-based training and workflow-specific practice before access is granted.
+Another risk is resistance caused by lack of transparency. If staff believe AI is being introduced to monitor or replace them, they may avoid or undermine the tool. A guardrail is to communicate purpose, boundaries, data practices, and workforce implications clearly and early.</a:t>
             </a:r>
             <a:endParaRPr lang="en-US" dirty="0"/>
           </a:p>
@@ -699,9 +700,8 @@
           <a:p>
             <a:r>
               <a:rPr lang="en-US" dirty="0"/>
-              <a:t>Reflection Questions
-Which staff, partners, or communities would be affected if this issue were handled poorly?
-What policy, process, or artifact should be created or updated after this module?</a:t>
+              <a:t>Application to AI-Supported Workflows
+Generative AI adoption requires training on review, citation, privacy, and public records. Predictive analytics adoption requires training on interpretation, limitations, and override documentation. Agentic workflow adoption requires training on approvals, stop procedures, and escalation. Each AI type changes work in different ways, so change management must be specific.</a:t>
             </a:r>
             <a:endParaRPr lang="en-US" dirty="0"/>
           </a:p>
@@ -789,8 +789,10 @@
           <a:p>
             <a:r>
               <a:rPr lang="en-US" dirty="0"/>
-              <a:t>Practical Exercise
-Create a change management plan for one AI use case. Include stakeholder map, communication messages, training needs, workflow changes, adoption measures, feedback process, and launch support.</a:t>
+              <a:t>Reflection Questions
+Which current or proposed AI use case in your agency raises this leadership or governance issue most clearly?
+Who currently has authority to make decisions about this issue, and is that authority documented?
+What evidence would governance or leadership need before approving the use case?</a:t>
             </a:r>
             <a:endParaRPr lang="en-US" dirty="0"/>
           </a:p>
@@ -878,8 +880,9 @@
           <a:p>
             <a:r>
               <a:rPr lang="en-US" dirty="0"/>
-              <a:t>Before You Begin
-Choose a real or realistic public health AI use case. Document assumptions, unresolved questions, and which agency roles would need to review the artifact before it is adopted. The exercise should produce a work product that could support governance review, leadership discussion, implementation planning, or policy development.</a:t>
+              <a:t>Reflection Questions
+Which staff, partners, or communities would be affected if this issue were handled poorly?
+What policy, process, or artifact should be created or updated after this module?</a:t>
             </a:r>
             <a:endParaRPr lang="en-US" dirty="0"/>
           </a:p>
@@ -967,8 +970,8 @@
           <a:p>
             <a:r>
               <a:rPr lang="en-US" dirty="0"/>
-              <a:t>Expected Artifact or Evidence
-AI adoption plan; stakeholder map; communication plan; training plan; feedback and adoption monitoring plan.</a:t>
+              <a:t>Practical Exercise
+Create a change management plan for one AI use case. Include stakeholder map, communication messages, training needs, workflow changes, adoption measures, feedback process, and launch support.</a:t>
             </a:r>
             <a:endParaRPr lang="en-US" dirty="0"/>
           </a:p>
@@ -1056,8 +1059,8 @@
           <a:p>
             <a:r>
               <a:rPr lang="en-US" dirty="0"/>
-              <a:t>Expected Assignment
-AI adoption plan; stakeholder map; communication plan; training plan; feedback and adoption monitoring plan.</a:t>
+              <a:t>Before You Begin
+Choose a real or realistic public health AI use case. Document assumptions, unresolved questions, and which agency roles would need to review the artifact before it is adopted. The exercise should produce a work product that could support governance review, leadership discussion, implementation planning, or policy development.</a:t>
             </a:r>
             <a:endParaRPr lang="en-US" dirty="0"/>
           </a:p>
@@ -1145,12 +1148,8 @@
           <a:p>
             <a:r>
               <a:rPr lang="en-US" dirty="0"/>
-              <a:t>Knowledge Check
-1. What is the strongest reason this module topic belongs in AI leadership and governance training?
-2. Which practice best supports accountable public health AI governance?
-3. When should an AI use case be escalated for leadership or governance review?
-4. What is weak evidence of completion for a leadership and governance module?
-5. What should leaders do when an AI use case has meaningful benefits but unresolved risks?</a:t>
+              <a:t>Expected Artifact or Evidence
+AI adoption plan; stakeholder map; communication plan; training plan; feedback and adoption monitoring plan.</a:t>
             </a:r>
             <a:endParaRPr lang="en-US" dirty="0"/>
           </a:p>
@@ -1238,12 +1237,8 @@
           <a:p>
             <a:r>
               <a:rPr lang="en-US" dirty="0"/>
-              <a:t>References and Resources
-NIST Artificial Intelligence Risk Management Framework (AI RMF 1.0): https://www.nist.gov/itl/ai-risk-management-framework
-NIST Generative AI Profile: https://www.nist.gov/publications/artificial-intelligence-risk-management-framework-generative-artificial-intelligence
-NIST Privacy Framework
-CDC Public Health Data Strategy and Data Modernization resources: https://www.cdc.gov/public-health-data-strategy/php/about/index.html
-WHO Ethics and Governance of Artificial Intelligence for Health: https://www.who.int/publications/i/item/9789240029200</a:t>
+              <a:t>Expected Assignment
+AI adoption plan; stakeholder map; communication plan; training plan; feedback and adoption monitoring plan.</a:t>
             </a:r>
             <a:endParaRPr lang="en-US" dirty="0"/>
           </a:p>
@@ -1331,9 +1326,12 @@
           <a:p>
             <a:r>
               <a:rPr lang="en-US" dirty="0"/>
-              <a:t>References and Resources
-OMB Memorandum M-24-10 on federal AI governance, risk management, and innovation, where relevant to public-sector governance models
-Agency strategic plans, procurement policies, privacy policies, cybersecurity policies, records policies, and equity plans</a:t>
+              <a:t>Knowledge Check
+1. What is the strongest reason this module topic belongs in AI leadership and governance training?
+2. Which practice best supports accountable public health AI governance?
+3. When should an AI use case be escalated for leadership or governance review?
+4. What is weak evidence of completion for a leadership and governance module?
+5. What should leaders do when an AI use case has meaningful benefits but unresolved risks?</a:t>
             </a:r>
             <a:endParaRPr lang="en-US" dirty="0"/>
           </a:p>
@@ -1357,6 +1355,99 @@
             <a:fld id="{F7021451-1387-4CA6-816F-3879F97B5CBC}" type="slidenum">
               <a:rPr lang="en-US"/>
               <a:t>18</a:t>
+            </a:fld>
+            <a:endParaRPr lang="en-US"/>
+          </a:p>
+        </p:txBody>
+      </p:sp>
+    </p:spTree>
+    <p:extLst>
+      <p:ext uri="{BB962C8B-B14F-4D97-AF65-F5344CB8AC3E}">
+        <p14:creationId xmlns:p14="http://schemas.microsoft.com/office/powerpoint/2010/main" val="1024086991"/>
+      </p:ext>
+    </p:extLst>
+  </p:cSld>
+  <p:clrMapOvr>
+    <a:masterClrMapping/>
+  </p:clrMapOvr>
+</p:notes>
+</file>
+
+<file path=ppt/notesSlides/notesSlide19.xml><?xml version="1.0" encoding="utf-8"?>
+<p:notes xmlns:a="http://schemas.openxmlformats.org/drawingml/2006/main" xmlns:r="http://schemas.openxmlformats.org/officeDocument/2006/relationships" xmlns:p="http://schemas.openxmlformats.org/presentationml/2006/main">
+  <p:cSld>
+    <p:spTree>
+      <p:nvGrpSpPr>
+        <p:cNvPr id="1" name=""/>
+        <p:cNvGrpSpPr/>
+        <p:nvPr/>
+      </p:nvGrpSpPr>
+      <p:grpSpPr>
+        <a:xfrm>
+          <a:off x="0" y="0"/>
+          <a:ext cx="0" cy="0"/>
+          <a:chOff x="0" y="0"/>
+          <a:chExt cx="0" cy="0"/>
+        </a:xfrm>
+      </p:grpSpPr>
+      <p:sp>
+        <p:nvSpPr>
+          <p:cNvPr id="2" name="Slide Image Placeholder 1"/>
+          <p:cNvSpPr>
+            <a:spLocks noGrp="1" noRot="1" noChangeAspect="1"/>
+          </p:cNvSpPr>
+          <p:nvPr>
+            <p:ph type="sldImg"/>
+          </p:nvPr>
+        </p:nvSpPr>
+        <p:spPr/>
+      </p:sp>
+      <p:sp>
+        <p:nvSpPr>
+          <p:cNvPr id="3" name="Notes Placeholder 2"/>
+          <p:cNvSpPr>
+            <a:spLocks noGrp="1"/>
+          </p:cNvSpPr>
+          <p:nvPr>
+            <p:ph type="body" idx="1"/>
+          </p:nvPr>
+        </p:nvSpPr>
+        <p:spPr/>
+        <p:txBody>
+          <a:bodyPr/>
+          <a:lstStyle/>
+          <a:p>
+            <a:r>
+              <a:rPr lang="en-US" dirty="0"/>
+              <a:t>References and Resources
+NIST Artificial Intelligence Risk Management Framework (AI RMF 1.0): https://www.nist.gov/itl/ai-risk-management-framework
+NIST Generative AI Profile: https://www.nist.gov/publications/artificial-intelligence-risk-management-framework-generative-artificial-intelligence
+NIST Privacy Framework
+CDC Public Health Data Strategy and Data Modernization resources: https://www.cdc.gov/public-health-data-strategy/php/about/index.html
+WHO Ethics and Governance of Artificial Intelligence for Health: https://www.who.int/publications/i/item/9789240029200</a:t>
+            </a:r>
+            <a:endParaRPr lang="en-US" dirty="0"/>
+          </a:p>
+        </p:txBody>
+      </p:sp>
+      <p:sp>
+        <p:nvSpPr>
+          <p:cNvPr id="4" name="Slide Number Placeholder 3"/>
+          <p:cNvSpPr>
+            <a:spLocks noGrp="1"/>
+          </p:cNvSpPr>
+          <p:nvPr>
+            <p:ph type="sldNum" sz="quarter" idx="10"/>
+          </p:nvPr>
+        </p:nvSpPr>
+        <p:spPr/>
+        <p:txBody>
+          <a:bodyPr/>
+          <a:lstStyle/>
+          <a:p>
+            <a:fld id="{F7021451-1387-4CA6-816F-3879F97B5CBC}" type="slidenum">
+              <a:rPr lang="en-US"/>
+              <a:t>19</a:t>
             </a:fld>
             <a:endParaRPr lang="en-US"/>
           </a:p>
@@ -1467,6 +1558,96 @@
 </p:notes>
 </file>
 
+<file path=ppt/notesSlides/notesSlide20.xml><?xml version="1.0" encoding="utf-8"?>
+<p:notes xmlns:a="http://schemas.openxmlformats.org/drawingml/2006/main" xmlns:r="http://schemas.openxmlformats.org/officeDocument/2006/relationships" xmlns:p="http://schemas.openxmlformats.org/presentationml/2006/main">
+  <p:cSld>
+    <p:spTree>
+      <p:nvGrpSpPr>
+        <p:cNvPr id="1" name=""/>
+        <p:cNvGrpSpPr/>
+        <p:nvPr/>
+      </p:nvGrpSpPr>
+      <p:grpSpPr>
+        <a:xfrm>
+          <a:off x="0" y="0"/>
+          <a:ext cx="0" cy="0"/>
+          <a:chOff x="0" y="0"/>
+          <a:chExt cx="0" cy="0"/>
+        </a:xfrm>
+      </p:grpSpPr>
+      <p:sp>
+        <p:nvSpPr>
+          <p:cNvPr id="2" name="Slide Image Placeholder 1"/>
+          <p:cNvSpPr>
+            <a:spLocks noGrp="1" noRot="1" noChangeAspect="1"/>
+          </p:cNvSpPr>
+          <p:nvPr>
+            <p:ph type="sldImg"/>
+          </p:nvPr>
+        </p:nvSpPr>
+        <p:spPr/>
+      </p:sp>
+      <p:sp>
+        <p:nvSpPr>
+          <p:cNvPr id="3" name="Notes Placeholder 2"/>
+          <p:cNvSpPr>
+            <a:spLocks noGrp="1"/>
+          </p:cNvSpPr>
+          <p:nvPr>
+            <p:ph type="body" idx="1"/>
+          </p:nvPr>
+        </p:nvSpPr>
+        <p:spPr/>
+        <p:txBody>
+          <a:bodyPr/>
+          <a:lstStyle/>
+          <a:p>
+            <a:r>
+              <a:rPr lang="en-US" dirty="0"/>
+              <a:t>References and Resources
+OMB Memorandum M-24-10 on federal AI governance, risk management, and innovation, where relevant to public-sector governance models
+Agency strategic plans, procurement policies, privacy policies, cybersecurity policies, records policies, and equity plans</a:t>
+            </a:r>
+            <a:endParaRPr lang="en-US" dirty="0"/>
+          </a:p>
+        </p:txBody>
+      </p:sp>
+      <p:sp>
+        <p:nvSpPr>
+          <p:cNvPr id="4" name="Slide Number Placeholder 3"/>
+          <p:cNvSpPr>
+            <a:spLocks noGrp="1"/>
+          </p:cNvSpPr>
+          <p:nvPr>
+            <p:ph type="sldNum" sz="quarter" idx="10"/>
+          </p:nvPr>
+        </p:nvSpPr>
+        <p:spPr/>
+        <p:txBody>
+          <a:bodyPr/>
+          <a:lstStyle/>
+          <a:p>
+            <a:fld id="{F7021451-1387-4CA6-816F-3879F97B5CBC}" type="slidenum">
+              <a:rPr lang="en-US"/>
+              <a:t>20</a:t>
+            </a:fld>
+            <a:endParaRPr lang="en-US"/>
+          </a:p>
+        </p:txBody>
+      </p:sp>
+    </p:spTree>
+    <p:extLst>
+      <p:ext uri="{BB962C8B-B14F-4D97-AF65-F5344CB8AC3E}">
+        <p14:creationId xmlns:p14="http://schemas.microsoft.com/office/powerpoint/2010/main" val="1024086991"/>
+      </p:ext>
+    </p:extLst>
+  </p:cSld>
+  <p:clrMapOvr>
+    <a:masterClrMapping/>
+  </p:clrMapOvr>
+</p:notes>
+</file>
+
 <file path=ppt/notesSlides/notesSlide3.xml><?xml version="1.0" encoding="utf-8"?>
 <p:notes xmlns:a="http://schemas.openxmlformats.org/drawingml/2006/main" xmlns:r="http://schemas.openxmlformats.org/officeDocument/2006/relationships" xmlns:p="http://schemas.openxmlformats.org/presentationml/2006/main">
   <p:cSld>
@@ -1513,12 +1694,11 @@
           <a:p>
             <a:r>
               <a:rPr lang="en-US" dirty="0"/>
-              <a:t>Learning Objectives
-Explain why AI implementation requires change management.
-Identify stakeholders affected by an AI-supported workflow.
-Develop a change management plan that includes communication, training, workflow updates, feedback, and adoption measures.
-Recognize staff concerns related to trust, workload, deskilling, surveillance, accountability, and job impact.
-Produce an AI adoption and change management plan.</a:t>
+              <a:t>Related Playbook Plays
+Play 11: Build and Deploy AI Solutions - This lesson informs Play 11 by helping learners connect the lesson topic to build and deploy ai solutions work in the AI Playbook.
+Play 2: Readiness Assessment - This lesson informs Play 2 by helping learners connect the lesson topic to readiness assessment work in the AI Playbook sequence.
+Play 3: Establish AI Governance - This lesson informs Play 3 by helping learners connect the lesson topic to establish ai governance work in the AI Playbook sequence.
+Play 1: Vision &amp; Guardrails - This lesson informs Play 1 by helping learners connect the lesson topic to vision &amp; guardrails work in the AI Playbook sequence.</a:t>
             </a:r>
             <a:endParaRPr lang="en-US" dirty="0"/>
           </a:p>
@@ -1606,9 +1786,13 @@
           <a:p>
             <a:r>
               <a:rPr lang="en-US" dirty="0"/>
-              <a:t>Module Overview
-AI adoption changes how people work, make decisions, document actions, communicate with partners, and understand their roles. Successful implementation requires change management, not just technical deployment. Staff need to understand why a tool is being introduced, how it affects their workflow, what they are responsible for reviewing, and how concerns will be handled.
-This module helps leaders plan the organizational side of AI adoption. It focuses on stakeholder engagement, communication, training, workflow redesign, trust-building, feedback loops, readiness assessment, and adoption monitoring. The goal is to prevent AI from being experienced as a top-down technology mandate and instead support thoughtful integration into public health practice.</a:t>
+              <a:t>Related Toolkit Resources
+Tool 4: AI Policy Landscape Scan (Worksheet) - Use AI Policy Landscape Scan to translate this lesson into a documented public health AI planning, governance, implementation,.
+Tool 5: AI Environmental and Resource Impact Review (Checklist) - Use AI Environmental and Resource Impact Review to translate this lesson into a documented public health AI planning,.
+Tool 6: Human-Centered AI Decision Rule Checklist (Checklist) - Use Human-Centered AI Decision Rule Checklist to translate this lesson into a documented public health AI planning, governance,.
+Tool 8: AI Project Charter (Planning) - Use AI Project Charter to translate this lesson into a documented public health AI planning, governance, implementation, or.
+Tool 9: Data Quality Assessment Checklist (Checklist) - Use this tool to complete or strengthen the practical exercise for the module using fictional, de-identified, or generalized.
+Tool 10: Tiered Data Classification for AI Use (Worksheet) - Use Tiered Data Classification for AI Use to translate this lesson into a documented public health AI planning, governance,.</a:t>
             </a:r>
             <a:endParaRPr lang="en-US" dirty="0"/>
           </a:p>
@@ -1696,9 +1880,12 @@
           <a:p>
             <a:r>
               <a:rPr lang="en-US" dirty="0"/>
-              <a:t>Why This Topic Matters for Public Health AI
-AI tools may fail even when the technology works because the organization is not ready to use them. Staff may not trust the output, may over-trust it, may not understand their review responsibilities, or may develop workarounds that undermine safeguards. Leaders may underestimate the time needed for training, workflow redesign, and user feedback.
-Change management is also an equity and workforce issue. Staff who are not included in design may experience AI as a threat or burden. Programs with less technical capacity may be left behind. Communities may experience changes in service delivery without understanding how AI is involved. A change plan helps ensure that adoption is transparent, inclusive, and aligned with public health values.</a:t>
+              <a:t>Learning Objectives
+Explain why AI implementation requires change management.
+Identify stakeholders affected by an AI-supported workflow.
+Develop a change management plan that includes communication, training, workflow updates, feedback, and adoption measures.
+Recognize staff concerns related to trust, workload, deskilling, surveillance, accountability, and job impact.
+Produce an AI adoption and change management plan.</a:t>
             </a:r>
             <a:endParaRPr lang="en-US" dirty="0"/>
           </a:p>
@@ -1786,9 +1973,9 @@
           <a:p>
             <a:r>
               <a:rPr lang="en-US" dirty="0"/>
-              <a:t>Public Health Example
-A health department launches an AI assistant to help staff find internal policies and program guidance. The tool is technically functional, but staff do not use it because they are unsure whether answers are official, whether searches are monitored, and whether they remain responsible for verifying information. Some staff worry that the tool will be used to judge their productivity.
-A change management plan addresses these concerns directly. It explains the purpose of the tool, approved uses, prohibited uses, privacy protections, source citation requirements, human verification expectations, and feedback process. It also includes supervisors, program champions, training sessions, office hours, and monitoring of adoption barriers.</a:t>
+              <a:t>Module Overview
+AI adoption changes how people work, make decisions, document actions, communicate with partners, and understand their roles. Successful implementation requires change management, not just technical deployment. Staff need to understand why a tool is being introduced, how it affects their workflow, what they are responsible for reviewing, and how concerns will be handled.
+This module helps leaders plan the organizational side of AI adoption. It focuses on stakeholder engagement, communication, training, workflow redesign, trust-building, feedback loops, readiness assessment, and adoption monitoring. The goal is to prevent AI from being experienced as a top-down technology mandate and instead support thoughtful integration into public health practice.</a:t>
             </a:r>
             <a:endParaRPr lang="en-US" dirty="0"/>
           </a:p>
@@ -1876,10 +2063,9 @@
           <a:p>
             <a:r>
               <a:rPr lang="en-US" dirty="0"/>
-              <a:t>Technical and Governance Deep Dive
-AI change management should begin before procurement or configuration. Leaders should identify who will be affected, what pain points the tool is supposed to address, which workflows will change, and what staff need to learn. Stakeholder engagement should include frontline users, supervisors, program leaders, IT, privacy, legal, communications, equity staff, and where appropriate, community representatives.
-The communication plan should be specific. Staff need to know what the tool does, what it does not do, why the agency is using it, what data may be entered, what outputs require review, and how errors should be reported. Communication should also acknowledge uncertainty. Overselling AI can damage trust when limitations become visible. Under-explaining AI can lead to rumors, resistance, or unsafe use.
-Training should be tied to workflow. Generic AI literacy is not enough. Users need role-specific examples, review criteria, escalation scenarios, documentation expectations, and practice with realistic outputs. Supervisors need to know how to reinforce appropriate use and respond to concerns. Change management should continue after launch through feedback, monitoring, and iterative improvement.</a:t>
+              <a:t>Why This Topic Matters for Public Health AI
+AI tools may fail even when the technology works because the organization is not ready to use them. Staff may not trust the output, may over-trust it, may not understand their review responsibilities, or may develop workarounds that undermine safeguards. Leaders may underestimate the time needed for training, workflow redesign, and user feedback.
+Change management is also an equity and workforce issue. Staff who are not included in design may experience AI as a threat or burden. Programs with less technical capacity may be left behind. Communities may experience changes in service delivery without understanding how AI is involved. A change plan helps ensure that adoption is transparent, inclusive, and aligned with public health values.</a:t>
             </a:r>
             <a:endParaRPr lang="en-US" dirty="0"/>
           </a:p>
@@ -1967,9 +2153,9 @@
           <a:p>
             <a:r>
               <a:rPr lang="en-US" dirty="0"/>
-              <a:t>Risks, Failure Modes, and Guardrails
-One risk is adoption without understanding. Staff may use the tool incorrectly or treat outputs as authoritative because training was superficial. A guardrail is to require role-based training and workflow-specific practice before access is granted.
-Another risk is resistance caused by lack of transparency. If staff believe AI is being introduced to monitor or replace them, they may avoid or undermine the tool. A guardrail is to communicate purpose, boundaries, data practices, and workforce implications clearly and early.</a:t>
+              <a:t>Public Health Example
+A health department launches an AI assistant to help staff find internal policies and program guidance. The tool is technically functional, but staff do not use it because they are unsure whether answers are official, whether searches are monitored, and whether they remain responsible for verifying information. Some staff worry that the tool will be used to judge their productivity.
+A change management plan addresses these concerns directly. It explains the purpose of the tool, approved uses, prohibited uses, privacy protections, source citation requirements, human verification expectations, and feedback process. It also includes supervisors, program champions, training sessions, office hours, and monitoring of adoption barriers.</a:t>
             </a:r>
             <a:endParaRPr lang="en-US" dirty="0"/>
           </a:p>
@@ -2057,8 +2243,10 @@
           <a:p>
             <a:r>
               <a:rPr lang="en-US" dirty="0"/>
-              <a:t>Application to AI-Supported Workflows
-Generative AI adoption requires training on review, citation, privacy, and public records. Predictive analytics adoption requires training on interpretation, limitations, and override documentation. Agentic workflow adoption requires training on approvals, stop procedures, and escalation. Each AI type changes work in different ways, so change management must be specific.</a:t>
+              <a:t>Technical and Governance Deep Dive
+AI change management should begin before procurement or configuration. Leaders should identify who will be affected, what pain points the tool is supposed to address, which workflows will change, and what staff need to learn. Stakeholder engagement should include frontline users, supervisors, program leaders, IT, privacy, legal, communications, equity staff, and where appropriate, community representatives.
+The communication plan should be specific. Staff need to know what the tool does, what it does not do, why the agency is using it, what data may be entered, what outputs require review, and how errors should be reported. Communication should also acknowledge uncertainty. Overselling AI can damage trust when limitations become visible. Under-explaining AI can lead to rumors, resistance, or unsafe use.
+Training should be tied to workflow. Generic AI literacy is not enough. Users need role-specific examples, review criteria, escalation scenarios, documentation expectations, and practice with realistic outputs. Supervisors need to know how to reinforce appropriate use and respond to concerns. Change management should continue after launch through feedback, monitoring, and iterative improvement.</a:t>
             </a:r>
             <a:endParaRPr lang="en-US" dirty="0"/>
           </a:p>
@@ -2681,7 +2869,32 @@
       </p:sp>
       <p:sp>
         <p:nvSpPr>
-          <p:cNvPr id="3" name="Text 1"/>
+          <p:cNvPr id="3" name="Shape 1"/>
+          <p:cNvSpPr/>
+          <p:nvPr/>
+        </p:nvSpPr>
+        <p:spPr>
+          <a:xfrm>
+            <a:off x="0" y="164592"/>
+            <a:ext cx="146304" cy="6693408"/>
+          </a:xfrm>
+          <a:prstGeom prst="rect">
+            <a:avLst/>
+          </a:prstGeom>
+          <a:solidFill>
+            <a:srgbClr val="2F8A28"/>
+          </a:solidFill>
+          <a:ln w="12700">
+            <a:solidFill>
+              <a:srgbClr val="2F8A28"/>
+            </a:solidFill>
+            <a:prstDash val="solid"/>
+          </a:ln>
+        </p:spPr>
+      </p:sp>
+      <p:sp>
+        <p:nvSpPr>
+          <p:cNvPr id="4" name="Text 2"/>
           <p:cNvSpPr/>
           <p:nvPr/>
         </p:nvSpPr>
@@ -2720,7 +2933,7 @@
       </p:sp>
       <p:sp>
         <p:nvSpPr>
-          <p:cNvPr id="4" name="Text 2"/>
+          <p:cNvPr id="5" name="Text 3"/>
           <p:cNvSpPr/>
           <p:nvPr/>
         </p:nvSpPr>
@@ -2759,7 +2972,7 @@
       </p:sp>
       <p:sp>
         <p:nvSpPr>
-          <p:cNvPr id="5" name="Text 3"/>
+          <p:cNvPr id="6" name="Text 4"/>
           <p:cNvSpPr/>
           <p:nvPr/>
         </p:nvSpPr>
@@ -2798,13 +3011,77 @@
       </p:sp>
       <p:sp>
         <p:nvSpPr>
-          <p:cNvPr id="6" name="Text 4"/>
+          <p:cNvPr id="7" name="Shape 5"/>
           <p:cNvSpPr/>
           <p:nvPr/>
         </p:nvSpPr>
         <p:spPr>
           <a:xfrm>
             <a:off x="640080" y="658368"/>
+            <a:ext cx="420624" cy="420624"/>
+          </a:xfrm>
+          <a:prstGeom prst="ellipse">
+            <a:avLst/>
+          </a:prstGeom>
+          <a:solidFill>
+            <a:srgbClr val="0068B7"/>
+          </a:solidFill>
+          <a:ln w="12700">
+            <a:solidFill>
+              <a:srgbClr val="0068B7"/>
+            </a:solidFill>
+            <a:prstDash val="solid"/>
+          </a:ln>
+        </p:spPr>
+      </p:sp>
+      <p:sp>
+        <p:nvSpPr>
+          <p:cNvPr id="8" name="Text 6"/>
+          <p:cNvSpPr/>
+          <p:nvPr/>
+        </p:nvSpPr>
+        <p:spPr>
+          <a:xfrm>
+            <a:off x="640080" y="731520"/>
+            <a:ext cx="420624" cy="164592"/>
+          </a:xfrm>
+          <a:prstGeom prst="rect">
+            <a:avLst/>
+          </a:prstGeom>
+          <a:noFill/>
+          <a:ln/>
+        </p:spPr>
+        <p:txBody>
+          <a:bodyPr wrap="square" lIns="0" tIns="0" rIns="0" bIns="0" rtlCol="0" anchor="ctr"/>
+          <a:lstStyle/>
+          <a:p>
+            <a:pPr algn="ctr" indent="0" marL="0">
+              <a:buNone/>
+            </a:pPr>
+            <a:r>
+              <a:rPr lang="en-US" sz="1100" b="1" dirty="0">
+                <a:solidFill>
+                  <a:srgbClr val="FFFFFF"/>
+                </a:solidFill>
+                <a:latin typeface="Aptos" pitchFamily="34" charset="0"/>
+                <a:ea typeface="Aptos" pitchFamily="34" charset="-122"/>
+                <a:cs typeface="Aptos" pitchFamily="34" charset="-120"/>
+              </a:rPr>
+              <a:t>6</a:t>
+            </a:r>
+            <a:endParaRPr lang="en-US" sz="1100" dirty="0"/>
+          </a:p>
+        </p:txBody>
+      </p:sp>
+      <p:sp>
+        <p:nvSpPr>
+          <p:cNvPr id="9" name="Text 7"/>
+          <p:cNvSpPr/>
+          <p:nvPr/>
+        </p:nvSpPr>
+        <p:spPr>
+          <a:xfrm>
+            <a:off x="640080" y="621792"/>
             <a:ext cx="10881360" cy="566928"/>
           </a:xfrm>
           <a:prstGeom prst="rect">
@@ -2831,7 +3108,7 @@
                 <a:ea typeface="Aptos Display" pitchFamily="34" charset="-122"/>
                 <a:cs typeface="Aptos Display" pitchFamily="34" charset="-120"/>
               </a:rPr>
-              <a:t>Reflection Questions</a:t>
+              <a:t>Risks, Failure Modes, and Guardrails</a:t>
             </a:r>
             <a:endParaRPr lang="en-US" sz="2700" dirty="0"/>
           </a:p>
@@ -2839,32 +3116,178 @@
       </p:sp>
       <p:sp>
         <p:nvSpPr>
-          <p:cNvPr id="7" name="Text 5"/>
-          <p:cNvSpPr/>
-          <p:nvPr/>
-        </p:nvSpPr>
-        <p:spPr>
-          <a:xfrm>
-            <a:off x="822960" y="1325880"/>
-            <a:ext cx="10378440" cy="4800600"/>
-          </a:xfrm>
-          <a:prstGeom prst="rect">
-            <a:avLst/>
-          </a:prstGeom>
-          <a:noFill/>
-          <a:ln/>
-        </p:spPr>
-        <p:txBody>
-          <a:bodyPr wrap="square" lIns="1016" tIns="1016" rIns="1016" bIns="1016" rtlCol="0" anchor="t">
+          <p:cNvPr id="10" name="Text 8"/>
+          <p:cNvSpPr/>
+          <p:nvPr/>
+        </p:nvSpPr>
+        <p:spPr>
+          <a:xfrm>
+            <a:off x="868680" y="1417320"/>
+            <a:ext cx="6675120" cy="4434840"/>
+          </a:xfrm>
+          <a:prstGeom prst="rect">
+            <a:avLst/>
+          </a:prstGeom>
+          <a:noFill/>
+          <a:ln/>
+        </p:spPr>
+        <p:txBody>
+          <a:bodyPr wrap="square" lIns="635" tIns="635" rIns="635" bIns="635" rtlCol="0" anchor="t">
             <a:normAutofit/>
           </a:bodyPr>
           <a:lstStyle/>
           <a:p>
+            <a:r>
+              <a:rPr lang="en-US" sz="1700" dirty="0">
+                <a:solidFill>
+                  <a:srgbClr val="17364A"/>
+                </a:solidFill>
+                <a:latin typeface="Aptos" pitchFamily="34" charset="0"/>
+                <a:ea typeface="Aptos" pitchFamily="34" charset="-122"/>
+                <a:cs typeface="Aptos" pitchFamily="34" charset="-120"/>
+              </a:rPr>
+              <a:t>One risk is adoption without understanding.</a:t>
+            </a:r>
+            <a:endParaRPr lang="en-US" sz="1700" dirty="0"/>
+          </a:p>
+          <a:p>
+            <a:r>
+              <a:rPr lang="en-US" sz="1700" dirty="0">
+                <a:solidFill>
+                  <a:srgbClr val="17364A"/>
+                </a:solidFill>
+                <a:latin typeface="Aptos" pitchFamily="34" charset="0"/>
+                <a:ea typeface="Aptos" pitchFamily="34" charset="-122"/>
+                <a:cs typeface="Aptos" pitchFamily="34" charset="-120"/>
+              </a:rPr>
+              <a:t>Staff may use the tool incorrectly or treat outputs as authoritative because training was superficial.</a:t>
+            </a:r>
+            <a:endParaRPr lang="en-US" sz="1700" dirty="0"/>
+          </a:p>
+          <a:p>
+            <a:r>
+              <a:rPr lang="en-US" sz="1700" dirty="0">
+                <a:solidFill>
+                  <a:srgbClr val="17364A"/>
+                </a:solidFill>
+                <a:latin typeface="Aptos" pitchFamily="34" charset="0"/>
+                <a:ea typeface="Aptos" pitchFamily="34" charset="-122"/>
+                <a:cs typeface="Aptos" pitchFamily="34" charset="-120"/>
+              </a:rPr>
+              <a:t>A guardrail is to require role-based training and workflow-specific practice before access is granted.</a:t>
+            </a:r>
+            <a:endParaRPr lang="en-US" sz="1700" dirty="0"/>
+          </a:p>
+          <a:p>
+            <a:r>
+              <a:rPr lang="en-US" sz="1700" dirty="0">
+                <a:solidFill>
+                  <a:srgbClr val="17364A"/>
+                </a:solidFill>
+                <a:latin typeface="Aptos" pitchFamily="34" charset="0"/>
+                <a:ea typeface="Aptos" pitchFamily="34" charset="-122"/>
+                <a:cs typeface="Aptos" pitchFamily="34" charset="-120"/>
+              </a:rPr>
+              <a:t>Another risk is resistance caused by lack of transparency.</a:t>
+            </a:r>
+            <a:endParaRPr lang="en-US" sz="1700" dirty="0"/>
+          </a:p>
+        </p:txBody>
+      </p:sp>
+      <p:sp>
+        <p:nvSpPr>
+          <p:cNvPr id="11" name="Shape 9"/>
+          <p:cNvSpPr/>
+          <p:nvPr/>
+        </p:nvSpPr>
+        <p:spPr>
+          <a:xfrm>
+            <a:off x="7909560" y="1417320"/>
+            <a:ext cx="3154680" cy="1828800"/>
+          </a:xfrm>
+          <a:prstGeom prst="roundRect">
+            <a:avLst>
+              <a:gd name="adj" fmla="val 6000"/>
+            </a:avLst>
+          </a:prstGeom>
+          <a:solidFill>
+            <a:srgbClr val="EEF8ED"/>
+          </a:solidFill>
+          <a:ln w="12700">
+            <a:solidFill>
+              <a:srgbClr val="B9D7E6"/>
+            </a:solidFill>
+            <a:prstDash val="solid"/>
+          </a:ln>
+        </p:spPr>
+      </p:sp>
+      <p:sp>
+        <p:nvSpPr>
+          <p:cNvPr id="12" name="Text 10"/>
+          <p:cNvSpPr/>
+          <p:nvPr/>
+        </p:nvSpPr>
+        <p:spPr>
+          <a:xfrm>
+            <a:off x="8074152" y="1563624"/>
+            <a:ext cx="2825496" cy="201168"/>
+          </a:xfrm>
+          <a:prstGeom prst="rect">
+            <a:avLst/>
+          </a:prstGeom>
+          <a:noFill/>
+          <a:ln/>
+        </p:spPr>
+        <p:txBody>
+          <a:bodyPr wrap="square" lIns="0" tIns="0" rIns="0" bIns="0" rtlCol="0" anchor="ctr"/>
+          <a:lstStyle/>
+          <a:p>
             <a:pPr indent="0" marL="0">
               <a:buNone/>
             </a:pPr>
             <a:r>
-              <a:rPr lang="en-US" sz="1420" dirty="0">
+              <a:rPr lang="en-US" sz="950" b="1" dirty="0">
+                <a:solidFill>
+                  <a:srgbClr val="0068B7"/>
+                </a:solidFill>
+                <a:latin typeface="Aptos" pitchFamily="34" charset="0"/>
+                <a:ea typeface="Aptos" pitchFamily="34" charset="-122"/>
+                <a:cs typeface="Aptos" pitchFamily="34" charset="-120"/>
+              </a:rPr>
+              <a:t>Key idea</a:t>
+            </a:r>
+            <a:endParaRPr lang="en-US" sz="950" dirty="0"/>
+          </a:p>
+        </p:txBody>
+      </p:sp>
+      <p:sp>
+        <p:nvSpPr>
+          <p:cNvPr id="13" name="Text 11"/>
+          <p:cNvSpPr/>
+          <p:nvPr/>
+        </p:nvSpPr>
+        <p:spPr>
+          <a:xfrm>
+            <a:off x="8074152" y="1856232"/>
+            <a:ext cx="2825496" cy="1261872"/>
+          </a:xfrm>
+          <a:prstGeom prst="rect">
+            <a:avLst/>
+          </a:prstGeom>
+          <a:noFill/>
+          <a:ln/>
+        </p:spPr>
+        <p:txBody>
+          <a:bodyPr wrap="square" lIns="0" tIns="0" rIns="0" bIns="0" rtlCol="0" anchor="t">
+            <a:normAutofit/>
+          </a:bodyPr>
+          <a:lstStyle/>
+          <a:p>
+            <a:pPr indent="0" marL="0">
+              <a:buNone/>
+            </a:pPr>
+            <a:r>
+              <a:rPr lang="en-US" sz="1250" dirty="0">
                 <a:solidFill>
                   <a:srgbClr val="17364A"/>
                 </a:solidFill>
@@ -2872,9 +3295,116 @@
                 <a:ea typeface="Aptos" pitchFamily="34" charset="-122"/>
                 <a:cs typeface="Aptos" pitchFamily="34" charset="-120"/>
               </a:rPr>
-              <a:t>Which current or proposed AI use case in your agency raises this leadership or governance issue most clearly? Who currently has authority to make decisions about this issue, and is that authority documented? What evidence would governance or leadership need before approving the use case?</a:t>
-            </a:r>
-            <a:endParaRPr lang="en-US" sz="1420" dirty="0"/>
+              <a:t>One risk is adoption without understanding.</a:t>
+            </a:r>
+            <a:endParaRPr lang="en-US" sz="1250" dirty="0"/>
+          </a:p>
+        </p:txBody>
+      </p:sp>
+      <p:sp>
+        <p:nvSpPr>
+          <p:cNvPr id="14" name="Shape 12"/>
+          <p:cNvSpPr/>
+          <p:nvPr/>
+        </p:nvSpPr>
+        <p:spPr>
+          <a:xfrm>
+            <a:off x="7909560" y="3520440"/>
+            <a:ext cx="3154680" cy="1737360"/>
+          </a:xfrm>
+          <a:prstGeom prst="roundRect">
+            <a:avLst>
+              <a:gd name="adj" fmla="val 6316"/>
+            </a:avLst>
+          </a:prstGeom>
+          <a:solidFill>
+            <a:srgbClr val="EAF6F8"/>
+          </a:solidFill>
+          <a:ln w="12700">
+            <a:solidFill>
+              <a:srgbClr val="B9D7E6"/>
+            </a:solidFill>
+            <a:prstDash val="solid"/>
+          </a:ln>
+        </p:spPr>
+      </p:sp>
+      <p:sp>
+        <p:nvSpPr>
+          <p:cNvPr id="15" name="Text 13"/>
+          <p:cNvSpPr/>
+          <p:nvPr/>
+        </p:nvSpPr>
+        <p:spPr>
+          <a:xfrm>
+            <a:off x="8074152" y="3666744"/>
+            <a:ext cx="2825496" cy="201168"/>
+          </a:xfrm>
+          <a:prstGeom prst="rect">
+            <a:avLst/>
+          </a:prstGeom>
+          <a:noFill/>
+          <a:ln/>
+        </p:spPr>
+        <p:txBody>
+          <a:bodyPr wrap="square" lIns="0" tIns="0" rIns="0" bIns="0" rtlCol="0" anchor="ctr"/>
+          <a:lstStyle/>
+          <a:p>
+            <a:pPr indent="0" marL="0">
+              <a:buNone/>
+            </a:pPr>
+            <a:r>
+              <a:rPr lang="en-US" sz="950" b="1" dirty="0">
+                <a:solidFill>
+                  <a:srgbClr val="0068B7"/>
+                </a:solidFill>
+                <a:latin typeface="Aptos" pitchFamily="34" charset="0"/>
+                <a:ea typeface="Aptos" pitchFamily="34" charset="-122"/>
+                <a:cs typeface="Aptos" pitchFamily="34" charset="-120"/>
+              </a:rPr>
+              <a:t>Use this for</a:t>
+            </a:r>
+            <a:endParaRPr lang="en-US" sz="950" dirty="0"/>
+          </a:p>
+        </p:txBody>
+      </p:sp>
+      <p:sp>
+        <p:nvSpPr>
+          <p:cNvPr id="16" name="Text 14"/>
+          <p:cNvSpPr/>
+          <p:nvPr/>
+        </p:nvSpPr>
+        <p:spPr>
+          <a:xfrm>
+            <a:off x="8074152" y="3959352"/>
+            <a:ext cx="2825496" cy="1170432"/>
+          </a:xfrm>
+          <a:prstGeom prst="rect">
+            <a:avLst/>
+          </a:prstGeom>
+          <a:noFill/>
+          <a:ln/>
+        </p:spPr>
+        <p:txBody>
+          <a:bodyPr wrap="square" lIns="0" tIns="0" rIns="0" bIns="0" rtlCol="0" anchor="t">
+            <a:normAutofit/>
+          </a:bodyPr>
+          <a:lstStyle/>
+          <a:p>
+            <a:pPr indent="0" marL="0">
+              <a:buNone/>
+            </a:pPr>
+            <a:r>
+              <a:rPr lang="en-US" sz="1250" dirty="0">
+                <a:solidFill>
+                  <a:srgbClr val="17364A"/>
+                </a:solidFill>
+                <a:latin typeface="Aptos" pitchFamily="34" charset="0"/>
+                <a:ea typeface="Aptos" pitchFamily="34" charset="-122"/>
+                <a:cs typeface="Aptos" pitchFamily="34" charset="-120"/>
+              </a:rPr>
+              <a:t>Connect the concept to public health decisions, safeguards, documentation, or implementation work.</a:t>
+            </a:r>
+            <a:endParaRPr lang="en-US" sz="1250" dirty="0"/>
           </a:p>
         </p:txBody>
       </p:sp>
@@ -2937,7 +3467,32 @@
       </p:sp>
       <p:sp>
         <p:nvSpPr>
-          <p:cNvPr id="3" name="Text 1"/>
+          <p:cNvPr id="3" name="Shape 1"/>
+          <p:cNvSpPr/>
+          <p:nvPr/>
+        </p:nvSpPr>
+        <p:spPr>
+          <a:xfrm>
+            <a:off x="0" y="164592"/>
+            <a:ext cx="146304" cy="6693408"/>
+          </a:xfrm>
+          <a:prstGeom prst="rect">
+            <a:avLst/>
+          </a:prstGeom>
+          <a:solidFill>
+            <a:srgbClr val="2F8A28"/>
+          </a:solidFill>
+          <a:ln w="12700">
+            <a:solidFill>
+              <a:srgbClr val="2F8A28"/>
+            </a:solidFill>
+            <a:prstDash val="solid"/>
+          </a:ln>
+        </p:spPr>
+      </p:sp>
+      <p:sp>
+        <p:nvSpPr>
+          <p:cNvPr id="4" name="Text 2"/>
           <p:cNvSpPr/>
           <p:nvPr/>
         </p:nvSpPr>
@@ -2976,7 +3531,7 @@
       </p:sp>
       <p:sp>
         <p:nvSpPr>
-          <p:cNvPr id="4" name="Text 2"/>
+          <p:cNvPr id="5" name="Text 3"/>
           <p:cNvSpPr/>
           <p:nvPr/>
         </p:nvSpPr>
@@ -3015,7 +3570,7 @@
       </p:sp>
       <p:sp>
         <p:nvSpPr>
-          <p:cNvPr id="5" name="Text 3"/>
+          <p:cNvPr id="6" name="Text 4"/>
           <p:cNvSpPr/>
           <p:nvPr/>
         </p:nvSpPr>
@@ -3054,13 +3609,77 @@
       </p:sp>
       <p:sp>
         <p:nvSpPr>
-          <p:cNvPr id="6" name="Text 4"/>
+          <p:cNvPr id="7" name="Shape 5"/>
           <p:cNvSpPr/>
           <p:nvPr/>
         </p:nvSpPr>
         <p:spPr>
           <a:xfrm>
             <a:off x="640080" y="658368"/>
+            <a:ext cx="420624" cy="420624"/>
+          </a:xfrm>
+          <a:prstGeom prst="ellipse">
+            <a:avLst/>
+          </a:prstGeom>
+          <a:solidFill>
+            <a:srgbClr val="0068B7"/>
+          </a:solidFill>
+          <a:ln w="12700">
+            <a:solidFill>
+              <a:srgbClr val="0068B7"/>
+            </a:solidFill>
+            <a:prstDash val="solid"/>
+          </a:ln>
+        </p:spPr>
+      </p:sp>
+      <p:sp>
+        <p:nvSpPr>
+          <p:cNvPr id="8" name="Text 6"/>
+          <p:cNvSpPr/>
+          <p:nvPr/>
+        </p:nvSpPr>
+        <p:spPr>
+          <a:xfrm>
+            <a:off x="640080" y="731520"/>
+            <a:ext cx="420624" cy="164592"/>
+          </a:xfrm>
+          <a:prstGeom prst="rect">
+            <a:avLst/>
+          </a:prstGeom>
+          <a:noFill/>
+          <a:ln/>
+        </p:spPr>
+        <p:txBody>
+          <a:bodyPr wrap="square" lIns="0" tIns="0" rIns="0" bIns="0" rtlCol="0" anchor="ctr"/>
+          <a:lstStyle/>
+          <a:p>
+            <a:pPr algn="ctr" indent="0" marL="0">
+              <a:buNone/>
+            </a:pPr>
+            <a:r>
+              <a:rPr lang="en-US" sz="1100" b="1" dirty="0">
+                <a:solidFill>
+                  <a:srgbClr val="FFFFFF"/>
+                </a:solidFill>
+                <a:latin typeface="Aptos" pitchFamily="34" charset="0"/>
+                <a:ea typeface="Aptos" pitchFamily="34" charset="-122"/>
+                <a:cs typeface="Aptos" pitchFamily="34" charset="-120"/>
+              </a:rPr>
+              <a:t>7</a:t>
+            </a:r>
+            <a:endParaRPr lang="en-US" sz="1100" dirty="0"/>
+          </a:p>
+        </p:txBody>
+      </p:sp>
+      <p:sp>
+        <p:nvSpPr>
+          <p:cNvPr id="9" name="Text 7"/>
+          <p:cNvSpPr/>
+          <p:nvPr/>
+        </p:nvSpPr>
+        <p:spPr>
+          <a:xfrm>
+            <a:off x="640080" y="621792"/>
             <a:ext cx="10881360" cy="566928"/>
           </a:xfrm>
           <a:prstGeom prst="rect">
@@ -3087,7 +3706,7 @@
                 <a:ea typeface="Aptos Display" pitchFamily="34" charset="-122"/>
                 <a:cs typeface="Aptos Display" pitchFamily="34" charset="-120"/>
               </a:rPr>
-              <a:t>Reflection Questions Continued</a:t>
+              <a:t>Application to AI-Supported Workflows</a:t>
             </a:r>
             <a:endParaRPr lang="en-US" sz="2700" dirty="0"/>
           </a:p>
@@ -3095,32 +3714,178 @@
       </p:sp>
       <p:sp>
         <p:nvSpPr>
-          <p:cNvPr id="7" name="Text 5"/>
-          <p:cNvSpPr/>
-          <p:nvPr/>
-        </p:nvSpPr>
-        <p:spPr>
-          <a:xfrm>
-            <a:off x="822960" y="1325880"/>
-            <a:ext cx="10378440" cy="4800600"/>
-          </a:xfrm>
-          <a:prstGeom prst="rect">
-            <a:avLst/>
-          </a:prstGeom>
-          <a:noFill/>
-          <a:ln/>
-        </p:spPr>
-        <p:txBody>
-          <a:bodyPr wrap="square" lIns="1016" tIns="1016" rIns="1016" bIns="1016" rtlCol="0" anchor="t">
+          <p:cNvPr id="10" name="Text 8"/>
+          <p:cNvSpPr/>
+          <p:nvPr/>
+        </p:nvSpPr>
+        <p:spPr>
+          <a:xfrm>
+            <a:off x="868680" y="1417320"/>
+            <a:ext cx="6675120" cy="4434840"/>
+          </a:xfrm>
+          <a:prstGeom prst="rect">
+            <a:avLst/>
+          </a:prstGeom>
+          <a:noFill/>
+          <a:ln/>
+        </p:spPr>
+        <p:txBody>
+          <a:bodyPr wrap="square" lIns="635" tIns="635" rIns="635" bIns="635" rtlCol="0" anchor="t">
             <a:normAutofit/>
           </a:bodyPr>
           <a:lstStyle/>
           <a:p>
+            <a:r>
+              <a:rPr lang="en-US" sz="1700" dirty="0">
+                <a:solidFill>
+                  <a:srgbClr val="17364A"/>
+                </a:solidFill>
+                <a:latin typeface="Aptos" pitchFamily="34" charset="0"/>
+                <a:ea typeface="Aptos" pitchFamily="34" charset="-122"/>
+                <a:cs typeface="Aptos" pitchFamily="34" charset="-120"/>
+              </a:rPr>
+              <a:t>Generative AI adoption requires training on review, citation, privacy, and public records.</a:t>
+            </a:r>
+            <a:endParaRPr lang="en-US" sz="1700" dirty="0"/>
+          </a:p>
+          <a:p>
+            <a:r>
+              <a:rPr lang="en-US" sz="1700" dirty="0">
+                <a:solidFill>
+                  <a:srgbClr val="17364A"/>
+                </a:solidFill>
+                <a:latin typeface="Aptos" pitchFamily="34" charset="0"/>
+                <a:ea typeface="Aptos" pitchFamily="34" charset="-122"/>
+                <a:cs typeface="Aptos" pitchFamily="34" charset="-120"/>
+              </a:rPr>
+              <a:t>Predictive analytics adoption requires training on interpretation, limitations, and override documentation.</a:t>
+            </a:r>
+            <a:endParaRPr lang="en-US" sz="1700" dirty="0"/>
+          </a:p>
+          <a:p>
+            <a:r>
+              <a:rPr lang="en-US" sz="1700" dirty="0">
+                <a:solidFill>
+                  <a:srgbClr val="17364A"/>
+                </a:solidFill>
+                <a:latin typeface="Aptos" pitchFamily="34" charset="0"/>
+                <a:ea typeface="Aptos" pitchFamily="34" charset="-122"/>
+                <a:cs typeface="Aptos" pitchFamily="34" charset="-120"/>
+              </a:rPr>
+              <a:t>Agentic workflow adoption requires training on approvals, stop procedures, and escalation.</a:t>
+            </a:r>
+            <a:endParaRPr lang="en-US" sz="1700" dirty="0"/>
+          </a:p>
+          <a:p>
+            <a:r>
+              <a:rPr lang="en-US" sz="1700" dirty="0">
+                <a:solidFill>
+                  <a:srgbClr val="17364A"/>
+                </a:solidFill>
+                <a:latin typeface="Aptos" pitchFamily="34" charset="0"/>
+                <a:ea typeface="Aptos" pitchFamily="34" charset="-122"/>
+                <a:cs typeface="Aptos" pitchFamily="34" charset="-120"/>
+              </a:rPr>
+              <a:t>Each AI type changes work in different ways, so change management must be specific.</a:t>
+            </a:r>
+            <a:endParaRPr lang="en-US" sz="1700" dirty="0"/>
+          </a:p>
+        </p:txBody>
+      </p:sp>
+      <p:sp>
+        <p:nvSpPr>
+          <p:cNvPr id="11" name="Shape 9"/>
+          <p:cNvSpPr/>
+          <p:nvPr/>
+        </p:nvSpPr>
+        <p:spPr>
+          <a:xfrm>
+            <a:off x="7909560" y="1417320"/>
+            <a:ext cx="3154680" cy="1828800"/>
+          </a:xfrm>
+          <a:prstGeom prst="roundRect">
+            <a:avLst>
+              <a:gd name="adj" fmla="val 6000"/>
+            </a:avLst>
+          </a:prstGeom>
+          <a:solidFill>
+            <a:srgbClr val="EEF8ED"/>
+          </a:solidFill>
+          <a:ln w="12700">
+            <a:solidFill>
+              <a:srgbClr val="B9D7E6"/>
+            </a:solidFill>
+            <a:prstDash val="solid"/>
+          </a:ln>
+        </p:spPr>
+      </p:sp>
+      <p:sp>
+        <p:nvSpPr>
+          <p:cNvPr id="12" name="Text 10"/>
+          <p:cNvSpPr/>
+          <p:nvPr/>
+        </p:nvSpPr>
+        <p:spPr>
+          <a:xfrm>
+            <a:off x="8074152" y="1563624"/>
+            <a:ext cx="2825496" cy="201168"/>
+          </a:xfrm>
+          <a:prstGeom prst="rect">
+            <a:avLst/>
+          </a:prstGeom>
+          <a:noFill/>
+          <a:ln/>
+        </p:spPr>
+        <p:txBody>
+          <a:bodyPr wrap="square" lIns="0" tIns="0" rIns="0" bIns="0" rtlCol="0" anchor="ctr"/>
+          <a:lstStyle/>
+          <a:p>
             <a:pPr indent="0" marL="0">
               <a:buNone/>
             </a:pPr>
             <a:r>
-              <a:rPr lang="en-US" sz="1420" dirty="0">
+              <a:rPr lang="en-US" sz="950" b="1" dirty="0">
+                <a:solidFill>
+                  <a:srgbClr val="0068B7"/>
+                </a:solidFill>
+                <a:latin typeface="Aptos" pitchFamily="34" charset="0"/>
+                <a:ea typeface="Aptos" pitchFamily="34" charset="-122"/>
+                <a:cs typeface="Aptos" pitchFamily="34" charset="-120"/>
+              </a:rPr>
+              <a:t>Key idea</a:t>
+            </a:r>
+            <a:endParaRPr lang="en-US" sz="950" dirty="0"/>
+          </a:p>
+        </p:txBody>
+      </p:sp>
+      <p:sp>
+        <p:nvSpPr>
+          <p:cNvPr id="13" name="Text 11"/>
+          <p:cNvSpPr/>
+          <p:nvPr/>
+        </p:nvSpPr>
+        <p:spPr>
+          <a:xfrm>
+            <a:off x="8074152" y="1856232"/>
+            <a:ext cx="2825496" cy="1261872"/>
+          </a:xfrm>
+          <a:prstGeom prst="rect">
+            <a:avLst/>
+          </a:prstGeom>
+          <a:noFill/>
+          <a:ln/>
+        </p:spPr>
+        <p:txBody>
+          <a:bodyPr wrap="square" lIns="0" tIns="0" rIns="0" bIns="0" rtlCol="0" anchor="t">
+            <a:normAutofit/>
+          </a:bodyPr>
+          <a:lstStyle/>
+          <a:p>
+            <a:pPr indent="0" marL="0">
+              <a:buNone/>
+            </a:pPr>
+            <a:r>
+              <a:rPr lang="en-US" sz="1250" dirty="0">
                 <a:solidFill>
                   <a:srgbClr val="17364A"/>
                 </a:solidFill>
@@ -3128,9 +3893,116 @@
                 <a:ea typeface="Aptos" pitchFamily="34" charset="-122"/>
                 <a:cs typeface="Aptos" pitchFamily="34" charset="-120"/>
               </a:rPr>
-              <a:t>Which staff, partners, or communities would be affected if this issue were handled poorly? What policy, process, or artifact should be created or updated after this module?</a:t>
-            </a:r>
-            <a:endParaRPr lang="en-US" sz="1420" dirty="0"/>
+              <a:t>Generative AI adoption requires training on review, citation, privacy, and public records.</a:t>
+            </a:r>
+            <a:endParaRPr lang="en-US" sz="1250" dirty="0"/>
+          </a:p>
+        </p:txBody>
+      </p:sp>
+      <p:sp>
+        <p:nvSpPr>
+          <p:cNvPr id="14" name="Shape 12"/>
+          <p:cNvSpPr/>
+          <p:nvPr/>
+        </p:nvSpPr>
+        <p:spPr>
+          <a:xfrm>
+            <a:off x="7909560" y="3520440"/>
+            <a:ext cx="3154680" cy="1737360"/>
+          </a:xfrm>
+          <a:prstGeom prst="roundRect">
+            <a:avLst>
+              <a:gd name="adj" fmla="val 6316"/>
+            </a:avLst>
+          </a:prstGeom>
+          <a:solidFill>
+            <a:srgbClr val="EAF6F8"/>
+          </a:solidFill>
+          <a:ln w="12700">
+            <a:solidFill>
+              <a:srgbClr val="B9D7E6"/>
+            </a:solidFill>
+            <a:prstDash val="solid"/>
+          </a:ln>
+        </p:spPr>
+      </p:sp>
+      <p:sp>
+        <p:nvSpPr>
+          <p:cNvPr id="15" name="Text 13"/>
+          <p:cNvSpPr/>
+          <p:nvPr/>
+        </p:nvSpPr>
+        <p:spPr>
+          <a:xfrm>
+            <a:off x="8074152" y="3666744"/>
+            <a:ext cx="2825496" cy="201168"/>
+          </a:xfrm>
+          <a:prstGeom prst="rect">
+            <a:avLst/>
+          </a:prstGeom>
+          <a:noFill/>
+          <a:ln/>
+        </p:spPr>
+        <p:txBody>
+          <a:bodyPr wrap="square" lIns="0" tIns="0" rIns="0" bIns="0" rtlCol="0" anchor="ctr"/>
+          <a:lstStyle/>
+          <a:p>
+            <a:pPr indent="0" marL="0">
+              <a:buNone/>
+            </a:pPr>
+            <a:r>
+              <a:rPr lang="en-US" sz="950" b="1" dirty="0">
+                <a:solidFill>
+                  <a:srgbClr val="0068B7"/>
+                </a:solidFill>
+                <a:latin typeface="Aptos" pitchFamily="34" charset="0"/>
+                <a:ea typeface="Aptos" pitchFamily="34" charset="-122"/>
+                <a:cs typeface="Aptos" pitchFamily="34" charset="-120"/>
+              </a:rPr>
+              <a:t>Use this for</a:t>
+            </a:r>
+            <a:endParaRPr lang="en-US" sz="950" dirty="0"/>
+          </a:p>
+        </p:txBody>
+      </p:sp>
+      <p:sp>
+        <p:nvSpPr>
+          <p:cNvPr id="16" name="Text 14"/>
+          <p:cNvSpPr/>
+          <p:nvPr/>
+        </p:nvSpPr>
+        <p:spPr>
+          <a:xfrm>
+            <a:off x="8074152" y="3959352"/>
+            <a:ext cx="2825496" cy="1170432"/>
+          </a:xfrm>
+          <a:prstGeom prst="rect">
+            <a:avLst/>
+          </a:prstGeom>
+          <a:noFill/>
+          <a:ln/>
+        </p:spPr>
+        <p:txBody>
+          <a:bodyPr wrap="square" lIns="0" tIns="0" rIns="0" bIns="0" rtlCol="0" anchor="t">
+            <a:normAutofit/>
+          </a:bodyPr>
+          <a:lstStyle/>
+          <a:p>
+            <a:pPr indent="0" marL="0">
+              <a:buNone/>
+            </a:pPr>
+            <a:r>
+              <a:rPr lang="en-US" sz="1250" dirty="0">
+                <a:solidFill>
+                  <a:srgbClr val="17364A"/>
+                </a:solidFill>
+                <a:latin typeface="Aptos" pitchFamily="34" charset="0"/>
+                <a:ea typeface="Aptos" pitchFamily="34" charset="-122"/>
+                <a:cs typeface="Aptos" pitchFamily="34" charset="-120"/>
+              </a:rPr>
+              <a:t>Connect the concept to public health decisions, safeguards, documentation, or implementation work.</a:t>
+            </a:r>
+            <a:endParaRPr lang="en-US" sz="1250" dirty="0"/>
           </a:p>
         </p:txBody>
       </p:sp>
@@ -3193,7 +4065,32 @@
       </p:sp>
       <p:sp>
         <p:nvSpPr>
-          <p:cNvPr id="3" name="Text 1"/>
+          <p:cNvPr id="3" name="Shape 1"/>
+          <p:cNvSpPr/>
+          <p:nvPr/>
+        </p:nvSpPr>
+        <p:spPr>
+          <a:xfrm>
+            <a:off x="0" y="164592"/>
+            <a:ext cx="146304" cy="6693408"/>
+          </a:xfrm>
+          <a:prstGeom prst="rect">
+            <a:avLst/>
+          </a:prstGeom>
+          <a:solidFill>
+            <a:srgbClr val="2F8A28"/>
+          </a:solidFill>
+          <a:ln w="12700">
+            <a:solidFill>
+              <a:srgbClr val="2F8A28"/>
+            </a:solidFill>
+            <a:prstDash val="solid"/>
+          </a:ln>
+        </p:spPr>
+      </p:sp>
+      <p:sp>
+        <p:nvSpPr>
+          <p:cNvPr id="4" name="Text 2"/>
           <p:cNvSpPr/>
           <p:nvPr/>
         </p:nvSpPr>
@@ -3232,7 +4129,7 @@
       </p:sp>
       <p:sp>
         <p:nvSpPr>
-          <p:cNvPr id="4" name="Text 2"/>
+          <p:cNvPr id="5" name="Text 3"/>
           <p:cNvSpPr/>
           <p:nvPr/>
         </p:nvSpPr>
@@ -3271,7 +4168,7 @@
       </p:sp>
       <p:sp>
         <p:nvSpPr>
-          <p:cNvPr id="5" name="Text 3"/>
+          <p:cNvPr id="6" name="Text 4"/>
           <p:cNvSpPr/>
           <p:nvPr/>
         </p:nvSpPr>
@@ -3310,13 +4207,77 @@
       </p:sp>
       <p:sp>
         <p:nvSpPr>
-          <p:cNvPr id="6" name="Text 4"/>
+          <p:cNvPr id="7" name="Shape 5"/>
           <p:cNvSpPr/>
           <p:nvPr/>
         </p:nvSpPr>
         <p:spPr>
           <a:xfrm>
             <a:off x="640080" y="658368"/>
+            <a:ext cx="420624" cy="420624"/>
+          </a:xfrm>
+          <a:prstGeom prst="ellipse">
+            <a:avLst/>
+          </a:prstGeom>
+          <a:solidFill>
+            <a:srgbClr val="0068B7"/>
+          </a:solidFill>
+          <a:ln w="12700">
+            <a:solidFill>
+              <a:srgbClr val="0068B7"/>
+            </a:solidFill>
+            <a:prstDash val="solid"/>
+          </a:ln>
+        </p:spPr>
+      </p:sp>
+      <p:sp>
+        <p:nvSpPr>
+          <p:cNvPr id="8" name="Text 6"/>
+          <p:cNvSpPr/>
+          <p:nvPr/>
+        </p:nvSpPr>
+        <p:spPr>
+          <a:xfrm>
+            <a:off x="640080" y="731520"/>
+            <a:ext cx="420624" cy="164592"/>
+          </a:xfrm>
+          <a:prstGeom prst="rect">
+            <a:avLst/>
+          </a:prstGeom>
+          <a:noFill/>
+          <a:ln/>
+        </p:spPr>
+        <p:txBody>
+          <a:bodyPr wrap="square" lIns="0" tIns="0" rIns="0" bIns="0" rtlCol="0" anchor="ctr"/>
+          <a:lstStyle/>
+          <a:p>
+            <a:pPr algn="ctr" indent="0" marL="0">
+              <a:buNone/>
+            </a:pPr>
+            <a:r>
+              <a:rPr lang="en-US" sz="1100" b="1" dirty="0">
+                <a:solidFill>
+                  <a:srgbClr val="FFFFFF"/>
+                </a:solidFill>
+                <a:latin typeface="Aptos" pitchFamily="34" charset="0"/>
+                <a:ea typeface="Aptos" pitchFamily="34" charset="-122"/>
+                <a:cs typeface="Aptos" pitchFamily="34" charset="-120"/>
+              </a:rPr>
+              <a:t>8</a:t>
+            </a:r>
+            <a:endParaRPr lang="en-US" sz="1100" dirty="0"/>
+          </a:p>
+        </p:txBody>
+      </p:sp>
+      <p:sp>
+        <p:nvSpPr>
+          <p:cNvPr id="9" name="Text 7"/>
+          <p:cNvSpPr/>
+          <p:nvPr/>
+        </p:nvSpPr>
+        <p:spPr>
+          <a:xfrm>
+            <a:off x="640080" y="621792"/>
             <a:ext cx="10881360" cy="566928"/>
           </a:xfrm>
           <a:prstGeom prst="rect">
@@ -3343,7 +4304,7 @@
                 <a:ea typeface="Aptos Display" pitchFamily="34" charset="-122"/>
                 <a:cs typeface="Aptos Display" pitchFamily="34" charset="-120"/>
               </a:rPr>
-              <a:t>Practical Exercise</a:t>
+              <a:t>Reflection Questions</a:t>
             </a:r>
             <a:endParaRPr lang="en-US" sz="2700" dirty="0"/>
           </a:p>
@@ -3351,32 +4312,164 @@
       </p:sp>
       <p:sp>
         <p:nvSpPr>
-          <p:cNvPr id="7" name="Text 5"/>
-          <p:cNvSpPr/>
-          <p:nvPr/>
-        </p:nvSpPr>
-        <p:spPr>
-          <a:xfrm>
-            <a:off x="822960" y="1325880"/>
-            <a:ext cx="10378440" cy="4800600"/>
-          </a:xfrm>
-          <a:prstGeom prst="rect">
-            <a:avLst/>
-          </a:prstGeom>
-          <a:noFill/>
-          <a:ln/>
-        </p:spPr>
-        <p:txBody>
-          <a:bodyPr wrap="square" lIns="1016" tIns="1016" rIns="1016" bIns="1016" rtlCol="0" anchor="t">
+          <p:cNvPr id="10" name="Text 8"/>
+          <p:cNvSpPr/>
+          <p:nvPr/>
+        </p:nvSpPr>
+        <p:spPr>
+          <a:xfrm>
+            <a:off x="868680" y="1417320"/>
+            <a:ext cx="6675120" cy="4434840"/>
+          </a:xfrm>
+          <a:prstGeom prst="rect">
+            <a:avLst/>
+          </a:prstGeom>
+          <a:noFill/>
+          <a:ln/>
+        </p:spPr>
+        <p:txBody>
+          <a:bodyPr wrap="square" lIns="635" tIns="635" rIns="635" bIns="635" rtlCol="0" anchor="t">
             <a:normAutofit/>
           </a:bodyPr>
           <a:lstStyle/>
           <a:p>
+            <a:r>
+              <a:rPr lang="en-US" sz="1700" dirty="0">
+                <a:solidFill>
+                  <a:srgbClr val="17364A"/>
+                </a:solidFill>
+                <a:latin typeface="Aptos" pitchFamily="34" charset="0"/>
+                <a:ea typeface="Aptos" pitchFamily="34" charset="-122"/>
+                <a:cs typeface="Aptos" pitchFamily="34" charset="-120"/>
+              </a:rPr>
+              <a:t>Which current or proposed AI use case in your agency raises this leadership or governance issue most clearly?</a:t>
+            </a:r>
+            <a:endParaRPr lang="en-US" sz="1700" dirty="0"/>
+          </a:p>
+          <a:p>
+            <a:r>
+              <a:rPr lang="en-US" sz="1700" dirty="0">
+                <a:solidFill>
+                  <a:srgbClr val="17364A"/>
+                </a:solidFill>
+                <a:latin typeface="Aptos" pitchFamily="34" charset="0"/>
+                <a:ea typeface="Aptos" pitchFamily="34" charset="-122"/>
+                <a:cs typeface="Aptos" pitchFamily="34" charset="-120"/>
+              </a:rPr>
+              <a:t>Who currently has authority to make decisions about this issue, and is that authority documented?</a:t>
+            </a:r>
+            <a:endParaRPr lang="en-US" sz="1700" dirty="0"/>
+          </a:p>
+          <a:p>
+            <a:r>
+              <a:rPr lang="en-US" sz="1700" dirty="0">
+                <a:solidFill>
+                  <a:srgbClr val="17364A"/>
+                </a:solidFill>
+                <a:latin typeface="Aptos" pitchFamily="34" charset="0"/>
+                <a:ea typeface="Aptos" pitchFamily="34" charset="-122"/>
+                <a:cs typeface="Aptos" pitchFamily="34" charset="-120"/>
+              </a:rPr>
+              <a:t>What evidence would governance or leadership need before approving the use case?</a:t>
+            </a:r>
+            <a:endParaRPr lang="en-US" sz="1700" dirty="0"/>
+          </a:p>
+        </p:txBody>
+      </p:sp>
+      <p:sp>
+        <p:nvSpPr>
+          <p:cNvPr id="11" name="Shape 9"/>
+          <p:cNvSpPr/>
+          <p:nvPr/>
+        </p:nvSpPr>
+        <p:spPr>
+          <a:xfrm>
+            <a:off x="7909560" y="1417320"/>
+            <a:ext cx="3154680" cy="1828800"/>
+          </a:xfrm>
+          <a:prstGeom prst="roundRect">
+            <a:avLst>
+              <a:gd name="adj" fmla="val 6000"/>
+            </a:avLst>
+          </a:prstGeom>
+          <a:solidFill>
+            <a:srgbClr val="EEF8ED"/>
+          </a:solidFill>
+          <a:ln w="12700">
+            <a:solidFill>
+              <a:srgbClr val="B9D7E6"/>
+            </a:solidFill>
+            <a:prstDash val="solid"/>
+          </a:ln>
+        </p:spPr>
+      </p:sp>
+      <p:sp>
+        <p:nvSpPr>
+          <p:cNvPr id="12" name="Text 10"/>
+          <p:cNvSpPr/>
+          <p:nvPr/>
+        </p:nvSpPr>
+        <p:spPr>
+          <a:xfrm>
+            <a:off x="8074152" y="1563624"/>
+            <a:ext cx="2825496" cy="201168"/>
+          </a:xfrm>
+          <a:prstGeom prst="rect">
+            <a:avLst/>
+          </a:prstGeom>
+          <a:noFill/>
+          <a:ln/>
+        </p:spPr>
+        <p:txBody>
+          <a:bodyPr wrap="square" lIns="0" tIns="0" rIns="0" bIns="0" rtlCol="0" anchor="ctr"/>
+          <a:lstStyle/>
+          <a:p>
             <a:pPr indent="0" marL="0">
               <a:buNone/>
             </a:pPr>
             <a:r>
-              <a:rPr lang="en-US" sz="1420" dirty="0">
+              <a:rPr lang="en-US" sz="950" b="1" dirty="0">
+                <a:solidFill>
+                  <a:srgbClr val="0068B7"/>
+                </a:solidFill>
+                <a:latin typeface="Aptos" pitchFamily="34" charset="0"/>
+                <a:ea typeface="Aptos" pitchFamily="34" charset="-122"/>
+                <a:cs typeface="Aptos" pitchFamily="34" charset="-120"/>
+              </a:rPr>
+              <a:t>Key idea</a:t>
+            </a:r>
+            <a:endParaRPr lang="en-US" sz="950" dirty="0"/>
+          </a:p>
+        </p:txBody>
+      </p:sp>
+      <p:sp>
+        <p:nvSpPr>
+          <p:cNvPr id="13" name="Text 11"/>
+          <p:cNvSpPr/>
+          <p:nvPr/>
+        </p:nvSpPr>
+        <p:spPr>
+          <a:xfrm>
+            <a:off x="8074152" y="1856232"/>
+            <a:ext cx="2825496" cy="1261872"/>
+          </a:xfrm>
+          <a:prstGeom prst="rect">
+            <a:avLst/>
+          </a:prstGeom>
+          <a:noFill/>
+          <a:ln/>
+        </p:spPr>
+        <p:txBody>
+          <a:bodyPr wrap="square" lIns="0" tIns="0" rIns="0" bIns="0" rtlCol="0" anchor="t">
+            <a:normAutofit/>
+          </a:bodyPr>
+          <a:lstStyle/>
+          <a:p>
+            <a:pPr indent="0" marL="0">
+              <a:buNone/>
+            </a:pPr>
+            <a:r>
+              <a:rPr lang="en-US" sz="1250" dirty="0">
                 <a:solidFill>
                   <a:srgbClr val="17364A"/>
                 </a:solidFill>
@@ -3384,9 +4477,116 @@
                 <a:ea typeface="Aptos" pitchFamily="34" charset="-122"/>
                 <a:cs typeface="Aptos" pitchFamily="34" charset="-120"/>
               </a:rPr>
-              <a:t>Create a change management plan for one AI use case. Include stakeholder map, communication messages, training needs, workflow changes, adoption measures, feedback process, and launch support.</a:t>
-            </a:r>
-            <a:endParaRPr lang="en-US" sz="1420" dirty="0"/>
+              <a:t>Which current or proposed AI use case in your agency raises this leadership or governance issue most clearly?</a:t>
+            </a:r>
+            <a:endParaRPr lang="en-US" sz="1250" dirty="0"/>
+          </a:p>
+        </p:txBody>
+      </p:sp>
+      <p:sp>
+        <p:nvSpPr>
+          <p:cNvPr id="14" name="Shape 12"/>
+          <p:cNvSpPr/>
+          <p:nvPr/>
+        </p:nvSpPr>
+        <p:spPr>
+          <a:xfrm>
+            <a:off x="7909560" y="3520440"/>
+            <a:ext cx="3154680" cy="1737360"/>
+          </a:xfrm>
+          <a:prstGeom prst="roundRect">
+            <a:avLst>
+              <a:gd name="adj" fmla="val 6316"/>
+            </a:avLst>
+          </a:prstGeom>
+          <a:solidFill>
+            <a:srgbClr val="EAF6F8"/>
+          </a:solidFill>
+          <a:ln w="12700">
+            <a:solidFill>
+              <a:srgbClr val="B9D7E6"/>
+            </a:solidFill>
+            <a:prstDash val="solid"/>
+          </a:ln>
+        </p:spPr>
+      </p:sp>
+      <p:sp>
+        <p:nvSpPr>
+          <p:cNvPr id="15" name="Text 13"/>
+          <p:cNvSpPr/>
+          <p:nvPr/>
+        </p:nvSpPr>
+        <p:spPr>
+          <a:xfrm>
+            <a:off x="8074152" y="3666744"/>
+            <a:ext cx="2825496" cy="201168"/>
+          </a:xfrm>
+          <a:prstGeom prst="rect">
+            <a:avLst/>
+          </a:prstGeom>
+          <a:noFill/>
+          <a:ln/>
+        </p:spPr>
+        <p:txBody>
+          <a:bodyPr wrap="square" lIns="0" tIns="0" rIns="0" bIns="0" rtlCol="0" anchor="ctr"/>
+          <a:lstStyle/>
+          <a:p>
+            <a:pPr indent="0" marL="0">
+              <a:buNone/>
+            </a:pPr>
+            <a:r>
+              <a:rPr lang="en-US" sz="950" b="1" dirty="0">
+                <a:solidFill>
+                  <a:srgbClr val="0068B7"/>
+                </a:solidFill>
+                <a:latin typeface="Aptos" pitchFamily="34" charset="0"/>
+                <a:ea typeface="Aptos" pitchFamily="34" charset="-122"/>
+                <a:cs typeface="Aptos" pitchFamily="34" charset="-120"/>
+              </a:rPr>
+              <a:t>Use this for</a:t>
+            </a:r>
+            <a:endParaRPr lang="en-US" sz="950" dirty="0"/>
+          </a:p>
+        </p:txBody>
+      </p:sp>
+      <p:sp>
+        <p:nvSpPr>
+          <p:cNvPr id="16" name="Text 14"/>
+          <p:cNvSpPr/>
+          <p:nvPr/>
+        </p:nvSpPr>
+        <p:spPr>
+          <a:xfrm>
+            <a:off x="8074152" y="3959352"/>
+            <a:ext cx="2825496" cy="1170432"/>
+          </a:xfrm>
+          <a:prstGeom prst="rect">
+            <a:avLst/>
+          </a:prstGeom>
+          <a:noFill/>
+          <a:ln/>
+        </p:spPr>
+        <p:txBody>
+          <a:bodyPr wrap="square" lIns="0" tIns="0" rIns="0" bIns="0" rtlCol="0" anchor="t">
+            <a:normAutofit/>
+          </a:bodyPr>
+          <a:lstStyle/>
+          <a:p>
+            <a:pPr indent="0" marL="0">
+              <a:buNone/>
+            </a:pPr>
+            <a:r>
+              <a:rPr lang="en-US" sz="1250" dirty="0">
+                <a:solidFill>
+                  <a:srgbClr val="17364A"/>
+                </a:solidFill>
+                <a:latin typeface="Aptos" pitchFamily="34" charset="0"/>
+                <a:ea typeface="Aptos" pitchFamily="34" charset="-122"/>
+                <a:cs typeface="Aptos" pitchFamily="34" charset="-120"/>
+              </a:rPr>
+              <a:t>Connect the concept to public health decisions, safeguards, documentation, or implementation work.</a:t>
+            </a:r>
+            <a:endParaRPr lang="en-US" sz="1250" dirty="0"/>
           </a:p>
         </p:txBody>
       </p:sp>
@@ -3449,7 +4649,32 @@
       </p:sp>
       <p:sp>
         <p:nvSpPr>
-          <p:cNvPr id="3" name="Text 1"/>
+          <p:cNvPr id="3" name="Shape 1"/>
+          <p:cNvSpPr/>
+          <p:nvPr/>
+        </p:nvSpPr>
+        <p:spPr>
+          <a:xfrm>
+            <a:off x="0" y="164592"/>
+            <a:ext cx="146304" cy="6693408"/>
+          </a:xfrm>
+          <a:prstGeom prst="rect">
+            <a:avLst/>
+          </a:prstGeom>
+          <a:solidFill>
+            <a:srgbClr val="2F8A28"/>
+          </a:solidFill>
+          <a:ln w="12700">
+            <a:solidFill>
+              <a:srgbClr val="2F8A28"/>
+            </a:solidFill>
+            <a:prstDash val="solid"/>
+          </a:ln>
+        </p:spPr>
+      </p:sp>
+      <p:sp>
+        <p:nvSpPr>
+          <p:cNvPr id="4" name="Text 2"/>
           <p:cNvSpPr/>
           <p:nvPr/>
         </p:nvSpPr>
@@ -3488,7 +4713,7 @@
       </p:sp>
       <p:sp>
         <p:nvSpPr>
-          <p:cNvPr id="4" name="Text 2"/>
+          <p:cNvPr id="5" name="Text 3"/>
           <p:cNvSpPr/>
           <p:nvPr/>
         </p:nvSpPr>
@@ -3527,7 +4752,7 @@
       </p:sp>
       <p:sp>
         <p:nvSpPr>
-          <p:cNvPr id="5" name="Text 3"/>
+          <p:cNvPr id="6" name="Text 4"/>
           <p:cNvSpPr/>
           <p:nvPr/>
         </p:nvSpPr>
@@ -3566,7 +4791,7 @@
       </p:sp>
       <p:sp>
         <p:nvSpPr>
-          <p:cNvPr id="6" name="Text 4"/>
+          <p:cNvPr id="7" name="Text 5"/>
           <p:cNvSpPr/>
           <p:nvPr/>
         </p:nvSpPr>
@@ -3599,7 +4824,7 @@
                 <a:ea typeface="Aptos Display" pitchFamily="34" charset="-122"/>
                 <a:cs typeface="Aptos Display" pitchFamily="34" charset="-120"/>
               </a:rPr>
-              <a:t>Before You Begin</a:t>
+              <a:t>Reflection Questions Continued</a:t>
             </a:r>
             <a:endParaRPr lang="en-US" sz="2700" dirty="0"/>
           </a:p>
@@ -3607,32 +4832,150 @@
       </p:sp>
       <p:sp>
         <p:nvSpPr>
-          <p:cNvPr id="7" name="Text 5"/>
-          <p:cNvSpPr/>
-          <p:nvPr/>
-        </p:nvSpPr>
-        <p:spPr>
-          <a:xfrm>
-            <a:off x="822960" y="1325880"/>
-            <a:ext cx="10378440" cy="4800600"/>
-          </a:xfrm>
-          <a:prstGeom prst="rect">
-            <a:avLst/>
-          </a:prstGeom>
-          <a:noFill/>
-          <a:ln/>
-        </p:spPr>
-        <p:txBody>
-          <a:bodyPr wrap="square" lIns="1016" tIns="1016" rIns="1016" bIns="1016" rtlCol="0" anchor="t">
+          <p:cNvPr id="8" name="Text 6"/>
+          <p:cNvSpPr/>
+          <p:nvPr/>
+        </p:nvSpPr>
+        <p:spPr>
+          <a:xfrm>
+            <a:off x="868680" y="1417320"/>
+            <a:ext cx="6675120" cy="4434840"/>
+          </a:xfrm>
+          <a:prstGeom prst="rect">
+            <a:avLst/>
+          </a:prstGeom>
+          <a:noFill/>
+          <a:ln/>
+        </p:spPr>
+        <p:txBody>
+          <a:bodyPr wrap="square" lIns="635" tIns="635" rIns="635" bIns="635" rtlCol="0" anchor="t">
             <a:normAutofit/>
           </a:bodyPr>
           <a:lstStyle/>
           <a:p>
+            <a:r>
+              <a:rPr lang="en-US" sz="1700" dirty="0">
+                <a:solidFill>
+                  <a:srgbClr val="17364A"/>
+                </a:solidFill>
+                <a:latin typeface="Aptos" pitchFamily="34" charset="0"/>
+                <a:ea typeface="Aptos" pitchFamily="34" charset="-122"/>
+                <a:cs typeface="Aptos" pitchFamily="34" charset="-120"/>
+              </a:rPr>
+              <a:t>Which staff, partners, or communities would be affected if this issue were handled poorly?</a:t>
+            </a:r>
+            <a:endParaRPr lang="en-US" sz="1700" dirty="0"/>
+          </a:p>
+          <a:p>
+            <a:r>
+              <a:rPr lang="en-US" sz="1700" dirty="0">
+                <a:solidFill>
+                  <a:srgbClr val="17364A"/>
+                </a:solidFill>
+                <a:latin typeface="Aptos" pitchFamily="34" charset="0"/>
+                <a:ea typeface="Aptos" pitchFamily="34" charset="-122"/>
+                <a:cs typeface="Aptos" pitchFamily="34" charset="-120"/>
+              </a:rPr>
+              <a:t>What policy, process, or artifact should be created or updated after this module?</a:t>
+            </a:r>
+            <a:endParaRPr lang="en-US" sz="1700" dirty="0"/>
+          </a:p>
+        </p:txBody>
+      </p:sp>
+      <p:sp>
+        <p:nvSpPr>
+          <p:cNvPr id="9" name="Shape 7"/>
+          <p:cNvSpPr/>
+          <p:nvPr/>
+        </p:nvSpPr>
+        <p:spPr>
+          <a:xfrm>
+            <a:off x="7909560" y="1417320"/>
+            <a:ext cx="3154680" cy="1828800"/>
+          </a:xfrm>
+          <a:prstGeom prst="roundRect">
+            <a:avLst>
+              <a:gd name="adj" fmla="val 6000"/>
+            </a:avLst>
+          </a:prstGeom>
+          <a:solidFill>
+            <a:srgbClr val="EEF8ED"/>
+          </a:solidFill>
+          <a:ln w="12700">
+            <a:solidFill>
+              <a:srgbClr val="B9D7E6"/>
+            </a:solidFill>
+            <a:prstDash val="solid"/>
+          </a:ln>
+        </p:spPr>
+      </p:sp>
+      <p:sp>
+        <p:nvSpPr>
+          <p:cNvPr id="10" name="Text 8"/>
+          <p:cNvSpPr/>
+          <p:nvPr/>
+        </p:nvSpPr>
+        <p:spPr>
+          <a:xfrm>
+            <a:off x="8074152" y="1563624"/>
+            <a:ext cx="2825496" cy="201168"/>
+          </a:xfrm>
+          <a:prstGeom prst="rect">
+            <a:avLst/>
+          </a:prstGeom>
+          <a:noFill/>
+          <a:ln/>
+        </p:spPr>
+        <p:txBody>
+          <a:bodyPr wrap="square" lIns="0" tIns="0" rIns="0" bIns="0" rtlCol="0" anchor="ctr"/>
+          <a:lstStyle/>
+          <a:p>
             <a:pPr indent="0" marL="0">
               <a:buNone/>
             </a:pPr>
             <a:r>
-              <a:rPr lang="en-US" sz="1420" dirty="0">
+              <a:rPr lang="en-US" sz="950" b="1" dirty="0">
+                <a:solidFill>
+                  <a:srgbClr val="0068B7"/>
+                </a:solidFill>
+                <a:latin typeface="Aptos" pitchFamily="34" charset="0"/>
+                <a:ea typeface="Aptos" pitchFamily="34" charset="-122"/>
+                <a:cs typeface="Aptos" pitchFamily="34" charset="-120"/>
+              </a:rPr>
+              <a:t>Key idea</a:t>
+            </a:r>
+            <a:endParaRPr lang="en-US" sz="950" dirty="0"/>
+          </a:p>
+        </p:txBody>
+      </p:sp>
+      <p:sp>
+        <p:nvSpPr>
+          <p:cNvPr id="11" name="Text 9"/>
+          <p:cNvSpPr/>
+          <p:nvPr/>
+        </p:nvSpPr>
+        <p:spPr>
+          <a:xfrm>
+            <a:off x="8074152" y="1856232"/>
+            <a:ext cx="2825496" cy="1261872"/>
+          </a:xfrm>
+          <a:prstGeom prst="rect">
+            <a:avLst/>
+          </a:prstGeom>
+          <a:noFill/>
+          <a:ln/>
+        </p:spPr>
+        <p:txBody>
+          <a:bodyPr wrap="square" lIns="0" tIns="0" rIns="0" bIns="0" rtlCol="0" anchor="t">
+            <a:normAutofit/>
+          </a:bodyPr>
+          <a:lstStyle/>
+          <a:p>
+            <a:pPr indent="0" marL="0">
+              <a:buNone/>
+            </a:pPr>
+            <a:r>
+              <a:rPr lang="en-US" sz="1250" dirty="0">
                 <a:solidFill>
                   <a:srgbClr val="17364A"/>
                 </a:solidFill>
@@ -3640,9 +4983,116 @@
                 <a:ea typeface="Aptos" pitchFamily="34" charset="-122"/>
                 <a:cs typeface="Aptos" pitchFamily="34" charset="-120"/>
               </a:rPr>
-              <a:t>Choose a real or realistic public health AI use case. Document assumptions, unresolved questions, and which agency roles would need to review the artifact before it is adopted. The exercise should produce a work product that could support governance review, leadership discussion, implementation planning, or policy development.</a:t>
-            </a:r>
-            <a:endParaRPr lang="en-US" sz="1420" dirty="0"/>
+              <a:t>Which staff, partners, or communities would be affected if this issue were handled poorly?</a:t>
+            </a:r>
+            <a:endParaRPr lang="en-US" sz="1250" dirty="0"/>
+          </a:p>
+        </p:txBody>
+      </p:sp>
+      <p:sp>
+        <p:nvSpPr>
+          <p:cNvPr id="12" name="Shape 10"/>
+          <p:cNvSpPr/>
+          <p:nvPr/>
+        </p:nvSpPr>
+        <p:spPr>
+          <a:xfrm>
+            <a:off x="7909560" y="3520440"/>
+            <a:ext cx="3154680" cy="1737360"/>
+          </a:xfrm>
+          <a:prstGeom prst="roundRect">
+            <a:avLst>
+              <a:gd name="adj" fmla="val 6316"/>
+            </a:avLst>
+          </a:prstGeom>
+          <a:solidFill>
+            <a:srgbClr val="EAF6F8"/>
+          </a:solidFill>
+          <a:ln w="12700">
+            <a:solidFill>
+              <a:srgbClr val="B9D7E6"/>
+            </a:solidFill>
+            <a:prstDash val="solid"/>
+          </a:ln>
+        </p:spPr>
+      </p:sp>
+      <p:sp>
+        <p:nvSpPr>
+          <p:cNvPr id="13" name="Text 11"/>
+          <p:cNvSpPr/>
+          <p:nvPr/>
+        </p:nvSpPr>
+        <p:spPr>
+          <a:xfrm>
+            <a:off x="8074152" y="3666744"/>
+            <a:ext cx="2825496" cy="201168"/>
+          </a:xfrm>
+          <a:prstGeom prst="rect">
+            <a:avLst/>
+          </a:prstGeom>
+          <a:noFill/>
+          <a:ln/>
+        </p:spPr>
+        <p:txBody>
+          <a:bodyPr wrap="square" lIns="0" tIns="0" rIns="0" bIns="0" rtlCol="0" anchor="ctr"/>
+          <a:lstStyle/>
+          <a:p>
+            <a:pPr indent="0" marL="0">
+              <a:buNone/>
+            </a:pPr>
+            <a:r>
+              <a:rPr lang="en-US" sz="950" b="1" dirty="0">
+                <a:solidFill>
+                  <a:srgbClr val="0068B7"/>
+                </a:solidFill>
+                <a:latin typeface="Aptos" pitchFamily="34" charset="0"/>
+                <a:ea typeface="Aptos" pitchFamily="34" charset="-122"/>
+                <a:cs typeface="Aptos" pitchFamily="34" charset="-120"/>
+              </a:rPr>
+              <a:t>Use this for</a:t>
+            </a:r>
+            <a:endParaRPr lang="en-US" sz="950" dirty="0"/>
+          </a:p>
+        </p:txBody>
+      </p:sp>
+      <p:sp>
+        <p:nvSpPr>
+          <p:cNvPr id="14" name="Text 12"/>
+          <p:cNvSpPr/>
+          <p:nvPr/>
+        </p:nvSpPr>
+        <p:spPr>
+          <a:xfrm>
+            <a:off x="8074152" y="3959352"/>
+            <a:ext cx="2825496" cy="1170432"/>
+          </a:xfrm>
+          <a:prstGeom prst="rect">
+            <a:avLst/>
+          </a:prstGeom>
+          <a:noFill/>
+          <a:ln/>
+        </p:spPr>
+        <p:txBody>
+          <a:bodyPr wrap="square" lIns="0" tIns="0" rIns="0" bIns="0" rtlCol="0" anchor="t">
+            <a:normAutofit/>
+          </a:bodyPr>
+          <a:lstStyle/>
+          <a:p>
+            <a:pPr indent="0" marL="0">
+              <a:buNone/>
+            </a:pPr>
+            <a:r>
+              <a:rPr lang="en-US" sz="1250" dirty="0">
+                <a:solidFill>
+                  <a:srgbClr val="17364A"/>
+                </a:solidFill>
+                <a:latin typeface="Aptos" pitchFamily="34" charset="0"/>
+                <a:ea typeface="Aptos" pitchFamily="34" charset="-122"/>
+                <a:cs typeface="Aptos" pitchFamily="34" charset="-120"/>
+              </a:rPr>
+              <a:t>Connect the concept to public health decisions, safeguards, documentation, or implementation work.</a:t>
+            </a:r>
+            <a:endParaRPr lang="en-US" sz="1250" dirty="0"/>
           </a:p>
         </p:txBody>
       </p:sp>
@@ -3705,7 +5155,32 @@
       </p:sp>
       <p:sp>
         <p:nvSpPr>
-          <p:cNvPr id="3" name="Text 1"/>
+          <p:cNvPr id="3" name="Shape 1"/>
+          <p:cNvSpPr/>
+          <p:nvPr/>
+        </p:nvSpPr>
+        <p:spPr>
+          <a:xfrm>
+            <a:off x="0" y="164592"/>
+            <a:ext cx="146304" cy="6693408"/>
+          </a:xfrm>
+          <a:prstGeom prst="rect">
+            <a:avLst/>
+          </a:prstGeom>
+          <a:solidFill>
+            <a:srgbClr val="2F8A28"/>
+          </a:solidFill>
+          <a:ln w="12700">
+            <a:solidFill>
+              <a:srgbClr val="2F8A28"/>
+            </a:solidFill>
+            <a:prstDash val="solid"/>
+          </a:ln>
+        </p:spPr>
+      </p:sp>
+      <p:sp>
+        <p:nvSpPr>
+          <p:cNvPr id="4" name="Text 2"/>
           <p:cNvSpPr/>
           <p:nvPr/>
         </p:nvSpPr>
@@ -3744,7 +5219,7 @@
       </p:sp>
       <p:sp>
         <p:nvSpPr>
-          <p:cNvPr id="4" name="Text 2"/>
+          <p:cNvPr id="5" name="Text 3"/>
           <p:cNvSpPr/>
           <p:nvPr/>
         </p:nvSpPr>
@@ -3783,7 +5258,7 @@
       </p:sp>
       <p:sp>
         <p:nvSpPr>
-          <p:cNvPr id="5" name="Text 3"/>
+          <p:cNvPr id="6" name="Text 4"/>
           <p:cNvSpPr/>
           <p:nvPr/>
         </p:nvSpPr>
@@ -3822,13 +5297,77 @@
       </p:sp>
       <p:sp>
         <p:nvSpPr>
-          <p:cNvPr id="6" name="Text 4"/>
+          <p:cNvPr id="7" name="Shape 5"/>
           <p:cNvSpPr/>
           <p:nvPr/>
         </p:nvSpPr>
         <p:spPr>
           <a:xfrm>
             <a:off x="640080" y="658368"/>
+            <a:ext cx="420624" cy="420624"/>
+          </a:xfrm>
+          <a:prstGeom prst="ellipse">
+            <a:avLst/>
+          </a:prstGeom>
+          <a:solidFill>
+            <a:srgbClr val="0068B7"/>
+          </a:solidFill>
+          <a:ln w="12700">
+            <a:solidFill>
+              <a:srgbClr val="0068B7"/>
+            </a:solidFill>
+            <a:prstDash val="solid"/>
+          </a:ln>
+        </p:spPr>
+      </p:sp>
+      <p:sp>
+        <p:nvSpPr>
+          <p:cNvPr id="8" name="Text 6"/>
+          <p:cNvSpPr/>
+          <p:nvPr/>
+        </p:nvSpPr>
+        <p:spPr>
+          <a:xfrm>
+            <a:off x="640080" y="731520"/>
+            <a:ext cx="420624" cy="164592"/>
+          </a:xfrm>
+          <a:prstGeom prst="rect">
+            <a:avLst/>
+          </a:prstGeom>
+          <a:noFill/>
+          <a:ln/>
+        </p:spPr>
+        <p:txBody>
+          <a:bodyPr wrap="square" lIns="0" tIns="0" rIns="0" bIns="0" rtlCol="0" anchor="ctr"/>
+          <a:lstStyle/>
+          <a:p>
+            <a:pPr algn="ctr" indent="0" marL="0">
+              <a:buNone/>
+            </a:pPr>
+            <a:r>
+              <a:rPr lang="en-US" sz="1100" b="1" dirty="0">
+                <a:solidFill>
+                  <a:srgbClr val="FFFFFF"/>
+                </a:solidFill>
+                <a:latin typeface="Aptos" pitchFamily="34" charset="0"/>
+                <a:ea typeface="Aptos" pitchFamily="34" charset="-122"/>
+                <a:cs typeface="Aptos" pitchFamily="34" charset="-120"/>
+              </a:rPr>
+              <a:t>9</a:t>
+            </a:r>
+            <a:endParaRPr lang="en-US" sz="1100" dirty="0"/>
+          </a:p>
+        </p:txBody>
+      </p:sp>
+      <p:sp>
+        <p:nvSpPr>
+          <p:cNvPr id="9" name="Text 7"/>
+          <p:cNvSpPr/>
+          <p:nvPr/>
+        </p:nvSpPr>
+        <p:spPr>
+          <a:xfrm>
+            <a:off x="640080" y="621792"/>
             <a:ext cx="10881360" cy="566928"/>
           </a:xfrm>
           <a:prstGeom prst="rect">
@@ -3855,7 +5394,7 @@
                 <a:ea typeface="Aptos Display" pitchFamily="34" charset="-122"/>
                 <a:cs typeface="Aptos Display" pitchFamily="34" charset="-120"/>
               </a:rPr>
-              <a:t>Expected Artifact or Evidence</a:t>
+              <a:t>Practical Exercise</a:t>
             </a:r>
             <a:endParaRPr lang="en-US" sz="2700" dirty="0"/>
           </a:p>
@@ -3863,32 +5402,150 @@
       </p:sp>
       <p:sp>
         <p:nvSpPr>
-          <p:cNvPr id="7" name="Text 5"/>
-          <p:cNvSpPr/>
-          <p:nvPr/>
-        </p:nvSpPr>
-        <p:spPr>
-          <a:xfrm>
-            <a:off x="822960" y="1325880"/>
-            <a:ext cx="10378440" cy="4800600"/>
-          </a:xfrm>
-          <a:prstGeom prst="rect">
-            <a:avLst/>
-          </a:prstGeom>
-          <a:noFill/>
-          <a:ln/>
-        </p:spPr>
-        <p:txBody>
-          <a:bodyPr wrap="square" lIns="1016" tIns="1016" rIns="1016" bIns="1016" rtlCol="0" anchor="t">
+          <p:cNvPr id="10" name="Text 8"/>
+          <p:cNvSpPr/>
+          <p:nvPr/>
+        </p:nvSpPr>
+        <p:spPr>
+          <a:xfrm>
+            <a:off x="868680" y="1417320"/>
+            <a:ext cx="6675120" cy="4434840"/>
+          </a:xfrm>
+          <a:prstGeom prst="rect">
+            <a:avLst/>
+          </a:prstGeom>
+          <a:noFill/>
+          <a:ln/>
+        </p:spPr>
+        <p:txBody>
+          <a:bodyPr wrap="square" lIns="635" tIns="635" rIns="635" bIns="635" rtlCol="0" anchor="t">
             <a:normAutofit/>
           </a:bodyPr>
           <a:lstStyle/>
           <a:p>
+            <a:r>
+              <a:rPr lang="en-US" sz="1700" dirty="0">
+                <a:solidFill>
+                  <a:srgbClr val="17364A"/>
+                </a:solidFill>
+                <a:latin typeface="Aptos" pitchFamily="34" charset="0"/>
+                <a:ea typeface="Aptos" pitchFamily="34" charset="-122"/>
+                <a:cs typeface="Aptos" pitchFamily="34" charset="-120"/>
+              </a:rPr>
+              <a:t>Create a change management plan for one AI use case.</a:t>
+            </a:r>
+            <a:endParaRPr lang="en-US" sz="1700" dirty="0"/>
+          </a:p>
+          <a:p>
+            <a:r>
+              <a:rPr lang="en-US" sz="1700" dirty="0">
+                <a:solidFill>
+                  <a:srgbClr val="17364A"/>
+                </a:solidFill>
+                <a:latin typeface="Aptos" pitchFamily="34" charset="0"/>
+                <a:ea typeface="Aptos" pitchFamily="34" charset="-122"/>
+                <a:cs typeface="Aptos" pitchFamily="34" charset="-120"/>
+              </a:rPr>
+              <a:t>Include stakeholder map, communication messages, training needs, workflow changes, adoption measures, feedback process, and.</a:t>
+            </a:r>
+            <a:endParaRPr lang="en-US" sz="1700" dirty="0"/>
+          </a:p>
+        </p:txBody>
+      </p:sp>
+      <p:sp>
+        <p:nvSpPr>
+          <p:cNvPr id="11" name="Shape 9"/>
+          <p:cNvSpPr/>
+          <p:nvPr/>
+        </p:nvSpPr>
+        <p:spPr>
+          <a:xfrm>
+            <a:off x="7909560" y="1417320"/>
+            <a:ext cx="3154680" cy="1828800"/>
+          </a:xfrm>
+          <a:prstGeom prst="roundRect">
+            <a:avLst>
+              <a:gd name="adj" fmla="val 6000"/>
+            </a:avLst>
+          </a:prstGeom>
+          <a:solidFill>
+            <a:srgbClr val="EEF8ED"/>
+          </a:solidFill>
+          <a:ln w="12700">
+            <a:solidFill>
+              <a:srgbClr val="B9D7E6"/>
+            </a:solidFill>
+            <a:prstDash val="solid"/>
+          </a:ln>
+        </p:spPr>
+      </p:sp>
+      <p:sp>
+        <p:nvSpPr>
+          <p:cNvPr id="12" name="Text 10"/>
+          <p:cNvSpPr/>
+          <p:nvPr/>
+        </p:nvSpPr>
+        <p:spPr>
+          <a:xfrm>
+            <a:off x="8074152" y="1563624"/>
+            <a:ext cx="2825496" cy="201168"/>
+          </a:xfrm>
+          <a:prstGeom prst="rect">
+            <a:avLst/>
+          </a:prstGeom>
+          <a:noFill/>
+          <a:ln/>
+        </p:spPr>
+        <p:txBody>
+          <a:bodyPr wrap="square" lIns="0" tIns="0" rIns="0" bIns="0" rtlCol="0" anchor="ctr"/>
+          <a:lstStyle/>
+          <a:p>
             <a:pPr indent="0" marL="0">
               <a:buNone/>
             </a:pPr>
             <a:r>
-              <a:rPr lang="en-US" sz="1420" dirty="0">
+              <a:rPr lang="en-US" sz="950" b="1" dirty="0">
+                <a:solidFill>
+                  <a:srgbClr val="0068B7"/>
+                </a:solidFill>
+                <a:latin typeface="Aptos" pitchFamily="34" charset="0"/>
+                <a:ea typeface="Aptos" pitchFamily="34" charset="-122"/>
+                <a:cs typeface="Aptos" pitchFamily="34" charset="-120"/>
+              </a:rPr>
+              <a:t>Key idea</a:t>
+            </a:r>
+            <a:endParaRPr lang="en-US" sz="950" dirty="0"/>
+          </a:p>
+        </p:txBody>
+      </p:sp>
+      <p:sp>
+        <p:nvSpPr>
+          <p:cNvPr id="13" name="Text 11"/>
+          <p:cNvSpPr/>
+          <p:nvPr/>
+        </p:nvSpPr>
+        <p:spPr>
+          <a:xfrm>
+            <a:off x="8074152" y="1856232"/>
+            <a:ext cx="2825496" cy="1261872"/>
+          </a:xfrm>
+          <a:prstGeom prst="rect">
+            <a:avLst/>
+          </a:prstGeom>
+          <a:noFill/>
+          <a:ln/>
+        </p:spPr>
+        <p:txBody>
+          <a:bodyPr wrap="square" lIns="0" tIns="0" rIns="0" bIns="0" rtlCol="0" anchor="t">
+            <a:normAutofit/>
+          </a:bodyPr>
+          <a:lstStyle/>
+          <a:p>
+            <a:pPr indent="0" marL="0">
+              <a:buNone/>
+            </a:pPr>
+            <a:r>
+              <a:rPr lang="en-US" sz="1250" dirty="0">
                 <a:solidFill>
                   <a:srgbClr val="17364A"/>
                 </a:solidFill>
@@ -3896,9 +5553,116 @@
                 <a:ea typeface="Aptos" pitchFamily="34" charset="-122"/>
                 <a:cs typeface="Aptos" pitchFamily="34" charset="-120"/>
               </a:rPr>
-              <a:t>AI adoption plan; stakeholder map; communication plan; training plan; feedback and adoption monitoring plan.</a:t>
-            </a:r>
-            <a:endParaRPr lang="en-US" sz="1420" dirty="0"/>
+              <a:t>Create a change management plan for one AI use case.</a:t>
+            </a:r>
+            <a:endParaRPr lang="en-US" sz="1250" dirty="0"/>
+          </a:p>
+        </p:txBody>
+      </p:sp>
+      <p:sp>
+        <p:nvSpPr>
+          <p:cNvPr id="14" name="Shape 12"/>
+          <p:cNvSpPr/>
+          <p:nvPr/>
+        </p:nvSpPr>
+        <p:spPr>
+          <a:xfrm>
+            <a:off x="7909560" y="3520440"/>
+            <a:ext cx="3154680" cy="1737360"/>
+          </a:xfrm>
+          <a:prstGeom prst="roundRect">
+            <a:avLst>
+              <a:gd name="adj" fmla="val 6316"/>
+            </a:avLst>
+          </a:prstGeom>
+          <a:solidFill>
+            <a:srgbClr val="EAF6F8"/>
+          </a:solidFill>
+          <a:ln w="12700">
+            <a:solidFill>
+              <a:srgbClr val="B9D7E6"/>
+            </a:solidFill>
+            <a:prstDash val="solid"/>
+          </a:ln>
+        </p:spPr>
+      </p:sp>
+      <p:sp>
+        <p:nvSpPr>
+          <p:cNvPr id="15" name="Text 13"/>
+          <p:cNvSpPr/>
+          <p:nvPr/>
+        </p:nvSpPr>
+        <p:spPr>
+          <a:xfrm>
+            <a:off x="8074152" y="3666744"/>
+            <a:ext cx="2825496" cy="201168"/>
+          </a:xfrm>
+          <a:prstGeom prst="rect">
+            <a:avLst/>
+          </a:prstGeom>
+          <a:noFill/>
+          <a:ln/>
+        </p:spPr>
+        <p:txBody>
+          <a:bodyPr wrap="square" lIns="0" tIns="0" rIns="0" bIns="0" rtlCol="0" anchor="ctr"/>
+          <a:lstStyle/>
+          <a:p>
+            <a:pPr indent="0" marL="0">
+              <a:buNone/>
+            </a:pPr>
+            <a:r>
+              <a:rPr lang="en-US" sz="950" b="1" dirty="0">
+                <a:solidFill>
+                  <a:srgbClr val="0068B7"/>
+                </a:solidFill>
+                <a:latin typeface="Aptos" pitchFamily="34" charset="0"/>
+                <a:ea typeface="Aptos" pitchFamily="34" charset="-122"/>
+                <a:cs typeface="Aptos" pitchFamily="34" charset="-120"/>
+              </a:rPr>
+              <a:t>Use this for</a:t>
+            </a:r>
+            <a:endParaRPr lang="en-US" sz="950" dirty="0"/>
+          </a:p>
+        </p:txBody>
+      </p:sp>
+      <p:sp>
+        <p:nvSpPr>
+          <p:cNvPr id="16" name="Text 14"/>
+          <p:cNvSpPr/>
+          <p:nvPr/>
+        </p:nvSpPr>
+        <p:spPr>
+          <a:xfrm>
+            <a:off x="8074152" y="3959352"/>
+            <a:ext cx="2825496" cy="1170432"/>
+          </a:xfrm>
+          <a:prstGeom prst="rect">
+            <a:avLst/>
+          </a:prstGeom>
+          <a:noFill/>
+          <a:ln/>
+        </p:spPr>
+        <p:txBody>
+          <a:bodyPr wrap="square" lIns="0" tIns="0" rIns="0" bIns="0" rtlCol="0" anchor="t">
+            <a:normAutofit/>
+          </a:bodyPr>
+          <a:lstStyle/>
+          <a:p>
+            <a:pPr indent="0" marL="0">
+              <a:buNone/>
+            </a:pPr>
+            <a:r>
+              <a:rPr lang="en-US" sz="1250" dirty="0">
+                <a:solidFill>
+                  <a:srgbClr val="17364A"/>
+                </a:solidFill>
+                <a:latin typeface="Aptos" pitchFamily="34" charset="0"/>
+                <a:ea typeface="Aptos" pitchFamily="34" charset="-122"/>
+                <a:cs typeface="Aptos" pitchFamily="34" charset="-120"/>
+              </a:rPr>
+              <a:t>Connect the concept to public health decisions, safeguards, documentation, or implementation work.</a:t>
+            </a:r>
+            <a:endParaRPr lang="en-US" sz="1250" dirty="0"/>
           </a:p>
         </p:txBody>
       </p:sp>
@@ -3961,7 +5725,32 @@
       </p:sp>
       <p:sp>
         <p:nvSpPr>
-          <p:cNvPr id="3" name="Text 1"/>
+          <p:cNvPr id="3" name="Shape 1"/>
+          <p:cNvSpPr/>
+          <p:nvPr/>
+        </p:nvSpPr>
+        <p:spPr>
+          <a:xfrm>
+            <a:off x="0" y="164592"/>
+            <a:ext cx="146304" cy="6693408"/>
+          </a:xfrm>
+          <a:prstGeom prst="rect">
+            <a:avLst/>
+          </a:prstGeom>
+          <a:solidFill>
+            <a:srgbClr val="2F8A28"/>
+          </a:solidFill>
+          <a:ln w="12700">
+            <a:solidFill>
+              <a:srgbClr val="2F8A28"/>
+            </a:solidFill>
+            <a:prstDash val="solid"/>
+          </a:ln>
+        </p:spPr>
+      </p:sp>
+      <p:sp>
+        <p:nvSpPr>
+          <p:cNvPr id="4" name="Text 2"/>
           <p:cNvSpPr/>
           <p:nvPr/>
         </p:nvSpPr>
@@ -4000,7 +5789,7 @@
       </p:sp>
       <p:sp>
         <p:nvSpPr>
-          <p:cNvPr id="4" name="Text 2"/>
+          <p:cNvPr id="5" name="Text 3"/>
           <p:cNvSpPr/>
           <p:nvPr/>
         </p:nvSpPr>
@@ -4039,7 +5828,7 @@
       </p:sp>
       <p:sp>
         <p:nvSpPr>
-          <p:cNvPr id="5" name="Text 3"/>
+          <p:cNvPr id="6" name="Text 4"/>
           <p:cNvSpPr/>
           <p:nvPr/>
         </p:nvSpPr>
@@ -4078,13 +5867,77 @@
       </p:sp>
       <p:sp>
         <p:nvSpPr>
-          <p:cNvPr id="6" name="Text 4"/>
+          <p:cNvPr id="7" name="Shape 5"/>
           <p:cNvSpPr/>
           <p:nvPr/>
         </p:nvSpPr>
         <p:spPr>
           <a:xfrm>
             <a:off x="640080" y="658368"/>
+            <a:ext cx="420624" cy="420624"/>
+          </a:xfrm>
+          <a:prstGeom prst="ellipse">
+            <a:avLst/>
+          </a:prstGeom>
+          <a:solidFill>
+            <a:srgbClr val="0068B7"/>
+          </a:solidFill>
+          <a:ln w="12700">
+            <a:solidFill>
+              <a:srgbClr val="0068B7"/>
+            </a:solidFill>
+            <a:prstDash val="solid"/>
+          </a:ln>
+        </p:spPr>
+      </p:sp>
+      <p:sp>
+        <p:nvSpPr>
+          <p:cNvPr id="8" name="Text 6"/>
+          <p:cNvSpPr/>
+          <p:nvPr/>
+        </p:nvSpPr>
+        <p:spPr>
+          <a:xfrm>
+            <a:off x="640080" y="731520"/>
+            <a:ext cx="420624" cy="164592"/>
+          </a:xfrm>
+          <a:prstGeom prst="rect">
+            <a:avLst/>
+          </a:prstGeom>
+          <a:noFill/>
+          <a:ln/>
+        </p:spPr>
+        <p:txBody>
+          <a:bodyPr wrap="square" lIns="0" tIns="0" rIns="0" bIns="0" rtlCol="0" anchor="ctr"/>
+          <a:lstStyle/>
+          <a:p>
+            <a:pPr algn="ctr" indent="0" marL="0">
+              <a:buNone/>
+            </a:pPr>
+            <a:r>
+              <a:rPr lang="en-US" sz="1100" b="1" dirty="0">
+                <a:solidFill>
+                  <a:srgbClr val="FFFFFF"/>
+                </a:solidFill>
+                <a:latin typeface="Aptos" pitchFamily="34" charset="0"/>
+                <a:ea typeface="Aptos" pitchFamily="34" charset="-122"/>
+                <a:cs typeface="Aptos" pitchFamily="34" charset="-120"/>
+              </a:rPr>
+              <a:t>10</a:t>
+            </a:r>
+            <a:endParaRPr lang="en-US" sz="1100" dirty="0"/>
+          </a:p>
+        </p:txBody>
+      </p:sp>
+      <p:sp>
+        <p:nvSpPr>
+          <p:cNvPr id="9" name="Text 7"/>
+          <p:cNvSpPr/>
+          <p:nvPr/>
+        </p:nvSpPr>
+        <p:spPr>
+          <a:xfrm>
+            <a:off x="640080" y="621792"/>
             <a:ext cx="10881360" cy="566928"/>
           </a:xfrm>
           <a:prstGeom prst="rect">
@@ -4111,7 +5964,7 @@
                 <a:ea typeface="Aptos Display" pitchFamily="34" charset="-122"/>
                 <a:cs typeface="Aptos Display" pitchFamily="34" charset="-120"/>
               </a:rPr>
-              <a:t>Expected Assignment</a:t>
+              <a:t>Before You Begin</a:t>
             </a:r>
             <a:endParaRPr lang="en-US" sz="2700" dirty="0"/>
           </a:p>
@@ -4119,14 +5972,14 @@
       </p:sp>
       <p:sp>
         <p:nvSpPr>
-          <p:cNvPr id="7" name="Text 5"/>
-          <p:cNvSpPr/>
-          <p:nvPr/>
-        </p:nvSpPr>
-        <p:spPr>
-          <a:xfrm>
-            <a:off x="822960" y="1325880"/>
-            <a:ext cx="10378440" cy="4800600"/>
+          <p:cNvPr id="10" name="Text 8"/>
+          <p:cNvSpPr/>
+          <p:nvPr/>
+        </p:nvSpPr>
+        <p:spPr>
+          <a:xfrm>
+            <a:off x="868680" y="1417320"/>
+            <a:ext cx="6675120" cy="4434840"/>
           </a:xfrm>
           <a:prstGeom prst="rect">
             <a:avLst/>
@@ -4141,7 +5994,7 @@
           <a:lstStyle/>
           <a:p>
             <a:r>
-              <a:rPr lang="en-US" sz="1450" dirty="0">
+              <a:rPr lang="en-US" sz="1700" dirty="0">
                 <a:solidFill>
                   <a:srgbClr val="17364A"/>
                 </a:solidFill>
@@ -4149,9 +6002,251 @@
                 <a:ea typeface="Aptos" pitchFamily="34" charset="-122"/>
                 <a:cs typeface="Aptos" pitchFamily="34" charset="-120"/>
               </a:rPr>
-              <a:t>AI adoption plan; stakeholder map; communication plan; training plan; feedback and adoption monitoring plan.</a:t>
-            </a:r>
-            <a:endParaRPr lang="en-US" sz="1450" dirty="0"/>
+              <a:t>Choose a real or realistic public health AI use case.</a:t>
+            </a:r>
+            <a:endParaRPr lang="en-US" sz="1700" dirty="0"/>
+          </a:p>
+          <a:p>
+            <a:r>
+              <a:rPr lang="en-US" sz="1700" dirty="0">
+                <a:solidFill>
+                  <a:srgbClr val="17364A"/>
+                </a:solidFill>
+                <a:latin typeface="Aptos" pitchFamily="34" charset="0"/>
+                <a:ea typeface="Aptos" pitchFamily="34" charset="-122"/>
+                <a:cs typeface="Aptos" pitchFamily="34" charset="-120"/>
+              </a:rPr>
+              <a:t>Document assumptions, unresolved questions, and which agency roles would need to review the artifact before it is adopted.</a:t>
+            </a:r>
+            <a:endParaRPr lang="en-US" sz="1700" dirty="0"/>
+          </a:p>
+          <a:p>
+            <a:r>
+              <a:rPr lang="en-US" sz="1700" dirty="0">
+                <a:solidFill>
+                  <a:srgbClr val="17364A"/>
+                </a:solidFill>
+                <a:latin typeface="Aptos" pitchFamily="34" charset="0"/>
+                <a:ea typeface="Aptos" pitchFamily="34" charset="-122"/>
+                <a:cs typeface="Aptos" pitchFamily="34" charset="-120"/>
+              </a:rPr>
+              <a:t>The exercise should produce a work product that could support governance review, leadership discussion, implementation.</a:t>
+            </a:r>
+            <a:endParaRPr lang="en-US" sz="1700" dirty="0"/>
+          </a:p>
+        </p:txBody>
+      </p:sp>
+      <p:sp>
+        <p:nvSpPr>
+          <p:cNvPr id="11" name="Shape 9"/>
+          <p:cNvSpPr/>
+          <p:nvPr/>
+        </p:nvSpPr>
+        <p:spPr>
+          <a:xfrm>
+            <a:off x="7909560" y="1417320"/>
+            <a:ext cx="3154680" cy="1828800"/>
+          </a:xfrm>
+          <a:prstGeom prst="roundRect">
+            <a:avLst>
+              <a:gd name="adj" fmla="val 6000"/>
+            </a:avLst>
+          </a:prstGeom>
+          <a:solidFill>
+            <a:srgbClr val="EEF8ED"/>
+          </a:solidFill>
+          <a:ln w="12700">
+            <a:solidFill>
+              <a:srgbClr val="B9D7E6"/>
+            </a:solidFill>
+            <a:prstDash val="solid"/>
+          </a:ln>
+        </p:spPr>
+      </p:sp>
+      <p:sp>
+        <p:nvSpPr>
+          <p:cNvPr id="12" name="Text 10"/>
+          <p:cNvSpPr/>
+          <p:nvPr/>
+        </p:nvSpPr>
+        <p:spPr>
+          <a:xfrm>
+            <a:off x="8074152" y="1563624"/>
+            <a:ext cx="2825496" cy="201168"/>
+          </a:xfrm>
+          <a:prstGeom prst="rect">
+            <a:avLst/>
+          </a:prstGeom>
+          <a:noFill/>
+          <a:ln/>
+        </p:spPr>
+        <p:txBody>
+          <a:bodyPr wrap="square" lIns="0" tIns="0" rIns="0" bIns="0" rtlCol="0" anchor="ctr"/>
+          <a:lstStyle/>
+          <a:p>
+            <a:pPr indent="0" marL="0">
+              <a:buNone/>
+            </a:pPr>
+            <a:r>
+              <a:rPr lang="en-US" sz="950" b="1" dirty="0">
+                <a:solidFill>
+                  <a:srgbClr val="0068B7"/>
+                </a:solidFill>
+                <a:latin typeface="Aptos" pitchFamily="34" charset="0"/>
+                <a:ea typeface="Aptos" pitchFamily="34" charset="-122"/>
+                <a:cs typeface="Aptos" pitchFamily="34" charset="-120"/>
+              </a:rPr>
+              <a:t>Key idea</a:t>
+            </a:r>
+            <a:endParaRPr lang="en-US" sz="950" dirty="0"/>
+          </a:p>
+        </p:txBody>
+      </p:sp>
+      <p:sp>
+        <p:nvSpPr>
+          <p:cNvPr id="13" name="Text 11"/>
+          <p:cNvSpPr/>
+          <p:nvPr/>
+        </p:nvSpPr>
+        <p:spPr>
+          <a:xfrm>
+            <a:off x="8074152" y="1856232"/>
+            <a:ext cx="2825496" cy="1261872"/>
+          </a:xfrm>
+          <a:prstGeom prst="rect">
+            <a:avLst/>
+          </a:prstGeom>
+          <a:noFill/>
+          <a:ln/>
+        </p:spPr>
+        <p:txBody>
+          <a:bodyPr wrap="square" lIns="0" tIns="0" rIns="0" bIns="0" rtlCol="0" anchor="t">
+            <a:normAutofit/>
+          </a:bodyPr>
+          <a:lstStyle/>
+          <a:p>
+            <a:pPr indent="0" marL="0">
+              <a:buNone/>
+            </a:pPr>
+            <a:r>
+              <a:rPr lang="en-US" sz="1250" dirty="0">
+                <a:solidFill>
+                  <a:srgbClr val="17364A"/>
+                </a:solidFill>
+                <a:latin typeface="Aptos" pitchFamily="34" charset="0"/>
+                <a:ea typeface="Aptos" pitchFamily="34" charset="-122"/>
+                <a:cs typeface="Aptos" pitchFamily="34" charset="-120"/>
+              </a:rPr>
+              <a:t>Choose a real or realistic public health AI use case.</a:t>
+            </a:r>
+            <a:endParaRPr lang="en-US" sz="1250" dirty="0"/>
+          </a:p>
+        </p:txBody>
+      </p:sp>
+      <p:sp>
+        <p:nvSpPr>
+          <p:cNvPr id="14" name="Shape 12"/>
+          <p:cNvSpPr/>
+          <p:nvPr/>
+        </p:nvSpPr>
+        <p:spPr>
+          <a:xfrm>
+            <a:off x="7909560" y="3520440"/>
+            <a:ext cx="3154680" cy="1737360"/>
+          </a:xfrm>
+          <a:prstGeom prst="roundRect">
+            <a:avLst>
+              <a:gd name="adj" fmla="val 6316"/>
+            </a:avLst>
+          </a:prstGeom>
+          <a:solidFill>
+            <a:srgbClr val="EAF6F8"/>
+          </a:solidFill>
+          <a:ln w="12700">
+            <a:solidFill>
+              <a:srgbClr val="B9D7E6"/>
+            </a:solidFill>
+            <a:prstDash val="solid"/>
+          </a:ln>
+        </p:spPr>
+      </p:sp>
+      <p:sp>
+        <p:nvSpPr>
+          <p:cNvPr id="15" name="Text 13"/>
+          <p:cNvSpPr/>
+          <p:nvPr/>
+        </p:nvSpPr>
+        <p:spPr>
+          <a:xfrm>
+            <a:off x="8074152" y="3666744"/>
+            <a:ext cx="2825496" cy="201168"/>
+          </a:xfrm>
+          <a:prstGeom prst="rect">
+            <a:avLst/>
+          </a:prstGeom>
+          <a:noFill/>
+          <a:ln/>
+        </p:spPr>
+        <p:txBody>
+          <a:bodyPr wrap="square" lIns="0" tIns="0" rIns="0" bIns="0" rtlCol="0" anchor="ctr"/>
+          <a:lstStyle/>
+          <a:p>
+            <a:pPr indent="0" marL="0">
+              <a:buNone/>
+            </a:pPr>
+            <a:r>
+              <a:rPr lang="en-US" sz="950" b="1" dirty="0">
+                <a:solidFill>
+                  <a:srgbClr val="0068B7"/>
+                </a:solidFill>
+                <a:latin typeface="Aptos" pitchFamily="34" charset="0"/>
+                <a:ea typeface="Aptos" pitchFamily="34" charset="-122"/>
+                <a:cs typeface="Aptos" pitchFamily="34" charset="-120"/>
+              </a:rPr>
+              <a:t>Use this for</a:t>
+            </a:r>
+            <a:endParaRPr lang="en-US" sz="950" dirty="0"/>
+          </a:p>
+        </p:txBody>
+      </p:sp>
+      <p:sp>
+        <p:nvSpPr>
+          <p:cNvPr id="16" name="Text 14"/>
+          <p:cNvSpPr/>
+          <p:nvPr/>
+        </p:nvSpPr>
+        <p:spPr>
+          <a:xfrm>
+            <a:off x="8074152" y="3959352"/>
+            <a:ext cx="2825496" cy="1170432"/>
+          </a:xfrm>
+          <a:prstGeom prst="rect">
+            <a:avLst/>
+          </a:prstGeom>
+          <a:noFill/>
+          <a:ln/>
+        </p:spPr>
+        <p:txBody>
+          <a:bodyPr wrap="square" lIns="0" tIns="0" rIns="0" bIns="0" rtlCol="0" anchor="t">
+            <a:normAutofit/>
+          </a:bodyPr>
+          <a:lstStyle/>
+          <a:p>
+            <a:pPr indent="0" marL="0">
+              <a:buNone/>
+            </a:pPr>
+            <a:r>
+              <a:rPr lang="en-US" sz="1250" dirty="0">
+                <a:solidFill>
+                  <a:srgbClr val="17364A"/>
+                </a:solidFill>
+                <a:latin typeface="Aptos" pitchFamily="34" charset="0"/>
+                <a:ea typeface="Aptos" pitchFamily="34" charset="-122"/>
+                <a:cs typeface="Aptos" pitchFamily="34" charset="-120"/>
+              </a:rPr>
+              <a:t>Connect the concept to public health decisions, safeguards, documentation, or implementation work.</a:t>
+            </a:r>
+            <a:endParaRPr lang="en-US" sz="1250" dirty="0"/>
           </a:p>
         </p:txBody>
       </p:sp>
@@ -4214,7 +6309,32 @@
       </p:sp>
       <p:sp>
         <p:nvSpPr>
-          <p:cNvPr id="3" name="Text 1"/>
+          <p:cNvPr id="3" name="Shape 1"/>
+          <p:cNvSpPr/>
+          <p:nvPr/>
+        </p:nvSpPr>
+        <p:spPr>
+          <a:xfrm>
+            <a:off x="0" y="164592"/>
+            <a:ext cx="146304" cy="6693408"/>
+          </a:xfrm>
+          <a:prstGeom prst="rect">
+            <a:avLst/>
+          </a:prstGeom>
+          <a:solidFill>
+            <a:srgbClr val="2F8A28"/>
+          </a:solidFill>
+          <a:ln w="12700">
+            <a:solidFill>
+              <a:srgbClr val="2F8A28"/>
+            </a:solidFill>
+            <a:prstDash val="solid"/>
+          </a:ln>
+        </p:spPr>
+      </p:sp>
+      <p:sp>
+        <p:nvSpPr>
+          <p:cNvPr id="4" name="Text 2"/>
           <p:cNvSpPr/>
           <p:nvPr/>
         </p:nvSpPr>
@@ -4253,7 +6373,7 @@
       </p:sp>
       <p:sp>
         <p:nvSpPr>
-          <p:cNvPr id="4" name="Text 2"/>
+          <p:cNvPr id="5" name="Text 3"/>
           <p:cNvSpPr/>
           <p:nvPr/>
         </p:nvSpPr>
@@ -4292,7 +6412,7 @@
       </p:sp>
       <p:sp>
         <p:nvSpPr>
-          <p:cNvPr id="5" name="Text 3"/>
+          <p:cNvPr id="6" name="Text 4"/>
           <p:cNvSpPr/>
           <p:nvPr/>
         </p:nvSpPr>
@@ -4331,13 +6451,77 @@
       </p:sp>
       <p:sp>
         <p:nvSpPr>
-          <p:cNvPr id="6" name="Text 4"/>
+          <p:cNvPr id="7" name="Shape 5"/>
           <p:cNvSpPr/>
           <p:nvPr/>
         </p:nvSpPr>
         <p:spPr>
           <a:xfrm>
             <a:off x="640080" y="658368"/>
+            <a:ext cx="420624" cy="420624"/>
+          </a:xfrm>
+          <a:prstGeom prst="ellipse">
+            <a:avLst/>
+          </a:prstGeom>
+          <a:solidFill>
+            <a:srgbClr val="0068B7"/>
+          </a:solidFill>
+          <a:ln w="12700">
+            <a:solidFill>
+              <a:srgbClr val="0068B7"/>
+            </a:solidFill>
+            <a:prstDash val="solid"/>
+          </a:ln>
+        </p:spPr>
+      </p:sp>
+      <p:sp>
+        <p:nvSpPr>
+          <p:cNvPr id="8" name="Text 6"/>
+          <p:cNvSpPr/>
+          <p:nvPr/>
+        </p:nvSpPr>
+        <p:spPr>
+          <a:xfrm>
+            <a:off x="640080" y="731520"/>
+            <a:ext cx="420624" cy="164592"/>
+          </a:xfrm>
+          <a:prstGeom prst="rect">
+            <a:avLst/>
+          </a:prstGeom>
+          <a:noFill/>
+          <a:ln/>
+        </p:spPr>
+        <p:txBody>
+          <a:bodyPr wrap="square" lIns="0" tIns="0" rIns="0" bIns="0" rtlCol="0" anchor="ctr"/>
+          <a:lstStyle/>
+          <a:p>
+            <a:pPr algn="ctr" indent="0" marL="0">
+              <a:buNone/>
+            </a:pPr>
+            <a:r>
+              <a:rPr lang="en-US" sz="1100" b="1" dirty="0">
+                <a:solidFill>
+                  <a:srgbClr val="FFFFFF"/>
+                </a:solidFill>
+                <a:latin typeface="Aptos" pitchFamily="34" charset="0"/>
+                <a:ea typeface="Aptos" pitchFamily="34" charset="-122"/>
+                <a:cs typeface="Aptos" pitchFamily="34" charset="-120"/>
+              </a:rPr>
+              <a:t>11</a:t>
+            </a:r>
+            <a:endParaRPr lang="en-US" sz="1100" dirty="0"/>
+          </a:p>
+        </p:txBody>
+      </p:sp>
+      <p:sp>
+        <p:nvSpPr>
+          <p:cNvPr id="9" name="Text 7"/>
+          <p:cNvSpPr/>
+          <p:nvPr/>
+        </p:nvSpPr>
+        <p:spPr>
+          <a:xfrm>
+            <a:off x="640080" y="621792"/>
             <a:ext cx="10881360" cy="566928"/>
           </a:xfrm>
           <a:prstGeom prst="rect">
@@ -4364,7 +6548,7 @@
                 <a:ea typeface="Aptos Display" pitchFamily="34" charset="-122"/>
                 <a:cs typeface="Aptos Display" pitchFamily="34" charset="-120"/>
               </a:rPr>
-              <a:t>Knowledge Check</a:t>
+              <a:t>Expected Artifact or Evidence</a:t>
             </a:r>
             <a:endParaRPr lang="en-US" sz="2700" dirty="0"/>
           </a:p>
@@ -4372,14 +6556,14 @@
       </p:sp>
       <p:sp>
         <p:nvSpPr>
-          <p:cNvPr id="7" name="Text 5"/>
-          <p:cNvSpPr/>
-          <p:nvPr/>
-        </p:nvSpPr>
-        <p:spPr>
-          <a:xfrm>
-            <a:off x="822960" y="1325880"/>
-            <a:ext cx="10378440" cy="4800600"/>
+          <p:cNvPr id="10" name="Text 8"/>
+          <p:cNvSpPr/>
+          <p:nvPr/>
+        </p:nvSpPr>
+        <p:spPr>
+          <a:xfrm>
+            <a:off x="868680" y="1417320"/>
+            <a:ext cx="6675120" cy="4434840"/>
           </a:xfrm>
           <a:prstGeom prst="rect">
             <a:avLst/>
@@ -4394,7 +6578,7 @@
           <a:lstStyle/>
           <a:p>
             <a:r>
-              <a:rPr lang="en-US" sz="1450" dirty="0">
+              <a:rPr lang="en-US" sz="1700" dirty="0">
                 <a:solidFill>
                   <a:srgbClr val="17364A"/>
                 </a:solidFill>
@@ -4402,13 +6586,106 @@
                 <a:ea typeface="Aptos" pitchFamily="34" charset="-122"/>
                 <a:cs typeface="Aptos" pitchFamily="34" charset="-120"/>
               </a:rPr>
-              <a:t>1. What is the strongest reason this module topic belongs in AI leadership and governance training?</a:t>
-            </a:r>
-            <a:endParaRPr lang="en-US" sz="1450" dirty="0"/>
-          </a:p>
-          <a:p>
-            <a:r>
-              <a:rPr lang="en-US" sz="1450" dirty="0">
+              <a:t>AI adoption plan; stakeholder map; communication plan; training plan; feedback and adoption monitoring plan.</a:t>
+            </a:r>
+            <a:endParaRPr lang="en-US" sz="1700" dirty="0"/>
+          </a:p>
+        </p:txBody>
+      </p:sp>
+      <p:sp>
+        <p:nvSpPr>
+          <p:cNvPr id="11" name="Shape 9"/>
+          <p:cNvSpPr/>
+          <p:nvPr/>
+        </p:nvSpPr>
+        <p:spPr>
+          <a:xfrm>
+            <a:off x="7909560" y="1417320"/>
+            <a:ext cx="3154680" cy="1828800"/>
+          </a:xfrm>
+          <a:prstGeom prst="roundRect">
+            <a:avLst>
+              <a:gd name="adj" fmla="val 6000"/>
+            </a:avLst>
+          </a:prstGeom>
+          <a:solidFill>
+            <a:srgbClr val="EEF8ED"/>
+          </a:solidFill>
+          <a:ln w="12700">
+            <a:solidFill>
+              <a:srgbClr val="B9D7E6"/>
+            </a:solidFill>
+            <a:prstDash val="solid"/>
+          </a:ln>
+        </p:spPr>
+      </p:sp>
+      <p:sp>
+        <p:nvSpPr>
+          <p:cNvPr id="12" name="Text 10"/>
+          <p:cNvSpPr/>
+          <p:nvPr/>
+        </p:nvSpPr>
+        <p:spPr>
+          <a:xfrm>
+            <a:off x="8074152" y="1563624"/>
+            <a:ext cx="2825496" cy="201168"/>
+          </a:xfrm>
+          <a:prstGeom prst="rect">
+            <a:avLst/>
+          </a:prstGeom>
+          <a:noFill/>
+          <a:ln/>
+        </p:spPr>
+        <p:txBody>
+          <a:bodyPr wrap="square" lIns="0" tIns="0" rIns="0" bIns="0" rtlCol="0" anchor="ctr"/>
+          <a:lstStyle/>
+          <a:p>
+            <a:pPr indent="0" marL="0">
+              <a:buNone/>
+            </a:pPr>
+            <a:r>
+              <a:rPr lang="en-US" sz="950" b="1" dirty="0">
+                <a:solidFill>
+                  <a:srgbClr val="0068B7"/>
+                </a:solidFill>
+                <a:latin typeface="Aptos" pitchFamily="34" charset="0"/>
+                <a:ea typeface="Aptos" pitchFamily="34" charset="-122"/>
+                <a:cs typeface="Aptos" pitchFamily="34" charset="-120"/>
+              </a:rPr>
+              <a:t>Key idea</a:t>
+            </a:r>
+            <a:endParaRPr lang="en-US" sz="950" dirty="0"/>
+          </a:p>
+        </p:txBody>
+      </p:sp>
+      <p:sp>
+        <p:nvSpPr>
+          <p:cNvPr id="13" name="Text 11"/>
+          <p:cNvSpPr/>
+          <p:nvPr/>
+        </p:nvSpPr>
+        <p:spPr>
+          <a:xfrm>
+            <a:off x="8074152" y="1856232"/>
+            <a:ext cx="2825496" cy="1261872"/>
+          </a:xfrm>
+          <a:prstGeom prst="rect">
+            <a:avLst/>
+          </a:prstGeom>
+          <a:noFill/>
+          <a:ln/>
+        </p:spPr>
+        <p:txBody>
+          <a:bodyPr wrap="square" lIns="0" tIns="0" rIns="0" bIns="0" rtlCol="0" anchor="t">
+            <a:normAutofit/>
+          </a:bodyPr>
+          <a:lstStyle/>
+          <a:p>
+            <a:pPr indent="0" marL="0">
+              <a:buNone/>
+            </a:pPr>
+            <a:r>
+              <a:rPr lang="en-US" sz="1250" dirty="0">
                 <a:solidFill>
                   <a:srgbClr val="17364A"/>
                 </a:solidFill>
@@ -4416,13 +6693,106 @@
                 <a:ea typeface="Aptos" pitchFamily="34" charset="-122"/>
                 <a:cs typeface="Aptos" pitchFamily="34" charset="-120"/>
               </a:rPr>
-              <a:t>2. Which practice best supports accountable public health AI governance?</a:t>
-            </a:r>
-            <a:endParaRPr lang="en-US" sz="1450" dirty="0"/>
-          </a:p>
-          <a:p>
-            <a:r>
-              <a:rPr lang="en-US" sz="1450" dirty="0">
+              <a:t>AI adoption plan; stakeholder map; communication plan; training plan; feedback and adoption monitoring plan.</a:t>
+            </a:r>
+            <a:endParaRPr lang="en-US" sz="1250" dirty="0"/>
+          </a:p>
+        </p:txBody>
+      </p:sp>
+      <p:sp>
+        <p:nvSpPr>
+          <p:cNvPr id="14" name="Shape 12"/>
+          <p:cNvSpPr/>
+          <p:nvPr/>
+        </p:nvSpPr>
+        <p:spPr>
+          <a:xfrm>
+            <a:off x="7909560" y="3520440"/>
+            <a:ext cx="3154680" cy="1737360"/>
+          </a:xfrm>
+          <a:prstGeom prst="roundRect">
+            <a:avLst>
+              <a:gd name="adj" fmla="val 6316"/>
+            </a:avLst>
+          </a:prstGeom>
+          <a:solidFill>
+            <a:srgbClr val="EAF6F8"/>
+          </a:solidFill>
+          <a:ln w="12700">
+            <a:solidFill>
+              <a:srgbClr val="B9D7E6"/>
+            </a:solidFill>
+            <a:prstDash val="solid"/>
+          </a:ln>
+        </p:spPr>
+      </p:sp>
+      <p:sp>
+        <p:nvSpPr>
+          <p:cNvPr id="15" name="Text 13"/>
+          <p:cNvSpPr/>
+          <p:nvPr/>
+        </p:nvSpPr>
+        <p:spPr>
+          <a:xfrm>
+            <a:off x="8074152" y="3666744"/>
+            <a:ext cx="2825496" cy="201168"/>
+          </a:xfrm>
+          <a:prstGeom prst="rect">
+            <a:avLst/>
+          </a:prstGeom>
+          <a:noFill/>
+          <a:ln/>
+        </p:spPr>
+        <p:txBody>
+          <a:bodyPr wrap="square" lIns="0" tIns="0" rIns="0" bIns="0" rtlCol="0" anchor="ctr"/>
+          <a:lstStyle/>
+          <a:p>
+            <a:pPr indent="0" marL="0">
+              <a:buNone/>
+            </a:pPr>
+            <a:r>
+              <a:rPr lang="en-US" sz="950" b="1" dirty="0">
+                <a:solidFill>
+                  <a:srgbClr val="0068B7"/>
+                </a:solidFill>
+                <a:latin typeface="Aptos" pitchFamily="34" charset="0"/>
+                <a:ea typeface="Aptos" pitchFamily="34" charset="-122"/>
+                <a:cs typeface="Aptos" pitchFamily="34" charset="-120"/>
+              </a:rPr>
+              <a:t>Use this for</a:t>
+            </a:r>
+            <a:endParaRPr lang="en-US" sz="950" dirty="0"/>
+          </a:p>
+        </p:txBody>
+      </p:sp>
+      <p:sp>
+        <p:nvSpPr>
+          <p:cNvPr id="16" name="Text 14"/>
+          <p:cNvSpPr/>
+          <p:nvPr/>
+        </p:nvSpPr>
+        <p:spPr>
+          <a:xfrm>
+            <a:off x="8074152" y="3959352"/>
+            <a:ext cx="2825496" cy="1170432"/>
+          </a:xfrm>
+          <a:prstGeom prst="rect">
+            <a:avLst/>
+          </a:prstGeom>
+          <a:noFill/>
+          <a:ln/>
+        </p:spPr>
+        <p:txBody>
+          <a:bodyPr wrap="square" lIns="0" tIns="0" rIns="0" bIns="0" rtlCol="0" anchor="t">
+            <a:normAutofit/>
+          </a:bodyPr>
+          <a:lstStyle/>
+          <a:p>
+            <a:pPr indent="0" marL="0">
+              <a:buNone/>
+            </a:pPr>
+            <a:r>
+              <a:rPr lang="en-US" sz="1250" dirty="0">
                 <a:solidFill>
                   <a:srgbClr val="17364A"/>
                 </a:solidFill>
@@ -4430,37 +6800,9 @@
                 <a:ea typeface="Aptos" pitchFamily="34" charset="-122"/>
                 <a:cs typeface="Aptos" pitchFamily="34" charset="-120"/>
               </a:rPr>
-              <a:t>3. When should an AI use case be escalated for leadership or governance review?</a:t>
-            </a:r>
-            <a:endParaRPr lang="en-US" sz="1450" dirty="0"/>
-          </a:p>
-          <a:p>
-            <a:r>
-              <a:rPr lang="en-US" sz="1450" dirty="0">
-                <a:solidFill>
-                  <a:srgbClr val="17364A"/>
-                </a:solidFill>
-                <a:latin typeface="Aptos" pitchFamily="34" charset="0"/>
-                <a:ea typeface="Aptos" pitchFamily="34" charset="-122"/>
-                <a:cs typeface="Aptos" pitchFamily="34" charset="-120"/>
-              </a:rPr>
-              <a:t>4. What is weak evidence of completion for a leadership and governance module?</a:t>
-            </a:r>
-            <a:endParaRPr lang="en-US" sz="1450" dirty="0"/>
-          </a:p>
-          <a:p>
-            <a:r>
-              <a:rPr lang="en-US" sz="1450" dirty="0">
-                <a:solidFill>
-                  <a:srgbClr val="17364A"/>
-                </a:solidFill>
-                <a:latin typeface="Aptos" pitchFamily="34" charset="0"/>
-                <a:ea typeface="Aptos" pitchFamily="34" charset="-122"/>
-                <a:cs typeface="Aptos" pitchFamily="34" charset="-120"/>
-              </a:rPr>
-              <a:t>5. What should leaders do when an AI use case has meaningful benefits but unresolved risks?</a:t>
-            </a:r>
-            <a:endParaRPr lang="en-US" sz="1450" dirty="0"/>
+              <a:t>Connect the concept to public health decisions, safeguards, documentation, or implementation work.</a:t>
+            </a:r>
+            <a:endParaRPr lang="en-US" sz="1250" dirty="0"/>
           </a:p>
         </p:txBody>
       </p:sp>
@@ -4523,7 +6865,32 @@
       </p:sp>
       <p:sp>
         <p:nvSpPr>
-          <p:cNvPr id="3" name="Text 1"/>
+          <p:cNvPr id="3" name="Shape 1"/>
+          <p:cNvSpPr/>
+          <p:nvPr/>
+        </p:nvSpPr>
+        <p:spPr>
+          <a:xfrm>
+            <a:off x="0" y="164592"/>
+            <a:ext cx="146304" cy="6693408"/>
+          </a:xfrm>
+          <a:prstGeom prst="rect">
+            <a:avLst/>
+          </a:prstGeom>
+          <a:solidFill>
+            <a:srgbClr val="2F8A28"/>
+          </a:solidFill>
+          <a:ln w="12700">
+            <a:solidFill>
+              <a:srgbClr val="2F8A28"/>
+            </a:solidFill>
+            <a:prstDash val="solid"/>
+          </a:ln>
+        </p:spPr>
+      </p:sp>
+      <p:sp>
+        <p:nvSpPr>
+          <p:cNvPr id="4" name="Text 2"/>
           <p:cNvSpPr/>
           <p:nvPr/>
         </p:nvSpPr>
@@ -4562,7 +6929,7 @@
       </p:sp>
       <p:sp>
         <p:nvSpPr>
-          <p:cNvPr id="4" name="Text 2"/>
+          <p:cNvPr id="5" name="Text 3"/>
           <p:cNvSpPr/>
           <p:nvPr/>
         </p:nvSpPr>
@@ -4601,7 +6968,7 @@
       </p:sp>
       <p:sp>
         <p:nvSpPr>
-          <p:cNvPr id="5" name="Text 3"/>
+          <p:cNvPr id="6" name="Text 4"/>
           <p:cNvSpPr/>
           <p:nvPr/>
         </p:nvSpPr>
@@ -4640,13 +7007,77 @@
       </p:sp>
       <p:sp>
         <p:nvSpPr>
-          <p:cNvPr id="6" name="Text 4"/>
+          <p:cNvPr id="7" name="Shape 5"/>
           <p:cNvSpPr/>
           <p:nvPr/>
         </p:nvSpPr>
         <p:spPr>
           <a:xfrm>
             <a:off x="640080" y="658368"/>
+            <a:ext cx="420624" cy="420624"/>
+          </a:xfrm>
+          <a:prstGeom prst="ellipse">
+            <a:avLst/>
+          </a:prstGeom>
+          <a:solidFill>
+            <a:srgbClr val="0068B7"/>
+          </a:solidFill>
+          <a:ln w="12700">
+            <a:solidFill>
+              <a:srgbClr val="0068B7"/>
+            </a:solidFill>
+            <a:prstDash val="solid"/>
+          </a:ln>
+        </p:spPr>
+      </p:sp>
+      <p:sp>
+        <p:nvSpPr>
+          <p:cNvPr id="8" name="Text 6"/>
+          <p:cNvSpPr/>
+          <p:nvPr/>
+        </p:nvSpPr>
+        <p:spPr>
+          <a:xfrm>
+            <a:off x="640080" y="731520"/>
+            <a:ext cx="420624" cy="164592"/>
+          </a:xfrm>
+          <a:prstGeom prst="rect">
+            <a:avLst/>
+          </a:prstGeom>
+          <a:noFill/>
+          <a:ln/>
+        </p:spPr>
+        <p:txBody>
+          <a:bodyPr wrap="square" lIns="0" tIns="0" rIns="0" bIns="0" rtlCol="0" anchor="ctr"/>
+          <a:lstStyle/>
+          <a:p>
+            <a:pPr algn="ctr" indent="0" marL="0">
+              <a:buNone/>
+            </a:pPr>
+            <a:r>
+              <a:rPr lang="en-US" sz="1100" b="1" dirty="0">
+                <a:solidFill>
+                  <a:srgbClr val="FFFFFF"/>
+                </a:solidFill>
+                <a:latin typeface="Aptos" pitchFamily="34" charset="0"/>
+                <a:ea typeface="Aptos" pitchFamily="34" charset="-122"/>
+                <a:cs typeface="Aptos" pitchFamily="34" charset="-120"/>
+              </a:rPr>
+              <a:t>12</a:t>
+            </a:r>
+            <a:endParaRPr lang="en-US" sz="1100" dirty="0"/>
+          </a:p>
+        </p:txBody>
+      </p:sp>
+      <p:sp>
+        <p:nvSpPr>
+          <p:cNvPr id="9" name="Text 7"/>
+          <p:cNvSpPr/>
+          <p:nvPr/>
+        </p:nvSpPr>
+        <p:spPr>
+          <a:xfrm>
+            <a:off x="640080" y="621792"/>
             <a:ext cx="10881360" cy="566928"/>
           </a:xfrm>
           <a:prstGeom prst="rect">
@@ -4673,7 +7104,7 @@
                 <a:ea typeface="Aptos Display" pitchFamily="34" charset="-122"/>
                 <a:cs typeface="Aptos Display" pitchFamily="34" charset="-120"/>
               </a:rPr>
-              <a:t>References and Resources</a:t>
+              <a:t>Expected Assignment</a:t>
             </a:r>
             <a:endParaRPr lang="en-US" sz="2700" dirty="0"/>
           </a:p>
@@ -4681,14 +7112,14 @@
       </p:sp>
       <p:sp>
         <p:nvSpPr>
-          <p:cNvPr id="7" name="Text 5"/>
-          <p:cNvSpPr/>
-          <p:nvPr/>
-        </p:nvSpPr>
-        <p:spPr>
-          <a:xfrm>
-            <a:off x="822960" y="1325880"/>
-            <a:ext cx="10378440" cy="4800600"/>
+          <p:cNvPr id="10" name="Text 8"/>
+          <p:cNvSpPr/>
+          <p:nvPr/>
+        </p:nvSpPr>
+        <p:spPr>
+          <a:xfrm>
+            <a:off x="868680" y="1417320"/>
+            <a:ext cx="6675120" cy="4434840"/>
           </a:xfrm>
           <a:prstGeom prst="rect">
             <a:avLst/>
@@ -4703,7 +7134,7 @@
           <a:lstStyle/>
           <a:p>
             <a:r>
-              <a:rPr lang="en-US" sz="1450" dirty="0">
+              <a:rPr lang="en-US" sz="1700" dirty="0">
                 <a:solidFill>
                   <a:srgbClr val="17364A"/>
                 </a:solidFill>
@@ -4711,13 +7142,106 @@
                 <a:ea typeface="Aptos" pitchFamily="34" charset="-122"/>
                 <a:cs typeface="Aptos" pitchFamily="34" charset="-120"/>
               </a:rPr>
-              <a:t>NIST Artificial Intelligence Risk Management Framework (AI RMF 1.0): https://www.nist.gov/itl/ai-risk-management-framework</a:t>
-            </a:r>
-            <a:endParaRPr lang="en-US" sz="1450" dirty="0"/>
-          </a:p>
-          <a:p>
-            <a:r>
-              <a:rPr lang="en-US" sz="1450" dirty="0">
+              <a:t>AI adoption plan; stakeholder map; communication plan; training plan; feedback and adoption monitoring plan.</a:t>
+            </a:r>
+            <a:endParaRPr lang="en-US" sz="1700" dirty="0"/>
+          </a:p>
+        </p:txBody>
+      </p:sp>
+      <p:sp>
+        <p:nvSpPr>
+          <p:cNvPr id="11" name="Shape 9"/>
+          <p:cNvSpPr/>
+          <p:nvPr/>
+        </p:nvSpPr>
+        <p:spPr>
+          <a:xfrm>
+            <a:off x="7909560" y="1417320"/>
+            <a:ext cx="3154680" cy="1828800"/>
+          </a:xfrm>
+          <a:prstGeom prst="roundRect">
+            <a:avLst>
+              <a:gd name="adj" fmla="val 6000"/>
+            </a:avLst>
+          </a:prstGeom>
+          <a:solidFill>
+            <a:srgbClr val="EEF8ED"/>
+          </a:solidFill>
+          <a:ln w="12700">
+            <a:solidFill>
+              <a:srgbClr val="B9D7E6"/>
+            </a:solidFill>
+            <a:prstDash val="solid"/>
+          </a:ln>
+        </p:spPr>
+      </p:sp>
+      <p:sp>
+        <p:nvSpPr>
+          <p:cNvPr id="12" name="Text 10"/>
+          <p:cNvSpPr/>
+          <p:nvPr/>
+        </p:nvSpPr>
+        <p:spPr>
+          <a:xfrm>
+            <a:off x="8074152" y="1563624"/>
+            <a:ext cx="2825496" cy="201168"/>
+          </a:xfrm>
+          <a:prstGeom prst="rect">
+            <a:avLst/>
+          </a:prstGeom>
+          <a:noFill/>
+          <a:ln/>
+        </p:spPr>
+        <p:txBody>
+          <a:bodyPr wrap="square" lIns="0" tIns="0" rIns="0" bIns="0" rtlCol="0" anchor="ctr"/>
+          <a:lstStyle/>
+          <a:p>
+            <a:pPr indent="0" marL="0">
+              <a:buNone/>
+            </a:pPr>
+            <a:r>
+              <a:rPr lang="en-US" sz="950" b="1" dirty="0">
+                <a:solidFill>
+                  <a:srgbClr val="0068B7"/>
+                </a:solidFill>
+                <a:latin typeface="Aptos" pitchFamily="34" charset="0"/>
+                <a:ea typeface="Aptos" pitchFamily="34" charset="-122"/>
+                <a:cs typeface="Aptos" pitchFamily="34" charset="-120"/>
+              </a:rPr>
+              <a:t>Key idea</a:t>
+            </a:r>
+            <a:endParaRPr lang="en-US" sz="950" dirty="0"/>
+          </a:p>
+        </p:txBody>
+      </p:sp>
+      <p:sp>
+        <p:nvSpPr>
+          <p:cNvPr id="13" name="Text 11"/>
+          <p:cNvSpPr/>
+          <p:nvPr/>
+        </p:nvSpPr>
+        <p:spPr>
+          <a:xfrm>
+            <a:off x="8074152" y="1856232"/>
+            <a:ext cx="2825496" cy="1261872"/>
+          </a:xfrm>
+          <a:prstGeom prst="rect">
+            <a:avLst/>
+          </a:prstGeom>
+          <a:noFill/>
+          <a:ln/>
+        </p:spPr>
+        <p:txBody>
+          <a:bodyPr wrap="square" lIns="0" tIns="0" rIns="0" bIns="0" rtlCol="0" anchor="t">
+            <a:normAutofit/>
+          </a:bodyPr>
+          <a:lstStyle/>
+          <a:p>
+            <a:pPr indent="0" marL="0">
+              <a:buNone/>
+            </a:pPr>
+            <a:r>
+              <a:rPr lang="en-US" sz="1250" dirty="0">
                 <a:solidFill>
                   <a:srgbClr val="17364A"/>
                 </a:solidFill>
@@ -4725,13 +7249,106 @@
                 <a:ea typeface="Aptos" pitchFamily="34" charset="-122"/>
                 <a:cs typeface="Aptos" pitchFamily="34" charset="-120"/>
               </a:rPr>
-              <a:t>NIST Generative AI Profile: https://www.nist.gov/publications/artificial-intelligence-risk-management-framework-generative-artificial-intelligence</a:t>
-            </a:r>
-            <a:endParaRPr lang="en-US" sz="1450" dirty="0"/>
-          </a:p>
-          <a:p>
-            <a:r>
-              <a:rPr lang="en-US" sz="1450" dirty="0">
+              <a:t>AI adoption plan; stakeholder map; communication plan; training plan; feedback and adoption monitoring plan.</a:t>
+            </a:r>
+            <a:endParaRPr lang="en-US" sz="1250" dirty="0"/>
+          </a:p>
+        </p:txBody>
+      </p:sp>
+      <p:sp>
+        <p:nvSpPr>
+          <p:cNvPr id="14" name="Shape 12"/>
+          <p:cNvSpPr/>
+          <p:nvPr/>
+        </p:nvSpPr>
+        <p:spPr>
+          <a:xfrm>
+            <a:off x="7909560" y="3520440"/>
+            <a:ext cx="3154680" cy="1737360"/>
+          </a:xfrm>
+          <a:prstGeom prst="roundRect">
+            <a:avLst>
+              <a:gd name="adj" fmla="val 6316"/>
+            </a:avLst>
+          </a:prstGeom>
+          <a:solidFill>
+            <a:srgbClr val="EAF6F8"/>
+          </a:solidFill>
+          <a:ln w="12700">
+            <a:solidFill>
+              <a:srgbClr val="B9D7E6"/>
+            </a:solidFill>
+            <a:prstDash val="solid"/>
+          </a:ln>
+        </p:spPr>
+      </p:sp>
+      <p:sp>
+        <p:nvSpPr>
+          <p:cNvPr id="15" name="Text 13"/>
+          <p:cNvSpPr/>
+          <p:nvPr/>
+        </p:nvSpPr>
+        <p:spPr>
+          <a:xfrm>
+            <a:off x="8074152" y="3666744"/>
+            <a:ext cx="2825496" cy="201168"/>
+          </a:xfrm>
+          <a:prstGeom prst="rect">
+            <a:avLst/>
+          </a:prstGeom>
+          <a:noFill/>
+          <a:ln/>
+        </p:spPr>
+        <p:txBody>
+          <a:bodyPr wrap="square" lIns="0" tIns="0" rIns="0" bIns="0" rtlCol="0" anchor="ctr"/>
+          <a:lstStyle/>
+          <a:p>
+            <a:pPr indent="0" marL="0">
+              <a:buNone/>
+            </a:pPr>
+            <a:r>
+              <a:rPr lang="en-US" sz="950" b="1" dirty="0">
+                <a:solidFill>
+                  <a:srgbClr val="0068B7"/>
+                </a:solidFill>
+                <a:latin typeface="Aptos" pitchFamily="34" charset="0"/>
+                <a:ea typeface="Aptos" pitchFamily="34" charset="-122"/>
+                <a:cs typeface="Aptos" pitchFamily="34" charset="-120"/>
+              </a:rPr>
+              <a:t>Use this for</a:t>
+            </a:r>
+            <a:endParaRPr lang="en-US" sz="950" dirty="0"/>
+          </a:p>
+        </p:txBody>
+      </p:sp>
+      <p:sp>
+        <p:nvSpPr>
+          <p:cNvPr id="16" name="Text 14"/>
+          <p:cNvSpPr/>
+          <p:nvPr/>
+        </p:nvSpPr>
+        <p:spPr>
+          <a:xfrm>
+            <a:off x="8074152" y="3959352"/>
+            <a:ext cx="2825496" cy="1170432"/>
+          </a:xfrm>
+          <a:prstGeom prst="rect">
+            <a:avLst/>
+          </a:prstGeom>
+          <a:noFill/>
+          <a:ln/>
+        </p:spPr>
+        <p:txBody>
+          <a:bodyPr wrap="square" lIns="0" tIns="0" rIns="0" bIns="0" rtlCol="0" anchor="t">
+            <a:normAutofit/>
+          </a:bodyPr>
+          <a:lstStyle/>
+          <a:p>
+            <a:pPr indent="0" marL="0">
+              <a:buNone/>
+            </a:pPr>
+            <a:r>
+              <a:rPr lang="en-US" sz="1250" dirty="0">
                 <a:solidFill>
                   <a:srgbClr val="17364A"/>
                 </a:solidFill>
@@ -4739,37 +7356,9 @@
                 <a:ea typeface="Aptos" pitchFamily="34" charset="-122"/>
                 <a:cs typeface="Aptos" pitchFamily="34" charset="-120"/>
               </a:rPr>
-              <a:t>NIST Privacy Framework</a:t>
-            </a:r>
-            <a:endParaRPr lang="en-US" sz="1450" dirty="0"/>
-          </a:p>
-          <a:p>
-            <a:r>
-              <a:rPr lang="en-US" sz="1450" dirty="0">
-                <a:solidFill>
-                  <a:srgbClr val="17364A"/>
-                </a:solidFill>
-                <a:latin typeface="Aptos" pitchFamily="34" charset="0"/>
-                <a:ea typeface="Aptos" pitchFamily="34" charset="-122"/>
-                <a:cs typeface="Aptos" pitchFamily="34" charset="-120"/>
-              </a:rPr>
-              <a:t>CDC Public Health Data Strategy and Data Modernization resources: https://www.cdc.gov/public-health-data-strategy/php/about/index.html</a:t>
-            </a:r>
-            <a:endParaRPr lang="en-US" sz="1450" dirty="0"/>
-          </a:p>
-          <a:p>
-            <a:r>
-              <a:rPr lang="en-US" sz="1450" dirty="0">
-                <a:solidFill>
-                  <a:srgbClr val="17364A"/>
-                </a:solidFill>
-                <a:latin typeface="Aptos" pitchFamily="34" charset="0"/>
-                <a:ea typeface="Aptos" pitchFamily="34" charset="-122"/>
-                <a:cs typeface="Aptos" pitchFamily="34" charset="-120"/>
-              </a:rPr>
-              <a:t>WHO Ethics and Governance of Artificial Intelligence for Health: https://www.who.int/publications/i/item/9789240029200</a:t>
-            </a:r>
-            <a:endParaRPr lang="en-US" sz="1450" dirty="0"/>
+              <a:t>Connect the concept to public health decisions, safeguards, documentation, or implementation work.</a:t>
+            </a:r>
+            <a:endParaRPr lang="en-US" sz="1250" dirty="0"/>
           </a:p>
         </p:txBody>
       </p:sp>
@@ -4832,7 +7421,32 @@
       </p:sp>
       <p:sp>
         <p:nvSpPr>
-          <p:cNvPr id="3" name="Text 1"/>
+          <p:cNvPr id="3" name="Shape 1"/>
+          <p:cNvSpPr/>
+          <p:nvPr/>
+        </p:nvSpPr>
+        <p:spPr>
+          <a:xfrm>
+            <a:off x="0" y="164592"/>
+            <a:ext cx="146304" cy="6693408"/>
+          </a:xfrm>
+          <a:prstGeom prst="rect">
+            <a:avLst/>
+          </a:prstGeom>
+          <a:solidFill>
+            <a:srgbClr val="2F8A28"/>
+          </a:solidFill>
+          <a:ln w="12700">
+            <a:solidFill>
+              <a:srgbClr val="2F8A28"/>
+            </a:solidFill>
+            <a:prstDash val="solid"/>
+          </a:ln>
+        </p:spPr>
+      </p:sp>
+      <p:sp>
+        <p:nvSpPr>
+          <p:cNvPr id="4" name="Text 2"/>
           <p:cNvSpPr/>
           <p:nvPr/>
         </p:nvSpPr>
@@ -4871,7 +7485,7 @@
       </p:sp>
       <p:sp>
         <p:nvSpPr>
-          <p:cNvPr id="4" name="Text 2"/>
+          <p:cNvPr id="5" name="Text 3"/>
           <p:cNvSpPr/>
           <p:nvPr/>
         </p:nvSpPr>
@@ -4910,7 +7524,7 @@
       </p:sp>
       <p:sp>
         <p:nvSpPr>
-          <p:cNvPr id="5" name="Text 3"/>
+          <p:cNvPr id="6" name="Text 4"/>
           <p:cNvSpPr/>
           <p:nvPr/>
         </p:nvSpPr>
@@ -4949,13 +7563,77 @@
       </p:sp>
       <p:sp>
         <p:nvSpPr>
-          <p:cNvPr id="6" name="Text 4"/>
+          <p:cNvPr id="7" name="Shape 5"/>
           <p:cNvSpPr/>
           <p:nvPr/>
         </p:nvSpPr>
         <p:spPr>
           <a:xfrm>
             <a:off x="640080" y="658368"/>
+            <a:ext cx="420624" cy="420624"/>
+          </a:xfrm>
+          <a:prstGeom prst="ellipse">
+            <a:avLst/>
+          </a:prstGeom>
+          <a:solidFill>
+            <a:srgbClr val="0068B7"/>
+          </a:solidFill>
+          <a:ln w="12700">
+            <a:solidFill>
+              <a:srgbClr val="0068B7"/>
+            </a:solidFill>
+            <a:prstDash val="solid"/>
+          </a:ln>
+        </p:spPr>
+      </p:sp>
+      <p:sp>
+        <p:nvSpPr>
+          <p:cNvPr id="8" name="Text 6"/>
+          <p:cNvSpPr/>
+          <p:nvPr/>
+        </p:nvSpPr>
+        <p:spPr>
+          <a:xfrm>
+            <a:off x="640080" y="731520"/>
+            <a:ext cx="420624" cy="164592"/>
+          </a:xfrm>
+          <a:prstGeom prst="rect">
+            <a:avLst/>
+          </a:prstGeom>
+          <a:noFill/>
+          <a:ln/>
+        </p:spPr>
+        <p:txBody>
+          <a:bodyPr wrap="square" lIns="0" tIns="0" rIns="0" bIns="0" rtlCol="0" anchor="ctr"/>
+          <a:lstStyle/>
+          <a:p>
+            <a:pPr algn="ctr" indent="0" marL="0">
+              <a:buNone/>
+            </a:pPr>
+            <a:r>
+              <a:rPr lang="en-US" sz="1100" b="1" dirty="0">
+                <a:solidFill>
+                  <a:srgbClr val="FFFFFF"/>
+                </a:solidFill>
+                <a:latin typeface="Aptos" pitchFamily="34" charset="0"/>
+                <a:ea typeface="Aptos" pitchFamily="34" charset="-122"/>
+                <a:cs typeface="Aptos" pitchFamily="34" charset="-120"/>
+              </a:rPr>
+              <a:t>13</a:t>
+            </a:r>
+            <a:endParaRPr lang="en-US" sz="1100" dirty="0"/>
+          </a:p>
+        </p:txBody>
+      </p:sp>
+      <p:sp>
+        <p:nvSpPr>
+          <p:cNvPr id="9" name="Text 7"/>
+          <p:cNvSpPr/>
+          <p:nvPr/>
+        </p:nvSpPr>
+        <p:spPr>
+          <a:xfrm>
+            <a:off x="640080" y="621792"/>
             <a:ext cx="10881360" cy="566928"/>
           </a:xfrm>
           <a:prstGeom prst="rect">
@@ -4982,7 +7660,7 @@
                 <a:ea typeface="Aptos Display" pitchFamily="34" charset="-122"/>
                 <a:cs typeface="Aptos Display" pitchFamily="34" charset="-120"/>
               </a:rPr>
-              <a:t>References and Resources Continued</a:t>
+              <a:t>Knowledge Check</a:t>
             </a:r>
             <a:endParaRPr lang="en-US" sz="2700" dirty="0"/>
           </a:p>
@@ -4990,14 +7668,14 @@
       </p:sp>
       <p:sp>
         <p:nvSpPr>
-          <p:cNvPr id="7" name="Text 5"/>
-          <p:cNvSpPr/>
-          <p:nvPr/>
-        </p:nvSpPr>
-        <p:spPr>
-          <a:xfrm>
-            <a:off x="822960" y="1325880"/>
-            <a:ext cx="10378440" cy="4800600"/>
+          <p:cNvPr id="10" name="Text 8"/>
+          <p:cNvSpPr/>
+          <p:nvPr/>
+        </p:nvSpPr>
+        <p:spPr>
+          <a:xfrm>
+            <a:off x="868680" y="1417320"/>
+            <a:ext cx="6675120" cy="4434840"/>
           </a:xfrm>
           <a:prstGeom prst="rect">
             <a:avLst/>
@@ -5012,7 +7690,7 @@
           <a:lstStyle/>
           <a:p>
             <a:r>
-              <a:rPr lang="en-US" sz="1450" dirty="0">
+              <a:rPr lang="en-US" sz="1700" dirty="0">
                 <a:solidFill>
                   <a:srgbClr val="17364A"/>
                 </a:solidFill>
@@ -5020,13 +7698,13 @@
                 <a:ea typeface="Aptos" pitchFamily="34" charset="-122"/>
                 <a:cs typeface="Aptos" pitchFamily="34" charset="-120"/>
               </a:rPr>
-              <a:t>OMB Memorandum M-24-10 on federal AI governance, risk management, and innovation, where relevant to public-sector governance models</a:t>
-            </a:r>
-            <a:endParaRPr lang="en-US" sz="1450" dirty="0"/>
-          </a:p>
-          <a:p>
-            <a:r>
-              <a:rPr lang="en-US" sz="1450" dirty="0">
+              <a:t>1. What is the strongest reason this module topic belongs in AI leadership and governance training?</a:t>
+            </a:r>
+            <a:endParaRPr lang="en-US" sz="1700" dirty="0"/>
+          </a:p>
+          <a:p>
+            <a:r>
+              <a:rPr lang="en-US" sz="1700" dirty="0">
                 <a:solidFill>
                   <a:srgbClr val="17364A"/>
                 </a:solidFill>
@@ -5034,9 +7712,849 @@
                 <a:ea typeface="Aptos" pitchFamily="34" charset="-122"/>
                 <a:cs typeface="Aptos" pitchFamily="34" charset="-120"/>
               </a:rPr>
-              <a:t>Agency strategic plans, procurement policies, privacy policies, cybersecurity policies, records policies, and equity plans</a:t>
-            </a:r>
-            <a:endParaRPr lang="en-US" sz="1450" dirty="0"/>
+              <a:t>2. Which practice best supports accountable public health AI governance?</a:t>
+            </a:r>
+            <a:endParaRPr lang="en-US" sz="1700" dirty="0"/>
+          </a:p>
+          <a:p>
+            <a:r>
+              <a:rPr lang="en-US" sz="1700" dirty="0">
+                <a:solidFill>
+                  <a:srgbClr val="17364A"/>
+                </a:solidFill>
+                <a:latin typeface="Aptos" pitchFamily="34" charset="0"/>
+                <a:ea typeface="Aptos" pitchFamily="34" charset="-122"/>
+                <a:cs typeface="Aptos" pitchFamily="34" charset="-120"/>
+              </a:rPr>
+              <a:t>3. When should an AI use case be escalated for leadership or governance review?</a:t>
+            </a:r>
+            <a:endParaRPr lang="en-US" sz="1700" dirty="0"/>
+          </a:p>
+          <a:p>
+            <a:r>
+              <a:rPr lang="en-US" sz="1700" dirty="0">
+                <a:solidFill>
+                  <a:srgbClr val="17364A"/>
+                </a:solidFill>
+                <a:latin typeface="Aptos" pitchFamily="34" charset="0"/>
+                <a:ea typeface="Aptos" pitchFamily="34" charset="-122"/>
+                <a:cs typeface="Aptos" pitchFamily="34" charset="-120"/>
+              </a:rPr>
+              <a:t>4. What is weak evidence of completion for a leadership and governance module?</a:t>
+            </a:r>
+            <a:endParaRPr lang="en-US" sz="1700" dirty="0"/>
+          </a:p>
+        </p:txBody>
+      </p:sp>
+      <p:sp>
+        <p:nvSpPr>
+          <p:cNvPr id="11" name="Shape 9"/>
+          <p:cNvSpPr/>
+          <p:nvPr/>
+        </p:nvSpPr>
+        <p:spPr>
+          <a:xfrm>
+            <a:off x="7909560" y="1417320"/>
+            <a:ext cx="3154680" cy="1828800"/>
+          </a:xfrm>
+          <a:prstGeom prst="roundRect">
+            <a:avLst>
+              <a:gd name="adj" fmla="val 6000"/>
+            </a:avLst>
+          </a:prstGeom>
+          <a:solidFill>
+            <a:srgbClr val="EEF8ED"/>
+          </a:solidFill>
+          <a:ln w="12700">
+            <a:solidFill>
+              <a:srgbClr val="B9D7E6"/>
+            </a:solidFill>
+            <a:prstDash val="solid"/>
+          </a:ln>
+        </p:spPr>
+      </p:sp>
+      <p:sp>
+        <p:nvSpPr>
+          <p:cNvPr id="12" name="Text 10"/>
+          <p:cNvSpPr/>
+          <p:nvPr/>
+        </p:nvSpPr>
+        <p:spPr>
+          <a:xfrm>
+            <a:off x="8074152" y="1563624"/>
+            <a:ext cx="2825496" cy="201168"/>
+          </a:xfrm>
+          <a:prstGeom prst="rect">
+            <a:avLst/>
+          </a:prstGeom>
+          <a:noFill/>
+          <a:ln/>
+        </p:spPr>
+        <p:txBody>
+          <a:bodyPr wrap="square" lIns="0" tIns="0" rIns="0" bIns="0" rtlCol="0" anchor="ctr"/>
+          <a:lstStyle/>
+          <a:p>
+            <a:pPr indent="0" marL="0">
+              <a:buNone/>
+            </a:pPr>
+            <a:r>
+              <a:rPr lang="en-US" sz="950" b="1" dirty="0">
+                <a:solidFill>
+                  <a:srgbClr val="0068B7"/>
+                </a:solidFill>
+                <a:latin typeface="Aptos" pitchFamily="34" charset="0"/>
+                <a:ea typeface="Aptos" pitchFamily="34" charset="-122"/>
+                <a:cs typeface="Aptos" pitchFamily="34" charset="-120"/>
+              </a:rPr>
+              <a:t>Key idea</a:t>
+            </a:r>
+            <a:endParaRPr lang="en-US" sz="950" dirty="0"/>
+          </a:p>
+        </p:txBody>
+      </p:sp>
+      <p:sp>
+        <p:nvSpPr>
+          <p:cNvPr id="13" name="Text 11"/>
+          <p:cNvSpPr/>
+          <p:nvPr/>
+        </p:nvSpPr>
+        <p:spPr>
+          <a:xfrm>
+            <a:off x="8074152" y="1856232"/>
+            <a:ext cx="2825496" cy="1261872"/>
+          </a:xfrm>
+          <a:prstGeom prst="rect">
+            <a:avLst/>
+          </a:prstGeom>
+          <a:noFill/>
+          <a:ln/>
+        </p:spPr>
+        <p:txBody>
+          <a:bodyPr wrap="square" lIns="0" tIns="0" rIns="0" bIns="0" rtlCol="0" anchor="t">
+            <a:normAutofit/>
+          </a:bodyPr>
+          <a:lstStyle/>
+          <a:p>
+            <a:pPr indent="0" marL="0">
+              <a:buNone/>
+            </a:pPr>
+            <a:r>
+              <a:rPr lang="en-US" sz="1250" dirty="0">
+                <a:solidFill>
+                  <a:srgbClr val="17364A"/>
+                </a:solidFill>
+                <a:latin typeface="Aptos" pitchFamily="34" charset="0"/>
+                <a:ea typeface="Aptos" pitchFamily="34" charset="-122"/>
+                <a:cs typeface="Aptos" pitchFamily="34" charset="-120"/>
+              </a:rPr>
+              <a:t>1. What is the strongest reason this module topic belongs in AI leadership and governance training?</a:t>
+            </a:r>
+            <a:endParaRPr lang="en-US" sz="1250" dirty="0"/>
+          </a:p>
+        </p:txBody>
+      </p:sp>
+      <p:sp>
+        <p:nvSpPr>
+          <p:cNvPr id="14" name="Shape 12"/>
+          <p:cNvSpPr/>
+          <p:nvPr/>
+        </p:nvSpPr>
+        <p:spPr>
+          <a:xfrm>
+            <a:off x="7909560" y="3520440"/>
+            <a:ext cx="3154680" cy="1737360"/>
+          </a:xfrm>
+          <a:prstGeom prst="roundRect">
+            <a:avLst>
+              <a:gd name="adj" fmla="val 6316"/>
+            </a:avLst>
+          </a:prstGeom>
+          <a:solidFill>
+            <a:srgbClr val="EAF6F8"/>
+          </a:solidFill>
+          <a:ln w="12700">
+            <a:solidFill>
+              <a:srgbClr val="B9D7E6"/>
+            </a:solidFill>
+            <a:prstDash val="solid"/>
+          </a:ln>
+        </p:spPr>
+      </p:sp>
+      <p:sp>
+        <p:nvSpPr>
+          <p:cNvPr id="15" name="Text 13"/>
+          <p:cNvSpPr/>
+          <p:nvPr/>
+        </p:nvSpPr>
+        <p:spPr>
+          <a:xfrm>
+            <a:off x="8074152" y="3666744"/>
+            <a:ext cx="2825496" cy="201168"/>
+          </a:xfrm>
+          <a:prstGeom prst="rect">
+            <a:avLst/>
+          </a:prstGeom>
+          <a:noFill/>
+          <a:ln/>
+        </p:spPr>
+        <p:txBody>
+          <a:bodyPr wrap="square" lIns="0" tIns="0" rIns="0" bIns="0" rtlCol="0" anchor="ctr"/>
+          <a:lstStyle/>
+          <a:p>
+            <a:pPr indent="0" marL="0">
+              <a:buNone/>
+            </a:pPr>
+            <a:r>
+              <a:rPr lang="en-US" sz="950" b="1" dirty="0">
+                <a:solidFill>
+                  <a:srgbClr val="0068B7"/>
+                </a:solidFill>
+                <a:latin typeface="Aptos" pitchFamily="34" charset="0"/>
+                <a:ea typeface="Aptos" pitchFamily="34" charset="-122"/>
+                <a:cs typeface="Aptos" pitchFamily="34" charset="-120"/>
+              </a:rPr>
+              <a:t>Use this for</a:t>
+            </a:r>
+            <a:endParaRPr lang="en-US" sz="950" dirty="0"/>
+          </a:p>
+        </p:txBody>
+      </p:sp>
+      <p:sp>
+        <p:nvSpPr>
+          <p:cNvPr id="16" name="Text 14"/>
+          <p:cNvSpPr/>
+          <p:nvPr/>
+        </p:nvSpPr>
+        <p:spPr>
+          <a:xfrm>
+            <a:off x="8074152" y="3959352"/>
+            <a:ext cx="2825496" cy="1170432"/>
+          </a:xfrm>
+          <a:prstGeom prst="rect">
+            <a:avLst/>
+          </a:prstGeom>
+          <a:noFill/>
+          <a:ln/>
+        </p:spPr>
+        <p:txBody>
+          <a:bodyPr wrap="square" lIns="0" tIns="0" rIns="0" bIns="0" rtlCol="0" anchor="t">
+            <a:normAutofit/>
+          </a:bodyPr>
+          <a:lstStyle/>
+          <a:p>
+            <a:pPr indent="0" marL="0">
+              <a:buNone/>
+            </a:pPr>
+            <a:r>
+              <a:rPr lang="en-US" sz="1250" dirty="0">
+                <a:solidFill>
+                  <a:srgbClr val="17364A"/>
+                </a:solidFill>
+                <a:latin typeface="Aptos" pitchFamily="34" charset="0"/>
+                <a:ea typeface="Aptos" pitchFamily="34" charset="-122"/>
+                <a:cs typeface="Aptos" pitchFamily="34" charset="-120"/>
+              </a:rPr>
+              <a:t>Connect the concept to public health decisions, safeguards, documentation, or implementation work.</a:t>
+            </a:r>
+            <a:endParaRPr lang="en-US" sz="1250" dirty="0"/>
+          </a:p>
+        </p:txBody>
+      </p:sp>
+    </p:spTree>
+  </p:cSld>
+  <p:clrMapOvr>
+    <a:masterClrMapping/>
+  </p:clrMapOvr>
+</p:sld>
+</file>
+
+<file path=ppt/slides/slide19.xml><?xml version="1.0" encoding="utf-8"?>
+<p:sld xmlns:a="http://schemas.openxmlformats.org/drawingml/2006/main" xmlns:r="http://schemas.openxmlformats.org/officeDocument/2006/relationships" xmlns:p="http://schemas.openxmlformats.org/presentationml/2006/main">
+  <p:cSld name="Slide 19">
+    <p:bg>
+      <p:bgPr>
+        <a:solidFill>
+          <a:srgbClr val="F7FBFD"/>
+        </a:solidFill>
+      </p:bgPr>
+    </p:bg>
+    <p:spTree>
+      <p:nvGrpSpPr>
+        <p:cNvPr id="1" name=""/>
+        <p:cNvGrpSpPr/>
+        <p:nvPr/>
+      </p:nvGrpSpPr>
+      <p:grpSpPr>
+        <a:xfrm>
+          <a:off x="0" y="0"/>
+          <a:ext cx="0" cy="0"/>
+          <a:chOff x="0" y="0"/>
+          <a:chExt cx="0" cy="0"/>
+        </a:xfrm>
+      </p:grpSpPr>
+      <p:sp>
+        <p:nvSpPr>
+          <p:cNvPr id="2" name="Shape 0"/>
+          <p:cNvSpPr/>
+          <p:nvPr/>
+        </p:nvSpPr>
+        <p:spPr>
+          <a:xfrm>
+            <a:off x="0" y="0"/>
+            <a:ext cx="12191695" cy="164592"/>
+          </a:xfrm>
+          <a:prstGeom prst="rect">
+            <a:avLst/>
+          </a:prstGeom>
+          <a:solidFill>
+            <a:srgbClr val="0068B7"/>
+          </a:solidFill>
+          <a:ln w="12700">
+            <a:solidFill>
+              <a:srgbClr val="0068B7"/>
+            </a:solidFill>
+            <a:prstDash val="solid"/>
+          </a:ln>
+        </p:spPr>
+      </p:sp>
+      <p:sp>
+        <p:nvSpPr>
+          <p:cNvPr id="3" name="Shape 1"/>
+          <p:cNvSpPr/>
+          <p:nvPr/>
+        </p:nvSpPr>
+        <p:spPr>
+          <a:xfrm>
+            <a:off x="0" y="164592"/>
+            <a:ext cx="146304" cy="6693408"/>
+          </a:xfrm>
+          <a:prstGeom prst="rect">
+            <a:avLst/>
+          </a:prstGeom>
+          <a:solidFill>
+            <a:srgbClr val="2F8A28"/>
+          </a:solidFill>
+          <a:ln w="12700">
+            <a:solidFill>
+              <a:srgbClr val="2F8A28"/>
+            </a:solidFill>
+            <a:prstDash val="solid"/>
+          </a:ln>
+        </p:spPr>
+      </p:sp>
+      <p:sp>
+        <p:nvSpPr>
+          <p:cNvPr id="4" name="Text 2"/>
+          <p:cNvSpPr/>
+          <p:nvPr/>
+        </p:nvSpPr>
+        <p:spPr>
+          <a:xfrm>
+            <a:off x="502920" y="292608"/>
+            <a:ext cx="10149840" cy="256032"/>
+          </a:xfrm>
+          <a:prstGeom prst="rect">
+            <a:avLst/>
+          </a:prstGeom>
+          <a:noFill/>
+          <a:ln/>
+        </p:spPr>
+        <p:txBody>
+          <a:bodyPr wrap="square" lIns="0" tIns="0" rIns="0" bIns="0" rtlCol="0" anchor="ctr"/>
+          <a:lstStyle/>
+          <a:p>
+            <a:pPr indent="0" marL="0">
+              <a:buNone/>
+            </a:pPr>
+            <a:r>
+              <a:rPr lang="en-US" sz="900" b="1" dirty="0">
+                <a:solidFill>
+                  <a:srgbClr val="5F7181"/>
+                </a:solidFill>
+                <a:latin typeface="Aptos" pitchFamily="34" charset="0"/>
+                <a:ea typeface="Aptos" pitchFamily="34" charset="-122"/>
+                <a:cs typeface="Aptos" pitchFamily="34" charset="-120"/>
+              </a:rPr>
+              <a:t>Organizational Change Management for AI Adoption</a:t>
+            </a:r>
+            <a:endParaRPr lang="en-US" sz="900" dirty="0"/>
+          </a:p>
+        </p:txBody>
+      </p:sp>
+      <p:sp>
+        <p:nvSpPr>
+          <p:cNvPr id="5" name="Text 3"/>
+          <p:cNvSpPr/>
+          <p:nvPr/>
+        </p:nvSpPr>
+        <p:spPr>
+          <a:xfrm>
+            <a:off x="502920" y="6537960"/>
+            <a:ext cx="7772400" cy="201168"/>
+          </a:xfrm>
+          <a:prstGeom prst="rect">
+            <a:avLst/>
+          </a:prstGeom>
+          <a:noFill/>
+          <a:ln/>
+        </p:spPr>
+        <p:txBody>
+          <a:bodyPr wrap="square" lIns="0" tIns="0" rIns="0" bIns="0" rtlCol="0" anchor="ctr"/>
+          <a:lstStyle/>
+          <a:p>
+            <a:pPr indent="0" marL="0">
+              <a:buNone/>
+            </a:pPr>
+            <a:r>
+              <a:rPr lang="en-US" sz="800" dirty="0">
+                <a:solidFill>
+                  <a:srgbClr val="5F7181"/>
+                </a:solidFill>
+                <a:latin typeface="Aptos" pitchFamily="34" charset="0"/>
+                <a:ea typeface="Aptos" pitchFamily="34" charset="-122"/>
+                <a:cs typeface="Aptos" pitchFamily="34" charset="-120"/>
+              </a:rPr>
+              <a:t>AI Playbook and Toolkit for Public Health Departments</a:t>
+            </a:r>
+            <a:endParaRPr lang="en-US" sz="800" dirty="0"/>
+          </a:p>
+        </p:txBody>
+      </p:sp>
+      <p:sp>
+        <p:nvSpPr>
+          <p:cNvPr id="6" name="Text 4"/>
+          <p:cNvSpPr/>
+          <p:nvPr/>
+        </p:nvSpPr>
+        <p:spPr>
+          <a:xfrm>
+            <a:off x="9966960" y="6537960"/>
+            <a:ext cx="1645920" cy="201168"/>
+          </a:xfrm>
+          <a:prstGeom prst="rect">
+            <a:avLst/>
+          </a:prstGeom>
+          <a:noFill/>
+          <a:ln/>
+        </p:spPr>
+        <p:txBody>
+          <a:bodyPr wrap="square" lIns="0" tIns="0" rIns="0" bIns="0" rtlCol="0" anchor="ctr"/>
+          <a:lstStyle/>
+          <a:p>
+            <a:pPr algn="r" indent="0" marL="0">
+              <a:buNone/>
+            </a:pPr>
+            <a:r>
+              <a:rPr lang="en-US" sz="800" dirty="0">
+                <a:solidFill>
+                  <a:srgbClr val="5F7181"/>
+                </a:solidFill>
+                <a:latin typeface="Aptos" pitchFamily="34" charset="0"/>
+                <a:ea typeface="Aptos" pitchFamily="34" charset="-122"/>
+                <a:cs typeface="Aptos" pitchFamily="34" charset="-120"/>
+              </a:rPr>
+              <a:t>© Paula Soper</a:t>
+            </a:r>
+            <a:endParaRPr lang="en-US" sz="800" dirty="0"/>
+          </a:p>
+        </p:txBody>
+      </p:sp>
+      <p:sp>
+        <p:nvSpPr>
+          <p:cNvPr id="7" name="Shape 5"/>
+          <p:cNvSpPr/>
+          <p:nvPr/>
+        </p:nvSpPr>
+        <p:spPr>
+          <a:xfrm>
+            <a:off x="640080" y="658368"/>
+            <a:ext cx="420624" cy="420624"/>
+          </a:xfrm>
+          <a:prstGeom prst="ellipse">
+            <a:avLst/>
+          </a:prstGeom>
+          <a:solidFill>
+            <a:srgbClr val="0068B7"/>
+          </a:solidFill>
+          <a:ln w="12700">
+            <a:solidFill>
+              <a:srgbClr val="0068B7"/>
+            </a:solidFill>
+            <a:prstDash val="solid"/>
+          </a:ln>
+        </p:spPr>
+      </p:sp>
+      <p:sp>
+        <p:nvSpPr>
+          <p:cNvPr id="8" name="Text 6"/>
+          <p:cNvSpPr/>
+          <p:nvPr/>
+        </p:nvSpPr>
+        <p:spPr>
+          <a:xfrm>
+            <a:off x="640080" y="731520"/>
+            <a:ext cx="420624" cy="164592"/>
+          </a:xfrm>
+          <a:prstGeom prst="rect">
+            <a:avLst/>
+          </a:prstGeom>
+          <a:noFill/>
+          <a:ln/>
+        </p:spPr>
+        <p:txBody>
+          <a:bodyPr wrap="square" lIns="0" tIns="0" rIns="0" bIns="0" rtlCol="0" anchor="ctr"/>
+          <a:lstStyle/>
+          <a:p>
+            <a:pPr algn="ctr" indent="0" marL="0">
+              <a:buNone/>
+            </a:pPr>
+            <a:r>
+              <a:rPr lang="en-US" sz="1100" b="1" dirty="0">
+                <a:solidFill>
+                  <a:srgbClr val="FFFFFF"/>
+                </a:solidFill>
+                <a:latin typeface="Aptos" pitchFamily="34" charset="0"/>
+                <a:ea typeface="Aptos" pitchFamily="34" charset="-122"/>
+                <a:cs typeface="Aptos" pitchFamily="34" charset="-120"/>
+              </a:rPr>
+              <a:t>14</a:t>
+            </a:r>
+            <a:endParaRPr lang="en-US" sz="1100" dirty="0"/>
+          </a:p>
+        </p:txBody>
+      </p:sp>
+      <p:sp>
+        <p:nvSpPr>
+          <p:cNvPr id="9" name="Text 7"/>
+          <p:cNvSpPr/>
+          <p:nvPr/>
+        </p:nvSpPr>
+        <p:spPr>
+          <a:xfrm>
+            <a:off x="640080" y="621792"/>
+            <a:ext cx="10881360" cy="566928"/>
+          </a:xfrm>
+          <a:prstGeom prst="rect">
+            <a:avLst/>
+          </a:prstGeom>
+          <a:noFill/>
+          <a:ln/>
+        </p:spPr>
+        <p:txBody>
+          <a:bodyPr wrap="square" lIns="0" tIns="0" rIns="0" bIns="0" rtlCol="0" anchor="ctr">
+            <a:normAutofit/>
+          </a:bodyPr>
+          <a:lstStyle/>
+          <a:p>
+            <a:pPr indent="0" marL="0">
+              <a:buNone/>
+            </a:pPr>
+            <a:r>
+              <a:rPr lang="en-US" sz="2700" b="1" dirty="0">
+                <a:solidFill>
+                  <a:srgbClr val="003A63"/>
+                </a:solidFill>
+                <a:latin typeface="Aptos Display" pitchFamily="34" charset="0"/>
+                <a:ea typeface="Aptos Display" pitchFamily="34" charset="-122"/>
+                <a:cs typeface="Aptos Display" pitchFamily="34" charset="-120"/>
+              </a:rPr>
+              <a:t>References and Resources</a:t>
+            </a:r>
+            <a:endParaRPr lang="en-US" sz="2700" dirty="0"/>
+          </a:p>
+        </p:txBody>
+      </p:sp>
+      <p:sp>
+        <p:nvSpPr>
+          <p:cNvPr id="10" name="Text 8"/>
+          <p:cNvSpPr/>
+          <p:nvPr/>
+        </p:nvSpPr>
+        <p:spPr>
+          <a:xfrm>
+            <a:off x="868680" y="1417320"/>
+            <a:ext cx="6675120" cy="4434840"/>
+          </a:xfrm>
+          <a:prstGeom prst="rect">
+            <a:avLst/>
+          </a:prstGeom>
+          <a:noFill/>
+          <a:ln/>
+        </p:spPr>
+        <p:txBody>
+          <a:bodyPr wrap="square" lIns="635" tIns="635" rIns="635" bIns="635" rtlCol="0" anchor="t">
+            <a:normAutofit/>
+          </a:bodyPr>
+          <a:lstStyle/>
+          <a:p>
+            <a:r>
+              <a:rPr lang="en-US" sz="1700" dirty="0">
+                <a:solidFill>
+                  <a:srgbClr val="17364A"/>
+                </a:solidFill>
+                <a:latin typeface="Aptos" pitchFamily="34" charset="0"/>
+                <a:ea typeface="Aptos" pitchFamily="34" charset="-122"/>
+                <a:cs typeface="Aptos" pitchFamily="34" charset="-120"/>
+              </a:rPr>
+              <a:t>NIST Artificial Intelligence Risk Management Framework (AI RMF 1.0): https://www.nist.gov/itl/ai-risk-management-framework</a:t>
+            </a:r>
+            <a:endParaRPr lang="en-US" sz="1700" dirty="0"/>
+          </a:p>
+          <a:p>
+            <a:r>
+              <a:rPr lang="en-US" sz="1700" dirty="0">
+                <a:solidFill>
+                  <a:srgbClr val="17364A"/>
+                </a:solidFill>
+                <a:latin typeface="Aptos" pitchFamily="34" charset="0"/>
+                <a:ea typeface="Aptos" pitchFamily="34" charset="-122"/>
+                <a:cs typeface="Aptos" pitchFamily="34" charset="-120"/>
+              </a:rPr>
+              <a:t>NIST Generative AI Profile:.</a:t>
+            </a:r>
+            <a:endParaRPr lang="en-US" sz="1700" dirty="0"/>
+          </a:p>
+          <a:p>
+            <a:r>
+              <a:rPr lang="en-US" sz="1700" dirty="0">
+                <a:solidFill>
+                  <a:srgbClr val="17364A"/>
+                </a:solidFill>
+                <a:latin typeface="Aptos" pitchFamily="34" charset="0"/>
+                <a:ea typeface="Aptos" pitchFamily="34" charset="-122"/>
+                <a:cs typeface="Aptos" pitchFamily="34" charset="-120"/>
+              </a:rPr>
+              <a:t>NIST Privacy Framework</a:t>
+            </a:r>
+            <a:endParaRPr lang="en-US" sz="1700" dirty="0"/>
+          </a:p>
+          <a:p>
+            <a:r>
+              <a:rPr lang="en-US" sz="1700" dirty="0">
+                <a:solidFill>
+                  <a:srgbClr val="17364A"/>
+                </a:solidFill>
+                <a:latin typeface="Aptos" pitchFamily="34" charset="0"/>
+                <a:ea typeface="Aptos" pitchFamily="34" charset="-122"/>
+                <a:cs typeface="Aptos" pitchFamily="34" charset="-120"/>
+              </a:rPr>
+              <a:t>CDC Public Health Data Strategy and Data Modernization resources:.</a:t>
+            </a:r>
+            <a:endParaRPr lang="en-US" sz="1700" dirty="0"/>
+          </a:p>
+        </p:txBody>
+      </p:sp>
+      <p:sp>
+        <p:nvSpPr>
+          <p:cNvPr id="11" name="Shape 9"/>
+          <p:cNvSpPr/>
+          <p:nvPr/>
+        </p:nvSpPr>
+        <p:spPr>
+          <a:xfrm>
+            <a:off x="7909560" y="1417320"/>
+            <a:ext cx="3154680" cy="1828800"/>
+          </a:xfrm>
+          <a:prstGeom prst="roundRect">
+            <a:avLst>
+              <a:gd name="adj" fmla="val 6000"/>
+            </a:avLst>
+          </a:prstGeom>
+          <a:solidFill>
+            <a:srgbClr val="EEF8ED"/>
+          </a:solidFill>
+          <a:ln w="12700">
+            <a:solidFill>
+              <a:srgbClr val="B9D7E6"/>
+            </a:solidFill>
+            <a:prstDash val="solid"/>
+          </a:ln>
+        </p:spPr>
+      </p:sp>
+      <p:sp>
+        <p:nvSpPr>
+          <p:cNvPr id="12" name="Text 10"/>
+          <p:cNvSpPr/>
+          <p:nvPr/>
+        </p:nvSpPr>
+        <p:spPr>
+          <a:xfrm>
+            <a:off x="8074152" y="1563624"/>
+            <a:ext cx="2825496" cy="201168"/>
+          </a:xfrm>
+          <a:prstGeom prst="rect">
+            <a:avLst/>
+          </a:prstGeom>
+          <a:noFill/>
+          <a:ln/>
+        </p:spPr>
+        <p:txBody>
+          <a:bodyPr wrap="square" lIns="0" tIns="0" rIns="0" bIns="0" rtlCol="0" anchor="ctr"/>
+          <a:lstStyle/>
+          <a:p>
+            <a:pPr indent="0" marL="0">
+              <a:buNone/>
+            </a:pPr>
+            <a:r>
+              <a:rPr lang="en-US" sz="950" b="1" dirty="0">
+                <a:solidFill>
+                  <a:srgbClr val="0068B7"/>
+                </a:solidFill>
+                <a:latin typeface="Aptos" pitchFamily="34" charset="0"/>
+                <a:ea typeface="Aptos" pitchFamily="34" charset="-122"/>
+                <a:cs typeface="Aptos" pitchFamily="34" charset="-120"/>
+              </a:rPr>
+              <a:t>Key idea</a:t>
+            </a:r>
+            <a:endParaRPr lang="en-US" sz="950" dirty="0"/>
+          </a:p>
+        </p:txBody>
+      </p:sp>
+      <p:sp>
+        <p:nvSpPr>
+          <p:cNvPr id="13" name="Text 11"/>
+          <p:cNvSpPr/>
+          <p:nvPr/>
+        </p:nvSpPr>
+        <p:spPr>
+          <a:xfrm>
+            <a:off x="8074152" y="1856232"/>
+            <a:ext cx="2825496" cy="1261872"/>
+          </a:xfrm>
+          <a:prstGeom prst="rect">
+            <a:avLst/>
+          </a:prstGeom>
+          <a:noFill/>
+          <a:ln/>
+        </p:spPr>
+        <p:txBody>
+          <a:bodyPr wrap="square" lIns="0" tIns="0" rIns="0" bIns="0" rtlCol="0" anchor="t">
+            <a:normAutofit/>
+          </a:bodyPr>
+          <a:lstStyle/>
+          <a:p>
+            <a:pPr indent="0" marL="0">
+              <a:buNone/>
+            </a:pPr>
+            <a:r>
+              <a:rPr lang="en-US" sz="1250" dirty="0">
+                <a:solidFill>
+                  <a:srgbClr val="17364A"/>
+                </a:solidFill>
+                <a:latin typeface="Aptos" pitchFamily="34" charset="0"/>
+                <a:ea typeface="Aptos" pitchFamily="34" charset="-122"/>
+                <a:cs typeface="Aptos" pitchFamily="34" charset="-120"/>
+              </a:rPr>
+              <a:t>NIST Artificial Intelligence Risk Management Framework (AI RMF 1.0): https://www.nist.gov/itl/ai-risk-management-framework</a:t>
+            </a:r>
+            <a:endParaRPr lang="en-US" sz="1250" dirty="0"/>
+          </a:p>
+        </p:txBody>
+      </p:sp>
+      <p:sp>
+        <p:nvSpPr>
+          <p:cNvPr id="14" name="Shape 12"/>
+          <p:cNvSpPr/>
+          <p:nvPr/>
+        </p:nvSpPr>
+        <p:spPr>
+          <a:xfrm>
+            <a:off x="7909560" y="3520440"/>
+            <a:ext cx="3154680" cy="1737360"/>
+          </a:xfrm>
+          <a:prstGeom prst="roundRect">
+            <a:avLst>
+              <a:gd name="adj" fmla="val 6316"/>
+            </a:avLst>
+          </a:prstGeom>
+          <a:solidFill>
+            <a:srgbClr val="EAF6F8"/>
+          </a:solidFill>
+          <a:ln w="12700">
+            <a:solidFill>
+              <a:srgbClr val="B9D7E6"/>
+            </a:solidFill>
+            <a:prstDash val="solid"/>
+          </a:ln>
+        </p:spPr>
+      </p:sp>
+      <p:sp>
+        <p:nvSpPr>
+          <p:cNvPr id="15" name="Text 13"/>
+          <p:cNvSpPr/>
+          <p:nvPr/>
+        </p:nvSpPr>
+        <p:spPr>
+          <a:xfrm>
+            <a:off x="8074152" y="3666744"/>
+            <a:ext cx="2825496" cy="201168"/>
+          </a:xfrm>
+          <a:prstGeom prst="rect">
+            <a:avLst/>
+          </a:prstGeom>
+          <a:noFill/>
+          <a:ln/>
+        </p:spPr>
+        <p:txBody>
+          <a:bodyPr wrap="square" lIns="0" tIns="0" rIns="0" bIns="0" rtlCol="0" anchor="ctr"/>
+          <a:lstStyle/>
+          <a:p>
+            <a:pPr indent="0" marL="0">
+              <a:buNone/>
+            </a:pPr>
+            <a:r>
+              <a:rPr lang="en-US" sz="950" b="1" dirty="0">
+                <a:solidFill>
+                  <a:srgbClr val="0068B7"/>
+                </a:solidFill>
+                <a:latin typeface="Aptos" pitchFamily="34" charset="0"/>
+                <a:ea typeface="Aptos" pitchFamily="34" charset="-122"/>
+                <a:cs typeface="Aptos" pitchFamily="34" charset="-120"/>
+              </a:rPr>
+              <a:t>Use this for</a:t>
+            </a:r>
+            <a:endParaRPr lang="en-US" sz="950" dirty="0"/>
+          </a:p>
+        </p:txBody>
+      </p:sp>
+      <p:sp>
+        <p:nvSpPr>
+          <p:cNvPr id="16" name="Text 14"/>
+          <p:cNvSpPr/>
+          <p:nvPr/>
+        </p:nvSpPr>
+        <p:spPr>
+          <a:xfrm>
+            <a:off x="8074152" y="3959352"/>
+            <a:ext cx="2825496" cy="1170432"/>
+          </a:xfrm>
+          <a:prstGeom prst="rect">
+            <a:avLst/>
+          </a:prstGeom>
+          <a:noFill/>
+          <a:ln/>
+        </p:spPr>
+        <p:txBody>
+          <a:bodyPr wrap="square" lIns="0" tIns="0" rIns="0" bIns="0" rtlCol="0" anchor="t">
+            <a:normAutofit/>
+          </a:bodyPr>
+          <a:lstStyle/>
+          <a:p>
+            <a:pPr indent="0" marL="0">
+              <a:buNone/>
+            </a:pPr>
+            <a:r>
+              <a:rPr lang="en-US" sz="1250" dirty="0">
+                <a:solidFill>
+                  <a:srgbClr val="17364A"/>
+                </a:solidFill>
+                <a:latin typeface="Aptos" pitchFamily="34" charset="0"/>
+                <a:ea typeface="Aptos" pitchFamily="34" charset="-122"/>
+                <a:cs typeface="Aptos" pitchFamily="34" charset="-120"/>
+              </a:rPr>
+              <a:t>Connect the concept to public health decisions, safeguards, documentation, or implementation work.</a:t>
+            </a:r>
+            <a:endParaRPr lang="en-US" sz="1250" dirty="0"/>
           </a:p>
         </p:txBody>
       </p:sp>
@@ -5099,7 +8617,32 @@
       </p:sp>
       <p:sp>
         <p:nvSpPr>
-          <p:cNvPr id="3" name="Text 1"/>
+          <p:cNvPr id="3" name="Shape 1"/>
+          <p:cNvSpPr/>
+          <p:nvPr/>
+        </p:nvSpPr>
+        <p:spPr>
+          <a:xfrm>
+            <a:off x="0" y="164592"/>
+            <a:ext cx="146304" cy="6693408"/>
+          </a:xfrm>
+          <a:prstGeom prst="rect">
+            <a:avLst/>
+          </a:prstGeom>
+          <a:solidFill>
+            <a:srgbClr val="2F8A28"/>
+          </a:solidFill>
+          <a:ln w="12700">
+            <a:solidFill>
+              <a:srgbClr val="2F8A28"/>
+            </a:solidFill>
+            <a:prstDash val="solid"/>
+          </a:ln>
+        </p:spPr>
+      </p:sp>
+      <p:sp>
+        <p:nvSpPr>
+          <p:cNvPr id="4" name="Text 2"/>
           <p:cNvSpPr/>
           <p:nvPr/>
         </p:nvSpPr>
@@ -5138,7 +8681,7 @@
       </p:sp>
       <p:sp>
         <p:nvSpPr>
-          <p:cNvPr id="4" name="Text 2"/>
+          <p:cNvPr id="5" name="Text 3"/>
           <p:cNvSpPr/>
           <p:nvPr/>
         </p:nvSpPr>
@@ -5177,7 +8720,7 @@
       </p:sp>
       <p:sp>
         <p:nvSpPr>
-          <p:cNvPr id="5" name="Text 3"/>
+          <p:cNvPr id="6" name="Text 4"/>
           <p:cNvSpPr/>
           <p:nvPr/>
         </p:nvSpPr>
@@ -5216,7 +8759,7 @@
       </p:sp>
       <p:sp>
         <p:nvSpPr>
-          <p:cNvPr id="6" name="Text 4"/>
+          <p:cNvPr id="7" name="Text 5"/>
           <p:cNvSpPr/>
           <p:nvPr/>
         </p:nvSpPr>
@@ -5249,7 +8792,7 @@
                 <a:ea typeface="Aptos Display" pitchFamily="34" charset="-122"/>
                 <a:cs typeface="Aptos Display" pitchFamily="34" charset="-120"/>
               </a:rPr>
-              <a:t>Module Context</a:t>
+              <a:t>What this module helps you do</a:t>
             </a:r>
             <a:endParaRPr lang="en-US" sz="2700" dirty="0"/>
           </a:p>
@@ -5257,14 +8800,14 @@
       </p:sp>
       <p:sp>
         <p:nvSpPr>
-          <p:cNvPr id="7" name="Text 5"/>
-          <p:cNvSpPr/>
-          <p:nvPr/>
-        </p:nvSpPr>
-        <p:spPr>
-          <a:xfrm>
-            <a:off x="822960" y="1325880"/>
-            <a:ext cx="10378440" cy="1371600"/>
+          <p:cNvPr id="8" name="Text 6"/>
+          <p:cNvSpPr/>
+          <p:nvPr/>
+        </p:nvSpPr>
+        <p:spPr>
+          <a:xfrm>
+            <a:off x="868680" y="1417320"/>
+            <a:ext cx="6675120" cy="3291840"/>
           </a:xfrm>
           <a:prstGeom prst="rect">
             <a:avLst/>
@@ -5279,7 +8822,7 @@
           <a:lstStyle/>
           <a:p>
             <a:r>
-              <a:rPr lang="en-US" sz="1600" dirty="0">
+              <a:rPr lang="en-US" sz="1700" dirty="0">
                 <a:solidFill>
                   <a:srgbClr val="17364A"/>
                 </a:solidFill>
@@ -5287,13 +8830,13 @@
                 <a:ea typeface="Aptos" pitchFamily="34" charset="-122"/>
                 <a:cs typeface="Aptos" pitchFamily="34" charset="-120"/>
               </a:rPr>
-              <a:t>Level: advanced/leadership</a:t>
-            </a:r>
-            <a:endParaRPr lang="en-US" sz="1600" dirty="0"/>
-          </a:p>
-          <a:p>
-            <a:r>
-              <a:rPr lang="en-US" sz="1600" dirty="0">
+              <a:t>AI adoption changes how people work, make decisions, document actions, communicate with partners, and understand their roles.</a:t>
+            </a:r>
+            <a:endParaRPr lang="en-US" sz="1700" dirty="0"/>
+          </a:p>
+          <a:p>
+            <a:r>
+              <a:rPr lang="en-US" sz="1700" dirty="0">
                 <a:solidFill>
                   <a:srgbClr val="17364A"/>
                 </a:solidFill>
@@ -5301,13 +8844,13 @@
                 <a:ea typeface="Aptos" pitchFamily="34" charset="-122"/>
                 <a:cs typeface="Aptos" pitchFamily="34" charset="-120"/>
               </a:rPr>
-              <a:t>Primary track: Public Health Executive Leadership Track</a:t>
-            </a:r>
-            <a:endParaRPr lang="en-US" sz="1600" dirty="0"/>
-          </a:p>
-          <a:p>
-            <a:r>
-              <a:rPr lang="en-US" sz="1600" dirty="0">
+              <a:t>Successful implementation requires change management, not just technical deployment.</a:t>
+            </a:r>
+            <a:endParaRPr lang="en-US" sz="1700" dirty="0"/>
+          </a:p>
+          <a:p>
+            <a:r>
+              <a:rPr lang="en-US" sz="1700" dirty="0">
                 <a:solidFill>
                   <a:srgbClr val="17364A"/>
                 </a:solidFill>
@@ -5315,31 +8858,111 @@
                 <a:ea typeface="Aptos" pitchFamily="34" charset="-122"/>
                 <a:cs typeface="Aptos" pitchFamily="34" charset="-120"/>
               </a:rPr>
-              <a:t>Appears in tracks: governance-security</a:t>
-            </a:r>
-            <a:endParaRPr lang="en-US" sz="1600" dirty="0"/>
-          </a:p>
-        </p:txBody>
-      </p:sp>
-      <p:sp>
-        <p:nvSpPr>
-          <p:cNvPr id="8" name="Text 6"/>
-          <p:cNvSpPr/>
-          <p:nvPr/>
-        </p:nvSpPr>
-        <p:spPr>
-          <a:xfrm>
-            <a:off x="822960" y="2743200"/>
-            <a:ext cx="10378440" cy="2834640"/>
-          </a:xfrm>
-          <a:prstGeom prst="rect">
-            <a:avLst/>
-          </a:prstGeom>
-          <a:noFill/>
-          <a:ln/>
-        </p:spPr>
-        <p:txBody>
-          <a:bodyPr wrap="square" lIns="1016" tIns="1016" rIns="1016" bIns="1016" rtlCol="0" anchor="t">
+              <a:t>Staff need to understand why a tool is being introduced, how it affects their workflow, what they are responsible for reviewing, and how concerns.</a:t>
+            </a:r>
+            <a:endParaRPr lang="en-US" sz="1700" dirty="0"/>
+          </a:p>
+          <a:p>
+            <a:r>
+              <a:rPr lang="en-US" sz="1700" dirty="0">
+                <a:solidFill>
+                  <a:srgbClr val="17364A"/>
+                </a:solidFill>
+                <a:latin typeface="Aptos" pitchFamily="34" charset="0"/>
+                <a:ea typeface="Aptos" pitchFamily="34" charset="-122"/>
+                <a:cs typeface="Aptos" pitchFamily="34" charset="-120"/>
+              </a:rPr>
+              <a:t>This module helps leaders plan the organizational side of AI adoption.</a:t>
+            </a:r>
+            <a:endParaRPr lang="en-US" sz="1700" dirty="0"/>
+          </a:p>
+        </p:txBody>
+      </p:sp>
+      <p:sp>
+        <p:nvSpPr>
+          <p:cNvPr id="9" name="Shape 7"/>
+          <p:cNvSpPr/>
+          <p:nvPr/>
+        </p:nvSpPr>
+        <p:spPr>
+          <a:xfrm>
+            <a:off x="7909560" y="1417320"/>
+            <a:ext cx="3154680" cy="1920240"/>
+          </a:xfrm>
+          <a:prstGeom prst="roundRect">
+            <a:avLst>
+              <a:gd name="adj" fmla="val 5714"/>
+            </a:avLst>
+          </a:prstGeom>
+          <a:solidFill>
+            <a:srgbClr val="EAF6F8"/>
+          </a:solidFill>
+          <a:ln w="12700">
+            <a:solidFill>
+              <a:srgbClr val="B9D7E6"/>
+            </a:solidFill>
+            <a:prstDash val="solid"/>
+          </a:ln>
+        </p:spPr>
+      </p:sp>
+      <p:sp>
+        <p:nvSpPr>
+          <p:cNvPr id="10" name="Text 8"/>
+          <p:cNvSpPr/>
+          <p:nvPr/>
+        </p:nvSpPr>
+        <p:spPr>
+          <a:xfrm>
+            <a:off x="8074152" y="1563624"/>
+            <a:ext cx="2825496" cy="201168"/>
+          </a:xfrm>
+          <a:prstGeom prst="rect">
+            <a:avLst/>
+          </a:prstGeom>
+          <a:noFill/>
+          <a:ln/>
+        </p:spPr>
+        <p:txBody>
+          <a:bodyPr wrap="square" lIns="0" tIns="0" rIns="0" bIns="0" rtlCol="0" anchor="ctr"/>
+          <a:lstStyle/>
+          <a:p>
+            <a:pPr indent="0" marL="0">
+              <a:buNone/>
+            </a:pPr>
+            <a:r>
+              <a:rPr lang="en-US" sz="950" b="1" dirty="0">
+                <a:solidFill>
+                  <a:srgbClr val="0068B7"/>
+                </a:solidFill>
+                <a:latin typeface="Aptos" pitchFamily="34" charset="0"/>
+                <a:ea typeface="Aptos" pitchFamily="34" charset="-122"/>
+                <a:cs typeface="Aptos" pitchFamily="34" charset="-120"/>
+              </a:rPr>
+              <a:t>Module details</a:t>
+            </a:r>
+            <a:endParaRPr lang="en-US" sz="950" dirty="0"/>
+          </a:p>
+        </p:txBody>
+      </p:sp>
+      <p:sp>
+        <p:nvSpPr>
+          <p:cNvPr id="11" name="Text 9"/>
+          <p:cNvSpPr/>
+          <p:nvPr/>
+        </p:nvSpPr>
+        <p:spPr>
+          <a:xfrm>
+            <a:off x="8074152" y="1856232"/>
+            <a:ext cx="2825496" cy="1353312"/>
+          </a:xfrm>
+          <a:prstGeom prst="rect">
+            <a:avLst/>
+          </a:prstGeom>
+          <a:noFill/>
+          <a:ln/>
+        </p:spPr>
+        <p:txBody>
+          <a:bodyPr wrap="square" lIns="0" tIns="0" rIns="0" bIns="0" rtlCol="0" anchor="t">
             <a:normAutofit/>
           </a:bodyPr>
           <a:lstStyle/>
@@ -5348,7 +8971,7 @@
               <a:buNone/>
             </a:pPr>
             <a:r>
-              <a:rPr lang="en-US" sz="1400" dirty="0">
+              <a:rPr lang="en-US" sz="1250" dirty="0">
                 <a:solidFill>
                   <a:srgbClr val="17364A"/>
                 </a:solidFill>
@@ -5356,9 +8979,656 @@
                 <a:ea typeface="Aptos" pitchFamily="34" charset="-122"/>
                 <a:cs typeface="Aptos" pitchFamily="34" charset="-120"/>
               </a:rPr>
-              <a:t>AI adoption changes how people work, make decisions, document actions, communicate with partners, and understand their roles. Successful implementation requires change management, not just technical deployment. Staff need to understand why a tool is being introduced, how it affects their workflow, what they are responsible for reviewing, and how concerns will be handled. This module helps leaders plan the organizational side of AI adoption. It focuses on stakeholder engagement, communication, training, workflow redesign, trust-building, feedback loops, readiness assessment, and adoption monitoring. The goal is to prevent AI from being experienced as a top-down technology mandate and instead support thoughtful integration into public health practice.</a:t>
-            </a:r>
-            <a:endParaRPr lang="en-US" sz="1400" dirty="0"/>
+              <a:t>Level: advanced/leadership</a:t>
+            </a:r>
+            <a:endParaRPr lang="en-US" sz="1250" dirty="0"/>
+          </a:p>
+          <a:p>
+            <a:pPr indent="0" marL="0">
+              <a:buNone/>
+            </a:pPr>
+            <a:r>
+              <a:rPr lang="en-US" sz="1250" dirty="0">
+                <a:solidFill>
+                  <a:srgbClr val="17364A"/>
+                </a:solidFill>
+                <a:latin typeface="Aptos" pitchFamily="34" charset="0"/>
+                <a:ea typeface="Aptos" pitchFamily="34" charset="-122"/>
+                <a:cs typeface="Aptos" pitchFamily="34" charset="-120"/>
+              </a:rPr>
+              <a:t>Primary track: Public Health Executive Leadership Track</a:t>
+            </a:r>
+            <a:endParaRPr lang="en-US" sz="1250" dirty="0"/>
+          </a:p>
+          <a:p>
+            <a:pPr indent="0" marL="0">
+              <a:buNone/>
+            </a:pPr>
+            <a:r>
+              <a:rPr lang="en-US" sz="1250" dirty="0">
+                <a:solidFill>
+                  <a:srgbClr val="17364A"/>
+                </a:solidFill>
+                <a:latin typeface="Aptos" pitchFamily="34" charset="0"/>
+                <a:ea typeface="Aptos" pitchFamily="34" charset="-122"/>
+                <a:cs typeface="Aptos" pitchFamily="34" charset="-120"/>
+              </a:rPr>
+              <a:t>Appears in tracks: governance-security</a:t>
+            </a:r>
+            <a:endParaRPr lang="en-US" sz="1250" dirty="0"/>
+          </a:p>
+        </p:txBody>
+      </p:sp>
+      <p:sp>
+        <p:nvSpPr>
+          <p:cNvPr id="12" name="Shape 10"/>
+          <p:cNvSpPr/>
+          <p:nvPr/>
+        </p:nvSpPr>
+        <p:spPr>
+          <a:xfrm>
+            <a:off x="7909560" y="3611880"/>
+            <a:ext cx="3154680" cy="1783080"/>
+          </a:xfrm>
+          <a:prstGeom prst="roundRect">
+            <a:avLst>
+              <a:gd name="adj" fmla="val 6154"/>
+            </a:avLst>
+          </a:prstGeom>
+          <a:solidFill>
+            <a:srgbClr val="EEF8ED"/>
+          </a:solidFill>
+          <a:ln w="12700">
+            <a:solidFill>
+              <a:srgbClr val="B9D7E6"/>
+            </a:solidFill>
+            <a:prstDash val="solid"/>
+          </a:ln>
+        </p:spPr>
+      </p:sp>
+      <p:sp>
+        <p:nvSpPr>
+          <p:cNvPr id="13" name="Text 11"/>
+          <p:cNvSpPr/>
+          <p:nvPr/>
+        </p:nvSpPr>
+        <p:spPr>
+          <a:xfrm>
+            <a:off x="8074152" y="3758184"/>
+            <a:ext cx="2825496" cy="201168"/>
+          </a:xfrm>
+          <a:prstGeom prst="rect">
+            <a:avLst/>
+          </a:prstGeom>
+          <a:noFill/>
+          <a:ln/>
+        </p:spPr>
+        <p:txBody>
+          <a:bodyPr wrap="square" lIns="0" tIns="0" rIns="0" bIns="0" rtlCol="0" anchor="ctr"/>
+          <a:lstStyle/>
+          <a:p>
+            <a:pPr indent="0" marL="0">
+              <a:buNone/>
+            </a:pPr>
+            <a:r>
+              <a:rPr lang="en-US" sz="950" b="1" dirty="0">
+                <a:solidFill>
+                  <a:srgbClr val="0068B7"/>
+                </a:solidFill>
+                <a:latin typeface="Aptos" pitchFamily="34" charset="0"/>
+                <a:ea typeface="Aptos" pitchFamily="34" charset="-122"/>
+                <a:cs typeface="Aptos" pitchFamily="34" charset="-120"/>
+              </a:rPr>
+              <a:t>Learning approach</a:t>
+            </a:r>
+            <a:endParaRPr lang="en-US" sz="950" dirty="0"/>
+          </a:p>
+        </p:txBody>
+      </p:sp>
+      <p:sp>
+        <p:nvSpPr>
+          <p:cNvPr id="14" name="Text 12"/>
+          <p:cNvSpPr/>
+          <p:nvPr/>
+        </p:nvSpPr>
+        <p:spPr>
+          <a:xfrm>
+            <a:off x="8074152" y="4050792"/>
+            <a:ext cx="2825496" cy="1216152"/>
+          </a:xfrm>
+          <a:prstGeom prst="rect">
+            <a:avLst/>
+          </a:prstGeom>
+          <a:noFill/>
+          <a:ln/>
+        </p:spPr>
+        <p:txBody>
+          <a:bodyPr wrap="square" lIns="0" tIns="0" rIns="0" bIns="0" rtlCol="0" anchor="t">
+            <a:normAutofit/>
+          </a:bodyPr>
+          <a:lstStyle/>
+          <a:p>
+            <a:pPr indent="0" marL="0">
+              <a:buNone/>
+            </a:pPr>
+            <a:r>
+              <a:rPr lang="en-US" sz="1250" dirty="0">
+                <a:solidFill>
+                  <a:srgbClr val="17364A"/>
+                </a:solidFill>
+                <a:latin typeface="Aptos" pitchFamily="34" charset="0"/>
+                <a:ea typeface="Aptos" pitchFamily="34" charset="-122"/>
+                <a:cs typeface="Aptos" pitchFamily="34" charset="-120"/>
+              </a:rPr>
+              <a:t>Review the core ideas, complete the practical exercise, check your understanding, and use the related plays and tools to apply the lesson.</a:t>
+            </a:r>
+            <a:endParaRPr lang="en-US" sz="1250" dirty="0"/>
+          </a:p>
+        </p:txBody>
+      </p:sp>
+    </p:spTree>
+  </p:cSld>
+  <p:clrMapOvr>
+    <a:masterClrMapping/>
+  </p:clrMapOvr>
+</p:sld>
+</file>
+
+<file path=ppt/slides/slide20.xml><?xml version="1.0" encoding="utf-8"?>
+<p:sld xmlns:a="http://schemas.openxmlformats.org/drawingml/2006/main" xmlns:r="http://schemas.openxmlformats.org/officeDocument/2006/relationships" xmlns:p="http://schemas.openxmlformats.org/presentationml/2006/main">
+  <p:cSld name="Slide 20">
+    <p:bg>
+      <p:bgPr>
+        <a:solidFill>
+          <a:srgbClr val="F7FBFD"/>
+        </a:solidFill>
+      </p:bgPr>
+    </p:bg>
+    <p:spTree>
+      <p:nvGrpSpPr>
+        <p:cNvPr id="1" name=""/>
+        <p:cNvGrpSpPr/>
+        <p:nvPr/>
+      </p:nvGrpSpPr>
+      <p:grpSpPr>
+        <a:xfrm>
+          <a:off x="0" y="0"/>
+          <a:ext cx="0" cy="0"/>
+          <a:chOff x="0" y="0"/>
+          <a:chExt cx="0" cy="0"/>
+        </a:xfrm>
+      </p:grpSpPr>
+      <p:sp>
+        <p:nvSpPr>
+          <p:cNvPr id="2" name="Shape 0"/>
+          <p:cNvSpPr/>
+          <p:nvPr/>
+        </p:nvSpPr>
+        <p:spPr>
+          <a:xfrm>
+            <a:off x="0" y="0"/>
+            <a:ext cx="12191695" cy="164592"/>
+          </a:xfrm>
+          <a:prstGeom prst="rect">
+            <a:avLst/>
+          </a:prstGeom>
+          <a:solidFill>
+            <a:srgbClr val="0068B7"/>
+          </a:solidFill>
+          <a:ln w="12700">
+            <a:solidFill>
+              <a:srgbClr val="0068B7"/>
+            </a:solidFill>
+            <a:prstDash val="solid"/>
+          </a:ln>
+        </p:spPr>
+      </p:sp>
+      <p:sp>
+        <p:nvSpPr>
+          <p:cNvPr id="3" name="Shape 1"/>
+          <p:cNvSpPr/>
+          <p:nvPr/>
+        </p:nvSpPr>
+        <p:spPr>
+          <a:xfrm>
+            <a:off x="0" y="164592"/>
+            <a:ext cx="146304" cy="6693408"/>
+          </a:xfrm>
+          <a:prstGeom prst="rect">
+            <a:avLst/>
+          </a:prstGeom>
+          <a:solidFill>
+            <a:srgbClr val="2F8A28"/>
+          </a:solidFill>
+          <a:ln w="12700">
+            <a:solidFill>
+              <a:srgbClr val="2F8A28"/>
+            </a:solidFill>
+            <a:prstDash val="solid"/>
+          </a:ln>
+        </p:spPr>
+      </p:sp>
+      <p:sp>
+        <p:nvSpPr>
+          <p:cNvPr id="4" name="Text 2"/>
+          <p:cNvSpPr/>
+          <p:nvPr/>
+        </p:nvSpPr>
+        <p:spPr>
+          <a:xfrm>
+            <a:off x="502920" y="292608"/>
+            <a:ext cx="10149840" cy="256032"/>
+          </a:xfrm>
+          <a:prstGeom prst="rect">
+            <a:avLst/>
+          </a:prstGeom>
+          <a:noFill/>
+          <a:ln/>
+        </p:spPr>
+        <p:txBody>
+          <a:bodyPr wrap="square" lIns="0" tIns="0" rIns="0" bIns="0" rtlCol="0" anchor="ctr"/>
+          <a:lstStyle/>
+          <a:p>
+            <a:pPr indent="0" marL="0">
+              <a:buNone/>
+            </a:pPr>
+            <a:r>
+              <a:rPr lang="en-US" sz="900" b="1" dirty="0">
+                <a:solidFill>
+                  <a:srgbClr val="5F7181"/>
+                </a:solidFill>
+                <a:latin typeface="Aptos" pitchFamily="34" charset="0"/>
+                <a:ea typeface="Aptos" pitchFamily="34" charset="-122"/>
+                <a:cs typeface="Aptos" pitchFamily="34" charset="-120"/>
+              </a:rPr>
+              <a:t>Organizational Change Management for AI Adoption</a:t>
+            </a:r>
+            <a:endParaRPr lang="en-US" sz="900" dirty="0"/>
+          </a:p>
+        </p:txBody>
+      </p:sp>
+      <p:sp>
+        <p:nvSpPr>
+          <p:cNvPr id="5" name="Text 3"/>
+          <p:cNvSpPr/>
+          <p:nvPr/>
+        </p:nvSpPr>
+        <p:spPr>
+          <a:xfrm>
+            <a:off x="502920" y="6537960"/>
+            <a:ext cx="7772400" cy="201168"/>
+          </a:xfrm>
+          <a:prstGeom prst="rect">
+            <a:avLst/>
+          </a:prstGeom>
+          <a:noFill/>
+          <a:ln/>
+        </p:spPr>
+        <p:txBody>
+          <a:bodyPr wrap="square" lIns="0" tIns="0" rIns="0" bIns="0" rtlCol="0" anchor="ctr"/>
+          <a:lstStyle/>
+          <a:p>
+            <a:pPr indent="0" marL="0">
+              <a:buNone/>
+            </a:pPr>
+            <a:r>
+              <a:rPr lang="en-US" sz="800" dirty="0">
+                <a:solidFill>
+                  <a:srgbClr val="5F7181"/>
+                </a:solidFill>
+                <a:latin typeface="Aptos" pitchFamily="34" charset="0"/>
+                <a:ea typeface="Aptos" pitchFamily="34" charset="-122"/>
+                <a:cs typeface="Aptos" pitchFamily="34" charset="-120"/>
+              </a:rPr>
+              <a:t>AI Playbook and Toolkit for Public Health Departments</a:t>
+            </a:r>
+            <a:endParaRPr lang="en-US" sz="800" dirty="0"/>
+          </a:p>
+        </p:txBody>
+      </p:sp>
+      <p:sp>
+        <p:nvSpPr>
+          <p:cNvPr id="6" name="Text 4"/>
+          <p:cNvSpPr/>
+          <p:nvPr/>
+        </p:nvSpPr>
+        <p:spPr>
+          <a:xfrm>
+            <a:off x="9966960" y="6537960"/>
+            <a:ext cx="1645920" cy="201168"/>
+          </a:xfrm>
+          <a:prstGeom prst="rect">
+            <a:avLst/>
+          </a:prstGeom>
+          <a:noFill/>
+          <a:ln/>
+        </p:spPr>
+        <p:txBody>
+          <a:bodyPr wrap="square" lIns="0" tIns="0" rIns="0" bIns="0" rtlCol="0" anchor="ctr"/>
+          <a:lstStyle/>
+          <a:p>
+            <a:pPr algn="r" indent="0" marL="0">
+              <a:buNone/>
+            </a:pPr>
+            <a:r>
+              <a:rPr lang="en-US" sz="800" dirty="0">
+                <a:solidFill>
+                  <a:srgbClr val="5F7181"/>
+                </a:solidFill>
+                <a:latin typeface="Aptos" pitchFamily="34" charset="0"/>
+                <a:ea typeface="Aptos" pitchFamily="34" charset="-122"/>
+                <a:cs typeface="Aptos" pitchFamily="34" charset="-120"/>
+              </a:rPr>
+              <a:t>© Paula Soper</a:t>
+            </a:r>
+            <a:endParaRPr lang="en-US" sz="800" dirty="0"/>
+          </a:p>
+        </p:txBody>
+      </p:sp>
+      <p:sp>
+        <p:nvSpPr>
+          <p:cNvPr id="7" name="Text 5"/>
+          <p:cNvSpPr/>
+          <p:nvPr/>
+        </p:nvSpPr>
+        <p:spPr>
+          <a:xfrm>
+            <a:off x="640080" y="658368"/>
+            <a:ext cx="10881360" cy="566928"/>
+          </a:xfrm>
+          <a:prstGeom prst="rect">
+            <a:avLst/>
+          </a:prstGeom>
+          <a:noFill/>
+          <a:ln/>
+        </p:spPr>
+        <p:txBody>
+          <a:bodyPr wrap="square" lIns="0" tIns="0" rIns="0" bIns="0" rtlCol="0" anchor="ctr">
+            <a:normAutofit/>
+          </a:bodyPr>
+          <a:lstStyle/>
+          <a:p>
+            <a:pPr indent="0" marL="0">
+              <a:buNone/>
+            </a:pPr>
+            <a:r>
+              <a:rPr lang="en-US" sz="2700" b="1" dirty="0">
+                <a:solidFill>
+                  <a:srgbClr val="003A63"/>
+                </a:solidFill>
+                <a:latin typeface="Aptos Display" pitchFamily="34" charset="0"/>
+                <a:ea typeface="Aptos Display" pitchFamily="34" charset="-122"/>
+                <a:cs typeface="Aptos Display" pitchFamily="34" charset="-120"/>
+              </a:rPr>
+              <a:t>References and Resources Continued</a:t>
+            </a:r>
+            <a:endParaRPr lang="en-US" sz="2700" dirty="0"/>
+          </a:p>
+        </p:txBody>
+      </p:sp>
+      <p:sp>
+        <p:nvSpPr>
+          <p:cNvPr id="8" name="Text 6"/>
+          <p:cNvSpPr/>
+          <p:nvPr/>
+        </p:nvSpPr>
+        <p:spPr>
+          <a:xfrm>
+            <a:off x="868680" y="1417320"/>
+            <a:ext cx="6675120" cy="4434840"/>
+          </a:xfrm>
+          <a:prstGeom prst="rect">
+            <a:avLst/>
+          </a:prstGeom>
+          <a:noFill/>
+          <a:ln/>
+        </p:spPr>
+        <p:txBody>
+          <a:bodyPr wrap="square" lIns="635" tIns="635" rIns="635" bIns="635" rtlCol="0" anchor="t">
+            <a:normAutofit/>
+          </a:bodyPr>
+          <a:lstStyle/>
+          <a:p>
+            <a:r>
+              <a:rPr lang="en-US" sz="1700" dirty="0">
+                <a:solidFill>
+                  <a:srgbClr val="17364A"/>
+                </a:solidFill>
+                <a:latin typeface="Aptos" pitchFamily="34" charset="0"/>
+                <a:ea typeface="Aptos" pitchFamily="34" charset="-122"/>
+                <a:cs typeface="Aptos" pitchFamily="34" charset="-120"/>
+              </a:rPr>
+              <a:t>OMB Memorandum M-24-10 on federal AI governance, risk management, and innovation, where relevant to public-sector governance.</a:t>
+            </a:r>
+            <a:endParaRPr lang="en-US" sz="1700" dirty="0"/>
+          </a:p>
+          <a:p>
+            <a:r>
+              <a:rPr lang="en-US" sz="1700" dirty="0">
+                <a:solidFill>
+                  <a:srgbClr val="17364A"/>
+                </a:solidFill>
+                <a:latin typeface="Aptos" pitchFamily="34" charset="0"/>
+                <a:ea typeface="Aptos" pitchFamily="34" charset="-122"/>
+                <a:cs typeface="Aptos" pitchFamily="34" charset="-120"/>
+              </a:rPr>
+              <a:t>Agency strategic plans, procurement policies, privacy policies, cybersecurity policies, records policies, and equity plans</a:t>
+            </a:r>
+            <a:endParaRPr lang="en-US" sz="1700" dirty="0"/>
+          </a:p>
+        </p:txBody>
+      </p:sp>
+      <p:sp>
+        <p:nvSpPr>
+          <p:cNvPr id="9" name="Shape 7"/>
+          <p:cNvSpPr/>
+          <p:nvPr/>
+        </p:nvSpPr>
+        <p:spPr>
+          <a:xfrm>
+            <a:off x="7909560" y="1417320"/>
+            <a:ext cx="3154680" cy="1828800"/>
+          </a:xfrm>
+          <a:prstGeom prst="roundRect">
+            <a:avLst>
+              <a:gd name="adj" fmla="val 6000"/>
+            </a:avLst>
+          </a:prstGeom>
+          <a:solidFill>
+            <a:srgbClr val="EEF8ED"/>
+          </a:solidFill>
+          <a:ln w="12700">
+            <a:solidFill>
+              <a:srgbClr val="B9D7E6"/>
+            </a:solidFill>
+            <a:prstDash val="solid"/>
+          </a:ln>
+        </p:spPr>
+      </p:sp>
+      <p:sp>
+        <p:nvSpPr>
+          <p:cNvPr id="10" name="Text 8"/>
+          <p:cNvSpPr/>
+          <p:nvPr/>
+        </p:nvSpPr>
+        <p:spPr>
+          <a:xfrm>
+            <a:off x="8074152" y="1563624"/>
+            <a:ext cx="2825496" cy="201168"/>
+          </a:xfrm>
+          <a:prstGeom prst="rect">
+            <a:avLst/>
+          </a:prstGeom>
+          <a:noFill/>
+          <a:ln/>
+        </p:spPr>
+        <p:txBody>
+          <a:bodyPr wrap="square" lIns="0" tIns="0" rIns="0" bIns="0" rtlCol="0" anchor="ctr"/>
+          <a:lstStyle/>
+          <a:p>
+            <a:pPr indent="0" marL="0">
+              <a:buNone/>
+            </a:pPr>
+            <a:r>
+              <a:rPr lang="en-US" sz="950" b="1" dirty="0">
+                <a:solidFill>
+                  <a:srgbClr val="0068B7"/>
+                </a:solidFill>
+                <a:latin typeface="Aptos" pitchFamily="34" charset="0"/>
+                <a:ea typeface="Aptos" pitchFamily="34" charset="-122"/>
+                <a:cs typeface="Aptos" pitchFamily="34" charset="-120"/>
+              </a:rPr>
+              <a:t>Key idea</a:t>
+            </a:r>
+            <a:endParaRPr lang="en-US" sz="950" dirty="0"/>
+          </a:p>
+        </p:txBody>
+      </p:sp>
+      <p:sp>
+        <p:nvSpPr>
+          <p:cNvPr id="11" name="Text 9"/>
+          <p:cNvSpPr/>
+          <p:nvPr/>
+        </p:nvSpPr>
+        <p:spPr>
+          <a:xfrm>
+            <a:off x="8074152" y="1856232"/>
+            <a:ext cx="2825496" cy="1261872"/>
+          </a:xfrm>
+          <a:prstGeom prst="rect">
+            <a:avLst/>
+          </a:prstGeom>
+          <a:noFill/>
+          <a:ln/>
+        </p:spPr>
+        <p:txBody>
+          <a:bodyPr wrap="square" lIns="0" tIns="0" rIns="0" bIns="0" rtlCol="0" anchor="t">
+            <a:normAutofit/>
+          </a:bodyPr>
+          <a:lstStyle/>
+          <a:p>
+            <a:pPr indent="0" marL="0">
+              <a:buNone/>
+            </a:pPr>
+            <a:r>
+              <a:rPr lang="en-US" sz="1250" dirty="0">
+                <a:solidFill>
+                  <a:srgbClr val="17364A"/>
+                </a:solidFill>
+                <a:latin typeface="Aptos" pitchFamily="34" charset="0"/>
+                <a:ea typeface="Aptos" pitchFamily="34" charset="-122"/>
+                <a:cs typeface="Aptos" pitchFamily="34" charset="-120"/>
+              </a:rPr>
+              <a:t>OMB Memorandum M-24-10 on federal AI governance, risk management, and innovation, where relevant to public-sector governance.</a:t>
+            </a:r>
+            <a:endParaRPr lang="en-US" sz="1250" dirty="0"/>
+          </a:p>
+        </p:txBody>
+      </p:sp>
+      <p:sp>
+        <p:nvSpPr>
+          <p:cNvPr id="12" name="Shape 10"/>
+          <p:cNvSpPr/>
+          <p:nvPr/>
+        </p:nvSpPr>
+        <p:spPr>
+          <a:xfrm>
+            <a:off x="7909560" y="3520440"/>
+            <a:ext cx="3154680" cy="1737360"/>
+          </a:xfrm>
+          <a:prstGeom prst="roundRect">
+            <a:avLst>
+              <a:gd name="adj" fmla="val 6316"/>
+            </a:avLst>
+          </a:prstGeom>
+          <a:solidFill>
+            <a:srgbClr val="EAF6F8"/>
+          </a:solidFill>
+          <a:ln w="12700">
+            <a:solidFill>
+              <a:srgbClr val="B9D7E6"/>
+            </a:solidFill>
+            <a:prstDash val="solid"/>
+          </a:ln>
+        </p:spPr>
+      </p:sp>
+      <p:sp>
+        <p:nvSpPr>
+          <p:cNvPr id="13" name="Text 11"/>
+          <p:cNvSpPr/>
+          <p:nvPr/>
+        </p:nvSpPr>
+        <p:spPr>
+          <a:xfrm>
+            <a:off x="8074152" y="3666744"/>
+            <a:ext cx="2825496" cy="201168"/>
+          </a:xfrm>
+          <a:prstGeom prst="rect">
+            <a:avLst/>
+          </a:prstGeom>
+          <a:noFill/>
+          <a:ln/>
+        </p:spPr>
+        <p:txBody>
+          <a:bodyPr wrap="square" lIns="0" tIns="0" rIns="0" bIns="0" rtlCol="0" anchor="ctr"/>
+          <a:lstStyle/>
+          <a:p>
+            <a:pPr indent="0" marL="0">
+              <a:buNone/>
+            </a:pPr>
+            <a:r>
+              <a:rPr lang="en-US" sz="950" b="1" dirty="0">
+                <a:solidFill>
+                  <a:srgbClr val="0068B7"/>
+                </a:solidFill>
+                <a:latin typeface="Aptos" pitchFamily="34" charset="0"/>
+                <a:ea typeface="Aptos" pitchFamily="34" charset="-122"/>
+                <a:cs typeface="Aptos" pitchFamily="34" charset="-120"/>
+              </a:rPr>
+              <a:t>Use this for</a:t>
+            </a:r>
+            <a:endParaRPr lang="en-US" sz="950" dirty="0"/>
+          </a:p>
+        </p:txBody>
+      </p:sp>
+      <p:sp>
+        <p:nvSpPr>
+          <p:cNvPr id="14" name="Text 12"/>
+          <p:cNvSpPr/>
+          <p:nvPr/>
+        </p:nvSpPr>
+        <p:spPr>
+          <a:xfrm>
+            <a:off x="8074152" y="3959352"/>
+            <a:ext cx="2825496" cy="1170432"/>
+          </a:xfrm>
+          <a:prstGeom prst="rect">
+            <a:avLst/>
+          </a:prstGeom>
+          <a:noFill/>
+          <a:ln/>
+        </p:spPr>
+        <p:txBody>
+          <a:bodyPr wrap="square" lIns="0" tIns="0" rIns="0" bIns="0" rtlCol="0" anchor="t">
+            <a:normAutofit/>
+          </a:bodyPr>
+          <a:lstStyle/>
+          <a:p>
+            <a:pPr indent="0" marL="0">
+              <a:buNone/>
+            </a:pPr>
+            <a:r>
+              <a:rPr lang="en-US" sz="1250" dirty="0">
+                <a:solidFill>
+                  <a:srgbClr val="17364A"/>
+                </a:solidFill>
+                <a:latin typeface="Aptos" pitchFamily="34" charset="0"/>
+                <a:ea typeface="Aptos" pitchFamily="34" charset="-122"/>
+                <a:cs typeface="Aptos" pitchFamily="34" charset="-120"/>
+              </a:rPr>
+              <a:t>Connect the concept to public health decisions, safeguards, documentation, or implementation work.</a:t>
+            </a:r>
+            <a:endParaRPr lang="en-US" sz="1250" dirty="0"/>
           </a:p>
         </p:txBody>
       </p:sp>
@@ -5421,7 +9691,32 @@
       </p:sp>
       <p:sp>
         <p:nvSpPr>
-          <p:cNvPr id="3" name="Text 1"/>
+          <p:cNvPr id="3" name="Shape 1"/>
+          <p:cNvSpPr/>
+          <p:nvPr/>
+        </p:nvSpPr>
+        <p:spPr>
+          <a:xfrm>
+            <a:off x="0" y="164592"/>
+            <a:ext cx="146304" cy="6693408"/>
+          </a:xfrm>
+          <a:prstGeom prst="rect">
+            <a:avLst/>
+          </a:prstGeom>
+          <a:solidFill>
+            <a:srgbClr val="2F8A28"/>
+          </a:solidFill>
+          <a:ln w="12700">
+            <a:solidFill>
+              <a:srgbClr val="2F8A28"/>
+            </a:solidFill>
+            <a:prstDash val="solid"/>
+          </a:ln>
+        </p:spPr>
+      </p:sp>
+      <p:sp>
+        <p:nvSpPr>
+          <p:cNvPr id="4" name="Text 2"/>
           <p:cNvSpPr/>
           <p:nvPr/>
         </p:nvSpPr>
@@ -5460,7 +9755,7 @@
       </p:sp>
       <p:sp>
         <p:nvSpPr>
-          <p:cNvPr id="4" name="Text 2"/>
+          <p:cNvPr id="5" name="Text 3"/>
           <p:cNvSpPr/>
           <p:nvPr/>
         </p:nvSpPr>
@@ -5499,7 +9794,7 @@
       </p:sp>
       <p:sp>
         <p:nvSpPr>
-          <p:cNvPr id="5" name="Text 3"/>
+          <p:cNvPr id="6" name="Text 4"/>
           <p:cNvSpPr/>
           <p:nvPr/>
         </p:nvSpPr>
@@ -5538,7 +9833,7 @@
       </p:sp>
       <p:sp>
         <p:nvSpPr>
-          <p:cNvPr id="6" name="Text 4"/>
+          <p:cNvPr id="7" name="Text 5"/>
           <p:cNvSpPr/>
           <p:nvPr/>
         </p:nvSpPr>
@@ -5571,7 +9866,7 @@
                 <a:ea typeface="Aptos Display" pitchFamily="34" charset="-122"/>
                 <a:cs typeface="Aptos Display" pitchFamily="34" charset="-120"/>
               </a:rPr>
-              <a:t>Learning Objectives</a:t>
+              <a:t>How this module connects to the playbook</a:t>
             </a:r>
             <a:endParaRPr lang="en-US" sz="2700" dirty="0"/>
           </a:p>
@@ -5579,14 +9874,14 @@
       </p:sp>
       <p:sp>
         <p:nvSpPr>
-          <p:cNvPr id="7" name="Text 5"/>
-          <p:cNvSpPr/>
-          <p:nvPr/>
-        </p:nvSpPr>
-        <p:spPr>
-          <a:xfrm>
-            <a:off x="822960" y="1325880"/>
-            <a:ext cx="10378440" cy="4800600"/>
+          <p:cNvPr id="8" name="Text 6"/>
+          <p:cNvSpPr/>
+          <p:nvPr/>
+        </p:nvSpPr>
+        <p:spPr>
+          <a:xfrm>
+            <a:off x="868680" y="1417320"/>
+            <a:ext cx="6903720" cy="4480560"/>
           </a:xfrm>
           <a:prstGeom prst="rect">
             <a:avLst/>
@@ -5601,7 +9896,7 @@
           <a:lstStyle/>
           <a:p>
             <a:r>
-              <a:rPr lang="en-US" sz="1450" dirty="0">
+              <a:rPr lang="en-US" sz="1540" dirty="0">
                 <a:solidFill>
                   <a:srgbClr val="17364A"/>
                 </a:solidFill>
@@ -5609,13 +9904,13 @@
                 <a:ea typeface="Aptos" pitchFamily="34" charset="-122"/>
                 <a:cs typeface="Aptos" pitchFamily="34" charset="-120"/>
               </a:rPr>
-              <a:t>Explain why AI implementation requires change management.</a:t>
-            </a:r>
-            <a:endParaRPr lang="en-US" sz="1450" dirty="0"/>
-          </a:p>
-          <a:p>
-            <a:r>
-              <a:rPr lang="en-US" sz="1450" dirty="0">
+              <a:t>Play 11: Build and Deploy AI Solutions - This lesson informs Play 11 by helping learners connect the lesson topic to build and deploy.</a:t>
+            </a:r>
+            <a:endParaRPr lang="en-US" sz="1540" dirty="0"/>
+          </a:p>
+          <a:p>
+            <a:r>
+              <a:rPr lang="en-US" sz="1540" dirty="0">
                 <a:solidFill>
                   <a:srgbClr val="17364A"/>
                 </a:solidFill>
@@ -5623,13 +9918,13 @@
                 <a:ea typeface="Aptos" pitchFamily="34" charset="-122"/>
                 <a:cs typeface="Aptos" pitchFamily="34" charset="-120"/>
               </a:rPr>
-              <a:t>Identify stakeholders affected by an AI-supported workflow.</a:t>
-            </a:r>
-            <a:endParaRPr lang="en-US" sz="1450" dirty="0"/>
-          </a:p>
-          <a:p>
-            <a:r>
-              <a:rPr lang="en-US" sz="1450" dirty="0">
+              <a:t>Play 2: Readiness Assessment - This lesson informs Play 2 by helping learners connect the lesson topic to readiness assessment work.</a:t>
+            </a:r>
+            <a:endParaRPr lang="en-US" sz="1540" dirty="0"/>
+          </a:p>
+          <a:p>
+            <a:r>
+              <a:rPr lang="en-US" sz="1540" dirty="0">
                 <a:solidFill>
                   <a:srgbClr val="17364A"/>
                 </a:solidFill>
@@ -5637,13 +9932,13 @@
                 <a:ea typeface="Aptos" pitchFamily="34" charset="-122"/>
                 <a:cs typeface="Aptos" pitchFamily="34" charset="-120"/>
               </a:rPr>
-              <a:t>Develop a change management plan that includes communication, training, workflow updates, feedback, and adoption measures.</a:t>
-            </a:r>
-            <a:endParaRPr lang="en-US" sz="1450" dirty="0"/>
-          </a:p>
-          <a:p>
-            <a:r>
-              <a:rPr lang="en-US" sz="1450" dirty="0">
+              <a:t>Play 3: Establish AI Governance - This lesson informs Play 3 by helping learners connect the lesson topic to establish ai governance.</a:t>
+            </a:r>
+            <a:endParaRPr lang="en-US" sz="1540" dirty="0"/>
+          </a:p>
+          <a:p>
+            <a:r>
+              <a:rPr lang="en-US" sz="1540" dirty="0">
                 <a:solidFill>
                   <a:srgbClr val="17364A"/>
                 </a:solidFill>
@@ -5651,13 +9946,106 @@
                 <a:ea typeface="Aptos" pitchFamily="34" charset="-122"/>
                 <a:cs typeface="Aptos" pitchFamily="34" charset="-120"/>
               </a:rPr>
-              <a:t>Recognize staff concerns related to trust, workload, deskilling, surveillance, accountability, and job impact.</a:t>
-            </a:r>
-            <a:endParaRPr lang="en-US" sz="1450" dirty="0"/>
-          </a:p>
-          <a:p>
-            <a:r>
-              <a:rPr lang="en-US" sz="1450" dirty="0">
+              <a:t>Play 1: Vision &amp; Guardrails - This lesson informs Play 1 by helping learners connect the lesson topic to vision &amp; guardrails work in.</a:t>
+            </a:r>
+            <a:endParaRPr lang="en-US" sz="1540" dirty="0"/>
+          </a:p>
+        </p:txBody>
+      </p:sp>
+      <p:sp>
+        <p:nvSpPr>
+          <p:cNvPr id="9" name="Shape 7"/>
+          <p:cNvSpPr/>
+          <p:nvPr/>
+        </p:nvSpPr>
+        <p:spPr>
+          <a:xfrm>
+            <a:off x="8046720" y="1417320"/>
+            <a:ext cx="3063240" cy="2103120"/>
+          </a:xfrm>
+          <a:prstGeom prst="roundRect">
+            <a:avLst>
+              <a:gd name="adj" fmla="val 5217"/>
+            </a:avLst>
+          </a:prstGeom>
+          <a:solidFill>
+            <a:srgbClr val="EEF8ED"/>
+          </a:solidFill>
+          <a:ln w="12700">
+            <a:solidFill>
+              <a:srgbClr val="B9D7E6"/>
+            </a:solidFill>
+            <a:prstDash val="solid"/>
+          </a:ln>
+        </p:spPr>
+      </p:sp>
+      <p:sp>
+        <p:nvSpPr>
+          <p:cNvPr id="10" name="Text 8"/>
+          <p:cNvSpPr/>
+          <p:nvPr/>
+        </p:nvSpPr>
+        <p:spPr>
+          <a:xfrm>
+            <a:off x="8211312" y="1563624"/>
+            <a:ext cx="2734056" cy="201168"/>
+          </a:xfrm>
+          <a:prstGeom prst="rect">
+            <a:avLst/>
+          </a:prstGeom>
+          <a:noFill/>
+          <a:ln/>
+        </p:spPr>
+        <p:txBody>
+          <a:bodyPr wrap="square" lIns="0" tIns="0" rIns="0" bIns="0" rtlCol="0" anchor="ctr"/>
+          <a:lstStyle/>
+          <a:p>
+            <a:pPr indent="0" marL="0">
+              <a:buNone/>
+            </a:pPr>
+            <a:r>
+              <a:rPr lang="en-US" sz="950" b="1" dirty="0">
+                <a:solidFill>
+                  <a:srgbClr val="0068B7"/>
+                </a:solidFill>
+                <a:latin typeface="Aptos" pitchFamily="34" charset="0"/>
+                <a:ea typeface="Aptos" pitchFamily="34" charset="-122"/>
+                <a:cs typeface="Aptos" pitchFamily="34" charset="-120"/>
+              </a:rPr>
+              <a:t>Apply the lesson</a:t>
+            </a:r>
+            <a:endParaRPr lang="en-US" sz="950" dirty="0"/>
+          </a:p>
+        </p:txBody>
+      </p:sp>
+      <p:sp>
+        <p:nvSpPr>
+          <p:cNvPr id="11" name="Text 9"/>
+          <p:cNvSpPr/>
+          <p:nvPr/>
+        </p:nvSpPr>
+        <p:spPr>
+          <a:xfrm>
+            <a:off x="8211312" y="1856232"/>
+            <a:ext cx="2734056" cy="1536192"/>
+          </a:xfrm>
+          <a:prstGeom prst="rect">
+            <a:avLst/>
+          </a:prstGeom>
+          <a:noFill/>
+          <a:ln/>
+        </p:spPr>
+        <p:txBody>
+          <a:bodyPr wrap="square" lIns="0" tIns="0" rIns="0" bIns="0" rtlCol="0" anchor="t">
+            <a:normAutofit/>
+          </a:bodyPr>
+          <a:lstStyle/>
+          <a:p>
+            <a:pPr indent="0" marL="0">
+              <a:buNone/>
+            </a:pPr>
+            <a:r>
+              <a:rPr lang="en-US" sz="1250" dirty="0">
                 <a:solidFill>
                   <a:srgbClr val="17364A"/>
                 </a:solidFill>
@@ -5665,9 +10053,116 @@
                 <a:ea typeface="Aptos" pitchFamily="34" charset="-122"/>
                 <a:cs typeface="Aptos" pitchFamily="34" charset="-120"/>
               </a:rPr>
-              <a:t>Produce an AI adoption and change management plan.</a:t>
-            </a:r>
-            <a:endParaRPr lang="en-US" sz="1450" dirty="0"/>
+              <a:t>Use the related plays to identify decisions, participants, timing, approvals, and documentation needed for responsible implementation.</a:t>
+            </a:r>
+            <a:endParaRPr lang="en-US" sz="1250" dirty="0"/>
+          </a:p>
+        </p:txBody>
+      </p:sp>
+      <p:sp>
+        <p:nvSpPr>
+          <p:cNvPr id="12" name="Shape 10"/>
+          <p:cNvSpPr/>
+          <p:nvPr/>
+        </p:nvSpPr>
+        <p:spPr>
+          <a:xfrm>
+            <a:off x="8046720" y="3794760"/>
+            <a:ext cx="3063240" cy="1508760"/>
+          </a:xfrm>
+          <a:prstGeom prst="roundRect">
+            <a:avLst>
+              <a:gd name="adj" fmla="val 7273"/>
+            </a:avLst>
+          </a:prstGeom>
+          <a:solidFill>
+            <a:srgbClr val="FFF4D9"/>
+          </a:solidFill>
+          <a:ln w="12700">
+            <a:solidFill>
+              <a:srgbClr val="B9D7E6"/>
+            </a:solidFill>
+            <a:prstDash val="solid"/>
+          </a:ln>
+        </p:spPr>
+      </p:sp>
+      <p:sp>
+        <p:nvSpPr>
+          <p:cNvPr id="13" name="Text 11"/>
+          <p:cNvSpPr/>
+          <p:nvPr/>
+        </p:nvSpPr>
+        <p:spPr>
+          <a:xfrm>
+            <a:off x="8211312" y="3941064"/>
+            <a:ext cx="2734056" cy="201168"/>
+          </a:xfrm>
+          <a:prstGeom prst="rect">
+            <a:avLst/>
+          </a:prstGeom>
+          <a:noFill/>
+          <a:ln/>
+        </p:spPr>
+        <p:txBody>
+          <a:bodyPr wrap="square" lIns="0" tIns="0" rIns="0" bIns="0" rtlCol="0" anchor="ctr"/>
+          <a:lstStyle/>
+          <a:p>
+            <a:pPr indent="0" marL="0">
+              <a:buNone/>
+            </a:pPr>
+            <a:r>
+              <a:rPr lang="en-US" sz="950" b="1" dirty="0">
+                <a:solidFill>
+                  <a:srgbClr val="0068B7"/>
+                </a:solidFill>
+                <a:latin typeface="Aptos" pitchFamily="34" charset="0"/>
+                <a:ea typeface="Aptos" pitchFamily="34" charset="-122"/>
+                <a:cs typeface="Aptos" pitchFamily="34" charset="-120"/>
+              </a:rPr>
+              <a:t>Keep in mind</a:t>
+            </a:r>
+            <a:endParaRPr lang="en-US" sz="950" dirty="0"/>
+          </a:p>
+        </p:txBody>
+      </p:sp>
+      <p:sp>
+        <p:nvSpPr>
+          <p:cNvPr id="14" name="Text 12"/>
+          <p:cNvSpPr/>
+          <p:nvPr/>
+        </p:nvSpPr>
+        <p:spPr>
+          <a:xfrm>
+            <a:off x="8211312" y="4233672"/>
+            <a:ext cx="2734056" cy="941832"/>
+          </a:xfrm>
+          <a:prstGeom prst="rect">
+            <a:avLst/>
+          </a:prstGeom>
+          <a:noFill/>
+          <a:ln/>
+        </p:spPr>
+        <p:txBody>
+          <a:bodyPr wrap="square" lIns="0" tIns="0" rIns="0" bIns="0" rtlCol="0" anchor="t">
+            <a:normAutofit/>
+          </a:bodyPr>
+          <a:lstStyle/>
+          <a:p>
+            <a:pPr indent="0" marL="0">
+              <a:buNone/>
+            </a:pPr>
+            <a:r>
+              <a:rPr lang="en-US" sz="1250" dirty="0">
+                <a:solidFill>
+                  <a:srgbClr val="17364A"/>
+                </a:solidFill>
+                <a:latin typeface="Aptos" pitchFamily="34" charset="0"/>
+                <a:ea typeface="Aptos" pitchFamily="34" charset="-122"/>
+                <a:cs typeface="Aptos" pitchFamily="34" charset="-120"/>
+              </a:rPr>
+              <a:t>The playbook connection helps turn training into agency work, not just individual knowledge.</a:t>
+            </a:r>
+            <a:endParaRPr lang="en-US" sz="1250" dirty="0"/>
           </a:p>
         </p:txBody>
       </p:sp>
@@ -5730,7 +10225,32 @@
       </p:sp>
       <p:sp>
         <p:nvSpPr>
-          <p:cNvPr id="3" name="Text 1"/>
+          <p:cNvPr id="3" name="Shape 1"/>
+          <p:cNvSpPr/>
+          <p:nvPr/>
+        </p:nvSpPr>
+        <p:spPr>
+          <a:xfrm>
+            <a:off x="0" y="164592"/>
+            <a:ext cx="146304" cy="6693408"/>
+          </a:xfrm>
+          <a:prstGeom prst="rect">
+            <a:avLst/>
+          </a:prstGeom>
+          <a:solidFill>
+            <a:srgbClr val="2F8A28"/>
+          </a:solidFill>
+          <a:ln w="12700">
+            <a:solidFill>
+              <a:srgbClr val="2F8A28"/>
+            </a:solidFill>
+            <a:prstDash val="solid"/>
+          </a:ln>
+        </p:spPr>
+      </p:sp>
+      <p:sp>
+        <p:nvSpPr>
+          <p:cNvPr id="4" name="Text 2"/>
           <p:cNvSpPr/>
           <p:nvPr/>
         </p:nvSpPr>
@@ -5769,7 +10289,7 @@
       </p:sp>
       <p:sp>
         <p:nvSpPr>
-          <p:cNvPr id="4" name="Text 2"/>
+          <p:cNvPr id="5" name="Text 3"/>
           <p:cNvSpPr/>
           <p:nvPr/>
         </p:nvSpPr>
@@ -5808,7 +10328,7 @@
       </p:sp>
       <p:sp>
         <p:nvSpPr>
-          <p:cNvPr id="5" name="Text 3"/>
+          <p:cNvPr id="6" name="Text 4"/>
           <p:cNvSpPr/>
           <p:nvPr/>
         </p:nvSpPr>
@@ -5847,7 +10367,7 @@
       </p:sp>
       <p:sp>
         <p:nvSpPr>
-          <p:cNvPr id="6" name="Text 4"/>
+          <p:cNvPr id="7" name="Text 5"/>
           <p:cNvSpPr/>
           <p:nvPr/>
         </p:nvSpPr>
@@ -5880,7 +10400,7 @@
                 <a:ea typeface="Aptos Display" pitchFamily="34" charset="-122"/>
                 <a:cs typeface="Aptos Display" pitchFamily="34" charset="-120"/>
               </a:rPr>
-              <a:t>Module Overview</a:t>
+              <a:t>Related toolkit resources</a:t>
             </a:r>
             <a:endParaRPr lang="en-US" sz="2700" dirty="0"/>
           </a:p>
@@ -5888,32 +10408,192 @@
       </p:sp>
       <p:sp>
         <p:nvSpPr>
-          <p:cNvPr id="7" name="Text 5"/>
-          <p:cNvSpPr/>
-          <p:nvPr/>
-        </p:nvSpPr>
-        <p:spPr>
-          <a:xfrm>
-            <a:off x="822960" y="1325880"/>
-            <a:ext cx="10378440" cy="4800600"/>
-          </a:xfrm>
-          <a:prstGeom prst="rect">
-            <a:avLst/>
-          </a:prstGeom>
-          <a:noFill/>
-          <a:ln/>
-        </p:spPr>
-        <p:txBody>
-          <a:bodyPr wrap="square" lIns="1016" tIns="1016" rIns="1016" bIns="1016" rtlCol="0" anchor="t">
+          <p:cNvPr id="8" name="Text 6"/>
+          <p:cNvSpPr/>
+          <p:nvPr/>
+        </p:nvSpPr>
+        <p:spPr>
+          <a:xfrm>
+            <a:off x="868680" y="1417320"/>
+            <a:ext cx="6903720" cy="4480560"/>
+          </a:xfrm>
+          <a:prstGeom prst="rect">
+            <a:avLst/>
+          </a:prstGeom>
+          <a:noFill/>
+          <a:ln/>
+        </p:spPr>
+        <p:txBody>
+          <a:bodyPr wrap="square" lIns="635" tIns="635" rIns="635" bIns="635" rtlCol="0" anchor="t">
             <a:normAutofit/>
           </a:bodyPr>
           <a:lstStyle/>
           <a:p>
+            <a:r>
+              <a:rPr lang="en-US" sz="1460" dirty="0">
+                <a:solidFill>
+                  <a:srgbClr val="17364A"/>
+                </a:solidFill>
+                <a:latin typeface="Aptos" pitchFamily="34" charset="0"/>
+                <a:ea typeface="Aptos" pitchFamily="34" charset="-122"/>
+                <a:cs typeface="Aptos" pitchFamily="34" charset="-120"/>
+              </a:rPr>
+              <a:t>Tool 4: AI Policy Landscape Scan (Worksheet) - Use AI Policy Landscape Scan to translate this lesson into a documented public health.</a:t>
+            </a:r>
+            <a:endParaRPr lang="en-US" sz="1460" dirty="0"/>
+          </a:p>
+          <a:p>
+            <a:r>
+              <a:rPr lang="en-US" sz="1460" dirty="0">
+                <a:solidFill>
+                  <a:srgbClr val="17364A"/>
+                </a:solidFill>
+                <a:latin typeface="Aptos" pitchFamily="34" charset="0"/>
+                <a:ea typeface="Aptos" pitchFamily="34" charset="-122"/>
+                <a:cs typeface="Aptos" pitchFamily="34" charset="-120"/>
+              </a:rPr>
+              <a:t>Tool 5: AI Environmental and Resource Impact Review (Checklist) - Use AI Environmental and Resource Impact Review to translate this.</a:t>
+            </a:r>
+            <a:endParaRPr lang="en-US" sz="1460" dirty="0"/>
+          </a:p>
+          <a:p>
+            <a:r>
+              <a:rPr lang="en-US" sz="1460" dirty="0">
+                <a:solidFill>
+                  <a:srgbClr val="17364A"/>
+                </a:solidFill>
+                <a:latin typeface="Aptos" pitchFamily="34" charset="0"/>
+                <a:ea typeface="Aptos" pitchFamily="34" charset="-122"/>
+                <a:cs typeface="Aptos" pitchFamily="34" charset="-120"/>
+              </a:rPr>
+              <a:t>Tool 6: Human-Centered AI Decision Rule Checklist (Checklist) - Use Human-Centered AI Decision Rule Checklist to translate this.</a:t>
+            </a:r>
+            <a:endParaRPr lang="en-US" sz="1460" dirty="0"/>
+          </a:p>
+          <a:p>
+            <a:r>
+              <a:rPr lang="en-US" sz="1460" dirty="0">
+                <a:solidFill>
+                  <a:srgbClr val="17364A"/>
+                </a:solidFill>
+                <a:latin typeface="Aptos" pitchFamily="34" charset="0"/>
+                <a:ea typeface="Aptos" pitchFamily="34" charset="-122"/>
+                <a:cs typeface="Aptos" pitchFamily="34" charset="-120"/>
+              </a:rPr>
+              <a:t>Tool 8: AI Project Charter (Planning) - Use AI Project Charter to translate this lesson into a documented public health AI planning,.</a:t>
+            </a:r>
+            <a:endParaRPr lang="en-US" sz="1460" dirty="0"/>
+          </a:p>
+          <a:p>
+            <a:r>
+              <a:rPr lang="en-US" sz="1460" dirty="0">
+                <a:solidFill>
+                  <a:srgbClr val="17364A"/>
+                </a:solidFill>
+                <a:latin typeface="Aptos" pitchFamily="34" charset="0"/>
+                <a:ea typeface="Aptos" pitchFamily="34" charset="-122"/>
+                <a:cs typeface="Aptos" pitchFamily="34" charset="-120"/>
+              </a:rPr>
+              <a:t>Tool 9: Data Quality Assessment Checklist (Checklist) - Use this tool to complete or strengthen the practical exercise for the module.</a:t>
+            </a:r>
+            <a:endParaRPr lang="en-US" sz="1460" dirty="0"/>
+          </a:p>
+        </p:txBody>
+      </p:sp>
+      <p:sp>
+        <p:nvSpPr>
+          <p:cNvPr id="9" name="Shape 7"/>
+          <p:cNvSpPr/>
+          <p:nvPr/>
+        </p:nvSpPr>
+        <p:spPr>
+          <a:xfrm>
+            <a:off x="8046720" y="1417320"/>
+            <a:ext cx="3063240" cy="2103120"/>
+          </a:xfrm>
+          <a:prstGeom prst="roundRect">
+            <a:avLst>
+              <a:gd name="adj" fmla="val 5217"/>
+            </a:avLst>
+          </a:prstGeom>
+          <a:solidFill>
+            <a:srgbClr val="EAF6F8"/>
+          </a:solidFill>
+          <a:ln w="12700">
+            <a:solidFill>
+              <a:srgbClr val="B9D7E6"/>
+            </a:solidFill>
+            <a:prstDash val="solid"/>
+          </a:ln>
+        </p:spPr>
+      </p:sp>
+      <p:sp>
+        <p:nvSpPr>
+          <p:cNvPr id="10" name="Text 8"/>
+          <p:cNvSpPr/>
+          <p:nvPr/>
+        </p:nvSpPr>
+        <p:spPr>
+          <a:xfrm>
+            <a:off x="8211312" y="1563624"/>
+            <a:ext cx="2734056" cy="201168"/>
+          </a:xfrm>
+          <a:prstGeom prst="rect">
+            <a:avLst/>
+          </a:prstGeom>
+          <a:noFill/>
+          <a:ln/>
+        </p:spPr>
+        <p:txBody>
+          <a:bodyPr wrap="square" lIns="0" tIns="0" rIns="0" bIns="0" rtlCol="0" anchor="ctr"/>
+          <a:lstStyle/>
+          <a:p>
             <a:pPr indent="0" marL="0">
               <a:buNone/>
             </a:pPr>
             <a:r>
-              <a:rPr lang="en-US" sz="1420" dirty="0">
+              <a:rPr lang="en-US" sz="950" b="1" dirty="0">
+                <a:solidFill>
+                  <a:srgbClr val="0068B7"/>
+                </a:solidFill>
+                <a:latin typeface="Aptos" pitchFamily="34" charset="0"/>
+                <a:ea typeface="Aptos" pitchFamily="34" charset="-122"/>
+                <a:cs typeface="Aptos" pitchFamily="34" charset="-120"/>
+              </a:rPr>
+              <a:t>Use the tools</a:t>
+            </a:r>
+            <a:endParaRPr lang="en-US" sz="950" dirty="0"/>
+          </a:p>
+        </p:txBody>
+      </p:sp>
+      <p:sp>
+        <p:nvSpPr>
+          <p:cNvPr id="11" name="Text 9"/>
+          <p:cNvSpPr/>
+          <p:nvPr/>
+        </p:nvSpPr>
+        <p:spPr>
+          <a:xfrm>
+            <a:off x="8211312" y="1856232"/>
+            <a:ext cx="2734056" cy="1536192"/>
+          </a:xfrm>
+          <a:prstGeom prst="rect">
+            <a:avLst/>
+          </a:prstGeom>
+          <a:noFill/>
+          <a:ln/>
+        </p:spPr>
+        <p:txBody>
+          <a:bodyPr wrap="square" lIns="0" tIns="0" rIns="0" bIns="0" rtlCol="0" anchor="t">
+            <a:normAutofit/>
+          </a:bodyPr>
+          <a:lstStyle/>
+          <a:p>
+            <a:pPr indent="0" marL="0">
+              <a:buNone/>
+            </a:pPr>
+            <a:r>
+              <a:rPr lang="en-US" sz="1250" dirty="0">
                 <a:solidFill>
                   <a:srgbClr val="17364A"/>
                 </a:solidFill>
@@ -5921,9 +10601,116 @@
                 <a:ea typeface="Aptos" pitchFamily="34" charset="-122"/>
                 <a:cs typeface="Aptos" pitchFamily="34" charset="-120"/>
               </a:rPr>
-              <a:t>AI adoption changes how people work, make decisions, document actions, communicate with partners, and understand their roles. Successful implementation requires change management, not just technical deployment. Staff need to understand why a tool is being introduced, how it affects their workflow, what they are responsible for reviewing, and how concerns will be handled. This module helps leaders plan the organizational side of AI adoption. It focuses on stakeholder engagement, communication, training, workflow redesign, trust-building, feedback loops, readiness assessment, and adoption monitoring. The goal is to prevent AI from being experienced as a top-down technology mandate and instead support thoughtful integration into public health practice.</a:t>
-            </a:r>
-            <a:endParaRPr lang="en-US" sz="1420" dirty="0"/>
+              <a:t>Use linked tools when your department needs a structured worksheet, template, checklist, review process, or documentation artifact.</a:t>
+            </a:r>
+            <a:endParaRPr lang="en-US" sz="1250" dirty="0"/>
+          </a:p>
+        </p:txBody>
+      </p:sp>
+      <p:sp>
+        <p:nvSpPr>
+          <p:cNvPr id="12" name="Shape 10"/>
+          <p:cNvSpPr/>
+          <p:nvPr/>
+        </p:nvSpPr>
+        <p:spPr>
+          <a:xfrm>
+            <a:off x="8046720" y="3794760"/>
+            <a:ext cx="3063240" cy="1508760"/>
+          </a:xfrm>
+          <a:prstGeom prst="roundRect">
+            <a:avLst>
+              <a:gd name="adj" fmla="val 7273"/>
+            </a:avLst>
+          </a:prstGeom>
+          <a:solidFill>
+            <a:srgbClr val="EEF8ED"/>
+          </a:solidFill>
+          <a:ln w="12700">
+            <a:solidFill>
+              <a:srgbClr val="B9D7E6"/>
+            </a:solidFill>
+            <a:prstDash val="solid"/>
+          </a:ln>
+        </p:spPr>
+      </p:sp>
+      <p:sp>
+        <p:nvSpPr>
+          <p:cNvPr id="13" name="Text 11"/>
+          <p:cNvSpPr/>
+          <p:nvPr/>
+        </p:nvSpPr>
+        <p:spPr>
+          <a:xfrm>
+            <a:off x="8211312" y="3941064"/>
+            <a:ext cx="2734056" cy="201168"/>
+          </a:xfrm>
+          <a:prstGeom prst="rect">
+            <a:avLst/>
+          </a:prstGeom>
+          <a:noFill/>
+          <a:ln/>
+        </p:spPr>
+        <p:txBody>
+          <a:bodyPr wrap="square" lIns="0" tIns="0" rIns="0" bIns="0" rtlCol="0" anchor="ctr"/>
+          <a:lstStyle/>
+          <a:p>
+            <a:pPr indent="0" marL="0">
+              <a:buNone/>
+            </a:pPr>
+            <a:r>
+              <a:rPr lang="en-US" sz="950" b="1" dirty="0">
+                <a:solidFill>
+                  <a:srgbClr val="0068B7"/>
+                </a:solidFill>
+                <a:latin typeface="Aptos" pitchFamily="34" charset="0"/>
+                <a:ea typeface="Aptos" pitchFamily="34" charset="-122"/>
+                <a:cs typeface="Aptos" pitchFamily="34" charset="-120"/>
+              </a:rPr>
+              <a:t>Avoid duplication</a:t>
+            </a:r>
+            <a:endParaRPr lang="en-US" sz="950" dirty="0"/>
+          </a:p>
+        </p:txBody>
+      </p:sp>
+      <p:sp>
+        <p:nvSpPr>
+          <p:cNvPr id="14" name="Text 12"/>
+          <p:cNvSpPr/>
+          <p:nvPr/>
+        </p:nvSpPr>
+        <p:spPr>
+          <a:xfrm>
+            <a:off x="8211312" y="4233672"/>
+            <a:ext cx="2734056" cy="941832"/>
+          </a:xfrm>
+          <a:prstGeom prst="rect">
+            <a:avLst/>
+          </a:prstGeom>
+          <a:noFill/>
+          <a:ln/>
+        </p:spPr>
+        <p:txBody>
+          <a:bodyPr wrap="square" lIns="0" tIns="0" rIns="0" bIns="0" rtlCol="0" anchor="t">
+            <a:normAutofit/>
+          </a:bodyPr>
+          <a:lstStyle/>
+          <a:p>
+            <a:pPr indent="0" marL="0">
+              <a:buNone/>
+            </a:pPr>
+            <a:r>
+              <a:rPr lang="en-US" sz="1250" dirty="0">
+                <a:solidFill>
+                  <a:srgbClr val="17364A"/>
+                </a:solidFill>
+                <a:latin typeface="Aptos" pitchFamily="34" charset="0"/>
+                <a:ea typeface="Aptos" pitchFamily="34" charset="-122"/>
+                <a:cs typeface="Aptos" pitchFamily="34" charset="-120"/>
+              </a:rPr>
+              <a:t>If your department already has a strong equivalent tool, adapt or use the existing process instead of recreating it.</a:t>
+            </a:r>
+            <a:endParaRPr lang="en-US" sz="1250" dirty="0"/>
           </a:p>
         </p:txBody>
       </p:sp>
@@ -5986,7 +10773,32 @@
       </p:sp>
       <p:sp>
         <p:nvSpPr>
-          <p:cNvPr id="3" name="Text 1"/>
+          <p:cNvPr id="3" name="Shape 1"/>
+          <p:cNvSpPr/>
+          <p:nvPr/>
+        </p:nvSpPr>
+        <p:spPr>
+          <a:xfrm>
+            <a:off x="0" y="164592"/>
+            <a:ext cx="146304" cy="6693408"/>
+          </a:xfrm>
+          <a:prstGeom prst="rect">
+            <a:avLst/>
+          </a:prstGeom>
+          <a:solidFill>
+            <a:srgbClr val="2F8A28"/>
+          </a:solidFill>
+          <a:ln w="12700">
+            <a:solidFill>
+              <a:srgbClr val="2F8A28"/>
+            </a:solidFill>
+            <a:prstDash val="solid"/>
+          </a:ln>
+        </p:spPr>
+      </p:sp>
+      <p:sp>
+        <p:nvSpPr>
+          <p:cNvPr id="4" name="Text 2"/>
           <p:cNvSpPr/>
           <p:nvPr/>
         </p:nvSpPr>
@@ -6025,7 +10837,7 @@
       </p:sp>
       <p:sp>
         <p:nvSpPr>
-          <p:cNvPr id="4" name="Text 2"/>
+          <p:cNvPr id="5" name="Text 3"/>
           <p:cNvSpPr/>
           <p:nvPr/>
         </p:nvSpPr>
@@ -6064,7 +10876,7 @@
       </p:sp>
       <p:sp>
         <p:nvSpPr>
-          <p:cNvPr id="5" name="Text 3"/>
+          <p:cNvPr id="6" name="Text 4"/>
           <p:cNvSpPr/>
           <p:nvPr/>
         </p:nvSpPr>
@@ -6103,13 +10915,77 @@
       </p:sp>
       <p:sp>
         <p:nvSpPr>
-          <p:cNvPr id="6" name="Text 4"/>
+          <p:cNvPr id="7" name="Shape 5"/>
           <p:cNvSpPr/>
           <p:nvPr/>
         </p:nvSpPr>
         <p:spPr>
           <a:xfrm>
             <a:off x="640080" y="658368"/>
+            <a:ext cx="420624" cy="420624"/>
+          </a:xfrm>
+          <a:prstGeom prst="ellipse">
+            <a:avLst/>
+          </a:prstGeom>
+          <a:solidFill>
+            <a:srgbClr val="0068B7"/>
+          </a:solidFill>
+          <a:ln w="12700">
+            <a:solidFill>
+              <a:srgbClr val="0068B7"/>
+            </a:solidFill>
+            <a:prstDash val="solid"/>
+          </a:ln>
+        </p:spPr>
+      </p:sp>
+      <p:sp>
+        <p:nvSpPr>
+          <p:cNvPr id="8" name="Text 6"/>
+          <p:cNvSpPr/>
+          <p:nvPr/>
+        </p:nvSpPr>
+        <p:spPr>
+          <a:xfrm>
+            <a:off x="640080" y="731520"/>
+            <a:ext cx="420624" cy="164592"/>
+          </a:xfrm>
+          <a:prstGeom prst="rect">
+            <a:avLst/>
+          </a:prstGeom>
+          <a:noFill/>
+          <a:ln/>
+        </p:spPr>
+        <p:txBody>
+          <a:bodyPr wrap="square" lIns="0" tIns="0" rIns="0" bIns="0" rtlCol="0" anchor="ctr"/>
+          <a:lstStyle/>
+          <a:p>
+            <a:pPr algn="ctr" indent="0" marL="0">
+              <a:buNone/>
+            </a:pPr>
+            <a:r>
+              <a:rPr lang="en-US" sz="1100" b="1" dirty="0">
+                <a:solidFill>
+                  <a:srgbClr val="FFFFFF"/>
+                </a:solidFill>
+                <a:latin typeface="Aptos" pitchFamily="34" charset="0"/>
+                <a:ea typeface="Aptos" pitchFamily="34" charset="-122"/>
+                <a:cs typeface="Aptos" pitchFamily="34" charset="-120"/>
+              </a:rPr>
+              <a:t>1</a:t>
+            </a:r>
+            <a:endParaRPr lang="en-US" sz="1100" dirty="0"/>
+          </a:p>
+        </p:txBody>
+      </p:sp>
+      <p:sp>
+        <p:nvSpPr>
+          <p:cNvPr id="9" name="Text 7"/>
+          <p:cNvSpPr/>
+          <p:nvPr/>
+        </p:nvSpPr>
+        <p:spPr>
+          <a:xfrm>
+            <a:off x="640080" y="621792"/>
             <a:ext cx="10881360" cy="566928"/>
           </a:xfrm>
           <a:prstGeom prst="rect">
@@ -6136,7 +11012,7 @@
                 <a:ea typeface="Aptos Display" pitchFamily="34" charset="-122"/>
                 <a:cs typeface="Aptos Display" pitchFamily="34" charset="-120"/>
               </a:rPr>
-              <a:t>Why This Topic Matters for Public Health AI</a:t>
+              <a:t>Learning Objectives</a:t>
             </a:r>
             <a:endParaRPr lang="en-US" sz="2700" dirty="0"/>
           </a:p>
@@ -6144,32 +11020,178 @@
       </p:sp>
       <p:sp>
         <p:nvSpPr>
-          <p:cNvPr id="7" name="Text 5"/>
-          <p:cNvSpPr/>
-          <p:nvPr/>
-        </p:nvSpPr>
-        <p:spPr>
-          <a:xfrm>
-            <a:off x="822960" y="1325880"/>
-            <a:ext cx="10378440" cy="4800600"/>
-          </a:xfrm>
-          <a:prstGeom prst="rect">
-            <a:avLst/>
-          </a:prstGeom>
-          <a:noFill/>
-          <a:ln/>
-        </p:spPr>
-        <p:txBody>
-          <a:bodyPr wrap="square" lIns="1016" tIns="1016" rIns="1016" bIns="1016" rtlCol="0" anchor="t">
+          <p:cNvPr id="10" name="Text 8"/>
+          <p:cNvSpPr/>
+          <p:nvPr/>
+        </p:nvSpPr>
+        <p:spPr>
+          <a:xfrm>
+            <a:off x="868680" y="1417320"/>
+            <a:ext cx="6675120" cy="4434840"/>
+          </a:xfrm>
+          <a:prstGeom prst="rect">
+            <a:avLst/>
+          </a:prstGeom>
+          <a:noFill/>
+          <a:ln/>
+        </p:spPr>
+        <p:txBody>
+          <a:bodyPr wrap="square" lIns="635" tIns="635" rIns="635" bIns="635" rtlCol="0" anchor="t">
             <a:normAutofit/>
           </a:bodyPr>
           <a:lstStyle/>
           <a:p>
+            <a:r>
+              <a:rPr lang="en-US" sz="1700" dirty="0">
+                <a:solidFill>
+                  <a:srgbClr val="17364A"/>
+                </a:solidFill>
+                <a:latin typeface="Aptos" pitchFamily="34" charset="0"/>
+                <a:ea typeface="Aptos" pitchFamily="34" charset="-122"/>
+                <a:cs typeface="Aptos" pitchFamily="34" charset="-120"/>
+              </a:rPr>
+              <a:t>Explain why AI implementation requires change management.</a:t>
+            </a:r>
+            <a:endParaRPr lang="en-US" sz="1700" dirty="0"/>
+          </a:p>
+          <a:p>
+            <a:r>
+              <a:rPr lang="en-US" sz="1700" dirty="0">
+                <a:solidFill>
+                  <a:srgbClr val="17364A"/>
+                </a:solidFill>
+                <a:latin typeface="Aptos" pitchFamily="34" charset="0"/>
+                <a:ea typeface="Aptos" pitchFamily="34" charset="-122"/>
+                <a:cs typeface="Aptos" pitchFamily="34" charset="-120"/>
+              </a:rPr>
+              <a:t>Identify stakeholders affected by an AI-supported workflow.</a:t>
+            </a:r>
+            <a:endParaRPr lang="en-US" sz="1700" dirty="0"/>
+          </a:p>
+          <a:p>
+            <a:r>
+              <a:rPr lang="en-US" sz="1700" dirty="0">
+                <a:solidFill>
+                  <a:srgbClr val="17364A"/>
+                </a:solidFill>
+                <a:latin typeface="Aptos" pitchFamily="34" charset="0"/>
+                <a:ea typeface="Aptos" pitchFamily="34" charset="-122"/>
+                <a:cs typeface="Aptos" pitchFamily="34" charset="-120"/>
+              </a:rPr>
+              <a:t>Develop a change management plan that includes communication, training, workflow updates, feedback, and adoption measures.</a:t>
+            </a:r>
+            <a:endParaRPr lang="en-US" sz="1700" dirty="0"/>
+          </a:p>
+          <a:p>
+            <a:r>
+              <a:rPr lang="en-US" sz="1700" dirty="0">
+                <a:solidFill>
+                  <a:srgbClr val="17364A"/>
+                </a:solidFill>
+                <a:latin typeface="Aptos" pitchFamily="34" charset="0"/>
+                <a:ea typeface="Aptos" pitchFamily="34" charset="-122"/>
+                <a:cs typeface="Aptos" pitchFamily="34" charset="-120"/>
+              </a:rPr>
+              <a:t>Recognize staff concerns related to trust, workload, deskilling, surveillance, accountability, and job impact.</a:t>
+            </a:r>
+            <a:endParaRPr lang="en-US" sz="1700" dirty="0"/>
+          </a:p>
+        </p:txBody>
+      </p:sp>
+      <p:sp>
+        <p:nvSpPr>
+          <p:cNvPr id="11" name="Shape 9"/>
+          <p:cNvSpPr/>
+          <p:nvPr/>
+        </p:nvSpPr>
+        <p:spPr>
+          <a:xfrm>
+            <a:off x="7909560" y="1417320"/>
+            <a:ext cx="3154680" cy="1828800"/>
+          </a:xfrm>
+          <a:prstGeom prst="roundRect">
+            <a:avLst>
+              <a:gd name="adj" fmla="val 6000"/>
+            </a:avLst>
+          </a:prstGeom>
+          <a:solidFill>
+            <a:srgbClr val="EEF8ED"/>
+          </a:solidFill>
+          <a:ln w="12700">
+            <a:solidFill>
+              <a:srgbClr val="B9D7E6"/>
+            </a:solidFill>
+            <a:prstDash val="solid"/>
+          </a:ln>
+        </p:spPr>
+      </p:sp>
+      <p:sp>
+        <p:nvSpPr>
+          <p:cNvPr id="12" name="Text 10"/>
+          <p:cNvSpPr/>
+          <p:nvPr/>
+        </p:nvSpPr>
+        <p:spPr>
+          <a:xfrm>
+            <a:off x="8074152" y="1563624"/>
+            <a:ext cx="2825496" cy="201168"/>
+          </a:xfrm>
+          <a:prstGeom prst="rect">
+            <a:avLst/>
+          </a:prstGeom>
+          <a:noFill/>
+          <a:ln/>
+        </p:spPr>
+        <p:txBody>
+          <a:bodyPr wrap="square" lIns="0" tIns="0" rIns="0" bIns="0" rtlCol="0" anchor="ctr"/>
+          <a:lstStyle/>
+          <a:p>
             <a:pPr indent="0" marL="0">
               <a:buNone/>
             </a:pPr>
             <a:r>
-              <a:rPr lang="en-US" sz="1420" dirty="0">
+              <a:rPr lang="en-US" sz="950" b="1" dirty="0">
+                <a:solidFill>
+                  <a:srgbClr val="0068B7"/>
+                </a:solidFill>
+                <a:latin typeface="Aptos" pitchFamily="34" charset="0"/>
+                <a:ea typeface="Aptos" pitchFamily="34" charset="-122"/>
+                <a:cs typeface="Aptos" pitchFamily="34" charset="-120"/>
+              </a:rPr>
+              <a:t>Key idea</a:t>
+            </a:r>
+            <a:endParaRPr lang="en-US" sz="950" dirty="0"/>
+          </a:p>
+        </p:txBody>
+      </p:sp>
+      <p:sp>
+        <p:nvSpPr>
+          <p:cNvPr id="13" name="Text 11"/>
+          <p:cNvSpPr/>
+          <p:nvPr/>
+        </p:nvSpPr>
+        <p:spPr>
+          <a:xfrm>
+            <a:off x="8074152" y="1856232"/>
+            <a:ext cx="2825496" cy="1261872"/>
+          </a:xfrm>
+          <a:prstGeom prst="rect">
+            <a:avLst/>
+          </a:prstGeom>
+          <a:noFill/>
+          <a:ln/>
+        </p:spPr>
+        <p:txBody>
+          <a:bodyPr wrap="square" lIns="0" tIns="0" rIns="0" bIns="0" rtlCol="0" anchor="t">
+            <a:normAutofit/>
+          </a:bodyPr>
+          <a:lstStyle/>
+          <a:p>
+            <a:pPr indent="0" marL="0">
+              <a:buNone/>
+            </a:pPr>
+            <a:r>
+              <a:rPr lang="en-US" sz="1250" dirty="0">
                 <a:solidFill>
                   <a:srgbClr val="17364A"/>
                 </a:solidFill>
@@ -6177,9 +11199,116 @@
                 <a:ea typeface="Aptos" pitchFamily="34" charset="-122"/>
                 <a:cs typeface="Aptos" pitchFamily="34" charset="-120"/>
               </a:rPr>
-              <a:t>AI tools may fail even when the technology works because the organization is not ready to use them. Staff may not trust the output, may over-trust it, may not understand their review responsibilities, or may develop workarounds that undermine safeguards. Leaders may underestimate the time needed for training, workflow redesign, and user feedback. Change management is also an equity and workforce issue. Staff who are not included in design may experience AI as a threat or burden. Programs with less technical capacity may be left behind. Communities may experience changes in service delivery without understanding how AI is involved. A change plan helps ensure that adoption is transparent, inclusive, and aligned with public health values.</a:t>
-            </a:r>
-            <a:endParaRPr lang="en-US" sz="1420" dirty="0"/>
+              <a:t>Explain why AI implementation requires change management.</a:t>
+            </a:r>
+            <a:endParaRPr lang="en-US" sz="1250" dirty="0"/>
+          </a:p>
+        </p:txBody>
+      </p:sp>
+      <p:sp>
+        <p:nvSpPr>
+          <p:cNvPr id="14" name="Shape 12"/>
+          <p:cNvSpPr/>
+          <p:nvPr/>
+        </p:nvSpPr>
+        <p:spPr>
+          <a:xfrm>
+            <a:off x="7909560" y="3520440"/>
+            <a:ext cx="3154680" cy="1737360"/>
+          </a:xfrm>
+          <a:prstGeom prst="roundRect">
+            <a:avLst>
+              <a:gd name="adj" fmla="val 6316"/>
+            </a:avLst>
+          </a:prstGeom>
+          <a:solidFill>
+            <a:srgbClr val="EAF6F8"/>
+          </a:solidFill>
+          <a:ln w="12700">
+            <a:solidFill>
+              <a:srgbClr val="B9D7E6"/>
+            </a:solidFill>
+            <a:prstDash val="solid"/>
+          </a:ln>
+        </p:spPr>
+      </p:sp>
+      <p:sp>
+        <p:nvSpPr>
+          <p:cNvPr id="15" name="Text 13"/>
+          <p:cNvSpPr/>
+          <p:nvPr/>
+        </p:nvSpPr>
+        <p:spPr>
+          <a:xfrm>
+            <a:off x="8074152" y="3666744"/>
+            <a:ext cx="2825496" cy="201168"/>
+          </a:xfrm>
+          <a:prstGeom prst="rect">
+            <a:avLst/>
+          </a:prstGeom>
+          <a:noFill/>
+          <a:ln/>
+        </p:spPr>
+        <p:txBody>
+          <a:bodyPr wrap="square" lIns="0" tIns="0" rIns="0" bIns="0" rtlCol="0" anchor="ctr"/>
+          <a:lstStyle/>
+          <a:p>
+            <a:pPr indent="0" marL="0">
+              <a:buNone/>
+            </a:pPr>
+            <a:r>
+              <a:rPr lang="en-US" sz="950" b="1" dirty="0">
+                <a:solidFill>
+                  <a:srgbClr val="0068B7"/>
+                </a:solidFill>
+                <a:latin typeface="Aptos" pitchFamily="34" charset="0"/>
+                <a:ea typeface="Aptos" pitchFamily="34" charset="-122"/>
+                <a:cs typeface="Aptos" pitchFamily="34" charset="-120"/>
+              </a:rPr>
+              <a:t>Use this for</a:t>
+            </a:r>
+            <a:endParaRPr lang="en-US" sz="950" dirty="0"/>
+          </a:p>
+        </p:txBody>
+      </p:sp>
+      <p:sp>
+        <p:nvSpPr>
+          <p:cNvPr id="16" name="Text 14"/>
+          <p:cNvSpPr/>
+          <p:nvPr/>
+        </p:nvSpPr>
+        <p:spPr>
+          <a:xfrm>
+            <a:off x="8074152" y="3959352"/>
+            <a:ext cx="2825496" cy="1170432"/>
+          </a:xfrm>
+          <a:prstGeom prst="rect">
+            <a:avLst/>
+          </a:prstGeom>
+          <a:noFill/>
+          <a:ln/>
+        </p:spPr>
+        <p:txBody>
+          <a:bodyPr wrap="square" lIns="0" tIns="0" rIns="0" bIns="0" rtlCol="0" anchor="t">
+            <a:normAutofit/>
+          </a:bodyPr>
+          <a:lstStyle/>
+          <a:p>
+            <a:pPr indent="0" marL="0">
+              <a:buNone/>
+            </a:pPr>
+            <a:r>
+              <a:rPr lang="en-US" sz="1250" dirty="0">
+                <a:solidFill>
+                  <a:srgbClr val="17364A"/>
+                </a:solidFill>
+                <a:latin typeface="Aptos" pitchFamily="34" charset="0"/>
+                <a:ea typeface="Aptos" pitchFamily="34" charset="-122"/>
+                <a:cs typeface="Aptos" pitchFamily="34" charset="-120"/>
+              </a:rPr>
+              <a:t>Connect the concept to public health decisions, safeguards, documentation, or implementation work.</a:t>
+            </a:r>
+            <a:endParaRPr lang="en-US" sz="1250" dirty="0"/>
           </a:p>
         </p:txBody>
       </p:sp>
@@ -6242,7 +11371,32 @@
       </p:sp>
       <p:sp>
         <p:nvSpPr>
-          <p:cNvPr id="3" name="Text 1"/>
+          <p:cNvPr id="3" name="Shape 1"/>
+          <p:cNvSpPr/>
+          <p:nvPr/>
+        </p:nvSpPr>
+        <p:spPr>
+          <a:xfrm>
+            <a:off x="0" y="164592"/>
+            <a:ext cx="146304" cy="6693408"/>
+          </a:xfrm>
+          <a:prstGeom prst="rect">
+            <a:avLst/>
+          </a:prstGeom>
+          <a:solidFill>
+            <a:srgbClr val="2F8A28"/>
+          </a:solidFill>
+          <a:ln w="12700">
+            <a:solidFill>
+              <a:srgbClr val="2F8A28"/>
+            </a:solidFill>
+            <a:prstDash val="solid"/>
+          </a:ln>
+        </p:spPr>
+      </p:sp>
+      <p:sp>
+        <p:nvSpPr>
+          <p:cNvPr id="4" name="Text 2"/>
           <p:cNvSpPr/>
           <p:nvPr/>
         </p:nvSpPr>
@@ -6281,7 +11435,7 @@
       </p:sp>
       <p:sp>
         <p:nvSpPr>
-          <p:cNvPr id="4" name="Text 2"/>
+          <p:cNvPr id="5" name="Text 3"/>
           <p:cNvSpPr/>
           <p:nvPr/>
         </p:nvSpPr>
@@ -6320,7 +11474,7 @@
       </p:sp>
       <p:sp>
         <p:nvSpPr>
-          <p:cNvPr id="5" name="Text 3"/>
+          <p:cNvPr id="6" name="Text 4"/>
           <p:cNvSpPr/>
           <p:nvPr/>
         </p:nvSpPr>
@@ -6359,13 +11513,77 @@
       </p:sp>
       <p:sp>
         <p:nvSpPr>
-          <p:cNvPr id="6" name="Text 4"/>
+          <p:cNvPr id="7" name="Shape 5"/>
           <p:cNvSpPr/>
           <p:nvPr/>
         </p:nvSpPr>
         <p:spPr>
           <a:xfrm>
             <a:off x="640080" y="658368"/>
+            <a:ext cx="420624" cy="420624"/>
+          </a:xfrm>
+          <a:prstGeom prst="ellipse">
+            <a:avLst/>
+          </a:prstGeom>
+          <a:solidFill>
+            <a:srgbClr val="0068B7"/>
+          </a:solidFill>
+          <a:ln w="12700">
+            <a:solidFill>
+              <a:srgbClr val="0068B7"/>
+            </a:solidFill>
+            <a:prstDash val="solid"/>
+          </a:ln>
+        </p:spPr>
+      </p:sp>
+      <p:sp>
+        <p:nvSpPr>
+          <p:cNvPr id="8" name="Text 6"/>
+          <p:cNvSpPr/>
+          <p:nvPr/>
+        </p:nvSpPr>
+        <p:spPr>
+          <a:xfrm>
+            <a:off x="640080" y="731520"/>
+            <a:ext cx="420624" cy="164592"/>
+          </a:xfrm>
+          <a:prstGeom prst="rect">
+            <a:avLst/>
+          </a:prstGeom>
+          <a:noFill/>
+          <a:ln/>
+        </p:spPr>
+        <p:txBody>
+          <a:bodyPr wrap="square" lIns="0" tIns="0" rIns="0" bIns="0" rtlCol="0" anchor="ctr"/>
+          <a:lstStyle/>
+          <a:p>
+            <a:pPr algn="ctr" indent="0" marL="0">
+              <a:buNone/>
+            </a:pPr>
+            <a:r>
+              <a:rPr lang="en-US" sz="1100" b="1" dirty="0">
+                <a:solidFill>
+                  <a:srgbClr val="FFFFFF"/>
+                </a:solidFill>
+                <a:latin typeface="Aptos" pitchFamily="34" charset="0"/>
+                <a:ea typeface="Aptos" pitchFamily="34" charset="-122"/>
+                <a:cs typeface="Aptos" pitchFamily="34" charset="-120"/>
+              </a:rPr>
+              <a:t>2</a:t>
+            </a:r>
+            <a:endParaRPr lang="en-US" sz="1100" dirty="0"/>
+          </a:p>
+        </p:txBody>
+      </p:sp>
+      <p:sp>
+        <p:nvSpPr>
+          <p:cNvPr id="9" name="Text 7"/>
+          <p:cNvSpPr/>
+          <p:nvPr/>
+        </p:nvSpPr>
+        <p:spPr>
+          <a:xfrm>
+            <a:off x="640080" y="621792"/>
             <a:ext cx="10881360" cy="566928"/>
           </a:xfrm>
           <a:prstGeom prst="rect">
@@ -6392,7 +11610,7 @@
                 <a:ea typeface="Aptos Display" pitchFamily="34" charset="-122"/>
                 <a:cs typeface="Aptos Display" pitchFamily="34" charset="-120"/>
               </a:rPr>
-              <a:t>Public Health Example</a:t>
+              <a:t>Module Overview</a:t>
             </a:r>
             <a:endParaRPr lang="en-US" sz="2700" dirty="0"/>
           </a:p>
@@ -6400,32 +11618,178 @@
       </p:sp>
       <p:sp>
         <p:nvSpPr>
-          <p:cNvPr id="7" name="Text 5"/>
-          <p:cNvSpPr/>
-          <p:nvPr/>
-        </p:nvSpPr>
-        <p:spPr>
-          <a:xfrm>
-            <a:off x="822960" y="1325880"/>
-            <a:ext cx="10378440" cy="4800600"/>
-          </a:xfrm>
-          <a:prstGeom prst="rect">
-            <a:avLst/>
-          </a:prstGeom>
-          <a:noFill/>
-          <a:ln/>
-        </p:spPr>
-        <p:txBody>
-          <a:bodyPr wrap="square" lIns="1016" tIns="1016" rIns="1016" bIns="1016" rtlCol="0" anchor="t">
+          <p:cNvPr id="10" name="Text 8"/>
+          <p:cNvSpPr/>
+          <p:nvPr/>
+        </p:nvSpPr>
+        <p:spPr>
+          <a:xfrm>
+            <a:off x="868680" y="1417320"/>
+            <a:ext cx="6675120" cy="4434840"/>
+          </a:xfrm>
+          <a:prstGeom prst="rect">
+            <a:avLst/>
+          </a:prstGeom>
+          <a:noFill/>
+          <a:ln/>
+        </p:spPr>
+        <p:txBody>
+          <a:bodyPr wrap="square" lIns="635" tIns="635" rIns="635" bIns="635" rtlCol="0" anchor="t">
             <a:normAutofit/>
           </a:bodyPr>
           <a:lstStyle/>
           <a:p>
+            <a:r>
+              <a:rPr lang="en-US" sz="1700" dirty="0">
+                <a:solidFill>
+                  <a:srgbClr val="17364A"/>
+                </a:solidFill>
+                <a:latin typeface="Aptos" pitchFamily="34" charset="0"/>
+                <a:ea typeface="Aptos" pitchFamily="34" charset="-122"/>
+                <a:cs typeface="Aptos" pitchFamily="34" charset="-120"/>
+              </a:rPr>
+              <a:t>AI adoption changes how people work, make decisions, document actions, communicate with partners, and understand their roles.</a:t>
+            </a:r>
+            <a:endParaRPr lang="en-US" sz="1700" dirty="0"/>
+          </a:p>
+          <a:p>
+            <a:r>
+              <a:rPr lang="en-US" sz="1700" dirty="0">
+                <a:solidFill>
+                  <a:srgbClr val="17364A"/>
+                </a:solidFill>
+                <a:latin typeface="Aptos" pitchFamily="34" charset="0"/>
+                <a:ea typeface="Aptos" pitchFamily="34" charset="-122"/>
+                <a:cs typeface="Aptos" pitchFamily="34" charset="-120"/>
+              </a:rPr>
+              <a:t>Successful implementation requires change management, not just technical deployment.</a:t>
+            </a:r>
+            <a:endParaRPr lang="en-US" sz="1700" dirty="0"/>
+          </a:p>
+          <a:p>
+            <a:r>
+              <a:rPr lang="en-US" sz="1700" dirty="0">
+                <a:solidFill>
+                  <a:srgbClr val="17364A"/>
+                </a:solidFill>
+                <a:latin typeface="Aptos" pitchFamily="34" charset="0"/>
+                <a:ea typeface="Aptos" pitchFamily="34" charset="-122"/>
+                <a:cs typeface="Aptos" pitchFamily="34" charset="-120"/>
+              </a:rPr>
+              <a:t>Staff need to understand why a tool is being introduced, how it affects their workflow, what they are responsible for.</a:t>
+            </a:r>
+            <a:endParaRPr lang="en-US" sz="1700" dirty="0"/>
+          </a:p>
+          <a:p>
+            <a:r>
+              <a:rPr lang="en-US" sz="1700" dirty="0">
+                <a:solidFill>
+                  <a:srgbClr val="17364A"/>
+                </a:solidFill>
+                <a:latin typeface="Aptos" pitchFamily="34" charset="0"/>
+                <a:ea typeface="Aptos" pitchFamily="34" charset="-122"/>
+                <a:cs typeface="Aptos" pitchFamily="34" charset="-120"/>
+              </a:rPr>
+              <a:t>This module helps leaders plan the organizational side of AI adoption.</a:t>
+            </a:r>
+            <a:endParaRPr lang="en-US" sz="1700" dirty="0"/>
+          </a:p>
+        </p:txBody>
+      </p:sp>
+      <p:sp>
+        <p:nvSpPr>
+          <p:cNvPr id="11" name="Shape 9"/>
+          <p:cNvSpPr/>
+          <p:nvPr/>
+        </p:nvSpPr>
+        <p:spPr>
+          <a:xfrm>
+            <a:off x="7909560" y="1417320"/>
+            <a:ext cx="3154680" cy="1828800"/>
+          </a:xfrm>
+          <a:prstGeom prst="roundRect">
+            <a:avLst>
+              <a:gd name="adj" fmla="val 6000"/>
+            </a:avLst>
+          </a:prstGeom>
+          <a:solidFill>
+            <a:srgbClr val="EEF8ED"/>
+          </a:solidFill>
+          <a:ln w="12700">
+            <a:solidFill>
+              <a:srgbClr val="B9D7E6"/>
+            </a:solidFill>
+            <a:prstDash val="solid"/>
+          </a:ln>
+        </p:spPr>
+      </p:sp>
+      <p:sp>
+        <p:nvSpPr>
+          <p:cNvPr id="12" name="Text 10"/>
+          <p:cNvSpPr/>
+          <p:nvPr/>
+        </p:nvSpPr>
+        <p:spPr>
+          <a:xfrm>
+            <a:off x="8074152" y="1563624"/>
+            <a:ext cx="2825496" cy="201168"/>
+          </a:xfrm>
+          <a:prstGeom prst="rect">
+            <a:avLst/>
+          </a:prstGeom>
+          <a:noFill/>
+          <a:ln/>
+        </p:spPr>
+        <p:txBody>
+          <a:bodyPr wrap="square" lIns="0" tIns="0" rIns="0" bIns="0" rtlCol="0" anchor="ctr"/>
+          <a:lstStyle/>
+          <a:p>
             <a:pPr indent="0" marL="0">
               <a:buNone/>
             </a:pPr>
             <a:r>
-              <a:rPr lang="en-US" sz="1420" dirty="0">
+              <a:rPr lang="en-US" sz="950" b="1" dirty="0">
+                <a:solidFill>
+                  <a:srgbClr val="0068B7"/>
+                </a:solidFill>
+                <a:latin typeface="Aptos" pitchFamily="34" charset="0"/>
+                <a:ea typeface="Aptos" pitchFamily="34" charset="-122"/>
+                <a:cs typeface="Aptos" pitchFamily="34" charset="-120"/>
+              </a:rPr>
+              <a:t>Key idea</a:t>
+            </a:r>
+            <a:endParaRPr lang="en-US" sz="950" dirty="0"/>
+          </a:p>
+        </p:txBody>
+      </p:sp>
+      <p:sp>
+        <p:nvSpPr>
+          <p:cNvPr id="13" name="Text 11"/>
+          <p:cNvSpPr/>
+          <p:nvPr/>
+        </p:nvSpPr>
+        <p:spPr>
+          <a:xfrm>
+            <a:off x="8074152" y="1856232"/>
+            <a:ext cx="2825496" cy="1261872"/>
+          </a:xfrm>
+          <a:prstGeom prst="rect">
+            <a:avLst/>
+          </a:prstGeom>
+          <a:noFill/>
+          <a:ln/>
+        </p:spPr>
+        <p:txBody>
+          <a:bodyPr wrap="square" lIns="0" tIns="0" rIns="0" bIns="0" rtlCol="0" anchor="t">
+            <a:normAutofit/>
+          </a:bodyPr>
+          <a:lstStyle/>
+          <a:p>
+            <a:pPr indent="0" marL="0">
+              <a:buNone/>
+            </a:pPr>
+            <a:r>
+              <a:rPr lang="en-US" sz="1250" dirty="0">
                 <a:solidFill>
                   <a:srgbClr val="17364A"/>
                 </a:solidFill>
@@ -6433,9 +11797,116 @@
                 <a:ea typeface="Aptos" pitchFamily="34" charset="-122"/>
                 <a:cs typeface="Aptos" pitchFamily="34" charset="-120"/>
               </a:rPr>
-              <a:t>A health department launches an AI assistant to help staff find internal policies and program guidance. The tool is technically functional, but staff do not use it because they are unsure whether answers are official, whether searches are monitored, and whether they remain responsible for verifying information. Some staff worry that the tool will be used to judge their productivity. A change management plan addresses these concerns directly. It explains the purpose of the tool, approved uses, prohibited uses, privacy protections, source citation requirements, human verification expectations, and feedback process. It also includes supervisors, program champions, training sessions, office hours, and monitoring of adoption barriers.</a:t>
-            </a:r>
-            <a:endParaRPr lang="en-US" sz="1420" dirty="0"/>
+              <a:t>AI adoption changes how people work, make decisions, document actions, communicate with partners, and understand their roles.</a:t>
+            </a:r>
+            <a:endParaRPr lang="en-US" sz="1250" dirty="0"/>
+          </a:p>
+        </p:txBody>
+      </p:sp>
+      <p:sp>
+        <p:nvSpPr>
+          <p:cNvPr id="14" name="Shape 12"/>
+          <p:cNvSpPr/>
+          <p:nvPr/>
+        </p:nvSpPr>
+        <p:spPr>
+          <a:xfrm>
+            <a:off x="7909560" y="3520440"/>
+            <a:ext cx="3154680" cy="1737360"/>
+          </a:xfrm>
+          <a:prstGeom prst="roundRect">
+            <a:avLst>
+              <a:gd name="adj" fmla="val 6316"/>
+            </a:avLst>
+          </a:prstGeom>
+          <a:solidFill>
+            <a:srgbClr val="EAF6F8"/>
+          </a:solidFill>
+          <a:ln w="12700">
+            <a:solidFill>
+              <a:srgbClr val="B9D7E6"/>
+            </a:solidFill>
+            <a:prstDash val="solid"/>
+          </a:ln>
+        </p:spPr>
+      </p:sp>
+      <p:sp>
+        <p:nvSpPr>
+          <p:cNvPr id="15" name="Text 13"/>
+          <p:cNvSpPr/>
+          <p:nvPr/>
+        </p:nvSpPr>
+        <p:spPr>
+          <a:xfrm>
+            <a:off x="8074152" y="3666744"/>
+            <a:ext cx="2825496" cy="201168"/>
+          </a:xfrm>
+          <a:prstGeom prst="rect">
+            <a:avLst/>
+          </a:prstGeom>
+          <a:noFill/>
+          <a:ln/>
+        </p:spPr>
+        <p:txBody>
+          <a:bodyPr wrap="square" lIns="0" tIns="0" rIns="0" bIns="0" rtlCol="0" anchor="ctr"/>
+          <a:lstStyle/>
+          <a:p>
+            <a:pPr indent="0" marL="0">
+              <a:buNone/>
+            </a:pPr>
+            <a:r>
+              <a:rPr lang="en-US" sz="950" b="1" dirty="0">
+                <a:solidFill>
+                  <a:srgbClr val="0068B7"/>
+                </a:solidFill>
+                <a:latin typeface="Aptos" pitchFamily="34" charset="0"/>
+                <a:ea typeface="Aptos" pitchFamily="34" charset="-122"/>
+                <a:cs typeface="Aptos" pitchFamily="34" charset="-120"/>
+              </a:rPr>
+              <a:t>Use this for</a:t>
+            </a:r>
+            <a:endParaRPr lang="en-US" sz="950" dirty="0"/>
+          </a:p>
+        </p:txBody>
+      </p:sp>
+      <p:sp>
+        <p:nvSpPr>
+          <p:cNvPr id="16" name="Text 14"/>
+          <p:cNvSpPr/>
+          <p:nvPr/>
+        </p:nvSpPr>
+        <p:spPr>
+          <a:xfrm>
+            <a:off x="8074152" y="3959352"/>
+            <a:ext cx="2825496" cy="1170432"/>
+          </a:xfrm>
+          <a:prstGeom prst="rect">
+            <a:avLst/>
+          </a:prstGeom>
+          <a:noFill/>
+          <a:ln/>
+        </p:spPr>
+        <p:txBody>
+          <a:bodyPr wrap="square" lIns="0" tIns="0" rIns="0" bIns="0" rtlCol="0" anchor="t">
+            <a:normAutofit/>
+          </a:bodyPr>
+          <a:lstStyle/>
+          <a:p>
+            <a:pPr indent="0" marL="0">
+              <a:buNone/>
+            </a:pPr>
+            <a:r>
+              <a:rPr lang="en-US" sz="1250" dirty="0">
+                <a:solidFill>
+                  <a:srgbClr val="17364A"/>
+                </a:solidFill>
+                <a:latin typeface="Aptos" pitchFamily="34" charset="0"/>
+                <a:ea typeface="Aptos" pitchFamily="34" charset="-122"/>
+                <a:cs typeface="Aptos" pitchFamily="34" charset="-120"/>
+              </a:rPr>
+              <a:t>Connect the concept to public health decisions, safeguards, documentation, or implementation work.</a:t>
+            </a:r>
+            <a:endParaRPr lang="en-US" sz="1250" dirty="0"/>
           </a:p>
         </p:txBody>
       </p:sp>
@@ -6498,7 +11969,32 @@
       </p:sp>
       <p:sp>
         <p:nvSpPr>
-          <p:cNvPr id="3" name="Text 1"/>
+          <p:cNvPr id="3" name="Shape 1"/>
+          <p:cNvSpPr/>
+          <p:nvPr/>
+        </p:nvSpPr>
+        <p:spPr>
+          <a:xfrm>
+            <a:off x="0" y="164592"/>
+            <a:ext cx="146304" cy="6693408"/>
+          </a:xfrm>
+          <a:prstGeom prst="rect">
+            <a:avLst/>
+          </a:prstGeom>
+          <a:solidFill>
+            <a:srgbClr val="2F8A28"/>
+          </a:solidFill>
+          <a:ln w="12700">
+            <a:solidFill>
+              <a:srgbClr val="2F8A28"/>
+            </a:solidFill>
+            <a:prstDash val="solid"/>
+          </a:ln>
+        </p:spPr>
+      </p:sp>
+      <p:sp>
+        <p:nvSpPr>
+          <p:cNvPr id="4" name="Text 2"/>
           <p:cNvSpPr/>
           <p:nvPr/>
         </p:nvSpPr>
@@ -6537,7 +12033,7 @@
       </p:sp>
       <p:sp>
         <p:nvSpPr>
-          <p:cNvPr id="4" name="Text 2"/>
+          <p:cNvPr id="5" name="Text 3"/>
           <p:cNvSpPr/>
           <p:nvPr/>
         </p:nvSpPr>
@@ -6576,7 +12072,7 @@
       </p:sp>
       <p:sp>
         <p:nvSpPr>
-          <p:cNvPr id="5" name="Text 3"/>
+          <p:cNvPr id="6" name="Text 4"/>
           <p:cNvSpPr/>
           <p:nvPr/>
         </p:nvSpPr>
@@ -6615,13 +12111,77 @@
       </p:sp>
       <p:sp>
         <p:nvSpPr>
-          <p:cNvPr id="6" name="Text 4"/>
+          <p:cNvPr id="7" name="Shape 5"/>
           <p:cNvSpPr/>
           <p:nvPr/>
         </p:nvSpPr>
         <p:spPr>
           <a:xfrm>
             <a:off x="640080" y="658368"/>
+            <a:ext cx="420624" cy="420624"/>
+          </a:xfrm>
+          <a:prstGeom prst="ellipse">
+            <a:avLst/>
+          </a:prstGeom>
+          <a:solidFill>
+            <a:srgbClr val="0068B7"/>
+          </a:solidFill>
+          <a:ln w="12700">
+            <a:solidFill>
+              <a:srgbClr val="0068B7"/>
+            </a:solidFill>
+            <a:prstDash val="solid"/>
+          </a:ln>
+        </p:spPr>
+      </p:sp>
+      <p:sp>
+        <p:nvSpPr>
+          <p:cNvPr id="8" name="Text 6"/>
+          <p:cNvSpPr/>
+          <p:nvPr/>
+        </p:nvSpPr>
+        <p:spPr>
+          <a:xfrm>
+            <a:off x="640080" y="731520"/>
+            <a:ext cx="420624" cy="164592"/>
+          </a:xfrm>
+          <a:prstGeom prst="rect">
+            <a:avLst/>
+          </a:prstGeom>
+          <a:noFill/>
+          <a:ln/>
+        </p:spPr>
+        <p:txBody>
+          <a:bodyPr wrap="square" lIns="0" tIns="0" rIns="0" bIns="0" rtlCol="0" anchor="ctr"/>
+          <a:lstStyle/>
+          <a:p>
+            <a:pPr algn="ctr" indent="0" marL="0">
+              <a:buNone/>
+            </a:pPr>
+            <a:r>
+              <a:rPr lang="en-US" sz="1100" b="1" dirty="0">
+                <a:solidFill>
+                  <a:srgbClr val="FFFFFF"/>
+                </a:solidFill>
+                <a:latin typeface="Aptos" pitchFamily="34" charset="0"/>
+                <a:ea typeface="Aptos" pitchFamily="34" charset="-122"/>
+                <a:cs typeface="Aptos" pitchFamily="34" charset="-120"/>
+              </a:rPr>
+              <a:t>3</a:t>
+            </a:r>
+            <a:endParaRPr lang="en-US" sz="1100" dirty="0"/>
+          </a:p>
+        </p:txBody>
+      </p:sp>
+      <p:sp>
+        <p:nvSpPr>
+          <p:cNvPr id="9" name="Text 7"/>
+          <p:cNvSpPr/>
+          <p:nvPr/>
+        </p:nvSpPr>
+        <p:spPr>
+          <a:xfrm>
+            <a:off x="640080" y="621792"/>
             <a:ext cx="10881360" cy="566928"/>
           </a:xfrm>
           <a:prstGeom prst="rect">
@@ -6648,7 +12208,7 @@
                 <a:ea typeface="Aptos Display" pitchFamily="34" charset="-122"/>
                 <a:cs typeface="Aptos Display" pitchFamily="34" charset="-120"/>
               </a:rPr>
-              <a:t>Technical and Governance Deep Dive</a:t>
+              <a:t>Why This Topic Matters for Public Health AI</a:t>
             </a:r>
             <a:endParaRPr lang="en-US" sz="2700" dirty="0"/>
           </a:p>
@@ -6656,32 +12216,178 @@
       </p:sp>
       <p:sp>
         <p:nvSpPr>
-          <p:cNvPr id="7" name="Text 5"/>
-          <p:cNvSpPr/>
-          <p:nvPr/>
-        </p:nvSpPr>
-        <p:spPr>
-          <a:xfrm>
-            <a:off x="822960" y="1325880"/>
-            <a:ext cx="10378440" cy="4800600"/>
-          </a:xfrm>
-          <a:prstGeom prst="rect">
-            <a:avLst/>
-          </a:prstGeom>
-          <a:noFill/>
-          <a:ln/>
-        </p:spPr>
-        <p:txBody>
-          <a:bodyPr wrap="square" lIns="1016" tIns="1016" rIns="1016" bIns="1016" rtlCol="0" anchor="t">
+          <p:cNvPr id="10" name="Text 8"/>
+          <p:cNvSpPr/>
+          <p:nvPr/>
+        </p:nvSpPr>
+        <p:spPr>
+          <a:xfrm>
+            <a:off x="868680" y="1417320"/>
+            <a:ext cx="6675120" cy="4434840"/>
+          </a:xfrm>
+          <a:prstGeom prst="rect">
+            <a:avLst/>
+          </a:prstGeom>
+          <a:noFill/>
+          <a:ln/>
+        </p:spPr>
+        <p:txBody>
+          <a:bodyPr wrap="square" lIns="635" tIns="635" rIns="635" bIns="635" rtlCol="0" anchor="t">
             <a:normAutofit/>
           </a:bodyPr>
           <a:lstStyle/>
           <a:p>
+            <a:r>
+              <a:rPr lang="en-US" sz="1700" dirty="0">
+                <a:solidFill>
+                  <a:srgbClr val="17364A"/>
+                </a:solidFill>
+                <a:latin typeface="Aptos" pitchFamily="34" charset="0"/>
+                <a:ea typeface="Aptos" pitchFamily="34" charset="-122"/>
+                <a:cs typeface="Aptos" pitchFamily="34" charset="-120"/>
+              </a:rPr>
+              <a:t>AI tools may fail even when the technology works because the organization is not ready to use them.</a:t>
+            </a:r>
+            <a:endParaRPr lang="en-US" sz="1700" dirty="0"/>
+          </a:p>
+          <a:p>
+            <a:r>
+              <a:rPr lang="en-US" sz="1700" dirty="0">
+                <a:solidFill>
+                  <a:srgbClr val="17364A"/>
+                </a:solidFill>
+                <a:latin typeface="Aptos" pitchFamily="34" charset="0"/>
+                <a:ea typeface="Aptos" pitchFamily="34" charset="-122"/>
+                <a:cs typeface="Aptos" pitchFamily="34" charset="-120"/>
+              </a:rPr>
+              <a:t>Staff may not trust the output, may over-trust it, may not understand their review responsibilities, or may develop.</a:t>
+            </a:r>
+            <a:endParaRPr lang="en-US" sz="1700" dirty="0"/>
+          </a:p>
+          <a:p>
+            <a:r>
+              <a:rPr lang="en-US" sz="1700" dirty="0">
+                <a:solidFill>
+                  <a:srgbClr val="17364A"/>
+                </a:solidFill>
+                <a:latin typeface="Aptos" pitchFamily="34" charset="0"/>
+                <a:ea typeface="Aptos" pitchFamily="34" charset="-122"/>
+                <a:cs typeface="Aptos" pitchFamily="34" charset="-120"/>
+              </a:rPr>
+              <a:t>Leaders may underestimate the time needed for training, workflow redesign, and user feedback.</a:t>
+            </a:r>
+            <a:endParaRPr lang="en-US" sz="1700" dirty="0"/>
+          </a:p>
+          <a:p>
+            <a:r>
+              <a:rPr lang="en-US" sz="1700" dirty="0">
+                <a:solidFill>
+                  <a:srgbClr val="17364A"/>
+                </a:solidFill>
+                <a:latin typeface="Aptos" pitchFamily="34" charset="0"/>
+                <a:ea typeface="Aptos" pitchFamily="34" charset="-122"/>
+                <a:cs typeface="Aptos" pitchFamily="34" charset="-120"/>
+              </a:rPr>
+              <a:t>Change management is also an equity and workforce issue.</a:t>
+            </a:r>
+            <a:endParaRPr lang="en-US" sz="1700" dirty="0"/>
+          </a:p>
+        </p:txBody>
+      </p:sp>
+      <p:sp>
+        <p:nvSpPr>
+          <p:cNvPr id="11" name="Shape 9"/>
+          <p:cNvSpPr/>
+          <p:nvPr/>
+        </p:nvSpPr>
+        <p:spPr>
+          <a:xfrm>
+            <a:off x="7909560" y="1417320"/>
+            <a:ext cx="3154680" cy="1828800"/>
+          </a:xfrm>
+          <a:prstGeom prst="roundRect">
+            <a:avLst>
+              <a:gd name="adj" fmla="val 6000"/>
+            </a:avLst>
+          </a:prstGeom>
+          <a:solidFill>
+            <a:srgbClr val="EEF8ED"/>
+          </a:solidFill>
+          <a:ln w="12700">
+            <a:solidFill>
+              <a:srgbClr val="B9D7E6"/>
+            </a:solidFill>
+            <a:prstDash val="solid"/>
+          </a:ln>
+        </p:spPr>
+      </p:sp>
+      <p:sp>
+        <p:nvSpPr>
+          <p:cNvPr id="12" name="Text 10"/>
+          <p:cNvSpPr/>
+          <p:nvPr/>
+        </p:nvSpPr>
+        <p:spPr>
+          <a:xfrm>
+            <a:off x="8074152" y="1563624"/>
+            <a:ext cx="2825496" cy="201168"/>
+          </a:xfrm>
+          <a:prstGeom prst="rect">
+            <a:avLst/>
+          </a:prstGeom>
+          <a:noFill/>
+          <a:ln/>
+        </p:spPr>
+        <p:txBody>
+          <a:bodyPr wrap="square" lIns="0" tIns="0" rIns="0" bIns="0" rtlCol="0" anchor="ctr"/>
+          <a:lstStyle/>
+          <a:p>
             <a:pPr indent="0" marL="0">
               <a:buNone/>
             </a:pPr>
             <a:r>
-              <a:rPr lang="en-US" sz="1420" dirty="0">
+              <a:rPr lang="en-US" sz="950" b="1" dirty="0">
+                <a:solidFill>
+                  <a:srgbClr val="0068B7"/>
+                </a:solidFill>
+                <a:latin typeface="Aptos" pitchFamily="34" charset="0"/>
+                <a:ea typeface="Aptos" pitchFamily="34" charset="-122"/>
+                <a:cs typeface="Aptos" pitchFamily="34" charset="-120"/>
+              </a:rPr>
+              <a:t>Key idea</a:t>
+            </a:r>
+            <a:endParaRPr lang="en-US" sz="950" dirty="0"/>
+          </a:p>
+        </p:txBody>
+      </p:sp>
+      <p:sp>
+        <p:nvSpPr>
+          <p:cNvPr id="13" name="Text 11"/>
+          <p:cNvSpPr/>
+          <p:nvPr/>
+        </p:nvSpPr>
+        <p:spPr>
+          <a:xfrm>
+            <a:off x="8074152" y="1856232"/>
+            <a:ext cx="2825496" cy="1261872"/>
+          </a:xfrm>
+          <a:prstGeom prst="rect">
+            <a:avLst/>
+          </a:prstGeom>
+          <a:noFill/>
+          <a:ln/>
+        </p:spPr>
+        <p:txBody>
+          <a:bodyPr wrap="square" lIns="0" tIns="0" rIns="0" bIns="0" rtlCol="0" anchor="t">
+            <a:normAutofit/>
+          </a:bodyPr>
+          <a:lstStyle/>
+          <a:p>
+            <a:pPr indent="0" marL="0">
+              <a:buNone/>
+            </a:pPr>
+            <a:r>
+              <a:rPr lang="en-US" sz="1250" dirty="0">
                 <a:solidFill>
                   <a:srgbClr val="17364A"/>
                 </a:solidFill>
@@ -6689,9 +12395,116 @@
                 <a:ea typeface="Aptos" pitchFamily="34" charset="-122"/>
                 <a:cs typeface="Aptos" pitchFamily="34" charset="-120"/>
               </a:rPr>
-              <a:t>AI change management should begin before procurement or configuration. Leaders should identify who will be affected, what pain points the tool is supposed to address, which workflows will change, and what staff need to learn. Stakeholder engagement should include frontline users, supervisors, program leaders, IT, privacy, legal, communications, equity staff, and where appropriate, community representatives. The communication plan should be specific. Staff need to know what the tool does, what it does not do, why the agency is using it, what data may be entered, what outputs require review, and how errors should be reported. Communication should also acknowledge uncertainty. Overselling AI can damage trust when limitations become visible. Under-explaining AI can lead to rumors, resistance, or unsafe use. Training should be tied to workflow. Generic AI literacy is not enough. Users need role-specific examples, review criteria, escalation scenarios, documentation expectations, and practice with realistic outputs. Supervisors need to know how to reinforce appropriate use and respond to concerns. Change management should continue after launch through feedback, monitoring, and iterative improvement.</a:t>
-            </a:r>
-            <a:endParaRPr lang="en-US" sz="1420" dirty="0"/>
+              <a:t>AI tools may fail even when the technology works because the organization is not ready to use them.</a:t>
+            </a:r>
+            <a:endParaRPr lang="en-US" sz="1250" dirty="0"/>
+          </a:p>
+        </p:txBody>
+      </p:sp>
+      <p:sp>
+        <p:nvSpPr>
+          <p:cNvPr id="14" name="Shape 12"/>
+          <p:cNvSpPr/>
+          <p:nvPr/>
+        </p:nvSpPr>
+        <p:spPr>
+          <a:xfrm>
+            <a:off x="7909560" y="3520440"/>
+            <a:ext cx="3154680" cy="1737360"/>
+          </a:xfrm>
+          <a:prstGeom prst="roundRect">
+            <a:avLst>
+              <a:gd name="adj" fmla="val 6316"/>
+            </a:avLst>
+          </a:prstGeom>
+          <a:solidFill>
+            <a:srgbClr val="EAF6F8"/>
+          </a:solidFill>
+          <a:ln w="12700">
+            <a:solidFill>
+              <a:srgbClr val="B9D7E6"/>
+            </a:solidFill>
+            <a:prstDash val="solid"/>
+          </a:ln>
+        </p:spPr>
+      </p:sp>
+      <p:sp>
+        <p:nvSpPr>
+          <p:cNvPr id="15" name="Text 13"/>
+          <p:cNvSpPr/>
+          <p:nvPr/>
+        </p:nvSpPr>
+        <p:spPr>
+          <a:xfrm>
+            <a:off x="8074152" y="3666744"/>
+            <a:ext cx="2825496" cy="201168"/>
+          </a:xfrm>
+          <a:prstGeom prst="rect">
+            <a:avLst/>
+          </a:prstGeom>
+          <a:noFill/>
+          <a:ln/>
+        </p:spPr>
+        <p:txBody>
+          <a:bodyPr wrap="square" lIns="0" tIns="0" rIns="0" bIns="0" rtlCol="0" anchor="ctr"/>
+          <a:lstStyle/>
+          <a:p>
+            <a:pPr indent="0" marL="0">
+              <a:buNone/>
+            </a:pPr>
+            <a:r>
+              <a:rPr lang="en-US" sz="950" b="1" dirty="0">
+                <a:solidFill>
+                  <a:srgbClr val="0068B7"/>
+                </a:solidFill>
+                <a:latin typeface="Aptos" pitchFamily="34" charset="0"/>
+                <a:ea typeface="Aptos" pitchFamily="34" charset="-122"/>
+                <a:cs typeface="Aptos" pitchFamily="34" charset="-120"/>
+              </a:rPr>
+              <a:t>Use this for</a:t>
+            </a:r>
+            <a:endParaRPr lang="en-US" sz="950" dirty="0"/>
+          </a:p>
+        </p:txBody>
+      </p:sp>
+      <p:sp>
+        <p:nvSpPr>
+          <p:cNvPr id="16" name="Text 14"/>
+          <p:cNvSpPr/>
+          <p:nvPr/>
+        </p:nvSpPr>
+        <p:spPr>
+          <a:xfrm>
+            <a:off x="8074152" y="3959352"/>
+            <a:ext cx="2825496" cy="1170432"/>
+          </a:xfrm>
+          <a:prstGeom prst="rect">
+            <a:avLst/>
+          </a:prstGeom>
+          <a:noFill/>
+          <a:ln/>
+        </p:spPr>
+        <p:txBody>
+          <a:bodyPr wrap="square" lIns="0" tIns="0" rIns="0" bIns="0" rtlCol="0" anchor="t">
+            <a:normAutofit/>
+          </a:bodyPr>
+          <a:lstStyle/>
+          <a:p>
+            <a:pPr indent="0" marL="0">
+              <a:buNone/>
+            </a:pPr>
+            <a:r>
+              <a:rPr lang="en-US" sz="1250" dirty="0">
+                <a:solidFill>
+                  <a:srgbClr val="17364A"/>
+                </a:solidFill>
+                <a:latin typeface="Aptos" pitchFamily="34" charset="0"/>
+                <a:ea typeface="Aptos" pitchFamily="34" charset="-122"/>
+                <a:cs typeface="Aptos" pitchFamily="34" charset="-120"/>
+              </a:rPr>
+              <a:t>Connect the concept to public health decisions, safeguards, documentation, or implementation work.</a:t>
+            </a:r>
+            <a:endParaRPr lang="en-US" sz="1250" dirty="0"/>
           </a:p>
         </p:txBody>
       </p:sp>
@@ -6754,7 +12567,32 @@
       </p:sp>
       <p:sp>
         <p:nvSpPr>
-          <p:cNvPr id="3" name="Text 1"/>
+          <p:cNvPr id="3" name="Shape 1"/>
+          <p:cNvSpPr/>
+          <p:nvPr/>
+        </p:nvSpPr>
+        <p:spPr>
+          <a:xfrm>
+            <a:off x="0" y="164592"/>
+            <a:ext cx="146304" cy="6693408"/>
+          </a:xfrm>
+          <a:prstGeom prst="rect">
+            <a:avLst/>
+          </a:prstGeom>
+          <a:solidFill>
+            <a:srgbClr val="2F8A28"/>
+          </a:solidFill>
+          <a:ln w="12700">
+            <a:solidFill>
+              <a:srgbClr val="2F8A28"/>
+            </a:solidFill>
+            <a:prstDash val="solid"/>
+          </a:ln>
+        </p:spPr>
+      </p:sp>
+      <p:sp>
+        <p:nvSpPr>
+          <p:cNvPr id="4" name="Text 2"/>
           <p:cNvSpPr/>
           <p:nvPr/>
         </p:nvSpPr>
@@ -6793,7 +12631,7 @@
       </p:sp>
       <p:sp>
         <p:nvSpPr>
-          <p:cNvPr id="4" name="Text 2"/>
+          <p:cNvPr id="5" name="Text 3"/>
           <p:cNvSpPr/>
           <p:nvPr/>
         </p:nvSpPr>
@@ -6832,7 +12670,7 @@
       </p:sp>
       <p:sp>
         <p:nvSpPr>
-          <p:cNvPr id="5" name="Text 3"/>
+          <p:cNvPr id="6" name="Text 4"/>
           <p:cNvSpPr/>
           <p:nvPr/>
         </p:nvSpPr>
@@ -6871,13 +12709,77 @@
       </p:sp>
       <p:sp>
         <p:nvSpPr>
-          <p:cNvPr id="6" name="Text 4"/>
+          <p:cNvPr id="7" name="Shape 5"/>
           <p:cNvSpPr/>
           <p:nvPr/>
         </p:nvSpPr>
         <p:spPr>
           <a:xfrm>
             <a:off x="640080" y="658368"/>
+            <a:ext cx="420624" cy="420624"/>
+          </a:xfrm>
+          <a:prstGeom prst="ellipse">
+            <a:avLst/>
+          </a:prstGeom>
+          <a:solidFill>
+            <a:srgbClr val="0068B7"/>
+          </a:solidFill>
+          <a:ln w="12700">
+            <a:solidFill>
+              <a:srgbClr val="0068B7"/>
+            </a:solidFill>
+            <a:prstDash val="solid"/>
+          </a:ln>
+        </p:spPr>
+      </p:sp>
+      <p:sp>
+        <p:nvSpPr>
+          <p:cNvPr id="8" name="Text 6"/>
+          <p:cNvSpPr/>
+          <p:nvPr/>
+        </p:nvSpPr>
+        <p:spPr>
+          <a:xfrm>
+            <a:off x="640080" y="731520"/>
+            <a:ext cx="420624" cy="164592"/>
+          </a:xfrm>
+          <a:prstGeom prst="rect">
+            <a:avLst/>
+          </a:prstGeom>
+          <a:noFill/>
+          <a:ln/>
+        </p:spPr>
+        <p:txBody>
+          <a:bodyPr wrap="square" lIns="0" tIns="0" rIns="0" bIns="0" rtlCol="0" anchor="ctr"/>
+          <a:lstStyle/>
+          <a:p>
+            <a:pPr algn="ctr" indent="0" marL="0">
+              <a:buNone/>
+            </a:pPr>
+            <a:r>
+              <a:rPr lang="en-US" sz="1100" b="1" dirty="0">
+                <a:solidFill>
+                  <a:srgbClr val="FFFFFF"/>
+                </a:solidFill>
+                <a:latin typeface="Aptos" pitchFamily="34" charset="0"/>
+                <a:ea typeface="Aptos" pitchFamily="34" charset="-122"/>
+                <a:cs typeface="Aptos" pitchFamily="34" charset="-120"/>
+              </a:rPr>
+              <a:t>4</a:t>
+            </a:r>
+            <a:endParaRPr lang="en-US" sz="1100" dirty="0"/>
+          </a:p>
+        </p:txBody>
+      </p:sp>
+      <p:sp>
+        <p:nvSpPr>
+          <p:cNvPr id="9" name="Text 7"/>
+          <p:cNvSpPr/>
+          <p:nvPr/>
+        </p:nvSpPr>
+        <p:spPr>
+          <a:xfrm>
+            <a:off x="640080" y="621792"/>
             <a:ext cx="10881360" cy="566928"/>
           </a:xfrm>
           <a:prstGeom prst="rect">
@@ -6904,7 +12806,7 @@
                 <a:ea typeface="Aptos Display" pitchFamily="34" charset="-122"/>
                 <a:cs typeface="Aptos Display" pitchFamily="34" charset="-120"/>
               </a:rPr>
-              <a:t>Risks, Failure Modes, and Guardrails</a:t>
+              <a:t>Public Health Example</a:t>
             </a:r>
             <a:endParaRPr lang="en-US" sz="2700" dirty="0"/>
           </a:p>
@@ -6912,32 +12814,178 @@
       </p:sp>
       <p:sp>
         <p:nvSpPr>
-          <p:cNvPr id="7" name="Text 5"/>
-          <p:cNvSpPr/>
-          <p:nvPr/>
-        </p:nvSpPr>
-        <p:spPr>
-          <a:xfrm>
-            <a:off x="822960" y="1325880"/>
-            <a:ext cx="10378440" cy="4800600"/>
-          </a:xfrm>
-          <a:prstGeom prst="rect">
-            <a:avLst/>
-          </a:prstGeom>
-          <a:noFill/>
-          <a:ln/>
-        </p:spPr>
-        <p:txBody>
-          <a:bodyPr wrap="square" lIns="1016" tIns="1016" rIns="1016" bIns="1016" rtlCol="0" anchor="t">
+          <p:cNvPr id="10" name="Text 8"/>
+          <p:cNvSpPr/>
+          <p:nvPr/>
+        </p:nvSpPr>
+        <p:spPr>
+          <a:xfrm>
+            <a:off x="868680" y="1417320"/>
+            <a:ext cx="6675120" cy="4434840"/>
+          </a:xfrm>
+          <a:prstGeom prst="rect">
+            <a:avLst/>
+          </a:prstGeom>
+          <a:noFill/>
+          <a:ln/>
+        </p:spPr>
+        <p:txBody>
+          <a:bodyPr wrap="square" lIns="635" tIns="635" rIns="635" bIns="635" rtlCol="0" anchor="t">
             <a:normAutofit/>
           </a:bodyPr>
           <a:lstStyle/>
           <a:p>
+            <a:r>
+              <a:rPr lang="en-US" sz="1700" dirty="0">
+                <a:solidFill>
+                  <a:srgbClr val="17364A"/>
+                </a:solidFill>
+                <a:latin typeface="Aptos" pitchFamily="34" charset="0"/>
+                <a:ea typeface="Aptos" pitchFamily="34" charset="-122"/>
+                <a:cs typeface="Aptos" pitchFamily="34" charset="-120"/>
+              </a:rPr>
+              <a:t>A health department launches an AI assistant to help staff find internal policies and program guidance.</a:t>
+            </a:r>
+            <a:endParaRPr lang="en-US" sz="1700" dirty="0"/>
+          </a:p>
+          <a:p>
+            <a:r>
+              <a:rPr lang="en-US" sz="1700" dirty="0">
+                <a:solidFill>
+                  <a:srgbClr val="17364A"/>
+                </a:solidFill>
+                <a:latin typeface="Aptos" pitchFamily="34" charset="0"/>
+                <a:ea typeface="Aptos" pitchFamily="34" charset="-122"/>
+                <a:cs typeface="Aptos" pitchFamily="34" charset="-120"/>
+              </a:rPr>
+              <a:t>The tool is technically functional, but staff do not use it because they are unsure whether answers are official, whether.</a:t>
+            </a:r>
+            <a:endParaRPr lang="en-US" sz="1700" dirty="0"/>
+          </a:p>
+          <a:p>
+            <a:r>
+              <a:rPr lang="en-US" sz="1700" dirty="0">
+                <a:solidFill>
+                  <a:srgbClr val="17364A"/>
+                </a:solidFill>
+                <a:latin typeface="Aptos" pitchFamily="34" charset="0"/>
+                <a:ea typeface="Aptos" pitchFamily="34" charset="-122"/>
+                <a:cs typeface="Aptos" pitchFamily="34" charset="-120"/>
+              </a:rPr>
+              <a:t>Some staff worry that the tool will be used to judge their productivity.</a:t>
+            </a:r>
+            <a:endParaRPr lang="en-US" sz="1700" dirty="0"/>
+          </a:p>
+          <a:p>
+            <a:r>
+              <a:rPr lang="en-US" sz="1700" dirty="0">
+                <a:solidFill>
+                  <a:srgbClr val="17364A"/>
+                </a:solidFill>
+                <a:latin typeface="Aptos" pitchFamily="34" charset="0"/>
+                <a:ea typeface="Aptos" pitchFamily="34" charset="-122"/>
+                <a:cs typeface="Aptos" pitchFamily="34" charset="-120"/>
+              </a:rPr>
+              <a:t>A change management plan addresses these concerns directly.</a:t>
+            </a:r>
+            <a:endParaRPr lang="en-US" sz="1700" dirty="0"/>
+          </a:p>
+        </p:txBody>
+      </p:sp>
+      <p:sp>
+        <p:nvSpPr>
+          <p:cNvPr id="11" name="Shape 9"/>
+          <p:cNvSpPr/>
+          <p:nvPr/>
+        </p:nvSpPr>
+        <p:spPr>
+          <a:xfrm>
+            <a:off x="7909560" y="1417320"/>
+            <a:ext cx="3154680" cy="1828800"/>
+          </a:xfrm>
+          <a:prstGeom prst="roundRect">
+            <a:avLst>
+              <a:gd name="adj" fmla="val 6000"/>
+            </a:avLst>
+          </a:prstGeom>
+          <a:solidFill>
+            <a:srgbClr val="EEF8ED"/>
+          </a:solidFill>
+          <a:ln w="12700">
+            <a:solidFill>
+              <a:srgbClr val="B9D7E6"/>
+            </a:solidFill>
+            <a:prstDash val="solid"/>
+          </a:ln>
+        </p:spPr>
+      </p:sp>
+      <p:sp>
+        <p:nvSpPr>
+          <p:cNvPr id="12" name="Text 10"/>
+          <p:cNvSpPr/>
+          <p:nvPr/>
+        </p:nvSpPr>
+        <p:spPr>
+          <a:xfrm>
+            <a:off x="8074152" y="1563624"/>
+            <a:ext cx="2825496" cy="201168"/>
+          </a:xfrm>
+          <a:prstGeom prst="rect">
+            <a:avLst/>
+          </a:prstGeom>
+          <a:noFill/>
+          <a:ln/>
+        </p:spPr>
+        <p:txBody>
+          <a:bodyPr wrap="square" lIns="0" tIns="0" rIns="0" bIns="0" rtlCol="0" anchor="ctr"/>
+          <a:lstStyle/>
+          <a:p>
             <a:pPr indent="0" marL="0">
               <a:buNone/>
             </a:pPr>
             <a:r>
-              <a:rPr lang="en-US" sz="1420" dirty="0">
+              <a:rPr lang="en-US" sz="950" b="1" dirty="0">
+                <a:solidFill>
+                  <a:srgbClr val="0068B7"/>
+                </a:solidFill>
+                <a:latin typeface="Aptos" pitchFamily="34" charset="0"/>
+                <a:ea typeface="Aptos" pitchFamily="34" charset="-122"/>
+                <a:cs typeface="Aptos" pitchFamily="34" charset="-120"/>
+              </a:rPr>
+              <a:t>Key idea</a:t>
+            </a:r>
+            <a:endParaRPr lang="en-US" sz="950" dirty="0"/>
+          </a:p>
+        </p:txBody>
+      </p:sp>
+      <p:sp>
+        <p:nvSpPr>
+          <p:cNvPr id="13" name="Text 11"/>
+          <p:cNvSpPr/>
+          <p:nvPr/>
+        </p:nvSpPr>
+        <p:spPr>
+          <a:xfrm>
+            <a:off x="8074152" y="1856232"/>
+            <a:ext cx="2825496" cy="1261872"/>
+          </a:xfrm>
+          <a:prstGeom prst="rect">
+            <a:avLst/>
+          </a:prstGeom>
+          <a:noFill/>
+          <a:ln/>
+        </p:spPr>
+        <p:txBody>
+          <a:bodyPr wrap="square" lIns="0" tIns="0" rIns="0" bIns="0" rtlCol="0" anchor="t">
+            <a:normAutofit/>
+          </a:bodyPr>
+          <a:lstStyle/>
+          <a:p>
+            <a:pPr indent="0" marL="0">
+              <a:buNone/>
+            </a:pPr>
+            <a:r>
+              <a:rPr lang="en-US" sz="1250" dirty="0">
                 <a:solidFill>
                   <a:srgbClr val="17364A"/>
                 </a:solidFill>
@@ -6945,9 +12993,116 @@
                 <a:ea typeface="Aptos" pitchFamily="34" charset="-122"/>
                 <a:cs typeface="Aptos" pitchFamily="34" charset="-120"/>
               </a:rPr>
-              <a:t>One risk is adoption without understanding. Staff may use the tool incorrectly or treat outputs as authoritative because training was superficial. A guardrail is to require role-based training and workflow-specific practice before access is granted. Another risk is resistance caused by lack of transparency. If staff believe AI is being introduced to monitor or replace them, they may avoid or undermine the tool. A guardrail is to communicate purpose, boundaries, data practices, and workforce implications clearly and early.</a:t>
-            </a:r>
-            <a:endParaRPr lang="en-US" sz="1420" dirty="0"/>
+              <a:t>A health department launches an AI assistant to help staff find internal policies and program guidance.</a:t>
+            </a:r>
+            <a:endParaRPr lang="en-US" sz="1250" dirty="0"/>
+          </a:p>
+        </p:txBody>
+      </p:sp>
+      <p:sp>
+        <p:nvSpPr>
+          <p:cNvPr id="14" name="Shape 12"/>
+          <p:cNvSpPr/>
+          <p:nvPr/>
+        </p:nvSpPr>
+        <p:spPr>
+          <a:xfrm>
+            <a:off x="7909560" y="3520440"/>
+            <a:ext cx="3154680" cy="1737360"/>
+          </a:xfrm>
+          <a:prstGeom prst="roundRect">
+            <a:avLst>
+              <a:gd name="adj" fmla="val 6316"/>
+            </a:avLst>
+          </a:prstGeom>
+          <a:solidFill>
+            <a:srgbClr val="EAF6F8"/>
+          </a:solidFill>
+          <a:ln w="12700">
+            <a:solidFill>
+              <a:srgbClr val="B9D7E6"/>
+            </a:solidFill>
+            <a:prstDash val="solid"/>
+          </a:ln>
+        </p:spPr>
+      </p:sp>
+      <p:sp>
+        <p:nvSpPr>
+          <p:cNvPr id="15" name="Text 13"/>
+          <p:cNvSpPr/>
+          <p:nvPr/>
+        </p:nvSpPr>
+        <p:spPr>
+          <a:xfrm>
+            <a:off x="8074152" y="3666744"/>
+            <a:ext cx="2825496" cy="201168"/>
+          </a:xfrm>
+          <a:prstGeom prst="rect">
+            <a:avLst/>
+          </a:prstGeom>
+          <a:noFill/>
+          <a:ln/>
+        </p:spPr>
+        <p:txBody>
+          <a:bodyPr wrap="square" lIns="0" tIns="0" rIns="0" bIns="0" rtlCol="0" anchor="ctr"/>
+          <a:lstStyle/>
+          <a:p>
+            <a:pPr indent="0" marL="0">
+              <a:buNone/>
+            </a:pPr>
+            <a:r>
+              <a:rPr lang="en-US" sz="950" b="1" dirty="0">
+                <a:solidFill>
+                  <a:srgbClr val="0068B7"/>
+                </a:solidFill>
+                <a:latin typeface="Aptos" pitchFamily="34" charset="0"/>
+                <a:ea typeface="Aptos" pitchFamily="34" charset="-122"/>
+                <a:cs typeface="Aptos" pitchFamily="34" charset="-120"/>
+              </a:rPr>
+              <a:t>Use this for</a:t>
+            </a:r>
+            <a:endParaRPr lang="en-US" sz="950" dirty="0"/>
+          </a:p>
+        </p:txBody>
+      </p:sp>
+      <p:sp>
+        <p:nvSpPr>
+          <p:cNvPr id="16" name="Text 14"/>
+          <p:cNvSpPr/>
+          <p:nvPr/>
+        </p:nvSpPr>
+        <p:spPr>
+          <a:xfrm>
+            <a:off x="8074152" y="3959352"/>
+            <a:ext cx="2825496" cy="1170432"/>
+          </a:xfrm>
+          <a:prstGeom prst="rect">
+            <a:avLst/>
+          </a:prstGeom>
+          <a:noFill/>
+          <a:ln/>
+        </p:spPr>
+        <p:txBody>
+          <a:bodyPr wrap="square" lIns="0" tIns="0" rIns="0" bIns="0" rtlCol="0" anchor="t">
+            <a:normAutofit/>
+          </a:bodyPr>
+          <a:lstStyle/>
+          <a:p>
+            <a:pPr indent="0" marL="0">
+              <a:buNone/>
+            </a:pPr>
+            <a:r>
+              <a:rPr lang="en-US" sz="1250" dirty="0">
+                <a:solidFill>
+                  <a:srgbClr val="17364A"/>
+                </a:solidFill>
+                <a:latin typeface="Aptos" pitchFamily="34" charset="0"/>
+                <a:ea typeface="Aptos" pitchFamily="34" charset="-122"/>
+                <a:cs typeface="Aptos" pitchFamily="34" charset="-120"/>
+              </a:rPr>
+              <a:t>Connect the concept to public health decisions, safeguards, documentation, or implementation work.</a:t>
+            </a:r>
+            <a:endParaRPr lang="en-US" sz="1250" dirty="0"/>
           </a:p>
         </p:txBody>
       </p:sp>
@@ -7010,7 +13165,32 @@
       </p:sp>
       <p:sp>
         <p:nvSpPr>
-          <p:cNvPr id="3" name="Text 1"/>
+          <p:cNvPr id="3" name="Shape 1"/>
+          <p:cNvSpPr/>
+          <p:nvPr/>
+        </p:nvSpPr>
+        <p:spPr>
+          <a:xfrm>
+            <a:off x="0" y="164592"/>
+            <a:ext cx="146304" cy="6693408"/>
+          </a:xfrm>
+          <a:prstGeom prst="rect">
+            <a:avLst/>
+          </a:prstGeom>
+          <a:solidFill>
+            <a:srgbClr val="2F8A28"/>
+          </a:solidFill>
+          <a:ln w="12700">
+            <a:solidFill>
+              <a:srgbClr val="2F8A28"/>
+            </a:solidFill>
+            <a:prstDash val="solid"/>
+          </a:ln>
+        </p:spPr>
+      </p:sp>
+      <p:sp>
+        <p:nvSpPr>
+          <p:cNvPr id="4" name="Text 2"/>
           <p:cNvSpPr/>
           <p:nvPr/>
         </p:nvSpPr>
@@ -7049,7 +13229,7 @@
       </p:sp>
       <p:sp>
         <p:nvSpPr>
-          <p:cNvPr id="4" name="Text 2"/>
+          <p:cNvPr id="5" name="Text 3"/>
           <p:cNvSpPr/>
           <p:nvPr/>
         </p:nvSpPr>
@@ -7088,7 +13268,7 @@
       </p:sp>
       <p:sp>
         <p:nvSpPr>
-          <p:cNvPr id="5" name="Text 3"/>
+          <p:cNvPr id="6" name="Text 4"/>
           <p:cNvSpPr/>
           <p:nvPr/>
         </p:nvSpPr>
@@ -7127,13 +13307,77 @@
       </p:sp>
       <p:sp>
         <p:nvSpPr>
-          <p:cNvPr id="6" name="Text 4"/>
+          <p:cNvPr id="7" name="Shape 5"/>
           <p:cNvSpPr/>
           <p:nvPr/>
         </p:nvSpPr>
         <p:spPr>
           <a:xfrm>
             <a:off x="640080" y="658368"/>
+            <a:ext cx="420624" cy="420624"/>
+          </a:xfrm>
+          <a:prstGeom prst="ellipse">
+            <a:avLst/>
+          </a:prstGeom>
+          <a:solidFill>
+            <a:srgbClr val="0068B7"/>
+          </a:solidFill>
+          <a:ln w="12700">
+            <a:solidFill>
+              <a:srgbClr val="0068B7"/>
+            </a:solidFill>
+            <a:prstDash val="solid"/>
+          </a:ln>
+        </p:spPr>
+      </p:sp>
+      <p:sp>
+        <p:nvSpPr>
+          <p:cNvPr id="8" name="Text 6"/>
+          <p:cNvSpPr/>
+          <p:nvPr/>
+        </p:nvSpPr>
+        <p:spPr>
+          <a:xfrm>
+            <a:off x="640080" y="731520"/>
+            <a:ext cx="420624" cy="164592"/>
+          </a:xfrm>
+          <a:prstGeom prst="rect">
+            <a:avLst/>
+          </a:prstGeom>
+          <a:noFill/>
+          <a:ln/>
+        </p:spPr>
+        <p:txBody>
+          <a:bodyPr wrap="square" lIns="0" tIns="0" rIns="0" bIns="0" rtlCol="0" anchor="ctr"/>
+          <a:lstStyle/>
+          <a:p>
+            <a:pPr algn="ctr" indent="0" marL="0">
+              <a:buNone/>
+            </a:pPr>
+            <a:r>
+              <a:rPr lang="en-US" sz="1100" b="1" dirty="0">
+                <a:solidFill>
+                  <a:srgbClr val="FFFFFF"/>
+                </a:solidFill>
+                <a:latin typeface="Aptos" pitchFamily="34" charset="0"/>
+                <a:ea typeface="Aptos" pitchFamily="34" charset="-122"/>
+                <a:cs typeface="Aptos" pitchFamily="34" charset="-120"/>
+              </a:rPr>
+              <a:t>5</a:t>
+            </a:r>
+            <a:endParaRPr lang="en-US" sz="1100" dirty="0"/>
+          </a:p>
+        </p:txBody>
+      </p:sp>
+      <p:sp>
+        <p:nvSpPr>
+          <p:cNvPr id="9" name="Text 7"/>
+          <p:cNvSpPr/>
+          <p:nvPr/>
+        </p:nvSpPr>
+        <p:spPr>
+          <a:xfrm>
+            <a:off x="640080" y="621792"/>
             <a:ext cx="10881360" cy="566928"/>
           </a:xfrm>
           <a:prstGeom prst="rect">
@@ -7160,7 +13404,7 @@
                 <a:ea typeface="Aptos Display" pitchFamily="34" charset="-122"/>
                 <a:cs typeface="Aptos Display" pitchFamily="34" charset="-120"/>
               </a:rPr>
-              <a:t>Application to AI-Supported Workflows</a:t>
+              <a:t>Technical and Governance Deep Dive</a:t>
             </a:r>
             <a:endParaRPr lang="en-US" sz="2700" dirty="0"/>
           </a:p>
@@ -7168,32 +13412,178 @@
       </p:sp>
       <p:sp>
         <p:nvSpPr>
-          <p:cNvPr id="7" name="Text 5"/>
-          <p:cNvSpPr/>
-          <p:nvPr/>
-        </p:nvSpPr>
-        <p:spPr>
-          <a:xfrm>
-            <a:off x="822960" y="1325880"/>
-            <a:ext cx="10378440" cy="4800600"/>
-          </a:xfrm>
-          <a:prstGeom prst="rect">
-            <a:avLst/>
-          </a:prstGeom>
-          <a:noFill/>
-          <a:ln/>
-        </p:spPr>
-        <p:txBody>
-          <a:bodyPr wrap="square" lIns="1016" tIns="1016" rIns="1016" bIns="1016" rtlCol="0" anchor="t">
+          <p:cNvPr id="10" name="Text 8"/>
+          <p:cNvSpPr/>
+          <p:nvPr/>
+        </p:nvSpPr>
+        <p:spPr>
+          <a:xfrm>
+            <a:off x="868680" y="1417320"/>
+            <a:ext cx="6675120" cy="4434840"/>
+          </a:xfrm>
+          <a:prstGeom prst="rect">
+            <a:avLst/>
+          </a:prstGeom>
+          <a:noFill/>
+          <a:ln/>
+        </p:spPr>
+        <p:txBody>
+          <a:bodyPr wrap="square" lIns="635" tIns="635" rIns="635" bIns="635" rtlCol="0" anchor="t">
             <a:normAutofit/>
           </a:bodyPr>
           <a:lstStyle/>
           <a:p>
+            <a:r>
+              <a:rPr lang="en-US" sz="1700" dirty="0">
+                <a:solidFill>
+                  <a:srgbClr val="17364A"/>
+                </a:solidFill>
+                <a:latin typeface="Aptos" pitchFamily="34" charset="0"/>
+                <a:ea typeface="Aptos" pitchFamily="34" charset="-122"/>
+                <a:cs typeface="Aptos" pitchFamily="34" charset="-120"/>
+              </a:rPr>
+              <a:t>AI change management should begin before procurement or configuration.</a:t>
+            </a:r>
+            <a:endParaRPr lang="en-US" sz="1700" dirty="0"/>
+          </a:p>
+          <a:p>
+            <a:r>
+              <a:rPr lang="en-US" sz="1700" dirty="0">
+                <a:solidFill>
+                  <a:srgbClr val="17364A"/>
+                </a:solidFill>
+                <a:latin typeface="Aptos" pitchFamily="34" charset="0"/>
+                <a:ea typeface="Aptos" pitchFamily="34" charset="-122"/>
+                <a:cs typeface="Aptos" pitchFamily="34" charset="-120"/>
+              </a:rPr>
+              <a:t>Leaders should identify who will be affected, what pain points the tool is supposed to address, which workflows will.</a:t>
+            </a:r>
+            <a:endParaRPr lang="en-US" sz="1700" dirty="0"/>
+          </a:p>
+          <a:p>
+            <a:r>
+              <a:rPr lang="en-US" sz="1700" dirty="0">
+                <a:solidFill>
+                  <a:srgbClr val="17364A"/>
+                </a:solidFill>
+                <a:latin typeface="Aptos" pitchFamily="34" charset="0"/>
+                <a:ea typeface="Aptos" pitchFamily="34" charset="-122"/>
+                <a:cs typeface="Aptos" pitchFamily="34" charset="-120"/>
+              </a:rPr>
+              <a:t>Stakeholder engagement should include frontline users, supervisors, program leaders, IT, privacy, legal, communications,.</a:t>
+            </a:r>
+            <a:endParaRPr lang="en-US" sz="1700" dirty="0"/>
+          </a:p>
+          <a:p>
+            <a:r>
+              <a:rPr lang="en-US" sz="1700" dirty="0">
+                <a:solidFill>
+                  <a:srgbClr val="17364A"/>
+                </a:solidFill>
+                <a:latin typeface="Aptos" pitchFamily="34" charset="0"/>
+                <a:ea typeface="Aptos" pitchFamily="34" charset="-122"/>
+                <a:cs typeface="Aptos" pitchFamily="34" charset="-120"/>
+              </a:rPr>
+              <a:t>The communication plan should be specific.</a:t>
+            </a:r>
+            <a:endParaRPr lang="en-US" sz="1700" dirty="0"/>
+          </a:p>
+        </p:txBody>
+      </p:sp>
+      <p:sp>
+        <p:nvSpPr>
+          <p:cNvPr id="11" name="Shape 9"/>
+          <p:cNvSpPr/>
+          <p:nvPr/>
+        </p:nvSpPr>
+        <p:spPr>
+          <a:xfrm>
+            <a:off x="7909560" y="1417320"/>
+            <a:ext cx="3154680" cy="1828800"/>
+          </a:xfrm>
+          <a:prstGeom prst="roundRect">
+            <a:avLst>
+              <a:gd name="adj" fmla="val 6000"/>
+            </a:avLst>
+          </a:prstGeom>
+          <a:solidFill>
+            <a:srgbClr val="EEF8ED"/>
+          </a:solidFill>
+          <a:ln w="12700">
+            <a:solidFill>
+              <a:srgbClr val="B9D7E6"/>
+            </a:solidFill>
+            <a:prstDash val="solid"/>
+          </a:ln>
+        </p:spPr>
+      </p:sp>
+      <p:sp>
+        <p:nvSpPr>
+          <p:cNvPr id="12" name="Text 10"/>
+          <p:cNvSpPr/>
+          <p:nvPr/>
+        </p:nvSpPr>
+        <p:spPr>
+          <a:xfrm>
+            <a:off x="8074152" y="1563624"/>
+            <a:ext cx="2825496" cy="201168"/>
+          </a:xfrm>
+          <a:prstGeom prst="rect">
+            <a:avLst/>
+          </a:prstGeom>
+          <a:noFill/>
+          <a:ln/>
+        </p:spPr>
+        <p:txBody>
+          <a:bodyPr wrap="square" lIns="0" tIns="0" rIns="0" bIns="0" rtlCol="0" anchor="ctr"/>
+          <a:lstStyle/>
+          <a:p>
             <a:pPr indent="0" marL="0">
               <a:buNone/>
             </a:pPr>
             <a:r>
-              <a:rPr lang="en-US" sz="1420" dirty="0">
+              <a:rPr lang="en-US" sz="950" b="1" dirty="0">
+                <a:solidFill>
+                  <a:srgbClr val="0068B7"/>
+                </a:solidFill>
+                <a:latin typeface="Aptos" pitchFamily="34" charset="0"/>
+                <a:ea typeface="Aptos" pitchFamily="34" charset="-122"/>
+                <a:cs typeface="Aptos" pitchFamily="34" charset="-120"/>
+              </a:rPr>
+              <a:t>Key idea</a:t>
+            </a:r>
+            <a:endParaRPr lang="en-US" sz="950" dirty="0"/>
+          </a:p>
+        </p:txBody>
+      </p:sp>
+      <p:sp>
+        <p:nvSpPr>
+          <p:cNvPr id="13" name="Text 11"/>
+          <p:cNvSpPr/>
+          <p:nvPr/>
+        </p:nvSpPr>
+        <p:spPr>
+          <a:xfrm>
+            <a:off x="8074152" y="1856232"/>
+            <a:ext cx="2825496" cy="1261872"/>
+          </a:xfrm>
+          <a:prstGeom prst="rect">
+            <a:avLst/>
+          </a:prstGeom>
+          <a:noFill/>
+          <a:ln/>
+        </p:spPr>
+        <p:txBody>
+          <a:bodyPr wrap="square" lIns="0" tIns="0" rIns="0" bIns="0" rtlCol="0" anchor="t">
+            <a:normAutofit/>
+          </a:bodyPr>
+          <a:lstStyle/>
+          <a:p>
+            <a:pPr indent="0" marL="0">
+              <a:buNone/>
+            </a:pPr>
+            <a:r>
+              <a:rPr lang="en-US" sz="1250" dirty="0">
                 <a:solidFill>
                   <a:srgbClr val="17364A"/>
                 </a:solidFill>
@@ -7201,9 +13591,116 @@
                 <a:ea typeface="Aptos" pitchFamily="34" charset="-122"/>
                 <a:cs typeface="Aptos" pitchFamily="34" charset="-120"/>
               </a:rPr>
-              <a:t>Generative AI adoption requires training on review, citation, privacy, and public records. Predictive analytics adoption requires training on interpretation, limitations, and override documentation. Agentic workflow adoption requires training on approvals, stop procedures, and escalation. Each AI type changes work in different ways, so change management must be specific.</a:t>
-            </a:r>
-            <a:endParaRPr lang="en-US" sz="1420" dirty="0"/>
+              <a:t>AI change management should begin before procurement or configuration.</a:t>
+            </a:r>
+            <a:endParaRPr lang="en-US" sz="1250" dirty="0"/>
+          </a:p>
+        </p:txBody>
+      </p:sp>
+      <p:sp>
+        <p:nvSpPr>
+          <p:cNvPr id="14" name="Shape 12"/>
+          <p:cNvSpPr/>
+          <p:nvPr/>
+        </p:nvSpPr>
+        <p:spPr>
+          <a:xfrm>
+            <a:off x="7909560" y="3520440"/>
+            <a:ext cx="3154680" cy="1737360"/>
+          </a:xfrm>
+          <a:prstGeom prst="roundRect">
+            <a:avLst>
+              <a:gd name="adj" fmla="val 6316"/>
+            </a:avLst>
+          </a:prstGeom>
+          <a:solidFill>
+            <a:srgbClr val="EAF6F8"/>
+          </a:solidFill>
+          <a:ln w="12700">
+            <a:solidFill>
+              <a:srgbClr val="B9D7E6"/>
+            </a:solidFill>
+            <a:prstDash val="solid"/>
+          </a:ln>
+        </p:spPr>
+      </p:sp>
+      <p:sp>
+        <p:nvSpPr>
+          <p:cNvPr id="15" name="Text 13"/>
+          <p:cNvSpPr/>
+          <p:nvPr/>
+        </p:nvSpPr>
+        <p:spPr>
+          <a:xfrm>
+            <a:off x="8074152" y="3666744"/>
+            <a:ext cx="2825496" cy="201168"/>
+          </a:xfrm>
+          <a:prstGeom prst="rect">
+            <a:avLst/>
+          </a:prstGeom>
+          <a:noFill/>
+          <a:ln/>
+        </p:spPr>
+        <p:txBody>
+          <a:bodyPr wrap="square" lIns="0" tIns="0" rIns="0" bIns="0" rtlCol="0" anchor="ctr"/>
+          <a:lstStyle/>
+          <a:p>
+            <a:pPr indent="0" marL="0">
+              <a:buNone/>
+            </a:pPr>
+            <a:r>
+              <a:rPr lang="en-US" sz="950" b="1" dirty="0">
+                <a:solidFill>
+                  <a:srgbClr val="0068B7"/>
+                </a:solidFill>
+                <a:latin typeface="Aptos" pitchFamily="34" charset="0"/>
+                <a:ea typeface="Aptos" pitchFamily="34" charset="-122"/>
+                <a:cs typeface="Aptos" pitchFamily="34" charset="-120"/>
+              </a:rPr>
+              <a:t>Use this for</a:t>
+            </a:r>
+            <a:endParaRPr lang="en-US" sz="950" dirty="0"/>
+          </a:p>
+        </p:txBody>
+      </p:sp>
+      <p:sp>
+        <p:nvSpPr>
+          <p:cNvPr id="16" name="Text 14"/>
+          <p:cNvSpPr/>
+          <p:nvPr/>
+        </p:nvSpPr>
+        <p:spPr>
+          <a:xfrm>
+            <a:off x="8074152" y="3959352"/>
+            <a:ext cx="2825496" cy="1170432"/>
+          </a:xfrm>
+          <a:prstGeom prst="rect">
+            <a:avLst/>
+          </a:prstGeom>
+          <a:noFill/>
+          <a:ln/>
+        </p:spPr>
+        <p:txBody>
+          <a:bodyPr wrap="square" lIns="0" tIns="0" rIns="0" bIns="0" rtlCol="0" anchor="t">
+            <a:normAutofit/>
+          </a:bodyPr>
+          <a:lstStyle/>
+          <a:p>
+            <a:pPr indent="0" marL="0">
+              <a:buNone/>
+            </a:pPr>
+            <a:r>
+              <a:rPr lang="en-US" sz="1250" dirty="0">
+                <a:solidFill>
+                  <a:srgbClr val="17364A"/>
+                </a:solidFill>
+                <a:latin typeface="Aptos" pitchFamily="34" charset="0"/>
+                <a:ea typeface="Aptos" pitchFamily="34" charset="-122"/>
+                <a:cs typeface="Aptos" pitchFamily="34" charset="-120"/>
+              </a:rPr>
+              <a:t>Connect the concept to public health decisions, safeguards, documentation, or implementation work.</a:t>
+            </a:r>
+            <a:endParaRPr lang="en-US" sz="1250" dirty="0"/>
           </a:p>
         </p:txBody>
       </p:sp>

--- a/downloads/presentations/modules/lesson-35-organizational-change-management-for-ai-adoption.pptx
+++ b/downloads/presentations/modules/lesson-35-organizational-change-management-for-ai-adoption.pptx
@@ -2810,6 +2810,45 @@
           </a:p>
         </p:txBody>
       </p:sp>
+      <p:sp>
+        <p:nvSpPr>
+          <p:cNvPr id="8" name="Text 5"/>
+          <p:cNvSpPr/>
+          <p:nvPr/>
+        </p:nvSpPr>
+        <p:spPr>
+          <a:xfrm>
+            <a:off x="11137392" y="6510528"/>
+            <a:ext cx="411480" cy="201168"/>
+          </a:xfrm>
+          <a:prstGeom prst="rect">
+            <a:avLst/>
+          </a:prstGeom>
+          <a:noFill/>
+          <a:ln/>
+        </p:spPr>
+        <p:txBody>
+          <a:bodyPr wrap="square" lIns="0" tIns="0" rIns="0" bIns="0" rtlCol="0" anchor="ctr"/>
+          <a:lstStyle/>
+          <a:p>
+            <a:pPr algn="r" indent="0" marL="0">
+              <a:buNone/>
+            </a:pPr>
+            <a:r>
+              <a:rPr lang="en-US" sz="900" dirty="0">
+                <a:solidFill>
+                  <a:srgbClr val="5F7181"/>
+                </a:solidFill>
+                <a:latin typeface="Aptos" pitchFamily="34" charset="0"/>
+                <a:ea typeface="Aptos" pitchFamily="34" charset="-122"/>
+                <a:cs typeface="Aptos" pitchFamily="34" charset="-120"/>
+              </a:rPr>
+              <a:t>1</a:t>
+            </a:r>
+            <a:endParaRPr lang="en-US" sz="900" dirty="0"/>
+          </a:p>
+        </p:txBody>
+      </p:sp>
     </p:spTree>
   </p:cSld>
   <p:clrMapOvr>
@@ -3003,7 +3042,7 @@
                 <a:ea typeface="Aptos" pitchFamily="34" charset="-122"/>
                 <a:cs typeface="Aptos" pitchFamily="34" charset="-120"/>
               </a:rPr>
-              <a:t>© Paula Soper</a:t>
+              <a:t>Â© Paula Soper</a:t>
             </a:r>
             <a:endParaRPr lang="en-US" sz="800" dirty="0"/>
           </a:p>
@@ -3011,7 +3050,46 @@
       </p:sp>
       <p:sp>
         <p:nvSpPr>
-          <p:cNvPr id="7" name="Shape 5"/>
+          <p:cNvPr id="7" name="Text 5"/>
+          <p:cNvSpPr/>
+          <p:nvPr/>
+        </p:nvSpPr>
+        <p:spPr>
+          <a:xfrm>
+            <a:off x="11137392" y="6510528"/>
+            <a:ext cx="411480" cy="201168"/>
+          </a:xfrm>
+          <a:prstGeom prst="rect">
+            <a:avLst/>
+          </a:prstGeom>
+          <a:noFill/>
+          <a:ln/>
+        </p:spPr>
+        <p:txBody>
+          <a:bodyPr wrap="square" lIns="0" tIns="0" rIns="0" bIns="0" rtlCol="0" anchor="ctr"/>
+          <a:lstStyle/>
+          <a:p>
+            <a:pPr algn="r" indent="0" marL="0">
+              <a:buNone/>
+            </a:pPr>
+            <a:r>
+              <a:rPr lang="en-US" sz="900" dirty="0">
+                <a:solidFill>
+                  <a:srgbClr val="5F7181"/>
+                </a:solidFill>
+                <a:latin typeface="Aptos" pitchFamily="34" charset="0"/>
+                <a:ea typeface="Aptos" pitchFamily="34" charset="-122"/>
+                <a:cs typeface="Aptos" pitchFamily="34" charset="-120"/>
+              </a:rPr>
+              <a:t>10</a:t>
+            </a:r>
+            <a:endParaRPr lang="en-US" sz="900" dirty="0"/>
+          </a:p>
+        </p:txBody>
+      </p:sp>
+      <p:sp>
+        <p:nvSpPr>
+          <p:cNvPr id="8" name="Shape 6"/>
           <p:cNvSpPr/>
           <p:nvPr/>
         </p:nvSpPr>
@@ -3036,7 +3114,7 @@
       </p:sp>
       <p:sp>
         <p:nvSpPr>
-          <p:cNvPr id="8" name="Text 6"/>
+          <p:cNvPr id="9" name="Text 7"/>
           <p:cNvSpPr/>
           <p:nvPr/>
         </p:nvSpPr>
@@ -3075,14 +3153,14 @@
       </p:sp>
       <p:sp>
         <p:nvSpPr>
-          <p:cNvPr id="9" name="Text 7"/>
+          <p:cNvPr id="10" name="Text 8"/>
           <p:cNvSpPr/>
           <p:nvPr/>
         </p:nvSpPr>
         <p:spPr>
           <a:xfrm>
             <a:off x="640080" y="621792"/>
-            <a:ext cx="10881360" cy="566928"/>
+            <a:ext cx="10881360" cy="713232"/>
           </a:xfrm>
           <a:prstGeom prst="rect">
             <a:avLst/>
@@ -3100,7 +3178,7 @@
               <a:buNone/>
             </a:pPr>
             <a:r>
-              <a:rPr lang="en-US" sz="2700" b="1" dirty="0">
+              <a:rPr lang="en-US" sz="3400" b="1" dirty="0">
                 <a:solidFill>
                   <a:srgbClr val="003A63"/>
                 </a:solidFill>
@@ -3110,20 +3188,20 @@
               </a:rPr>
               <a:t>Risks, Failure Modes, and Guardrails</a:t>
             </a:r>
-            <a:endParaRPr lang="en-US" sz="2700" dirty="0"/>
-          </a:p>
-        </p:txBody>
-      </p:sp>
-      <p:sp>
-        <p:nvSpPr>
-          <p:cNvPr id="10" name="Text 8"/>
-          <p:cNvSpPr/>
-          <p:nvPr/>
-        </p:nvSpPr>
-        <p:spPr>
-          <a:xfrm>
-            <a:off x="868680" y="1417320"/>
-            <a:ext cx="6675120" cy="4434840"/>
+            <a:endParaRPr lang="en-US" sz="3400" dirty="0"/>
+          </a:p>
+        </p:txBody>
+      </p:sp>
+      <p:sp>
+        <p:nvSpPr>
+          <p:cNvPr id="11" name="Text 9"/>
+          <p:cNvSpPr/>
+          <p:nvPr/>
+        </p:nvSpPr>
+        <p:spPr>
+          <a:xfrm>
+            <a:off x="868680" y="1508760"/>
+            <a:ext cx="6537960" cy="4160520"/>
           </a:xfrm>
           <a:prstGeom prst="rect">
             <a:avLst/>
@@ -3138,7 +3216,7 @@
           <a:lstStyle/>
           <a:p>
             <a:r>
-              <a:rPr lang="en-US" sz="1700" dirty="0">
+              <a:rPr lang="en-US" sz="2100" dirty="0">
                 <a:solidFill>
                   <a:srgbClr val="17364A"/>
                 </a:solidFill>
@@ -3148,11 +3226,11 @@
               </a:rPr>
               <a:t>One risk is adoption without understanding.</a:t>
             </a:r>
-            <a:endParaRPr lang="en-US" sz="1700" dirty="0"/>
-          </a:p>
-          <a:p>
-            <a:r>
-              <a:rPr lang="en-US" sz="1700" dirty="0">
+            <a:endParaRPr lang="en-US" sz="2100" dirty="0"/>
+          </a:p>
+          <a:p>
+            <a:r>
+              <a:rPr lang="en-US" sz="2100" dirty="0">
                 <a:solidFill>
                   <a:srgbClr val="17364A"/>
                 </a:solidFill>
@@ -3162,11 +3240,11 @@
               </a:rPr>
               <a:t>Staff may use the tool incorrectly or treat outputs as authoritative because training was superficial.</a:t>
             </a:r>
-            <a:endParaRPr lang="en-US" sz="1700" dirty="0"/>
-          </a:p>
-          <a:p>
-            <a:r>
-              <a:rPr lang="en-US" sz="1700" dirty="0">
+            <a:endParaRPr lang="en-US" sz="2100" dirty="0"/>
+          </a:p>
+          <a:p>
+            <a:r>
+              <a:rPr lang="en-US" sz="2100" dirty="0">
                 <a:solidFill>
                   <a:srgbClr val="17364A"/>
                 </a:solidFill>
@@ -3176,27 +3254,13 @@
               </a:rPr>
               <a:t>A guardrail is to require role-based training and workflow-specific practice before access is granted.</a:t>
             </a:r>
-            <a:endParaRPr lang="en-US" sz="1700" dirty="0"/>
-          </a:p>
-          <a:p>
-            <a:r>
-              <a:rPr lang="en-US" sz="1700" dirty="0">
-                <a:solidFill>
-                  <a:srgbClr val="17364A"/>
-                </a:solidFill>
-                <a:latin typeface="Aptos" pitchFamily="34" charset="0"/>
-                <a:ea typeface="Aptos" pitchFamily="34" charset="-122"/>
-                <a:cs typeface="Aptos" pitchFamily="34" charset="-120"/>
-              </a:rPr>
-              <a:t>Another risk is resistance caused by lack of transparency.</a:t>
-            </a:r>
-            <a:endParaRPr lang="en-US" sz="1700" dirty="0"/>
-          </a:p>
-        </p:txBody>
-      </p:sp>
-      <p:sp>
-        <p:nvSpPr>
-          <p:cNvPr id="11" name="Shape 9"/>
+            <a:endParaRPr lang="en-US" sz="2100" dirty="0"/>
+          </a:p>
+        </p:txBody>
+      </p:sp>
+      <p:sp>
+        <p:nvSpPr>
+          <p:cNvPr id="12" name="Shape 10"/>
           <p:cNvSpPr/>
           <p:nvPr/>
         </p:nvSpPr>
@@ -3223,14 +3287,14 @@
       </p:sp>
       <p:sp>
         <p:nvSpPr>
-          <p:cNvPr id="12" name="Text 10"/>
+          <p:cNvPr id="13" name="Text 11"/>
           <p:cNvSpPr/>
           <p:nvPr/>
         </p:nvSpPr>
         <p:spPr>
           <a:xfrm>
             <a:off x="8074152" y="1563624"/>
-            <a:ext cx="2825496" cy="201168"/>
+            <a:ext cx="2825496" cy="256032"/>
           </a:xfrm>
           <a:prstGeom prst="rect">
             <a:avLst/>
@@ -3246,7 +3310,7 @@
               <a:buNone/>
             </a:pPr>
             <a:r>
-              <a:rPr lang="en-US" sz="950" b="1" dirty="0">
+              <a:rPr lang="en-US" sz="1300" b="1" dirty="0">
                 <a:solidFill>
                   <a:srgbClr val="0068B7"/>
                 </a:solidFill>
@@ -3256,20 +3320,20 @@
               </a:rPr>
               <a:t>Key idea</a:t>
             </a:r>
-            <a:endParaRPr lang="en-US" sz="950" dirty="0"/>
-          </a:p>
-        </p:txBody>
-      </p:sp>
-      <p:sp>
-        <p:nvSpPr>
-          <p:cNvPr id="13" name="Text 11"/>
-          <p:cNvSpPr/>
-          <p:nvPr/>
-        </p:nvSpPr>
-        <p:spPr>
-          <a:xfrm>
-            <a:off x="8074152" y="1856232"/>
-            <a:ext cx="2825496" cy="1261872"/>
+            <a:endParaRPr lang="en-US" sz="1300" dirty="0"/>
+          </a:p>
+        </p:txBody>
+      </p:sp>
+      <p:sp>
+        <p:nvSpPr>
+          <p:cNvPr id="14" name="Text 12"/>
+          <p:cNvSpPr/>
+          <p:nvPr/>
+        </p:nvSpPr>
+        <p:spPr>
+          <a:xfrm>
+            <a:off x="8074152" y="1920240"/>
+            <a:ext cx="2825496" cy="1188720"/>
           </a:xfrm>
           <a:prstGeom prst="rect">
             <a:avLst/>
@@ -3287,7 +3351,7 @@
               <a:buNone/>
             </a:pPr>
             <a:r>
-              <a:rPr lang="en-US" sz="1250" dirty="0">
+              <a:rPr lang="en-US" sz="1550" dirty="0">
                 <a:solidFill>
                   <a:srgbClr val="17364A"/>
                 </a:solidFill>
@@ -3297,13 +3361,13 @@
               </a:rPr>
               <a:t>One risk is adoption without understanding.</a:t>
             </a:r>
-            <a:endParaRPr lang="en-US" sz="1250" dirty="0"/>
-          </a:p>
-        </p:txBody>
-      </p:sp>
-      <p:sp>
-        <p:nvSpPr>
-          <p:cNvPr id="14" name="Shape 12"/>
+            <a:endParaRPr lang="en-US" sz="1550" dirty="0"/>
+          </a:p>
+        </p:txBody>
+      </p:sp>
+      <p:sp>
+        <p:nvSpPr>
+          <p:cNvPr id="15" name="Shape 13"/>
           <p:cNvSpPr/>
           <p:nvPr/>
         </p:nvSpPr>
@@ -3330,14 +3394,14 @@
       </p:sp>
       <p:sp>
         <p:nvSpPr>
-          <p:cNvPr id="15" name="Text 13"/>
+          <p:cNvPr id="16" name="Text 14"/>
           <p:cNvSpPr/>
           <p:nvPr/>
         </p:nvSpPr>
         <p:spPr>
           <a:xfrm>
             <a:off x="8074152" y="3666744"/>
-            <a:ext cx="2825496" cy="201168"/>
+            <a:ext cx="2825496" cy="256032"/>
           </a:xfrm>
           <a:prstGeom prst="rect">
             <a:avLst/>
@@ -3353,7 +3417,7 @@
               <a:buNone/>
             </a:pPr>
             <a:r>
-              <a:rPr lang="en-US" sz="950" b="1" dirty="0">
+              <a:rPr lang="en-US" sz="1300" b="1" dirty="0">
                 <a:solidFill>
                   <a:srgbClr val="0068B7"/>
                 </a:solidFill>
@@ -3363,20 +3427,20 @@
               </a:rPr>
               <a:t>Use this for</a:t>
             </a:r>
-            <a:endParaRPr lang="en-US" sz="950" dirty="0"/>
-          </a:p>
-        </p:txBody>
-      </p:sp>
-      <p:sp>
-        <p:nvSpPr>
-          <p:cNvPr id="16" name="Text 14"/>
-          <p:cNvSpPr/>
-          <p:nvPr/>
-        </p:nvSpPr>
-        <p:spPr>
-          <a:xfrm>
-            <a:off x="8074152" y="3959352"/>
-            <a:ext cx="2825496" cy="1170432"/>
+            <a:endParaRPr lang="en-US" sz="1300" dirty="0"/>
+          </a:p>
+        </p:txBody>
+      </p:sp>
+      <p:sp>
+        <p:nvSpPr>
+          <p:cNvPr id="17" name="Text 15"/>
+          <p:cNvSpPr/>
+          <p:nvPr/>
+        </p:nvSpPr>
+        <p:spPr>
+          <a:xfrm>
+            <a:off x="8074152" y="4023360"/>
+            <a:ext cx="2825496" cy="1097280"/>
           </a:xfrm>
           <a:prstGeom prst="rect">
             <a:avLst/>
@@ -3394,7 +3458,7 @@
               <a:buNone/>
             </a:pPr>
             <a:r>
-              <a:rPr lang="en-US" sz="1250" dirty="0">
+              <a:rPr lang="en-US" sz="1550" dirty="0">
                 <a:solidFill>
                   <a:srgbClr val="17364A"/>
                 </a:solidFill>
@@ -3404,7 +3468,7 @@
               </a:rPr>
               <a:t>Connect the concept to public health decisions, safeguards, documentation, or implementation work.</a:t>
             </a:r>
-            <a:endParaRPr lang="en-US" sz="1250" dirty="0"/>
+            <a:endParaRPr lang="en-US" sz="1550" dirty="0"/>
           </a:p>
         </p:txBody>
       </p:sp>
@@ -3601,7 +3665,7 @@
                 <a:ea typeface="Aptos" pitchFamily="34" charset="-122"/>
                 <a:cs typeface="Aptos" pitchFamily="34" charset="-120"/>
               </a:rPr>
-              <a:t>© Paula Soper</a:t>
+              <a:t>Â© Paula Soper</a:t>
             </a:r>
             <a:endParaRPr lang="en-US" sz="800" dirty="0"/>
           </a:p>
@@ -3609,7 +3673,46 @@
       </p:sp>
       <p:sp>
         <p:nvSpPr>
-          <p:cNvPr id="7" name="Shape 5"/>
+          <p:cNvPr id="7" name="Text 5"/>
+          <p:cNvSpPr/>
+          <p:nvPr/>
+        </p:nvSpPr>
+        <p:spPr>
+          <a:xfrm>
+            <a:off x="11137392" y="6510528"/>
+            <a:ext cx="411480" cy="201168"/>
+          </a:xfrm>
+          <a:prstGeom prst="rect">
+            <a:avLst/>
+          </a:prstGeom>
+          <a:noFill/>
+          <a:ln/>
+        </p:spPr>
+        <p:txBody>
+          <a:bodyPr wrap="square" lIns="0" tIns="0" rIns="0" bIns="0" rtlCol="0" anchor="ctr"/>
+          <a:lstStyle/>
+          <a:p>
+            <a:pPr algn="r" indent="0" marL="0">
+              <a:buNone/>
+            </a:pPr>
+            <a:r>
+              <a:rPr lang="en-US" sz="900" dirty="0">
+                <a:solidFill>
+                  <a:srgbClr val="5F7181"/>
+                </a:solidFill>
+                <a:latin typeface="Aptos" pitchFamily="34" charset="0"/>
+                <a:ea typeface="Aptos" pitchFamily="34" charset="-122"/>
+                <a:cs typeface="Aptos" pitchFamily="34" charset="-120"/>
+              </a:rPr>
+              <a:t>11</a:t>
+            </a:r>
+            <a:endParaRPr lang="en-US" sz="900" dirty="0"/>
+          </a:p>
+        </p:txBody>
+      </p:sp>
+      <p:sp>
+        <p:nvSpPr>
+          <p:cNvPr id="8" name="Shape 6"/>
           <p:cNvSpPr/>
           <p:nvPr/>
         </p:nvSpPr>
@@ -3634,7 +3737,7 @@
       </p:sp>
       <p:sp>
         <p:nvSpPr>
-          <p:cNvPr id="8" name="Text 6"/>
+          <p:cNvPr id="9" name="Text 7"/>
           <p:cNvSpPr/>
           <p:nvPr/>
         </p:nvSpPr>
@@ -3673,14 +3776,14 @@
       </p:sp>
       <p:sp>
         <p:nvSpPr>
-          <p:cNvPr id="9" name="Text 7"/>
+          <p:cNvPr id="10" name="Text 8"/>
           <p:cNvSpPr/>
           <p:nvPr/>
         </p:nvSpPr>
         <p:spPr>
           <a:xfrm>
             <a:off x="640080" y="621792"/>
-            <a:ext cx="10881360" cy="566928"/>
+            <a:ext cx="10881360" cy="713232"/>
           </a:xfrm>
           <a:prstGeom prst="rect">
             <a:avLst/>
@@ -3698,7 +3801,7 @@
               <a:buNone/>
             </a:pPr>
             <a:r>
-              <a:rPr lang="en-US" sz="2700" b="1" dirty="0">
+              <a:rPr lang="en-US" sz="3400" b="1" dirty="0">
                 <a:solidFill>
                   <a:srgbClr val="003A63"/>
                 </a:solidFill>
@@ -3708,20 +3811,20 @@
               </a:rPr>
               <a:t>Application to AI-Supported Workflows</a:t>
             </a:r>
-            <a:endParaRPr lang="en-US" sz="2700" dirty="0"/>
-          </a:p>
-        </p:txBody>
-      </p:sp>
-      <p:sp>
-        <p:nvSpPr>
-          <p:cNvPr id="10" name="Text 8"/>
-          <p:cNvSpPr/>
-          <p:nvPr/>
-        </p:nvSpPr>
-        <p:spPr>
-          <a:xfrm>
-            <a:off x="868680" y="1417320"/>
-            <a:ext cx="6675120" cy="4434840"/>
+            <a:endParaRPr lang="en-US" sz="3400" dirty="0"/>
+          </a:p>
+        </p:txBody>
+      </p:sp>
+      <p:sp>
+        <p:nvSpPr>
+          <p:cNvPr id="11" name="Text 9"/>
+          <p:cNvSpPr/>
+          <p:nvPr/>
+        </p:nvSpPr>
+        <p:spPr>
+          <a:xfrm>
+            <a:off x="868680" y="1508760"/>
+            <a:ext cx="6537960" cy="4160520"/>
           </a:xfrm>
           <a:prstGeom prst="rect">
             <a:avLst/>
@@ -3736,7 +3839,7 @@
           <a:lstStyle/>
           <a:p>
             <a:r>
-              <a:rPr lang="en-US" sz="1700" dirty="0">
+              <a:rPr lang="en-US" sz="2100" dirty="0">
                 <a:solidFill>
                   <a:srgbClr val="17364A"/>
                 </a:solidFill>
@@ -3746,11 +3849,11 @@
               </a:rPr>
               <a:t>Generative AI adoption requires training on review, citation, privacy, and public records.</a:t>
             </a:r>
-            <a:endParaRPr lang="en-US" sz="1700" dirty="0"/>
-          </a:p>
-          <a:p>
-            <a:r>
-              <a:rPr lang="en-US" sz="1700" dirty="0">
+            <a:endParaRPr lang="en-US" sz="2100" dirty="0"/>
+          </a:p>
+          <a:p>
+            <a:r>
+              <a:rPr lang="en-US" sz="2100" dirty="0">
                 <a:solidFill>
                   <a:srgbClr val="17364A"/>
                 </a:solidFill>
@@ -3758,13 +3861,13 @@
                 <a:ea typeface="Aptos" pitchFamily="34" charset="-122"/>
                 <a:cs typeface="Aptos" pitchFamily="34" charset="-120"/>
               </a:rPr>
-              <a:t>Predictive analytics adoption requires training on interpretation, limitations, and override documentation.</a:t>
-            </a:r>
-            <a:endParaRPr lang="en-US" sz="1700" dirty="0"/>
-          </a:p>
-          <a:p>
-            <a:r>
-              <a:rPr lang="en-US" sz="1700" dirty="0">
+              <a:t>Predictive analytics adoption requires training on interpretation, limitations, and override.</a:t>
+            </a:r>
+            <a:endParaRPr lang="en-US" sz="2100" dirty="0"/>
+          </a:p>
+          <a:p>
+            <a:r>
+              <a:rPr lang="en-US" sz="2100" dirty="0">
                 <a:solidFill>
                   <a:srgbClr val="17364A"/>
                 </a:solidFill>
@@ -3774,27 +3877,13 @@
               </a:rPr>
               <a:t>Agentic workflow adoption requires training on approvals, stop procedures, and escalation.</a:t>
             </a:r>
-            <a:endParaRPr lang="en-US" sz="1700" dirty="0"/>
-          </a:p>
-          <a:p>
-            <a:r>
-              <a:rPr lang="en-US" sz="1700" dirty="0">
-                <a:solidFill>
-                  <a:srgbClr val="17364A"/>
-                </a:solidFill>
-                <a:latin typeface="Aptos" pitchFamily="34" charset="0"/>
-                <a:ea typeface="Aptos" pitchFamily="34" charset="-122"/>
-                <a:cs typeface="Aptos" pitchFamily="34" charset="-120"/>
-              </a:rPr>
-              <a:t>Each AI type changes work in different ways, so change management must be specific.</a:t>
-            </a:r>
-            <a:endParaRPr lang="en-US" sz="1700" dirty="0"/>
-          </a:p>
-        </p:txBody>
-      </p:sp>
-      <p:sp>
-        <p:nvSpPr>
-          <p:cNvPr id="11" name="Shape 9"/>
+            <a:endParaRPr lang="en-US" sz="2100" dirty="0"/>
+          </a:p>
+        </p:txBody>
+      </p:sp>
+      <p:sp>
+        <p:nvSpPr>
+          <p:cNvPr id="12" name="Shape 10"/>
           <p:cNvSpPr/>
           <p:nvPr/>
         </p:nvSpPr>
@@ -3821,14 +3910,14 @@
       </p:sp>
       <p:sp>
         <p:nvSpPr>
-          <p:cNvPr id="12" name="Text 10"/>
+          <p:cNvPr id="13" name="Text 11"/>
           <p:cNvSpPr/>
           <p:nvPr/>
         </p:nvSpPr>
         <p:spPr>
           <a:xfrm>
             <a:off x="8074152" y="1563624"/>
-            <a:ext cx="2825496" cy="201168"/>
+            <a:ext cx="2825496" cy="256032"/>
           </a:xfrm>
           <a:prstGeom prst="rect">
             <a:avLst/>
@@ -3844,7 +3933,7 @@
               <a:buNone/>
             </a:pPr>
             <a:r>
-              <a:rPr lang="en-US" sz="950" b="1" dirty="0">
+              <a:rPr lang="en-US" sz="1300" b="1" dirty="0">
                 <a:solidFill>
                   <a:srgbClr val="0068B7"/>
                 </a:solidFill>
@@ -3854,20 +3943,20 @@
               </a:rPr>
               <a:t>Key idea</a:t>
             </a:r>
-            <a:endParaRPr lang="en-US" sz="950" dirty="0"/>
-          </a:p>
-        </p:txBody>
-      </p:sp>
-      <p:sp>
-        <p:nvSpPr>
-          <p:cNvPr id="13" name="Text 11"/>
-          <p:cNvSpPr/>
-          <p:nvPr/>
-        </p:nvSpPr>
-        <p:spPr>
-          <a:xfrm>
-            <a:off x="8074152" y="1856232"/>
-            <a:ext cx="2825496" cy="1261872"/>
+            <a:endParaRPr lang="en-US" sz="1300" dirty="0"/>
+          </a:p>
+        </p:txBody>
+      </p:sp>
+      <p:sp>
+        <p:nvSpPr>
+          <p:cNvPr id="14" name="Text 12"/>
+          <p:cNvSpPr/>
+          <p:nvPr/>
+        </p:nvSpPr>
+        <p:spPr>
+          <a:xfrm>
+            <a:off x="8074152" y="1920240"/>
+            <a:ext cx="2825496" cy="1188720"/>
           </a:xfrm>
           <a:prstGeom prst="rect">
             <a:avLst/>
@@ -3885,7 +3974,7 @@
               <a:buNone/>
             </a:pPr>
             <a:r>
-              <a:rPr lang="en-US" sz="1250" dirty="0">
+              <a:rPr lang="en-US" sz="1550" dirty="0">
                 <a:solidFill>
                   <a:srgbClr val="17364A"/>
                 </a:solidFill>
@@ -3895,13 +3984,13 @@
               </a:rPr>
               <a:t>Generative AI adoption requires training on review, citation, privacy, and public records.</a:t>
             </a:r>
-            <a:endParaRPr lang="en-US" sz="1250" dirty="0"/>
-          </a:p>
-        </p:txBody>
-      </p:sp>
-      <p:sp>
-        <p:nvSpPr>
-          <p:cNvPr id="14" name="Shape 12"/>
+            <a:endParaRPr lang="en-US" sz="1550" dirty="0"/>
+          </a:p>
+        </p:txBody>
+      </p:sp>
+      <p:sp>
+        <p:nvSpPr>
+          <p:cNvPr id="15" name="Shape 13"/>
           <p:cNvSpPr/>
           <p:nvPr/>
         </p:nvSpPr>
@@ -3928,14 +4017,14 @@
       </p:sp>
       <p:sp>
         <p:nvSpPr>
-          <p:cNvPr id="15" name="Text 13"/>
+          <p:cNvPr id="16" name="Text 14"/>
           <p:cNvSpPr/>
           <p:nvPr/>
         </p:nvSpPr>
         <p:spPr>
           <a:xfrm>
             <a:off x="8074152" y="3666744"/>
-            <a:ext cx="2825496" cy="201168"/>
+            <a:ext cx="2825496" cy="256032"/>
           </a:xfrm>
           <a:prstGeom prst="rect">
             <a:avLst/>
@@ -3951,7 +4040,7 @@
               <a:buNone/>
             </a:pPr>
             <a:r>
-              <a:rPr lang="en-US" sz="950" b="1" dirty="0">
+              <a:rPr lang="en-US" sz="1300" b="1" dirty="0">
                 <a:solidFill>
                   <a:srgbClr val="0068B7"/>
                 </a:solidFill>
@@ -3961,20 +4050,20 @@
               </a:rPr>
               <a:t>Use this for</a:t>
             </a:r>
-            <a:endParaRPr lang="en-US" sz="950" dirty="0"/>
-          </a:p>
-        </p:txBody>
-      </p:sp>
-      <p:sp>
-        <p:nvSpPr>
-          <p:cNvPr id="16" name="Text 14"/>
-          <p:cNvSpPr/>
-          <p:nvPr/>
-        </p:nvSpPr>
-        <p:spPr>
-          <a:xfrm>
-            <a:off x="8074152" y="3959352"/>
-            <a:ext cx="2825496" cy="1170432"/>
+            <a:endParaRPr lang="en-US" sz="1300" dirty="0"/>
+          </a:p>
+        </p:txBody>
+      </p:sp>
+      <p:sp>
+        <p:nvSpPr>
+          <p:cNvPr id="17" name="Text 15"/>
+          <p:cNvSpPr/>
+          <p:nvPr/>
+        </p:nvSpPr>
+        <p:spPr>
+          <a:xfrm>
+            <a:off x="8074152" y="4023360"/>
+            <a:ext cx="2825496" cy="1097280"/>
           </a:xfrm>
           <a:prstGeom prst="rect">
             <a:avLst/>
@@ -3992,7 +4081,7 @@
               <a:buNone/>
             </a:pPr>
             <a:r>
-              <a:rPr lang="en-US" sz="1250" dirty="0">
+              <a:rPr lang="en-US" sz="1550" dirty="0">
                 <a:solidFill>
                   <a:srgbClr val="17364A"/>
                 </a:solidFill>
@@ -4002,7 +4091,7 @@
               </a:rPr>
               <a:t>Connect the concept to public health decisions, safeguards, documentation, or implementation work.</a:t>
             </a:r>
-            <a:endParaRPr lang="en-US" sz="1250" dirty="0"/>
+            <a:endParaRPr lang="en-US" sz="1550" dirty="0"/>
           </a:p>
         </p:txBody>
       </p:sp>
@@ -4199,7 +4288,7 @@
                 <a:ea typeface="Aptos" pitchFamily="34" charset="-122"/>
                 <a:cs typeface="Aptos" pitchFamily="34" charset="-120"/>
               </a:rPr>
-              <a:t>© Paula Soper</a:t>
+              <a:t>Â© Paula Soper</a:t>
             </a:r>
             <a:endParaRPr lang="en-US" sz="800" dirty="0"/>
           </a:p>
@@ -4207,7 +4296,46 @@
       </p:sp>
       <p:sp>
         <p:nvSpPr>
-          <p:cNvPr id="7" name="Shape 5"/>
+          <p:cNvPr id="7" name="Text 5"/>
+          <p:cNvSpPr/>
+          <p:nvPr/>
+        </p:nvSpPr>
+        <p:spPr>
+          <a:xfrm>
+            <a:off x="11137392" y="6510528"/>
+            <a:ext cx="411480" cy="201168"/>
+          </a:xfrm>
+          <a:prstGeom prst="rect">
+            <a:avLst/>
+          </a:prstGeom>
+          <a:noFill/>
+          <a:ln/>
+        </p:spPr>
+        <p:txBody>
+          <a:bodyPr wrap="square" lIns="0" tIns="0" rIns="0" bIns="0" rtlCol="0" anchor="ctr"/>
+          <a:lstStyle/>
+          <a:p>
+            <a:pPr algn="r" indent="0" marL="0">
+              <a:buNone/>
+            </a:pPr>
+            <a:r>
+              <a:rPr lang="en-US" sz="900" dirty="0">
+                <a:solidFill>
+                  <a:srgbClr val="5F7181"/>
+                </a:solidFill>
+                <a:latin typeface="Aptos" pitchFamily="34" charset="0"/>
+                <a:ea typeface="Aptos" pitchFamily="34" charset="-122"/>
+                <a:cs typeface="Aptos" pitchFamily="34" charset="-120"/>
+              </a:rPr>
+              <a:t>12</a:t>
+            </a:r>
+            <a:endParaRPr lang="en-US" sz="900" dirty="0"/>
+          </a:p>
+        </p:txBody>
+      </p:sp>
+      <p:sp>
+        <p:nvSpPr>
+          <p:cNvPr id="8" name="Shape 6"/>
           <p:cNvSpPr/>
           <p:nvPr/>
         </p:nvSpPr>
@@ -4232,7 +4360,7 @@
       </p:sp>
       <p:sp>
         <p:nvSpPr>
-          <p:cNvPr id="8" name="Text 6"/>
+          <p:cNvPr id="9" name="Text 7"/>
           <p:cNvSpPr/>
           <p:nvPr/>
         </p:nvSpPr>
@@ -4271,14 +4399,14 @@
       </p:sp>
       <p:sp>
         <p:nvSpPr>
-          <p:cNvPr id="9" name="Text 7"/>
+          <p:cNvPr id="10" name="Text 8"/>
           <p:cNvSpPr/>
           <p:nvPr/>
         </p:nvSpPr>
         <p:spPr>
           <a:xfrm>
             <a:off x="640080" y="621792"/>
-            <a:ext cx="10881360" cy="566928"/>
+            <a:ext cx="10881360" cy="713232"/>
           </a:xfrm>
           <a:prstGeom prst="rect">
             <a:avLst/>
@@ -4296,7 +4424,7 @@
               <a:buNone/>
             </a:pPr>
             <a:r>
-              <a:rPr lang="en-US" sz="2700" b="1" dirty="0">
+              <a:rPr lang="en-US" sz="3400" b="1" dirty="0">
                 <a:solidFill>
                   <a:srgbClr val="003A63"/>
                 </a:solidFill>
@@ -4306,20 +4434,20 @@
               </a:rPr>
               <a:t>Reflection Questions</a:t>
             </a:r>
-            <a:endParaRPr lang="en-US" sz="2700" dirty="0"/>
-          </a:p>
-        </p:txBody>
-      </p:sp>
-      <p:sp>
-        <p:nvSpPr>
-          <p:cNvPr id="10" name="Text 8"/>
-          <p:cNvSpPr/>
-          <p:nvPr/>
-        </p:nvSpPr>
-        <p:spPr>
-          <a:xfrm>
-            <a:off x="868680" y="1417320"/>
-            <a:ext cx="6675120" cy="4434840"/>
+            <a:endParaRPr lang="en-US" sz="3400" dirty="0"/>
+          </a:p>
+        </p:txBody>
+      </p:sp>
+      <p:sp>
+        <p:nvSpPr>
+          <p:cNvPr id="11" name="Text 9"/>
+          <p:cNvSpPr/>
+          <p:nvPr/>
+        </p:nvSpPr>
+        <p:spPr>
+          <a:xfrm>
+            <a:off x="868680" y="1508760"/>
+            <a:ext cx="6537960" cy="4160520"/>
           </a:xfrm>
           <a:prstGeom prst="rect">
             <a:avLst/>
@@ -4334,7 +4462,7 @@
           <a:lstStyle/>
           <a:p>
             <a:r>
-              <a:rPr lang="en-US" sz="1700" dirty="0">
+              <a:rPr lang="en-US" sz="2100" dirty="0">
                 <a:solidFill>
                   <a:srgbClr val="17364A"/>
                 </a:solidFill>
@@ -4342,13 +4470,13 @@
                 <a:ea typeface="Aptos" pitchFamily="34" charset="-122"/>
                 <a:cs typeface="Aptos" pitchFamily="34" charset="-120"/>
               </a:rPr>
-              <a:t>Which current or proposed AI use case in your agency raises this leadership or governance issue most clearly?</a:t>
-            </a:r>
-            <a:endParaRPr lang="en-US" sz="1700" dirty="0"/>
-          </a:p>
-          <a:p>
-            <a:r>
-              <a:rPr lang="en-US" sz="1700" dirty="0">
+              <a:t>Which current or proposed AI use case in your agency raises this leadership or governance issue most.</a:t>
+            </a:r>
+            <a:endParaRPr lang="en-US" sz="2100" dirty="0"/>
+          </a:p>
+          <a:p>
+            <a:r>
+              <a:rPr lang="en-US" sz="2100" dirty="0">
                 <a:solidFill>
                   <a:srgbClr val="17364A"/>
                 </a:solidFill>
@@ -4358,11 +4486,11 @@
               </a:rPr>
               <a:t>Who currently has authority to make decisions about this issue, and is that authority documented?</a:t>
             </a:r>
-            <a:endParaRPr lang="en-US" sz="1700" dirty="0"/>
-          </a:p>
-          <a:p>
-            <a:r>
-              <a:rPr lang="en-US" sz="1700" dirty="0">
+            <a:endParaRPr lang="en-US" sz="2100" dirty="0"/>
+          </a:p>
+          <a:p>
+            <a:r>
+              <a:rPr lang="en-US" sz="2100" dirty="0">
                 <a:solidFill>
                   <a:srgbClr val="17364A"/>
                 </a:solidFill>
@@ -4372,13 +4500,13 @@
               </a:rPr>
               <a:t>What evidence would governance or leadership need before approving the use case?</a:t>
             </a:r>
-            <a:endParaRPr lang="en-US" sz="1700" dirty="0"/>
-          </a:p>
-        </p:txBody>
-      </p:sp>
-      <p:sp>
-        <p:nvSpPr>
-          <p:cNvPr id="11" name="Shape 9"/>
+            <a:endParaRPr lang="en-US" sz="2100" dirty="0"/>
+          </a:p>
+        </p:txBody>
+      </p:sp>
+      <p:sp>
+        <p:nvSpPr>
+          <p:cNvPr id="12" name="Shape 10"/>
           <p:cNvSpPr/>
           <p:nvPr/>
         </p:nvSpPr>
@@ -4405,14 +4533,14 @@
       </p:sp>
       <p:sp>
         <p:nvSpPr>
-          <p:cNvPr id="12" name="Text 10"/>
+          <p:cNvPr id="13" name="Text 11"/>
           <p:cNvSpPr/>
           <p:nvPr/>
         </p:nvSpPr>
         <p:spPr>
           <a:xfrm>
             <a:off x="8074152" y="1563624"/>
-            <a:ext cx="2825496" cy="201168"/>
+            <a:ext cx="2825496" cy="256032"/>
           </a:xfrm>
           <a:prstGeom prst="rect">
             <a:avLst/>
@@ -4428,7 +4556,7 @@
               <a:buNone/>
             </a:pPr>
             <a:r>
-              <a:rPr lang="en-US" sz="950" b="1" dirty="0">
+              <a:rPr lang="en-US" sz="1300" b="1" dirty="0">
                 <a:solidFill>
                   <a:srgbClr val="0068B7"/>
                 </a:solidFill>
@@ -4438,20 +4566,20 @@
               </a:rPr>
               <a:t>Key idea</a:t>
             </a:r>
-            <a:endParaRPr lang="en-US" sz="950" dirty="0"/>
-          </a:p>
-        </p:txBody>
-      </p:sp>
-      <p:sp>
-        <p:nvSpPr>
-          <p:cNvPr id="13" name="Text 11"/>
-          <p:cNvSpPr/>
-          <p:nvPr/>
-        </p:nvSpPr>
-        <p:spPr>
-          <a:xfrm>
-            <a:off x="8074152" y="1856232"/>
-            <a:ext cx="2825496" cy="1261872"/>
+            <a:endParaRPr lang="en-US" sz="1300" dirty="0"/>
+          </a:p>
+        </p:txBody>
+      </p:sp>
+      <p:sp>
+        <p:nvSpPr>
+          <p:cNvPr id="14" name="Text 12"/>
+          <p:cNvSpPr/>
+          <p:nvPr/>
+        </p:nvSpPr>
+        <p:spPr>
+          <a:xfrm>
+            <a:off x="8074152" y="1920240"/>
+            <a:ext cx="2825496" cy="1188720"/>
           </a:xfrm>
           <a:prstGeom prst="rect">
             <a:avLst/>
@@ -4469,7 +4597,7 @@
               <a:buNone/>
             </a:pPr>
             <a:r>
-              <a:rPr lang="en-US" sz="1250" dirty="0">
+              <a:rPr lang="en-US" sz="1550" dirty="0">
                 <a:solidFill>
                   <a:srgbClr val="17364A"/>
                 </a:solidFill>
@@ -4477,15 +4605,15 @@
                 <a:ea typeface="Aptos" pitchFamily="34" charset="-122"/>
                 <a:cs typeface="Aptos" pitchFamily="34" charset="-120"/>
               </a:rPr>
-              <a:t>Which current or proposed AI use case in your agency raises this leadership or governance issue most clearly?</a:t>
-            </a:r>
-            <a:endParaRPr lang="en-US" sz="1250" dirty="0"/>
-          </a:p>
-        </p:txBody>
-      </p:sp>
-      <p:sp>
-        <p:nvSpPr>
-          <p:cNvPr id="14" name="Shape 12"/>
+              <a:t>Which current or proposed AI use case in your agency raises this leadership or governance issue most.</a:t>
+            </a:r>
+            <a:endParaRPr lang="en-US" sz="1550" dirty="0"/>
+          </a:p>
+        </p:txBody>
+      </p:sp>
+      <p:sp>
+        <p:nvSpPr>
+          <p:cNvPr id="15" name="Shape 13"/>
           <p:cNvSpPr/>
           <p:nvPr/>
         </p:nvSpPr>
@@ -4512,14 +4640,14 @@
       </p:sp>
       <p:sp>
         <p:nvSpPr>
-          <p:cNvPr id="15" name="Text 13"/>
+          <p:cNvPr id="16" name="Text 14"/>
           <p:cNvSpPr/>
           <p:nvPr/>
         </p:nvSpPr>
         <p:spPr>
           <a:xfrm>
             <a:off x="8074152" y="3666744"/>
-            <a:ext cx="2825496" cy="201168"/>
+            <a:ext cx="2825496" cy="256032"/>
           </a:xfrm>
           <a:prstGeom prst="rect">
             <a:avLst/>
@@ -4535,7 +4663,7 @@
               <a:buNone/>
             </a:pPr>
             <a:r>
-              <a:rPr lang="en-US" sz="950" b="1" dirty="0">
+              <a:rPr lang="en-US" sz="1300" b="1" dirty="0">
                 <a:solidFill>
                   <a:srgbClr val="0068B7"/>
                 </a:solidFill>
@@ -4545,20 +4673,20 @@
               </a:rPr>
               <a:t>Use this for</a:t>
             </a:r>
-            <a:endParaRPr lang="en-US" sz="950" dirty="0"/>
-          </a:p>
-        </p:txBody>
-      </p:sp>
-      <p:sp>
-        <p:nvSpPr>
-          <p:cNvPr id="16" name="Text 14"/>
-          <p:cNvSpPr/>
-          <p:nvPr/>
-        </p:nvSpPr>
-        <p:spPr>
-          <a:xfrm>
-            <a:off x="8074152" y="3959352"/>
-            <a:ext cx="2825496" cy="1170432"/>
+            <a:endParaRPr lang="en-US" sz="1300" dirty="0"/>
+          </a:p>
+        </p:txBody>
+      </p:sp>
+      <p:sp>
+        <p:nvSpPr>
+          <p:cNvPr id="17" name="Text 15"/>
+          <p:cNvSpPr/>
+          <p:nvPr/>
+        </p:nvSpPr>
+        <p:spPr>
+          <a:xfrm>
+            <a:off x="8074152" y="4023360"/>
+            <a:ext cx="2825496" cy="1097280"/>
           </a:xfrm>
           <a:prstGeom prst="rect">
             <a:avLst/>
@@ -4576,7 +4704,7 @@
               <a:buNone/>
             </a:pPr>
             <a:r>
-              <a:rPr lang="en-US" sz="1250" dirty="0">
+              <a:rPr lang="en-US" sz="1550" dirty="0">
                 <a:solidFill>
                   <a:srgbClr val="17364A"/>
                 </a:solidFill>
@@ -4586,7 +4714,7 @@
               </a:rPr>
               <a:t>Connect the concept to public health decisions, safeguards, documentation, or implementation work.</a:t>
             </a:r>
-            <a:endParaRPr lang="en-US" sz="1250" dirty="0"/>
+            <a:endParaRPr lang="en-US" sz="1550" dirty="0"/>
           </a:p>
         </p:txBody>
       </p:sp>
@@ -4783,7 +4911,7 @@
                 <a:ea typeface="Aptos" pitchFamily="34" charset="-122"/>
                 <a:cs typeface="Aptos" pitchFamily="34" charset="-120"/>
               </a:rPr>
-              <a:t>© Paula Soper</a:t>
+              <a:t>Â© Paula Soper</a:t>
             </a:r>
             <a:endParaRPr lang="en-US" sz="800" dirty="0"/>
           </a:p>
@@ -4797,8 +4925,47 @@
         </p:nvSpPr>
         <p:spPr>
           <a:xfrm>
+            <a:off x="11137392" y="6510528"/>
+            <a:ext cx="411480" cy="201168"/>
+          </a:xfrm>
+          <a:prstGeom prst="rect">
+            <a:avLst/>
+          </a:prstGeom>
+          <a:noFill/>
+          <a:ln/>
+        </p:spPr>
+        <p:txBody>
+          <a:bodyPr wrap="square" lIns="0" tIns="0" rIns="0" bIns="0" rtlCol="0" anchor="ctr"/>
+          <a:lstStyle/>
+          <a:p>
+            <a:pPr algn="r" indent="0" marL="0">
+              <a:buNone/>
+            </a:pPr>
+            <a:r>
+              <a:rPr lang="en-US" sz="900" dirty="0">
+                <a:solidFill>
+                  <a:srgbClr val="5F7181"/>
+                </a:solidFill>
+                <a:latin typeface="Aptos" pitchFamily="34" charset="0"/>
+                <a:ea typeface="Aptos" pitchFamily="34" charset="-122"/>
+                <a:cs typeface="Aptos" pitchFamily="34" charset="-120"/>
+              </a:rPr>
+              <a:t>13</a:t>
+            </a:r>
+            <a:endParaRPr lang="en-US" sz="900" dirty="0"/>
+          </a:p>
+        </p:txBody>
+      </p:sp>
+      <p:sp>
+        <p:nvSpPr>
+          <p:cNvPr id="8" name="Text 6"/>
+          <p:cNvSpPr/>
+          <p:nvPr/>
+        </p:nvSpPr>
+        <p:spPr>
+          <a:xfrm>
             <a:off x="640080" y="658368"/>
-            <a:ext cx="10881360" cy="566928"/>
+            <a:ext cx="10881360" cy="713232"/>
           </a:xfrm>
           <a:prstGeom prst="rect">
             <a:avLst/>
@@ -4816,7 +4983,7 @@
               <a:buNone/>
             </a:pPr>
             <a:r>
-              <a:rPr lang="en-US" sz="2700" b="1" dirty="0">
+              <a:rPr lang="en-US" sz="3400" b="1" dirty="0">
                 <a:solidFill>
                   <a:srgbClr val="003A63"/>
                 </a:solidFill>
@@ -4826,20 +4993,20 @@
               </a:rPr>
               <a:t>Reflection Questions Continued</a:t>
             </a:r>
-            <a:endParaRPr lang="en-US" sz="2700" dirty="0"/>
-          </a:p>
-        </p:txBody>
-      </p:sp>
-      <p:sp>
-        <p:nvSpPr>
-          <p:cNvPr id="8" name="Text 6"/>
-          <p:cNvSpPr/>
-          <p:nvPr/>
-        </p:nvSpPr>
-        <p:spPr>
-          <a:xfrm>
-            <a:off x="868680" y="1417320"/>
-            <a:ext cx="6675120" cy="4434840"/>
+            <a:endParaRPr lang="en-US" sz="3400" dirty="0"/>
+          </a:p>
+        </p:txBody>
+      </p:sp>
+      <p:sp>
+        <p:nvSpPr>
+          <p:cNvPr id="9" name="Text 7"/>
+          <p:cNvSpPr/>
+          <p:nvPr/>
+        </p:nvSpPr>
+        <p:spPr>
+          <a:xfrm>
+            <a:off x="868680" y="1508760"/>
+            <a:ext cx="6537960" cy="4160520"/>
           </a:xfrm>
           <a:prstGeom prst="rect">
             <a:avLst/>
@@ -4854,7 +5021,7 @@
           <a:lstStyle/>
           <a:p>
             <a:r>
-              <a:rPr lang="en-US" sz="1700" dirty="0">
+              <a:rPr lang="en-US" sz="2100" dirty="0">
                 <a:solidFill>
                   <a:srgbClr val="17364A"/>
                 </a:solidFill>
@@ -4864,11 +5031,11 @@
               </a:rPr>
               <a:t>Which staff, partners, or communities would be affected if this issue were handled poorly?</a:t>
             </a:r>
-            <a:endParaRPr lang="en-US" sz="1700" dirty="0"/>
-          </a:p>
-          <a:p>
-            <a:r>
-              <a:rPr lang="en-US" sz="1700" dirty="0">
+            <a:endParaRPr lang="en-US" sz="2100" dirty="0"/>
+          </a:p>
+          <a:p>
+            <a:r>
+              <a:rPr lang="en-US" sz="2100" dirty="0">
                 <a:solidFill>
                   <a:srgbClr val="17364A"/>
                 </a:solidFill>
@@ -4878,13 +5045,13 @@
               </a:rPr>
               <a:t>What policy, process, or artifact should be created or updated after this module?</a:t>
             </a:r>
-            <a:endParaRPr lang="en-US" sz="1700" dirty="0"/>
-          </a:p>
-        </p:txBody>
-      </p:sp>
-      <p:sp>
-        <p:nvSpPr>
-          <p:cNvPr id="9" name="Shape 7"/>
+            <a:endParaRPr lang="en-US" sz="2100" dirty="0"/>
+          </a:p>
+        </p:txBody>
+      </p:sp>
+      <p:sp>
+        <p:nvSpPr>
+          <p:cNvPr id="10" name="Shape 8"/>
           <p:cNvSpPr/>
           <p:nvPr/>
         </p:nvSpPr>
@@ -4911,14 +5078,14 @@
       </p:sp>
       <p:sp>
         <p:nvSpPr>
-          <p:cNvPr id="10" name="Text 8"/>
+          <p:cNvPr id="11" name="Text 9"/>
           <p:cNvSpPr/>
           <p:nvPr/>
         </p:nvSpPr>
         <p:spPr>
           <a:xfrm>
             <a:off x="8074152" y="1563624"/>
-            <a:ext cx="2825496" cy="201168"/>
+            <a:ext cx="2825496" cy="256032"/>
           </a:xfrm>
           <a:prstGeom prst="rect">
             <a:avLst/>
@@ -4934,7 +5101,7 @@
               <a:buNone/>
             </a:pPr>
             <a:r>
-              <a:rPr lang="en-US" sz="950" b="1" dirty="0">
+              <a:rPr lang="en-US" sz="1300" b="1" dirty="0">
                 <a:solidFill>
                   <a:srgbClr val="0068B7"/>
                 </a:solidFill>
@@ -4944,20 +5111,20 @@
               </a:rPr>
               <a:t>Key idea</a:t>
             </a:r>
-            <a:endParaRPr lang="en-US" sz="950" dirty="0"/>
-          </a:p>
-        </p:txBody>
-      </p:sp>
-      <p:sp>
-        <p:nvSpPr>
-          <p:cNvPr id="11" name="Text 9"/>
-          <p:cNvSpPr/>
-          <p:nvPr/>
-        </p:nvSpPr>
-        <p:spPr>
-          <a:xfrm>
-            <a:off x="8074152" y="1856232"/>
-            <a:ext cx="2825496" cy="1261872"/>
+            <a:endParaRPr lang="en-US" sz="1300" dirty="0"/>
+          </a:p>
+        </p:txBody>
+      </p:sp>
+      <p:sp>
+        <p:nvSpPr>
+          <p:cNvPr id="12" name="Text 10"/>
+          <p:cNvSpPr/>
+          <p:nvPr/>
+        </p:nvSpPr>
+        <p:spPr>
+          <a:xfrm>
+            <a:off x="8074152" y="1920240"/>
+            <a:ext cx="2825496" cy="1188720"/>
           </a:xfrm>
           <a:prstGeom prst="rect">
             <a:avLst/>
@@ -4975,7 +5142,7 @@
               <a:buNone/>
             </a:pPr>
             <a:r>
-              <a:rPr lang="en-US" sz="1250" dirty="0">
+              <a:rPr lang="en-US" sz="1550" dirty="0">
                 <a:solidFill>
                   <a:srgbClr val="17364A"/>
                 </a:solidFill>
@@ -4985,13 +5152,13 @@
               </a:rPr>
               <a:t>Which staff, partners, or communities would be affected if this issue were handled poorly?</a:t>
             </a:r>
-            <a:endParaRPr lang="en-US" sz="1250" dirty="0"/>
-          </a:p>
-        </p:txBody>
-      </p:sp>
-      <p:sp>
-        <p:nvSpPr>
-          <p:cNvPr id="12" name="Shape 10"/>
+            <a:endParaRPr lang="en-US" sz="1550" dirty="0"/>
+          </a:p>
+        </p:txBody>
+      </p:sp>
+      <p:sp>
+        <p:nvSpPr>
+          <p:cNvPr id="13" name="Shape 11"/>
           <p:cNvSpPr/>
           <p:nvPr/>
         </p:nvSpPr>
@@ -5018,14 +5185,14 @@
       </p:sp>
       <p:sp>
         <p:nvSpPr>
-          <p:cNvPr id="13" name="Text 11"/>
+          <p:cNvPr id="14" name="Text 12"/>
           <p:cNvSpPr/>
           <p:nvPr/>
         </p:nvSpPr>
         <p:spPr>
           <a:xfrm>
             <a:off x="8074152" y="3666744"/>
-            <a:ext cx="2825496" cy="201168"/>
+            <a:ext cx="2825496" cy="256032"/>
           </a:xfrm>
           <a:prstGeom prst="rect">
             <a:avLst/>
@@ -5041,7 +5208,7 @@
               <a:buNone/>
             </a:pPr>
             <a:r>
-              <a:rPr lang="en-US" sz="950" b="1" dirty="0">
+              <a:rPr lang="en-US" sz="1300" b="1" dirty="0">
                 <a:solidFill>
                   <a:srgbClr val="0068B7"/>
                 </a:solidFill>
@@ -5051,20 +5218,20 @@
               </a:rPr>
               <a:t>Use this for</a:t>
             </a:r>
-            <a:endParaRPr lang="en-US" sz="950" dirty="0"/>
-          </a:p>
-        </p:txBody>
-      </p:sp>
-      <p:sp>
-        <p:nvSpPr>
-          <p:cNvPr id="14" name="Text 12"/>
-          <p:cNvSpPr/>
-          <p:nvPr/>
-        </p:nvSpPr>
-        <p:spPr>
-          <a:xfrm>
-            <a:off x="8074152" y="3959352"/>
-            <a:ext cx="2825496" cy="1170432"/>
+            <a:endParaRPr lang="en-US" sz="1300" dirty="0"/>
+          </a:p>
+        </p:txBody>
+      </p:sp>
+      <p:sp>
+        <p:nvSpPr>
+          <p:cNvPr id="15" name="Text 13"/>
+          <p:cNvSpPr/>
+          <p:nvPr/>
+        </p:nvSpPr>
+        <p:spPr>
+          <a:xfrm>
+            <a:off x="8074152" y="4023360"/>
+            <a:ext cx="2825496" cy="1097280"/>
           </a:xfrm>
           <a:prstGeom prst="rect">
             <a:avLst/>
@@ -5082,7 +5249,7 @@
               <a:buNone/>
             </a:pPr>
             <a:r>
-              <a:rPr lang="en-US" sz="1250" dirty="0">
+              <a:rPr lang="en-US" sz="1550" dirty="0">
                 <a:solidFill>
                   <a:srgbClr val="17364A"/>
                 </a:solidFill>
@@ -5092,7 +5259,7 @@
               </a:rPr>
               <a:t>Connect the concept to public health decisions, safeguards, documentation, or implementation work.</a:t>
             </a:r>
-            <a:endParaRPr lang="en-US" sz="1250" dirty="0"/>
+            <a:endParaRPr lang="en-US" sz="1550" dirty="0"/>
           </a:p>
         </p:txBody>
       </p:sp>
@@ -5289,7 +5456,7 @@
                 <a:ea typeface="Aptos" pitchFamily="34" charset="-122"/>
                 <a:cs typeface="Aptos" pitchFamily="34" charset="-120"/>
               </a:rPr>
-              <a:t>© Paula Soper</a:t>
+              <a:t>Â© Paula Soper</a:t>
             </a:r>
             <a:endParaRPr lang="en-US" sz="800" dirty="0"/>
           </a:p>
@@ -5297,7 +5464,46 @@
       </p:sp>
       <p:sp>
         <p:nvSpPr>
-          <p:cNvPr id="7" name="Shape 5"/>
+          <p:cNvPr id="7" name="Text 5"/>
+          <p:cNvSpPr/>
+          <p:nvPr/>
+        </p:nvSpPr>
+        <p:spPr>
+          <a:xfrm>
+            <a:off x="11137392" y="6510528"/>
+            <a:ext cx="411480" cy="201168"/>
+          </a:xfrm>
+          <a:prstGeom prst="rect">
+            <a:avLst/>
+          </a:prstGeom>
+          <a:noFill/>
+          <a:ln/>
+        </p:spPr>
+        <p:txBody>
+          <a:bodyPr wrap="square" lIns="0" tIns="0" rIns="0" bIns="0" rtlCol="0" anchor="ctr"/>
+          <a:lstStyle/>
+          <a:p>
+            <a:pPr algn="r" indent="0" marL="0">
+              <a:buNone/>
+            </a:pPr>
+            <a:r>
+              <a:rPr lang="en-US" sz="900" dirty="0">
+                <a:solidFill>
+                  <a:srgbClr val="5F7181"/>
+                </a:solidFill>
+                <a:latin typeface="Aptos" pitchFamily="34" charset="0"/>
+                <a:ea typeface="Aptos" pitchFamily="34" charset="-122"/>
+                <a:cs typeface="Aptos" pitchFamily="34" charset="-120"/>
+              </a:rPr>
+              <a:t>14</a:t>
+            </a:r>
+            <a:endParaRPr lang="en-US" sz="900" dirty="0"/>
+          </a:p>
+        </p:txBody>
+      </p:sp>
+      <p:sp>
+        <p:nvSpPr>
+          <p:cNvPr id="8" name="Shape 6"/>
           <p:cNvSpPr/>
           <p:nvPr/>
         </p:nvSpPr>
@@ -5322,7 +5528,7 @@
       </p:sp>
       <p:sp>
         <p:nvSpPr>
-          <p:cNvPr id="8" name="Text 6"/>
+          <p:cNvPr id="9" name="Text 7"/>
           <p:cNvSpPr/>
           <p:nvPr/>
         </p:nvSpPr>
@@ -5361,14 +5567,14 @@
       </p:sp>
       <p:sp>
         <p:nvSpPr>
-          <p:cNvPr id="9" name="Text 7"/>
+          <p:cNvPr id="10" name="Text 8"/>
           <p:cNvSpPr/>
           <p:nvPr/>
         </p:nvSpPr>
         <p:spPr>
           <a:xfrm>
             <a:off x="640080" y="621792"/>
-            <a:ext cx="10881360" cy="566928"/>
+            <a:ext cx="10881360" cy="713232"/>
           </a:xfrm>
           <a:prstGeom prst="rect">
             <a:avLst/>
@@ -5386,7 +5592,7 @@
               <a:buNone/>
             </a:pPr>
             <a:r>
-              <a:rPr lang="en-US" sz="2700" b="1" dirty="0">
+              <a:rPr lang="en-US" sz="3400" b="1" dirty="0">
                 <a:solidFill>
                   <a:srgbClr val="003A63"/>
                 </a:solidFill>
@@ -5396,20 +5602,20 @@
               </a:rPr>
               <a:t>Practical Exercise</a:t>
             </a:r>
-            <a:endParaRPr lang="en-US" sz="2700" dirty="0"/>
-          </a:p>
-        </p:txBody>
-      </p:sp>
-      <p:sp>
-        <p:nvSpPr>
-          <p:cNvPr id="10" name="Text 8"/>
-          <p:cNvSpPr/>
-          <p:nvPr/>
-        </p:nvSpPr>
-        <p:spPr>
-          <a:xfrm>
-            <a:off x="868680" y="1417320"/>
-            <a:ext cx="6675120" cy="4434840"/>
+            <a:endParaRPr lang="en-US" sz="3400" dirty="0"/>
+          </a:p>
+        </p:txBody>
+      </p:sp>
+      <p:sp>
+        <p:nvSpPr>
+          <p:cNvPr id="11" name="Text 9"/>
+          <p:cNvSpPr/>
+          <p:nvPr/>
+        </p:nvSpPr>
+        <p:spPr>
+          <a:xfrm>
+            <a:off x="868680" y="1508760"/>
+            <a:ext cx="6537960" cy="4160520"/>
           </a:xfrm>
           <a:prstGeom prst="rect">
             <a:avLst/>
@@ -5424,7 +5630,7 @@
           <a:lstStyle/>
           <a:p>
             <a:r>
-              <a:rPr lang="en-US" sz="1700" dirty="0">
+              <a:rPr lang="en-US" sz="2100" dirty="0">
                 <a:solidFill>
                   <a:srgbClr val="17364A"/>
                 </a:solidFill>
@@ -5434,11 +5640,11 @@
               </a:rPr>
               <a:t>Create a change management plan for one AI use case.</a:t>
             </a:r>
-            <a:endParaRPr lang="en-US" sz="1700" dirty="0"/>
-          </a:p>
-          <a:p>
-            <a:r>
-              <a:rPr lang="en-US" sz="1700" dirty="0">
+            <a:endParaRPr lang="en-US" sz="2100" dirty="0"/>
+          </a:p>
+          <a:p>
+            <a:r>
+              <a:rPr lang="en-US" sz="2100" dirty="0">
                 <a:solidFill>
                   <a:srgbClr val="17364A"/>
                 </a:solidFill>
@@ -5446,15 +5652,15 @@
                 <a:ea typeface="Aptos" pitchFamily="34" charset="-122"/>
                 <a:cs typeface="Aptos" pitchFamily="34" charset="-120"/>
               </a:rPr>
-              <a:t>Include stakeholder map, communication messages, training needs, workflow changes, adoption measures, feedback process, and.</a:t>
-            </a:r>
-            <a:endParaRPr lang="en-US" sz="1700" dirty="0"/>
-          </a:p>
-        </p:txBody>
-      </p:sp>
-      <p:sp>
-        <p:nvSpPr>
-          <p:cNvPr id="11" name="Shape 9"/>
+              <a:t>Include stakeholder map, communication messages, training needs, workflow changes, adoption measures,.</a:t>
+            </a:r>
+            <a:endParaRPr lang="en-US" sz="2100" dirty="0"/>
+          </a:p>
+        </p:txBody>
+      </p:sp>
+      <p:sp>
+        <p:nvSpPr>
+          <p:cNvPr id="12" name="Shape 10"/>
           <p:cNvSpPr/>
           <p:nvPr/>
         </p:nvSpPr>
@@ -5481,14 +5687,14 @@
       </p:sp>
       <p:sp>
         <p:nvSpPr>
-          <p:cNvPr id="12" name="Text 10"/>
+          <p:cNvPr id="13" name="Text 11"/>
           <p:cNvSpPr/>
           <p:nvPr/>
         </p:nvSpPr>
         <p:spPr>
           <a:xfrm>
             <a:off x="8074152" y="1563624"/>
-            <a:ext cx="2825496" cy="201168"/>
+            <a:ext cx="2825496" cy="256032"/>
           </a:xfrm>
           <a:prstGeom prst="rect">
             <a:avLst/>
@@ -5504,7 +5710,7 @@
               <a:buNone/>
             </a:pPr>
             <a:r>
-              <a:rPr lang="en-US" sz="950" b="1" dirty="0">
+              <a:rPr lang="en-US" sz="1300" b="1" dirty="0">
                 <a:solidFill>
                   <a:srgbClr val="0068B7"/>
                 </a:solidFill>
@@ -5514,20 +5720,20 @@
               </a:rPr>
               <a:t>Key idea</a:t>
             </a:r>
-            <a:endParaRPr lang="en-US" sz="950" dirty="0"/>
-          </a:p>
-        </p:txBody>
-      </p:sp>
-      <p:sp>
-        <p:nvSpPr>
-          <p:cNvPr id="13" name="Text 11"/>
-          <p:cNvSpPr/>
-          <p:nvPr/>
-        </p:nvSpPr>
-        <p:spPr>
-          <a:xfrm>
-            <a:off x="8074152" y="1856232"/>
-            <a:ext cx="2825496" cy="1261872"/>
+            <a:endParaRPr lang="en-US" sz="1300" dirty="0"/>
+          </a:p>
+        </p:txBody>
+      </p:sp>
+      <p:sp>
+        <p:nvSpPr>
+          <p:cNvPr id="14" name="Text 12"/>
+          <p:cNvSpPr/>
+          <p:nvPr/>
+        </p:nvSpPr>
+        <p:spPr>
+          <a:xfrm>
+            <a:off x="8074152" y="1920240"/>
+            <a:ext cx="2825496" cy="1188720"/>
           </a:xfrm>
           <a:prstGeom prst="rect">
             <a:avLst/>
@@ -5545,7 +5751,7 @@
               <a:buNone/>
             </a:pPr>
             <a:r>
-              <a:rPr lang="en-US" sz="1250" dirty="0">
+              <a:rPr lang="en-US" sz="1550" dirty="0">
                 <a:solidFill>
                   <a:srgbClr val="17364A"/>
                 </a:solidFill>
@@ -5555,13 +5761,13 @@
               </a:rPr>
               <a:t>Create a change management plan for one AI use case.</a:t>
             </a:r>
-            <a:endParaRPr lang="en-US" sz="1250" dirty="0"/>
-          </a:p>
-        </p:txBody>
-      </p:sp>
-      <p:sp>
-        <p:nvSpPr>
-          <p:cNvPr id="14" name="Shape 12"/>
+            <a:endParaRPr lang="en-US" sz="1550" dirty="0"/>
+          </a:p>
+        </p:txBody>
+      </p:sp>
+      <p:sp>
+        <p:nvSpPr>
+          <p:cNvPr id="15" name="Shape 13"/>
           <p:cNvSpPr/>
           <p:nvPr/>
         </p:nvSpPr>
@@ -5588,14 +5794,14 @@
       </p:sp>
       <p:sp>
         <p:nvSpPr>
-          <p:cNvPr id="15" name="Text 13"/>
+          <p:cNvPr id="16" name="Text 14"/>
           <p:cNvSpPr/>
           <p:nvPr/>
         </p:nvSpPr>
         <p:spPr>
           <a:xfrm>
             <a:off x="8074152" y="3666744"/>
-            <a:ext cx="2825496" cy="201168"/>
+            <a:ext cx="2825496" cy="256032"/>
           </a:xfrm>
           <a:prstGeom prst="rect">
             <a:avLst/>
@@ -5611,7 +5817,7 @@
               <a:buNone/>
             </a:pPr>
             <a:r>
-              <a:rPr lang="en-US" sz="950" b="1" dirty="0">
+              <a:rPr lang="en-US" sz="1300" b="1" dirty="0">
                 <a:solidFill>
                   <a:srgbClr val="0068B7"/>
                 </a:solidFill>
@@ -5621,20 +5827,20 @@
               </a:rPr>
               <a:t>Use this for</a:t>
             </a:r>
-            <a:endParaRPr lang="en-US" sz="950" dirty="0"/>
-          </a:p>
-        </p:txBody>
-      </p:sp>
-      <p:sp>
-        <p:nvSpPr>
-          <p:cNvPr id="16" name="Text 14"/>
-          <p:cNvSpPr/>
-          <p:nvPr/>
-        </p:nvSpPr>
-        <p:spPr>
-          <a:xfrm>
-            <a:off x="8074152" y="3959352"/>
-            <a:ext cx="2825496" cy="1170432"/>
+            <a:endParaRPr lang="en-US" sz="1300" dirty="0"/>
+          </a:p>
+        </p:txBody>
+      </p:sp>
+      <p:sp>
+        <p:nvSpPr>
+          <p:cNvPr id="17" name="Text 15"/>
+          <p:cNvSpPr/>
+          <p:nvPr/>
+        </p:nvSpPr>
+        <p:spPr>
+          <a:xfrm>
+            <a:off x="8074152" y="4023360"/>
+            <a:ext cx="2825496" cy="1097280"/>
           </a:xfrm>
           <a:prstGeom prst="rect">
             <a:avLst/>
@@ -5652,7 +5858,7 @@
               <a:buNone/>
             </a:pPr>
             <a:r>
-              <a:rPr lang="en-US" sz="1250" dirty="0">
+              <a:rPr lang="en-US" sz="1550" dirty="0">
                 <a:solidFill>
                   <a:srgbClr val="17364A"/>
                 </a:solidFill>
@@ -5662,7 +5868,7 @@
               </a:rPr>
               <a:t>Connect the concept to public health decisions, safeguards, documentation, or implementation work.</a:t>
             </a:r>
-            <a:endParaRPr lang="en-US" sz="1250" dirty="0"/>
+            <a:endParaRPr lang="en-US" sz="1550" dirty="0"/>
           </a:p>
         </p:txBody>
       </p:sp>
@@ -5859,7 +6065,7 @@
                 <a:ea typeface="Aptos" pitchFamily="34" charset="-122"/>
                 <a:cs typeface="Aptos" pitchFamily="34" charset="-120"/>
               </a:rPr>
-              <a:t>© Paula Soper</a:t>
+              <a:t>Â© Paula Soper</a:t>
             </a:r>
             <a:endParaRPr lang="en-US" sz="800" dirty="0"/>
           </a:p>
@@ -5867,7 +6073,46 @@
       </p:sp>
       <p:sp>
         <p:nvSpPr>
-          <p:cNvPr id="7" name="Shape 5"/>
+          <p:cNvPr id="7" name="Text 5"/>
+          <p:cNvSpPr/>
+          <p:nvPr/>
+        </p:nvSpPr>
+        <p:spPr>
+          <a:xfrm>
+            <a:off x="11137392" y="6510528"/>
+            <a:ext cx="411480" cy="201168"/>
+          </a:xfrm>
+          <a:prstGeom prst="rect">
+            <a:avLst/>
+          </a:prstGeom>
+          <a:noFill/>
+          <a:ln/>
+        </p:spPr>
+        <p:txBody>
+          <a:bodyPr wrap="square" lIns="0" tIns="0" rIns="0" bIns="0" rtlCol="0" anchor="ctr"/>
+          <a:lstStyle/>
+          <a:p>
+            <a:pPr algn="r" indent="0" marL="0">
+              <a:buNone/>
+            </a:pPr>
+            <a:r>
+              <a:rPr lang="en-US" sz="900" dirty="0">
+                <a:solidFill>
+                  <a:srgbClr val="5F7181"/>
+                </a:solidFill>
+                <a:latin typeface="Aptos" pitchFamily="34" charset="0"/>
+                <a:ea typeface="Aptos" pitchFamily="34" charset="-122"/>
+                <a:cs typeface="Aptos" pitchFamily="34" charset="-120"/>
+              </a:rPr>
+              <a:t>15</a:t>
+            </a:r>
+            <a:endParaRPr lang="en-US" sz="900" dirty="0"/>
+          </a:p>
+        </p:txBody>
+      </p:sp>
+      <p:sp>
+        <p:nvSpPr>
+          <p:cNvPr id="8" name="Shape 6"/>
           <p:cNvSpPr/>
           <p:nvPr/>
         </p:nvSpPr>
@@ -5892,7 +6137,7 @@
       </p:sp>
       <p:sp>
         <p:nvSpPr>
-          <p:cNvPr id="8" name="Text 6"/>
+          <p:cNvPr id="9" name="Text 7"/>
           <p:cNvSpPr/>
           <p:nvPr/>
         </p:nvSpPr>
@@ -5931,14 +6176,14 @@
       </p:sp>
       <p:sp>
         <p:nvSpPr>
-          <p:cNvPr id="9" name="Text 7"/>
+          <p:cNvPr id="10" name="Text 8"/>
           <p:cNvSpPr/>
           <p:nvPr/>
         </p:nvSpPr>
         <p:spPr>
           <a:xfrm>
             <a:off x="640080" y="621792"/>
-            <a:ext cx="10881360" cy="566928"/>
+            <a:ext cx="10881360" cy="713232"/>
           </a:xfrm>
           <a:prstGeom prst="rect">
             <a:avLst/>
@@ -5956,7 +6201,7 @@
               <a:buNone/>
             </a:pPr>
             <a:r>
-              <a:rPr lang="en-US" sz="2700" b="1" dirty="0">
+              <a:rPr lang="en-US" sz="3400" b="1" dirty="0">
                 <a:solidFill>
                   <a:srgbClr val="003A63"/>
                 </a:solidFill>
@@ -5966,20 +6211,20 @@
               </a:rPr>
               <a:t>Before You Begin</a:t>
             </a:r>
-            <a:endParaRPr lang="en-US" sz="2700" dirty="0"/>
-          </a:p>
-        </p:txBody>
-      </p:sp>
-      <p:sp>
-        <p:nvSpPr>
-          <p:cNvPr id="10" name="Text 8"/>
-          <p:cNvSpPr/>
-          <p:nvPr/>
-        </p:nvSpPr>
-        <p:spPr>
-          <a:xfrm>
-            <a:off x="868680" y="1417320"/>
-            <a:ext cx="6675120" cy="4434840"/>
+            <a:endParaRPr lang="en-US" sz="3400" dirty="0"/>
+          </a:p>
+        </p:txBody>
+      </p:sp>
+      <p:sp>
+        <p:nvSpPr>
+          <p:cNvPr id="11" name="Text 9"/>
+          <p:cNvSpPr/>
+          <p:nvPr/>
+        </p:nvSpPr>
+        <p:spPr>
+          <a:xfrm>
+            <a:off x="868680" y="1508760"/>
+            <a:ext cx="6537960" cy="4160520"/>
           </a:xfrm>
           <a:prstGeom prst="rect">
             <a:avLst/>
@@ -5994,7 +6239,7 @@
           <a:lstStyle/>
           <a:p>
             <a:r>
-              <a:rPr lang="en-US" sz="1700" dirty="0">
+              <a:rPr lang="en-US" sz="2100" dirty="0">
                 <a:solidFill>
                   <a:srgbClr val="17364A"/>
                 </a:solidFill>
@@ -6004,11 +6249,11 @@
               </a:rPr>
               <a:t>Choose a real or realistic public health AI use case.</a:t>
             </a:r>
-            <a:endParaRPr lang="en-US" sz="1700" dirty="0"/>
-          </a:p>
-          <a:p>
-            <a:r>
-              <a:rPr lang="en-US" sz="1700" dirty="0">
+            <a:endParaRPr lang="en-US" sz="2100" dirty="0"/>
+          </a:p>
+          <a:p>
+            <a:r>
+              <a:rPr lang="en-US" sz="2100" dirty="0">
                 <a:solidFill>
                   <a:srgbClr val="17364A"/>
                 </a:solidFill>
@@ -6016,13 +6261,13 @@
                 <a:ea typeface="Aptos" pitchFamily="34" charset="-122"/>
                 <a:cs typeface="Aptos" pitchFamily="34" charset="-120"/>
               </a:rPr>
-              <a:t>Document assumptions, unresolved questions, and which agency roles would need to review the artifact before it is adopted.</a:t>
-            </a:r>
-            <a:endParaRPr lang="en-US" sz="1700" dirty="0"/>
-          </a:p>
-          <a:p>
-            <a:r>
-              <a:rPr lang="en-US" sz="1700" dirty="0">
+              <a:t>Document assumptions, unresolved questions, and which agency roles would need to review the artifact.</a:t>
+            </a:r>
+            <a:endParaRPr lang="en-US" sz="2100" dirty="0"/>
+          </a:p>
+          <a:p>
+            <a:r>
+              <a:rPr lang="en-US" sz="2100" dirty="0">
                 <a:solidFill>
                   <a:srgbClr val="17364A"/>
                 </a:solidFill>
@@ -6030,15 +6275,15 @@
                 <a:ea typeface="Aptos" pitchFamily="34" charset="-122"/>
                 <a:cs typeface="Aptos" pitchFamily="34" charset="-120"/>
               </a:rPr>
-              <a:t>The exercise should produce a work product that could support governance review, leadership discussion, implementation.</a:t>
-            </a:r>
-            <a:endParaRPr lang="en-US" sz="1700" dirty="0"/>
-          </a:p>
-        </p:txBody>
-      </p:sp>
-      <p:sp>
-        <p:nvSpPr>
-          <p:cNvPr id="11" name="Shape 9"/>
+              <a:t>The exercise should produce a work product that could support governance review, leadership discussion,.</a:t>
+            </a:r>
+            <a:endParaRPr lang="en-US" sz="2100" dirty="0"/>
+          </a:p>
+        </p:txBody>
+      </p:sp>
+      <p:sp>
+        <p:nvSpPr>
+          <p:cNvPr id="12" name="Shape 10"/>
           <p:cNvSpPr/>
           <p:nvPr/>
         </p:nvSpPr>
@@ -6065,14 +6310,14 @@
       </p:sp>
       <p:sp>
         <p:nvSpPr>
-          <p:cNvPr id="12" name="Text 10"/>
+          <p:cNvPr id="13" name="Text 11"/>
           <p:cNvSpPr/>
           <p:nvPr/>
         </p:nvSpPr>
         <p:spPr>
           <a:xfrm>
             <a:off x="8074152" y="1563624"/>
-            <a:ext cx="2825496" cy="201168"/>
+            <a:ext cx="2825496" cy="256032"/>
           </a:xfrm>
           <a:prstGeom prst="rect">
             <a:avLst/>
@@ -6088,7 +6333,7 @@
               <a:buNone/>
             </a:pPr>
             <a:r>
-              <a:rPr lang="en-US" sz="950" b="1" dirty="0">
+              <a:rPr lang="en-US" sz="1300" b="1" dirty="0">
                 <a:solidFill>
                   <a:srgbClr val="0068B7"/>
                 </a:solidFill>
@@ -6098,20 +6343,20 @@
               </a:rPr>
               <a:t>Key idea</a:t>
             </a:r>
-            <a:endParaRPr lang="en-US" sz="950" dirty="0"/>
-          </a:p>
-        </p:txBody>
-      </p:sp>
-      <p:sp>
-        <p:nvSpPr>
-          <p:cNvPr id="13" name="Text 11"/>
-          <p:cNvSpPr/>
-          <p:nvPr/>
-        </p:nvSpPr>
-        <p:spPr>
-          <a:xfrm>
-            <a:off x="8074152" y="1856232"/>
-            <a:ext cx="2825496" cy="1261872"/>
+            <a:endParaRPr lang="en-US" sz="1300" dirty="0"/>
+          </a:p>
+        </p:txBody>
+      </p:sp>
+      <p:sp>
+        <p:nvSpPr>
+          <p:cNvPr id="14" name="Text 12"/>
+          <p:cNvSpPr/>
+          <p:nvPr/>
+        </p:nvSpPr>
+        <p:spPr>
+          <a:xfrm>
+            <a:off x="8074152" y="1920240"/>
+            <a:ext cx="2825496" cy="1188720"/>
           </a:xfrm>
           <a:prstGeom prst="rect">
             <a:avLst/>
@@ -6129,7 +6374,7 @@
               <a:buNone/>
             </a:pPr>
             <a:r>
-              <a:rPr lang="en-US" sz="1250" dirty="0">
+              <a:rPr lang="en-US" sz="1550" dirty="0">
                 <a:solidFill>
                   <a:srgbClr val="17364A"/>
                 </a:solidFill>
@@ -6139,13 +6384,13 @@
               </a:rPr>
               <a:t>Choose a real or realistic public health AI use case.</a:t>
             </a:r>
-            <a:endParaRPr lang="en-US" sz="1250" dirty="0"/>
-          </a:p>
-        </p:txBody>
-      </p:sp>
-      <p:sp>
-        <p:nvSpPr>
-          <p:cNvPr id="14" name="Shape 12"/>
+            <a:endParaRPr lang="en-US" sz="1550" dirty="0"/>
+          </a:p>
+        </p:txBody>
+      </p:sp>
+      <p:sp>
+        <p:nvSpPr>
+          <p:cNvPr id="15" name="Shape 13"/>
           <p:cNvSpPr/>
           <p:nvPr/>
         </p:nvSpPr>
@@ -6172,14 +6417,14 @@
       </p:sp>
       <p:sp>
         <p:nvSpPr>
-          <p:cNvPr id="15" name="Text 13"/>
+          <p:cNvPr id="16" name="Text 14"/>
           <p:cNvSpPr/>
           <p:nvPr/>
         </p:nvSpPr>
         <p:spPr>
           <a:xfrm>
             <a:off x="8074152" y="3666744"/>
-            <a:ext cx="2825496" cy="201168"/>
+            <a:ext cx="2825496" cy="256032"/>
           </a:xfrm>
           <a:prstGeom prst="rect">
             <a:avLst/>
@@ -6195,7 +6440,7 @@
               <a:buNone/>
             </a:pPr>
             <a:r>
-              <a:rPr lang="en-US" sz="950" b="1" dirty="0">
+              <a:rPr lang="en-US" sz="1300" b="1" dirty="0">
                 <a:solidFill>
                   <a:srgbClr val="0068B7"/>
                 </a:solidFill>
@@ -6205,20 +6450,20 @@
               </a:rPr>
               <a:t>Use this for</a:t>
             </a:r>
-            <a:endParaRPr lang="en-US" sz="950" dirty="0"/>
-          </a:p>
-        </p:txBody>
-      </p:sp>
-      <p:sp>
-        <p:nvSpPr>
-          <p:cNvPr id="16" name="Text 14"/>
-          <p:cNvSpPr/>
-          <p:nvPr/>
-        </p:nvSpPr>
-        <p:spPr>
-          <a:xfrm>
-            <a:off x="8074152" y="3959352"/>
-            <a:ext cx="2825496" cy="1170432"/>
+            <a:endParaRPr lang="en-US" sz="1300" dirty="0"/>
+          </a:p>
+        </p:txBody>
+      </p:sp>
+      <p:sp>
+        <p:nvSpPr>
+          <p:cNvPr id="17" name="Text 15"/>
+          <p:cNvSpPr/>
+          <p:nvPr/>
+        </p:nvSpPr>
+        <p:spPr>
+          <a:xfrm>
+            <a:off x="8074152" y="4023360"/>
+            <a:ext cx="2825496" cy="1097280"/>
           </a:xfrm>
           <a:prstGeom prst="rect">
             <a:avLst/>
@@ -6236,7 +6481,7 @@
               <a:buNone/>
             </a:pPr>
             <a:r>
-              <a:rPr lang="en-US" sz="1250" dirty="0">
+              <a:rPr lang="en-US" sz="1550" dirty="0">
                 <a:solidFill>
                   <a:srgbClr val="17364A"/>
                 </a:solidFill>
@@ -6246,7 +6491,7 @@
               </a:rPr>
               <a:t>Connect the concept to public health decisions, safeguards, documentation, or implementation work.</a:t>
             </a:r>
-            <a:endParaRPr lang="en-US" sz="1250" dirty="0"/>
+            <a:endParaRPr lang="en-US" sz="1550" dirty="0"/>
           </a:p>
         </p:txBody>
       </p:sp>
@@ -6443,7 +6688,7 @@
                 <a:ea typeface="Aptos" pitchFamily="34" charset="-122"/>
                 <a:cs typeface="Aptos" pitchFamily="34" charset="-120"/>
               </a:rPr>
-              <a:t>© Paula Soper</a:t>
+              <a:t>Â© Paula Soper</a:t>
             </a:r>
             <a:endParaRPr lang="en-US" sz="800" dirty="0"/>
           </a:p>
@@ -6451,7 +6696,46 @@
       </p:sp>
       <p:sp>
         <p:nvSpPr>
-          <p:cNvPr id="7" name="Shape 5"/>
+          <p:cNvPr id="7" name="Text 5"/>
+          <p:cNvSpPr/>
+          <p:nvPr/>
+        </p:nvSpPr>
+        <p:spPr>
+          <a:xfrm>
+            <a:off x="11137392" y="6510528"/>
+            <a:ext cx="411480" cy="201168"/>
+          </a:xfrm>
+          <a:prstGeom prst="rect">
+            <a:avLst/>
+          </a:prstGeom>
+          <a:noFill/>
+          <a:ln/>
+        </p:spPr>
+        <p:txBody>
+          <a:bodyPr wrap="square" lIns="0" tIns="0" rIns="0" bIns="0" rtlCol="0" anchor="ctr"/>
+          <a:lstStyle/>
+          <a:p>
+            <a:pPr algn="r" indent="0" marL="0">
+              <a:buNone/>
+            </a:pPr>
+            <a:r>
+              <a:rPr lang="en-US" sz="900" dirty="0">
+                <a:solidFill>
+                  <a:srgbClr val="5F7181"/>
+                </a:solidFill>
+                <a:latin typeface="Aptos" pitchFamily="34" charset="0"/>
+                <a:ea typeface="Aptos" pitchFamily="34" charset="-122"/>
+                <a:cs typeface="Aptos" pitchFamily="34" charset="-120"/>
+              </a:rPr>
+              <a:t>16</a:t>
+            </a:r>
+            <a:endParaRPr lang="en-US" sz="900" dirty="0"/>
+          </a:p>
+        </p:txBody>
+      </p:sp>
+      <p:sp>
+        <p:nvSpPr>
+          <p:cNvPr id="8" name="Shape 6"/>
           <p:cNvSpPr/>
           <p:nvPr/>
         </p:nvSpPr>
@@ -6476,7 +6760,7 @@
       </p:sp>
       <p:sp>
         <p:nvSpPr>
-          <p:cNvPr id="8" name="Text 6"/>
+          <p:cNvPr id="9" name="Text 7"/>
           <p:cNvSpPr/>
           <p:nvPr/>
         </p:nvSpPr>
@@ -6515,14 +6799,14 @@
       </p:sp>
       <p:sp>
         <p:nvSpPr>
-          <p:cNvPr id="9" name="Text 7"/>
+          <p:cNvPr id="10" name="Text 8"/>
           <p:cNvSpPr/>
           <p:nvPr/>
         </p:nvSpPr>
         <p:spPr>
           <a:xfrm>
             <a:off x="640080" y="621792"/>
-            <a:ext cx="10881360" cy="566928"/>
+            <a:ext cx="10881360" cy="713232"/>
           </a:xfrm>
           <a:prstGeom prst="rect">
             <a:avLst/>
@@ -6540,7 +6824,7 @@
               <a:buNone/>
             </a:pPr>
             <a:r>
-              <a:rPr lang="en-US" sz="2700" b="1" dirty="0">
+              <a:rPr lang="en-US" sz="3400" b="1" dirty="0">
                 <a:solidFill>
                   <a:srgbClr val="003A63"/>
                 </a:solidFill>
@@ -6550,20 +6834,20 @@
               </a:rPr>
               <a:t>Expected Artifact or Evidence</a:t>
             </a:r>
-            <a:endParaRPr lang="en-US" sz="2700" dirty="0"/>
-          </a:p>
-        </p:txBody>
-      </p:sp>
-      <p:sp>
-        <p:nvSpPr>
-          <p:cNvPr id="10" name="Text 8"/>
-          <p:cNvSpPr/>
-          <p:nvPr/>
-        </p:nvSpPr>
-        <p:spPr>
-          <a:xfrm>
-            <a:off x="868680" y="1417320"/>
-            <a:ext cx="6675120" cy="4434840"/>
+            <a:endParaRPr lang="en-US" sz="3400" dirty="0"/>
+          </a:p>
+        </p:txBody>
+      </p:sp>
+      <p:sp>
+        <p:nvSpPr>
+          <p:cNvPr id="11" name="Text 9"/>
+          <p:cNvSpPr/>
+          <p:nvPr/>
+        </p:nvSpPr>
+        <p:spPr>
+          <a:xfrm>
+            <a:off x="868680" y="1508760"/>
+            <a:ext cx="6537960" cy="4160520"/>
           </a:xfrm>
           <a:prstGeom prst="rect">
             <a:avLst/>
@@ -6578,7 +6862,7 @@
           <a:lstStyle/>
           <a:p>
             <a:r>
-              <a:rPr lang="en-US" sz="1700" dirty="0">
+              <a:rPr lang="en-US" sz="2100" dirty="0">
                 <a:solidFill>
                   <a:srgbClr val="17364A"/>
                 </a:solidFill>
@@ -6586,15 +6870,15 @@
                 <a:ea typeface="Aptos" pitchFamily="34" charset="-122"/>
                 <a:cs typeface="Aptos" pitchFamily="34" charset="-120"/>
               </a:rPr>
-              <a:t>AI adoption plan; stakeholder map; communication plan; training plan; feedback and adoption monitoring plan.</a:t>
-            </a:r>
-            <a:endParaRPr lang="en-US" sz="1700" dirty="0"/>
-          </a:p>
-        </p:txBody>
-      </p:sp>
-      <p:sp>
-        <p:nvSpPr>
-          <p:cNvPr id="11" name="Shape 9"/>
+              <a:t>AI adoption plan; stakeholder map; communication plan; training plan; feedback and adoption monitoring.</a:t>
+            </a:r>
+            <a:endParaRPr lang="en-US" sz="2100" dirty="0"/>
+          </a:p>
+        </p:txBody>
+      </p:sp>
+      <p:sp>
+        <p:nvSpPr>
+          <p:cNvPr id="12" name="Shape 10"/>
           <p:cNvSpPr/>
           <p:nvPr/>
         </p:nvSpPr>
@@ -6621,14 +6905,14 @@
       </p:sp>
       <p:sp>
         <p:nvSpPr>
-          <p:cNvPr id="12" name="Text 10"/>
+          <p:cNvPr id="13" name="Text 11"/>
           <p:cNvSpPr/>
           <p:nvPr/>
         </p:nvSpPr>
         <p:spPr>
           <a:xfrm>
             <a:off x="8074152" y="1563624"/>
-            <a:ext cx="2825496" cy="201168"/>
+            <a:ext cx="2825496" cy="256032"/>
           </a:xfrm>
           <a:prstGeom prst="rect">
             <a:avLst/>
@@ -6644,7 +6928,7 @@
               <a:buNone/>
             </a:pPr>
             <a:r>
-              <a:rPr lang="en-US" sz="950" b="1" dirty="0">
+              <a:rPr lang="en-US" sz="1300" b="1" dirty="0">
                 <a:solidFill>
                   <a:srgbClr val="0068B7"/>
                 </a:solidFill>
@@ -6654,20 +6938,20 @@
               </a:rPr>
               <a:t>Key idea</a:t>
             </a:r>
-            <a:endParaRPr lang="en-US" sz="950" dirty="0"/>
-          </a:p>
-        </p:txBody>
-      </p:sp>
-      <p:sp>
-        <p:nvSpPr>
-          <p:cNvPr id="13" name="Text 11"/>
-          <p:cNvSpPr/>
-          <p:nvPr/>
-        </p:nvSpPr>
-        <p:spPr>
-          <a:xfrm>
-            <a:off x="8074152" y="1856232"/>
-            <a:ext cx="2825496" cy="1261872"/>
+            <a:endParaRPr lang="en-US" sz="1300" dirty="0"/>
+          </a:p>
+        </p:txBody>
+      </p:sp>
+      <p:sp>
+        <p:nvSpPr>
+          <p:cNvPr id="14" name="Text 12"/>
+          <p:cNvSpPr/>
+          <p:nvPr/>
+        </p:nvSpPr>
+        <p:spPr>
+          <a:xfrm>
+            <a:off x="8074152" y="1920240"/>
+            <a:ext cx="2825496" cy="1188720"/>
           </a:xfrm>
           <a:prstGeom prst="rect">
             <a:avLst/>
@@ -6685,7 +6969,7 @@
               <a:buNone/>
             </a:pPr>
             <a:r>
-              <a:rPr lang="en-US" sz="1250" dirty="0">
+              <a:rPr lang="en-US" sz="1550" dirty="0">
                 <a:solidFill>
                   <a:srgbClr val="17364A"/>
                 </a:solidFill>
@@ -6693,15 +6977,15 @@
                 <a:ea typeface="Aptos" pitchFamily="34" charset="-122"/>
                 <a:cs typeface="Aptos" pitchFamily="34" charset="-120"/>
               </a:rPr>
-              <a:t>AI adoption plan; stakeholder map; communication plan; training plan; feedback and adoption monitoring plan.</a:t>
-            </a:r>
-            <a:endParaRPr lang="en-US" sz="1250" dirty="0"/>
-          </a:p>
-        </p:txBody>
-      </p:sp>
-      <p:sp>
-        <p:nvSpPr>
-          <p:cNvPr id="14" name="Shape 12"/>
+              <a:t>AI adoption plan; stakeholder map; communication plan; training plan; feedback and adoption monitoring.</a:t>
+            </a:r>
+            <a:endParaRPr lang="en-US" sz="1550" dirty="0"/>
+          </a:p>
+        </p:txBody>
+      </p:sp>
+      <p:sp>
+        <p:nvSpPr>
+          <p:cNvPr id="15" name="Shape 13"/>
           <p:cNvSpPr/>
           <p:nvPr/>
         </p:nvSpPr>
@@ -6728,14 +7012,14 @@
       </p:sp>
       <p:sp>
         <p:nvSpPr>
-          <p:cNvPr id="15" name="Text 13"/>
+          <p:cNvPr id="16" name="Text 14"/>
           <p:cNvSpPr/>
           <p:nvPr/>
         </p:nvSpPr>
         <p:spPr>
           <a:xfrm>
             <a:off x="8074152" y="3666744"/>
-            <a:ext cx="2825496" cy="201168"/>
+            <a:ext cx="2825496" cy="256032"/>
           </a:xfrm>
           <a:prstGeom prst="rect">
             <a:avLst/>
@@ -6751,7 +7035,7 @@
               <a:buNone/>
             </a:pPr>
             <a:r>
-              <a:rPr lang="en-US" sz="950" b="1" dirty="0">
+              <a:rPr lang="en-US" sz="1300" b="1" dirty="0">
                 <a:solidFill>
                   <a:srgbClr val="0068B7"/>
                 </a:solidFill>
@@ -6761,20 +7045,20 @@
               </a:rPr>
               <a:t>Use this for</a:t>
             </a:r>
-            <a:endParaRPr lang="en-US" sz="950" dirty="0"/>
-          </a:p>
-        </p:txBody>
-      </p:sp>
-      <p:sp>
-        <p:nvSpPr>
-          <p:cNvPr id="16" name="Text 14"/>
-          <p:cNvSpPr/>
-          <p:nvPr/>
-        </p:nvSpPr>
-        <p:spPr>
-          <a:xfrm>
-            <a:off x="8074152" y="3959352"/>
-            <a:ext cx="2825496" cy="1170432"/>
+            <a:endParaRPr lang="en-US" sz="1300" dirty="0"/>
+          </a:p>
+        </p:txBody>
+      </p:sp>
+      <p:sp>
+        <p:nvSpPr>
+          <p:cNvPr id="17" name="Text 15"/>
+          <p:cNvSpPr/>
+          <p:nvPr/>
+        </p:nvSpPr>
+        <p:spPr>
+          <a:xfrm>
+            <a:off x="8074152" y="4023360"/>
+            <a:ext cx="2825496" cy="1097280"/>
           </a:xfrm>
           <a:prstGeom prst="rect">
             <a:avLst/>
@@ -6792,7 +7076,7 @@
               <a:buNone/>
             </a:pPr>
             <a:r>
-              <a:rPr lang="en-US" sz="1250" dirty="0">
+              <a:rPr lang="en-US" sz="1550" dirty="0">
                 <a:solidFill>
                   <a:srgbClr val="17364A"/>
                 </a:solidFill>
@@ -6802,7 +7086,7 @@
               </a:rPr>
               <a:t>Connect the concept to public health decisions, safeguards, documentation, or implementation work.</a:t>
             </a:r>
-            <a:endParaRPr lang="en-US" sz="1250" dirty="0"/>
+            <a:endParaRPr lang="en-US" sz="1550" dirty="0"/>
           </a:p>
         </p:txBody>
       </p:sp>
@@ -6999,7 +7283,7 @@
                 <a:ea typeface="Aptos" pitchFamily="34" charset="-122"/>
                 <a:cs typeface="Aptos" pitchFamily="34" charset="-120"/>
               </a:rPr>
-              <a:t>© Paula Soper</a:t>
+              <a:t>Â© Paula Soper</a:t>
             </a:r>
             <a:endParaRPr lang="en-US" sz="800" dirty="0"/>
           </a:p>
@@ -7007,7 +7291,46 @@
       </p:sp>
       <p:sp>
         <p:nvSpPr>
-          <p:cNvPr id="7" name="Shape 5"/>
+          <p:cNvPr id="7" name="Text 5"/>
+          <p:cNvSpPr/>
+          <p:nvPr/>
+        </p:nvSpPr>
+        <p:spPr>
+          <a:xfrm>
+            <a:off x="11137392" y="6510528"/>
+            <a:ext cx="411480" cy="201168"/>
+          </a:xfrm>
+          <a:prstGeom prst="rect">
+            <a:avLst/>
+          </a:prstGeom>
+          <a:noFill/>
+          <a:ln/>
+        </p:spPr>
+        <p:txBody>
+          <a:bodyPr wrap="square" lIns="0" tIns="0" rIns="0" bIns="0" rtlCol="0" anchor="ctr"/>
+          <a:lstStyle/>
+          <a:p>
+            <a:pPr algn="r" indent="0" marL="0">
+              <a:buNone/>
+            </a:pPr>
+            <a:r>
+              <a:rPr lang="en-US" sz="900" dirty="0">
+                <a:solidFill>
+                  <a:srgbClr val="5F7181"/>
+                </a:solidFill>
+                <a:latin typeface="Aptos" pitchFamily="34" charset="0"/>
+                <a:ea typeface="Aptos" pitchFamily="34" charset="-122"/>
+                <a:cs typeface="Aptos" pitchFamily="34" charset="-120"/>
+              </a:rPr>
+              <a:t>17</a:t>
+            </a:r>
+            <a:endParaRPr lang="en-US" sz="900" dirty="0"/>
+          </a:p>
+        </p:txBody>
+      </p:sp>
+      <p:sp>
+        <p:nvSpPr>
+          <p:cNvPr id="8" name="Shape 6"/>
           <p:cNvSpPr/>
           <p:nvPr/>
         </p:nvSpPr>
@@ -7032,7 +7355,7 @@
       </p:sp>
       <p:sp>
         <p:nvSpPr>
-          <p:cNvPr id="8" name="Text 6"/>
+          <p:cNvPr id="9" name="Text 7"/>
           <p:cNvSpPr/>
           <p:nvPr/>
         </p:nvSpPr>
@@ -7071,14 +7394,14 @@
       </p:sp>
       <p:sp>
         <p:nvSpPr>
-          <p:cNvPr id="9" name="Text 7"/>
+          <p:cNvPr id="10" name="Text 8"/>
           <p:cNvSpPr/>
           <p:nvPr/>
         </p:nvSpPr>
         <p:spPr>
           <a:xfrm>
             <a:off x="640080" y="621792"/>
-            <a:ext cx="10881360" cy="566928"/>
+            <a:ext cx="10881360" cy="713232"/>
           </a:xfrm>
           <a:prstGeom prst="rect">
             <a:avLst/>
@@ -7096,7 +7419,7 @@
               <a:buNone/>
             </a:pPr>
             <a:r>
-              <a:rPr lang="en-US" sz="2700" b="1" dirty="0">
+              <a:rPr lang="en-US" sz="3400" b="1" dirty="0">
                 <a:solidFill>
                   <a:srgbClr val="003A63"/>
                 </a:solidFill>
@@ -7106,20 +7429,20 @@
               </a:rPr>
               <a:t>Expected Assignment</a:t>
             </a:r>
-            <a:endParaRPr lang="en-US" sz="2700" dirty="0"/>
-          </a:p>
-        </p:txBody>
-      </p:sp>
-      <p:sp>
-        <p:nvSpPr>
-          <p:cNvPr id="10" name="Text 8"/>
-          <p:cNvSpPr/>
-          <p:nvPr/>
-        </p:nvSpPr>
-        <p:spPr>
-          <a:xfrm>
-            <a:off x="868680" y="1417320"/>
-            <a:ext cx="6675120" cy="4434840"/>
+            <a:endParaRPr lang="en-US" sz="3400" dirty="0"/>
+          </a:p>
+        </p:txBody>
+      </p:sp>
+      <p:sp>
+        <p:nvSpPr>
+          <p:cNvPr id="11" name="Text 9"/>
+          <p:cNvSpPr/>
+          <p:nvPr/>
+        </p:nvSpPr>
+        <p:spPr>
+          <a:xfrm>
+            <a:off x="868680" y="1508760"/>
+            <a:ext cx="6537960" cy="4160520"/>
           </a:xfrm>
           <a:prstGeom prst="rect">
             <a:avLst/>
@@ -7134,7 +7457,7 @@
           <a:lstStyle/>
           <a:p>
             <a:r>
-              <a:rPr lang="en-US" sz="1700" dirty="0">
+              <a:rPr lang="en-US" sz="2100" dirty="0">
                 <a:solidFill>
                   <a:srgbClr val="17364A"/>
                 </a:solidFill>
@@ -7142,15 +7465,15 @@
                 <a:ea typeface="Aptos" pitchFamily="34" charset="-122"/>
                 <a:cs typeface="Aptos" pitchFamily="34" charset="-120"/>
               </a:rPr>
-              <a:t>AI adoption plan; stakeholder map; communication plan; training plan; feedback and adoption monitoring plan.</a:t>
-            </a:r>
-            <a:endParaRPr lang="en-US" sz="1700" dirty="0"/>
-          </a:p>
-        </p:txBody>
-      </p:sp>
-      <p:sp>
-        <p:nvSpPr>
-          <p:cNvPr id="11" name="Shape 9"/>
+              <a:t>AI adoption plan; stakeholder map; communication plan; training plan; feedback and adoption monitoring.</a:t>
+            </a:r>
+            <a:endParaRPr lang="en-US" sz="2100" dirty="0"/>
+          </a:p>
+        </p:txBody>
+      </p:sp>
+      <p:sp>
+        <p:nvSpPr>
+          <p:cNvPr id="12" name="Shape 10"/>
           <p:cNvSpPr/>
           <p:nvPr/>
         </p:nvSpPr>
@@ -7177,14 +7500,14 @@
       </p:sp>
       <p:sp>
         <p:nvSpPr>
-          <p:cNvPr id="12" name="Text 10"/>
+          <p:cNvPr id="13" name="Text 11"/>
           <p:cNvSpPr/>
           <p:nvPr/>
         </p:nvSpPr>
         <p:spPr>
           <a:xfrm>
             <a:off x="8074152" y="1563624"/>
-            <a:ext cx="2825496" cy="201168"/>
+            <a:ext cx="2825496" cy="256032"/>
           </a:xfrm>
           <a:prstGeom prst="rect">
             <a:avLst/>
@@ -7200,7 +7523,7 @@
               <a:buNone/>
             </a:pPr>
             <a:r>
-              <a:rPr lang="en-US" sz="950" b="1" dirty="0">
+              <a:rPr lang="en-US" sz="1300" b="1" dirty="0">
                 <a:solidFill>
                   <a:srgbClr val="0068B7"/>
                 </a:solidFill>
@@ -7210,20 +7533,20 @@
               </a:rPr>
               <a:t>Key idea</a:t>
             </a:r>
-            <a:endParaRPr lang="en-US" sz="950" dirty="0"/>
-          </a:p>
-        </p:txBody>
-      </p:sp>
-      <p:sp>
-        <p:nvSpPr>
-          <p:cNvPr id="13" name="Text 11"/>
-          <p:cNvSpPr/>
-          <p:nvPr/>
-        </p:nvSpPr>
-        <p:spPr>
-          <a:xfrm>
-            <a:off x="8074152" y="1856232"/>
-            <a:ext cx="2825496" cy="1261872"/>
+            <a:endParaRPr lang="en-US" sz="1300" dirty="0"/>
+          </a:p>
+        </p:txBody>
+      </p:sp>
+      <p:sp>
+        <p:nvSpPr>
+          <p:cNvPr id="14" name="Text 12"/>
+          <p:cNvSpPr/>
+          <p:nvPr/>
+        </p:nvSpPr>
+        <p:spPr>
+          <a:xfrm>
+            <a:off x="8074152" y="1920240"/>
+            <a:ext cx="2825496" cy="1188720"/>
           </a:xfrm>
           <a:prstGeom prst="rect">
             <a:avLst/>
@@ -7241,7 +7564,7 @@
               <a:buNone/>
             </a:pPr>
             <a:r>
-              <a:rPr lang="en-US" sz="1250" dirty="0">
+              <a:rPr lang="en-US" sz="1550" dirty="0">
                 <a:solidFill>
                   <a:srgbClr val="17364A"/>
                 </a:solidFill>
@@ -7249,15 +7572,15 @@
                 <a:ea typeface="Aptos" pitchFamily="34" charset="-122"/>
                 <a:cs typeface="Aptos" pitchFamily="34" charset="-120"/>
               </a:rPr>
-              <a:t>AI adoption plan; stakeholder map; communication plan; training plan; feedback and adoption monitoring plan.</a:t>
-            </a:r>
-            <a:endParaRPr lang="en-US" sz="1250" dirty="0"/>
-          </a:p>
-        </p:txBody>
-      </p:sp>
-      <p:sp>
-        <p:nvSpPr>
-          <p:cNvPr id="14" name="Shape 12"/>
+              <a:t>AI adoption plan; stakeholder map; communication plan; training plan; feedback and adoption monitoring.</a:t>
+            </a:r>
+            <a:endParaRPr lang="en-US" sz="1550" dirty="0"/>
+          </a:p>
+        </p:txBody>
+      </p:sp>
+      <p:sp>
+        <p:nvSpPr>
+          <p:cNvPr id="15" name="Shape 13"/>
           <p:cNvSpPr/>
           <p:nvPr/>
         </p:nvSpPr>
@@ -7284,14 +7607,14 @@
       </p:sp>
       <p:sp>
         <p:nvSpPr>
-          <p:cNvPr id="15" name="Text 13"/>
+          <p:cNvPr id="16" name="Text 14"/>
           <p:cNvSpPr/>
           <p:nvPr/>
         </p:nvSpPr>
         <p:spPr>
           <a:xfrm>
             <a:off x="8074152" y="3666744"/>
-            <a:ext cx="2825496" cy="201168"/>
+            <a:ext cx="2825496" cy="256032"/>
           </a:xfrm>
           <a:prstGeom prst="rect">
             <a:avLst/>
@@ -7307,7 +7630,7 @@
               <a:buNone/>
             </a:pPr>
             <a:r>
-              <a:rPr lang="en-US" sz="950" b="1" dirty="0">
+              <a:rPr lang="en-US" sz="1300" b="1" dirty="0">
                 <a:solidFill>
                   <a:srgbClr val="0068B7"/>
                 </a:solidFill>
@@ -7317,20 +7640,20 @@
               </a:rPr>
               <a:t>Use this for</a:t>
             </a:r>
-            <a:endParaRPr lang="en-US" sz="950" dirty="0"/>
-          </a:p>
-        </p:txBody>
-      </p:sp>
-      <p:sp>
-        <p:nvSpPr>
-          <p:cNvPr id="16" name="Text 14"/>
-          <p:cNvSpPr/>
-          <p:nvPr/>
-        </p:nvSpPr>
-        <p:spPr>
-          <a:xfrm>
-            <a:off x="8074152" y="3959352"/>
-            <a:ext cx="2825496" cy="1170432"/>
+            <a:endParaRPr lang="en-US" sz="1300" dirty="0"/>
+          </a:p>
+        </p:txBody>
+      </p:sp>
+      <p:sp>
+        <p:nvSpPr>
+          <p:cNvPr id="17" name="Text 15"/>
+          <p:cNvSpPr/>
+          <p:nvPr/>
+        </p:nvSpPr>
+        <p:spPr>
+          <a:xfrm>
+            <a:off x="8074152" y="4023360"/>
+            <a:ext cx="2825496" cy="1097280"/>
           </a:xfrm>
           <a:prstGeom prst="rect">
             <a:avLst/>
@@ -7348,7 +7671,7 @@
               <a:buNone/>
             </a:pPr>
             <a:r>
-              <a:rPr lang="en-US" sz="1250" dirty="0">
+              <a:rPr lang="en-US" sz="1550" dirty="0">
                 <a:solidFill>
                   <a:srgbClr val="17364A"/>
                 </a:solidFill>
@@ -7358,7 +7681,7 @@
               </a:rPr>
               <a:t>Connect the concept to public health decisions, safeguards, documentation, or implementation work.</a:t>
             </a:r>
-            <a:endParaRPr lang="en-US" sz="1250" dirty="0"/>
+            <a:endParaRPr lang="en-US" sz="1550" dirty="0"/>
           </a:p>
         </p:txBody>
       </p:sp>
@@ -7555,7 +7878,7 @@
                 <a:ea typeface="Aptos" pitchFamily="34" charset="-122"/>
                 <a:cs typeface="Aptos" pitchFamily="34" charset="-120"/>
               </a:rPr>
-              <a:t>© Paula Soper</a:t>
+              <a:t>Â© Paula Soper</a:t>
             </a:r>
             <a:endParaRPr lang="en-US" sz="800" dirty="0"/>
           </a:p>
@@ -7563,7 +7886,46 @@
       </p:sp>
       <p:sp>
         <p:nvSpPr>
-          <p:cNvPr id="7" name="Shape 5"/>
+          <p:cNvPr id="7" name="Text 5"/>
+          <p:cNvSpPr/>
+          <p:nvPr/>
+        </p:nvSpPr>
+        <p:spPr>
+          <a:xfrm>
+            <a:off x="11137392" y="6510528"/>
+            <a:ext cx="411480" cy="201168"/>
+          </a:xfrm>
+          <a:prstGeom prst="rect">
+            <a:avLst/>
+          </a:prstGeom>
+          <a:noFill/>
+          <a:ln/>
+        </p:spPr>
+        <p:txBody>
+          <a:bodyPr wrap="square" lIns="0" tIns="0" rIns="0" bIns="0" rtlCol="0" anchor="ctr"/>
+          <a:lstStyle/>
+          <a:p>
+            <a:pPr algn="r" indent="0" marL="0">
+              <a:buNone/>
+            </a:pPr>
+            <a:r>
+              <a:rPr lang="en-US" sz="900" dirty="0">
+                <a:solidFill>
+                  <a:srgbClr val="5F7181"/>
+                </a:solidFill>
+                <a:latin typeface="Aptos" pitchFamily="34" charset="0"/>
+                <a:ea typeface="Aptos" pitchFamily="34" charset="-122"/>
+                <a:cs typeface="Aptos" pitchFamily="34" charset="-120"/>
+              </a:rPr>
+              <a:t>18</a:t>
+            </a:r>
+            <a:endParaRPr lang="en-US" sz="900" dirty="0"/>
+          </a:p>
+        </p:txBody>
+      </p:sp>
+      <p:sp>
+        <p:nvSpPr>
+          <p:cNvPr id="8" name="Shape 6"/>
           <p:cNvSpPr/>
           <p:nvPr/>
         </p:nvSpPr>
@@ -7588,7 +7950,7 @@
       </p:sp>
       <p:sp>
         <p:nvSpPr>
-          <p:cNvPr id="8" name="Text 6"/>
+          <p:cNvPr id="9" name="Text 7"/>
           <p:cNvSpPr/>
           <p:nvPr/>
         </p:nvSpPr>
@@ -7627,14 +7989,14 @@
       </p:sp>
       <p:sp>
         <p:nvSpPr>
-          <p:cNvPr id="9" name="Text 7"/>
+          <p:cNvPr id="10" name="Text 8"/>
           <p:cNvSpPr/>
           <p:nvPr/>
         </p:nvSpPr>
         <p:spPr>
           <a:xfrm>
             <a:off x="640080" y="621792"/>
-            <a:ext cx="10881360" cy="566928"/>
+            <a:ext cx="10881360" cy="713232"/>
           </a:xfrm>
           <a:prstGeom prst="rect">
             <a:avLst/>
@@ -7652,7 +8014,7 @@
               <a:buNone/>
             </a:pPr>
             <a:r>
-              <a:rPr lang="en-US" sz="2700" b="1" dirty="0">
+              <a:rPr lang="en-US" sz="3400" b="1" dirty="0">
                 <a:solidFill>
                   <a:srgbClr val="003A63"/>
                 </a:solidFill>
@@ -7662,20 +8024,20 @@
               </a:rPr>
               <a:t>Knowledge Check</a:t>
             </a:r>
-            <a:endParaRPr lang="en-US" sz="2700" dirty="0"/>
-          </a:p>
-        </p:txBody>
-      </p:sp>
-      <p:sp>
-        <p:nvSpPr>
-          <p:cNvPr id="10" name="Text 8"/>
-          <p:cNvSpPr/>
-          <p:nvPr/>
-        </p:nvSpPr>
-        <p:spPr>
-          <a:xfrm>
-            <a:off x="868680" y="1417320"/>
-            <a:ext cx="6675120" cy="4434840"/>
+            <a:endParaRPr lang="en-US" sz="3400" dirty="0"/>
+          </a:p>
+        </p:txBody>
+      </p:sp>
+      <p:sp>
+        <p:nvSpPr>
+          <p:cNvPr id="11" name="Text 9"/>
+          <p:cNvSpPr/>
+          <p:nvPr/>
+        </p:nvSpPr>
+        <p:spPr>
+          <a:xfrm>
+            <a:off x="868680" y="1508760"/>
+            <a:ext cx="6537960" cy="4160520"/>
           </a:xfrm>
           <a:prstGeom prst="rect">
             <a:avLst/>
@@ -7690,7 +8052,7 @@
           <a:lstStyle/>
           <a:p>
             <a:r>
-              <a:rPr lang="en-US" sz="1700" dirty="0">
+              <a:rPr lang="en-US" sz="2100" dirty="0">
                 <a:solidFill>
                   <a:srgbClr val="17364A"/>
                 </a:solidFill>
@@ -7700,11 +8062,11 @@
               </a:rPr>
               <a:t>1. What is the strongest reason this module topic belongs in AI leadership and governance training?</a:t>
             </a:r>
-            <a:endParaRPr lang="en-US" sz="1700" dirty="0"/>
-          </a:p>
-          <a:p>
-            <a:r>
-              <a:rPr lang="en-US" sz="1700" dirty="0">
+            <a:endParaRPr lang="en-US" sz="2100" dirty="0"/>
+          </a:p>
+          <a:p>
+            <a:r>
+              <a:rPr lang="en-US" sz="2100" dirty="0">
                 <a:solidFill>
                   <a:srgbClr val="17364A"/>
                 </a:solidFill>
@@ -7714,11 +8076,11 @@
               </a:rPr>
               <a:t>2. Which practice best supports accountable public health AI governance?</a:t>
             </a:r>
-            <a:endParaRPr lang="en-US" sz="1700" dirty="0"/>
-          </a:p>
-          <a:p>
-            <a:r>
-              <a:rPr lang="en-US" sz="1700" dirty="0">
+            <a:endParaRPr lang="en-US" sz="2100" dirty="0"/>
+          </a:p>
+          <a:p>
+            <a:r>
+              <a:rPr lang="en-US" sz="2100" dirty="0">
                 <a:solidFill>
                   <a:srgbClr val="17364A"/>
                 </a:solidFill>
@@ -7728,27 +8090,13 @@
               </a:rPr>
               <a:t>3. When should an AI use case be escalated for leadership or governance review?</a:t>
             </a:r>
-            <a:endParaRPr lang="en-US" sz="1700" dirty="0"/>
-          </a:p>
-          <a:p>
-            <a:r>
-              <a:rPr lang="en-US" sz="1700" dirty="0">
-                <a:solidFill>
-                  <a:srgbClr val="17364A"/>
-                </a:solidFill>
-                <a:latin typeface="Aptos" pitchFamily="34" charset="0"/>
-                <a:ea typeface="Aptos" pitchFamily="34" charset="-122"/>
-                <a:cs typeface="Aptos" pitchFamily="34" charset="-120"/>
-              </a:rPr>
-              <a:t>4. What is weak evidence of completion for a leadership and governance module?</a:t>
-            </a:r>
-            <a:endParaRPr lang="en-US" sz="1700" dirty="0"/>
-          </a:p>
-        </p:txBody>
-      </p:sp>
-      <p:sp>
-        <p:nvSpPr>
-          <p:cNvPr id="11" name="Shape 9"/>
+            <a:endParaRPr lang="en-US" sz="2100" dirty="0"/>
+          </a:p>
+        </p:txBody>
+      </p:sp>
+      <p:sp>
+        <p:nvSpPr>
+          <p:cNvPr id="12" name="Shape 10"/>
           <p:cNvSpPr/>
           <p:nvPr/>
         </p:nvSpPr>
@@ -7775,14 +8123,14 @@
       </p:sp>
       <p:sp>
         <p:nvSpPr>
-          <p:cNvPr id="12" name="Text 10"/>
+          <p:cNvPr id="13" name="Text 11"/>
           <p:cNvSpPr/>
           <p:nvPr/>
         </p:nvSpPr>
         <p:spPr>
           <a:xfrm>
             <a:off x="8074152" y="1563624"/>
-            <a:ext cx="2825496" cy="201168"/>
+            <a:ext cx="2825496" cy="256032"/>
           </a:xfrm>
           <a:prstGeom prst="rect">
             <a:avLst/>
@@ -7798,7 +8146,7 @@
               <a:buNone/>
             </a:pPr>
             <a:r>
-              <a:rPr lang="en-US" sz="950" b="1" dirty="0">
+              <a:rPr lang="en-US" sz="1300" b="1" dirty="0">
                 <a:solidFill>
                   <a:srgbClr val="0068B7"/>
                 </a:solidFill>
@@ -7808,20 +8156,20 @@
               </a:rPr>
               <a:t>Key idea</a:t>
             </a:r>
-            <a:endParaRPr lang="en-US" sz="950" dirty="0"/>
-          </a:p>
-        </p:txBody>
-      </p:sp>
-      <p:sp>
-        <p:nvSpPr>
-          <p:cNvPr id="13" name="Text 11"/>
-          <p:cNvSpPr/>
-          <p:nvPr/>
-        </p:nvSpPr>
-        <p:spPr>
-          <a:xfrm>
-            <a:off x="8074152" y="1856232"/>
-            <a:ext cx="2825496" cy="1261872"/>
+            <a:endParaRPr lang="en-US" sz="1300" dirty="0"/>
+          </a:p>
+        </p:txBody>
+      </p:sp>
+      <p:sp>
+        <p:nvSpPr>
+          <p:cNvPr id="14" name="Text 12"/>
+          <p:cNvSpPr/>
+          <p:nvPr/>
+        </p:nvSpPr>
+        <p:spPr>
+          <a:xfrm>
+            <a:off x="8074152" y="1920240"/>
+            <a:ext cx="2825496" cy="1188720"/>
           </a:xfrm>
           <a:prstGeom prst="rect">
             <a:avLst/>
@@ -7839,7 +8187,7 @@
               <a:buNone/>
             </a:pPr>
             <a:r>
-              <a:rPr lang="en-US" sz="1250" dirty="0">
+              <a:rPr lang="en-US" sz="1550" dirty="0">
                 <a:solidFill>
                   <a:srgbClr val="17364A"/>
                 </a:solidFill>
@@ -7849,13 +8197,13 @@
               </a:rPr>
               <a:t>1. What is the strongest reason this module topic belongs in AI leadership and governance training?</a:t>
             </a:r>
-            <a:endParaRPr lang="en-US" sz="1250" dirty="0"/>
-          </a:p>
-        </p:txBody>
-      </p:sp>
-      <p:sp>
-        <p:nvSpPr>
-          <p:cNvPr id="14" name="Shape 12"/>
+            <a:endParaRPr lang="en-US" sz="1550" dirty="0"/>
+          </a:p>
+        </p:txBody>
+      </p:sp>
+      <p:sp>
+        <p:nvSpPr>
+          <p:cNvPr id="15" name="Shape 13"/>
           <p:cNvSpPr/>
           <p:nvPr/>
         </p:nvSpPr>
@@ -7882,14 +8230,14 @@
       </p:sp>
       <p:sp>
         <p:nvSpPr>
-          <p:cNvPr id="15" name="Text 13"/>
+          <p:cNvPr id="16" name="Text 14"/>
           <p:cNvSpPr/>
           <p:nvPr/>
         </p:nvSpPr>
         <p:spPr>
           <a:xfrm>
             <a:off x="8074152" y="3666744"/>
-            <a:ext cx="2825496" cy="201168"/>
+            <a:ext cx="2825496" cy="256032"/>
           </a:xfrm>
           <a:prstGeom prst="rect">
             <a:avLst/>
@@ -7905,7 +8253,7 @@
               <a:buNone/>
             </a:pPr>
             <a:r>
-              <a:rPr lang="en-US" sz="950" b="1" dirty="0">
+              <a:rPr lang="en-US" sz="1300" b="1" dirty="0">
                 <a:solidFill>
                   <a:srgbClr val="0068B7"/>
                 </a:solidFill>
@@ -7915,20 +8263,20 @@
               </a:rPr>
               <a:t>Use this for</a:t>
             </a:r>
-            <a:endParaRPr lang="en-US" sz="950" dirty="0"/>
-          </a:p>
-        </p:txBody>
-      </p:sp>
-      <p:sp>
-        <p:nvSpPr>
-          <p:cNvPr id="16" name="Text 14"/>
-          <p:cNvSpPr/>
-          <p:nvPr/>
-        </p:nvSpPr>
-        <p:spPr>
-          <a:xfrm>
-            <a:off x="8074152" y="3959352"/>
-            <a:ext cx="2825496" cy="1170432"/>
+            <a:endParaRPr lang="en-US" sz="1300" dirty="0"/>
+          </a:p>
+        </p:txBody>
+      </p:sp>
+      <p:sp>
+        <p:nvSpPr>
+          <p:cNvPr id="17" name="Text 15"/>
+          <p:cNvSpPr/>
+          <p:nvPr/>
+        </p:nvSpPr>
+        <p:spPr>
+          <a:xfrm>
+            <a:off x="8074152" y="4023360"/>
+            <a:ext cx="2825496" cy="1097280"/>
           </a:xfrm>
           <a:prstGeom prst="rect">
             <a:avLst/>
@@ -7946,7 +8294,7 @@
               <a:buNone/>
             </a:pPr>
             <a:r>
-              <a:rPr lang="en-US" sz="1250" dirty="0">
+              <a:rPr lang="en-US" sz="1550" dirty="0">
                 <a:solidFill>
                   <a:srgbClr val="17364A"/>
                 </a:solidFill>
@@ -7956,7 +8304,7 @@
               </a:rPr>
               <a:t>Connect the concept to public health decisions, safeguards, documentation, or implementation work.</a:t>
             </a:r>
-            <a:endParaRPr lang="en-US" sz="1250" dirty="0"/>
+            <a:endParaRPr lang="en-US" sz="1550" dirty="0"/>
           </a:p>
         </p:txBody>
       </p:sp>
@@ -8153,7 +8501,7 @@
                 <a:ea typeface="Aptos" pitchFamily="34" charset="-122"/>
                 <a:cs typeface="Aptos" pitchFamily="34" charset="-120"/>
               </a:rPr>
-              <a:t>© Paula Soper</a:t>
+              <a:t>Â© Paula Soper</a:t>
             </a:r>
             <a:endParaRPr lang="en-US" sz="800" dirty="0"/>
           </a:p>
@@ -8161,7 +8509,46 @@
       </p:sp>
       <p:sp>
         <p:nvSpPr>
-          <p:cNvPr id="7" name="Shape 5"/>
+          <p:cNvPr id="7" name="Text 5"/>
+          <p:cNvSpPr/>
+          <p:nvPr/>
+        </p:nvSpPr>
+        <p:spPr>
+          <a:xfrm>
+            <a:off x="11137392" y="6510528"/>
+            <a:ext cx="411480" cy="201168"/>
+          </a:xfrm>
+          <a:prstGeom prst="rect">
+            <a:avLst/>
+          </a:prstGeom>
+          <a:noFill/>
+          <a:ln/>
+        </p:spPr>
+        <p:txBody>
+          <a:bodyPr wrap="square" lIns="0" tIns="0" rIns="0" bIns="0" rtlCol="0" anchor="ctr"/>
+          <a:lstStyle/>
+          <a:p>
+            <a:pPr algn="r" indent="0" marL="0">
+              <a:buNone/>
+            </a:pPr>
+            <a:r>
+              <a:rPr lang="en-US" sz="900" dirty="0">
+                <a:solidFill>
+                  <a:srgbClr val="5F7181"/>
+                </a:solidFill>
+                <a:latin typeface="Aptos" pitchFamily="34" charset="0"/>
+                <a:ea typeface="Aptos" pitchFamily="34" charset="-122"/>
+                <a:cs typeface="Aptos" pitchFamily="34" charset="-120"/>
+              </a:rPr>
+              <a:t>19</a:t>
+            </a:r>
+            <a:endParaRPr lang="en-US" sz="900" dirty="0"/>
+          </a:p>
+        </p:txBody>
+      </p:sp>
+      <p:sp>
+        <p:nvSpPr>
+          <p:cNvPr id="8" name="Shape 6"/>
           <p:cNvSpPr/>
           <p:nvPr/>
         </p:nvSpPr>
@@ -8186,7 +8573,7 @@
       </p:sp>
       <p:sp>
         <p:nvSpPr>
-          <p:cNvPr id="8" name="Text 6"/>
+          <p:cNvPr id="9" name="Text 7"/>
           <p:cNvSpPr/>
           <p:nvPr/>
         </p:nvSpPr>
@@ -8225,14 +8612,14 @@
       </p:sp>
       <p:sp>
         <p:nvSpPr>
-          <p:cNvPr id="9" name="Text 7"/>
+          <p:cNvPr id="10" name="Text 8"/>
           <p:cNvSpPr/>
           <p:nvPr/>
         </p:nvSpPr>
         <p:spPr>
           <a:xfrm>
             <a:off x="640080" y="621792"/>
-            <a:ext cx="10881360" cy="566928"/>
+            <a:ext cx="10881360" cy="713232"/>
           </a:xfrm>
           <a:prstGeom prst="rect">
             <a:avLst/>
@@ -8250,7 +8637,7 @@
               <a:buNone/>
             </a:pPr>
             <a:r>
-              <a:rPr lang="en-US" sz="2700" b="1" dirty="0">
+              <a:rPr lang="en-US" sz="3400" b="1" dirty="0">
                 <a:solidFill>
                   <a:srgbClr val="003A63"/>
                 </a:solidFill>
@@ -8260,20 +8647,20 @@
               </a:rPr>
               <a:t>References and Resources</a:t>
             </a:r>
-            <a:endParaRPr lang="en-US" sz="2700" dirty="0"/>
-          </a:p>
-        </p:txBody>
-      </p:sp>
-      <p:sp>
-        <p:nvSpPr>
-          <p:cNvPr id="10" name="Text 8"/>
-          <p:cNvSpPr/>
-          <p:nvPr/>
-        </p:nvSpPr>
-        <p:spPr>
-          <a:xfrm>
-            <a:off x="868680" y="1417320"/>
-            <a:ext cx="6675120" cy="4434840"/>
+            <a:endParaRPr lang="en-US" sz="3400" dirty="0"/>
+          </a:p>
+        </p:txBody>
+      </p:sp>
+      <p:sp>
+        <p:nvSpPr>
+          <p:cNvPr id="11" name="Text 9"/>
+          <p:cNvSpPr/>
+          <p:nvPr/>
+        </p:nvSpPr>
+        <p:spPr>
+          <a:xfrm>
+            <a:off x="868680" y="1508760"/>
+            <a:ext cx="6537960" cy="4160520"/>
           </a:xfrm>
           <a:prstGeom prst="rect">
             <a:avLst/>
@@ -8288,7 +8675,7 @@
           <a:lstStyle/>
           <a:p>
             <a:r>
-              <a:rPr lang="en-US" sz="1700" dirty="0">
+              <a:rPr lang="en-US" sz="2100" dirty="0">
                 <a:solidFill>
                   <a:srgbClr val="17364A"/>
                 </a:solidFill>
@@ -8296,13 +8683,13 @@
                 <a:ea typeface="Aptos" pitchFamily="34" charset="-122"/>
                 <a:cs typeface="Aptos" pitchFamily="34" charset="-120"/>
               </a:rPr>
-              <a:t>NIST Artificial Intelligence Risk Management Framework (AI RMF 1.0): https://www.nist.gov/itl/ai-risk-management-framework</a:t>
-            </a:r>
-            <a:endParaRPr lang="en-US" sz="1700" dirty="0"/>
-          </a:p>
-          <a:p>
-            <a:r>
-              <a:rPr lang="en-US" sz="1700" dirty="0">
+              <a:t>NIST Artificial Intelligence Risk Management Framework (AI RMF 1.0):.</a:t>
+            </a:r>
+            <a:endParaRPr lang="en-US" sz="2100" dirty="0"/>
+          </a:p>
+          <a:p>
+            <a:r>
+              <a:rPr lang="en-US" sz="2100" dirty="0">
                 <a:solidFill>
                   <a:srgbClr val="17364A"/>
                 </a:solidFill>
@@ -8312,11 +8699,11 @@
               </a:rPr>
               <a:t>NIST Generative AI Profile:.</a:t>
             </a:r>
-            <a:endParaRPr lang="en-US" sz="1700" dirty="0"/>
-          </a:p>
-          <a:p>
-            <a:r>
-              <a:rPr lang="en-US" sz="1700" dirty="0">
+            <a:endParaRPr lang="en-US" sz="2100" dirty="0"/>
+          </a:p>
+          <a:p>
+            <a:r>
+              <a:rPr lang="en-US" sz="2100" dirty="0">
                 <a:solidFill>
                   <a:srgbClr val="17364A"/>
                 </a:solidFill>
@@ -8326,27 +8713,13 @@
               </a:rPr>
               <a:t>NIST Privacy Framework</a:t>
             </a:r>
-            <a:endParaRPr lang="en-US" sz="1700" dirty="0"/>
-          </a:p>
-          <a:p>
-            <a:r>
-              <a:rPr lang="en-US" sz="1700" dirty="0">
-                <a:solidFill>
-                  <a:srgbClr val="17364A"/>
-                </a:solidFill>
-                <a:latin typeface="Aptos" pitchFamily="34" charset="0"/>
-                <a:ea typeface="Aptos" pitchFamily="34" charset="-122"/>
-                <a:cs typeface="Aptos" pitchFamily="34" charset="-120"/>
-              </a:rPr>
-              <a:t>CDC Public Health Data Strategy and Data Modernization resources:.</a:t>
-            </a:r>
-            <a:endParaRPr lang="en-US" sz="1700" dirty="0"/>
-          </a:p>
-        </p:txBody>
-      </p:sp>
-      <p:sp>
-        <p:nvSpPr>
-          <p:cNvPr id="11" name="Shape 9"/>
+            <a:endParaRPr lang="en-US" sz="2100" dirty="0"/>
+          </a:p>
+        </p:txBody>
+      </p:sp>
+      <p:sp>
+        <p:nvSpPr>
+          <p:cNvPr id="12" name="Shape 10"/>
           <p:cNvSpPr/>
           <p:nvPr/>
         </p:nvSpPr>
@@ -8373,14 +8746,14 @@
       </p:sp>
       <p:sp>
         <p:nvSpPr>
-          <p:cNvPr id="12" name="Text 10"/>
+          <p:cNvPr id="13" name="Text 11"/>
           <p:cNvSpPr/>
           <p:nvPr/>
         </p:nvSpPr>
         <p:spPr>
           <a:xfrm>
             <a:off x="8074152" y="1563624"/>
-            <a:ext cx="2825496" cy="201168"/>
+            <a:ext cx="2825496" cy="256032"/>
           </a:xfrm>
           <a:prstGeom prst="rect">
             <a:avLst/>
@@ -8396,7 +8769,7 @@
               <a:buNone/>
             </a:pPr>
             <a:r>
-              <a:rPr lang="en-US" sz="950" b="1" dirty="0">
+              <a:rPr lang="en-US" sz="1300" b="1" dirty="0">
                 <a:solidFill>
                   <a:srgbClr val="0068B7"/>
                 </a:solidFill>
@@ -8406,20 +8779,20 @@
               </a:rPr>
               <a:t>Key idea</a:t>
             </a:r>
-            <a:endParaRPr lang="en-US" sz="950" dirty="0"/>
-          </a:p>
-        </p:txBody>
-      </p:sp>
-      <p:sp>
-        <p:nvSpPr>
-          <p:cNvPr id="13" name="Text 11"/>
-          <p:cNvSpPr/>
-          <p:nvPr/>
-        </p:nvSpPr>
-        <p:spPr>
-          <a:xfrm>
-            <a:off x="8074152" y="1856232"/>
-            <a:ext cx="2825496" cy="1261872"/>
+            <a:endParaRPr lang="en-US" sz="1300" dirty="0"/>
+          </a:p>
+        </p:txBody>
+      </p:sp>
+      <p:sp>
+        <p:nvSpPr>
+          <p:cNvPr id="14" name="Text 12"/>
+          <p:cNvSpPr/>
+          <p:nvPr/>
+        </p:nvSpPr>
+        <p:spPr>
+          <a:xfrm>
+            <a:off x="8074152" y="1920240"/>
+            <a:ext cx="2825496" cy="1188720"/>
           </a:xfrm>
           <a:prstGeom prst="rect">
             <a:avLst/>
@@ -8437,7 +8810,7 @@
               <a:buNone/>
             </a:pPr>
             <a:r>
-              <a:rPr lang="en-US" sz="1250" dirty="0">
+              <a:rPr lang="en-US" sz="1550" dirty="0">
                 <a:solidFill>
                   <a:srgbClr val="17364A"/>
                 </a:solidFill>
@@ -8445,15 +8818,15 @@
                 <a:ea typeface="Aptos" pitchFamily="34" charset="-122"/>
                 <a:cs typeface="Aptos" pitchFamily="34" charset="-120"/>
               </a:rPr>
-              <a:t>NIST Artificial Intelligence Risk Management Framework (AI RMF 1.0): https://www.nist.gov/itl/ai-risk-management-framework</a:t>
-            </a:r>
-            <a:endParaRPr lang="en-US" sz="1250" dirty="0"/>
-          </a:p>
-        </p:txBody>
-      </p:sp>
-      <p:sp>
-        <p:nvSpPr>
-          <p:cNvPr id="14" name="Shape 12"/>
+              <a:t>NIST Artificial Intelligence Risk Management Framework (AI RMF 1.0):.</a:t>
+            </a:r>
+            <a:endParaRPr lang="en-US" sz="1550" dirty="0"/>
+          </a:p>
+        </p:txBody>
+      </p:sp>
+      <p:sp>
+        <p:nvSpPr>
+          <p:cNvPr id="15" name="Shape 13"/>
           <p:cNvSpPr/>
           <p:nvPr/>
         </p:nvSpPr>
@@ -8480,14 +8853,14 @@
       </p:sp>
       <p:sp>
         <p:nvSpPr>
-          <p:cNvPr id="15" name="Text 13"/>
+          <p:cNvPr id="16" name="Text 14"/>
           <p:cNvSpPr/>
           <p:nvPr/>
         </p:nvSpPr>
         <p:spPr>
           <a:xfrm>
             <a:off x="8074152" y="3666744"/>
-            <a:ext cx="2825496" cy="201168"/>
+            <a:ext cx="2825496" cy="256032"/>
           </a:xfrm>
           <a:prstGeom prst="rect">
             <a:avLst/>
@@ -8503,7 +8876,7 @@
               <a:buNone/>
             </a:pPr>
             <a:r>
-              <a:rPr lang="en-US" sz="950" b="1" dirty="0">
+              <a:rPr lang="en-US" sz="1300" b="1" dirty="0">
                 <a:solidFill>
                   <a:srgbClr val="0068B7"/>
                 </a:solidFill>
@@ -8513,20 +8886,20 @@
               </a:rPr>
               <a:t>Use this for</a:t>
             </a:r>
-            <a:endParaRPr lang="en-US" sz="950" dirty="0"/>
-          </a:p>
-        </p:txBody>
-      </p:sp>
-      <p:sp>
-        <p:nvSpPr>
-          <p:cNvPr id="16" name="Text 14"/>
-          <p:cNvSpPr/>
-          <p:nvPr/>
-        </p:nvSpPr>
-        <p:spPr>
-          <a:xfrm>
-            <a:off x="8074152" y="3959352"/>
-            <a:ext cx="2825496" cy="1170432"/>
+            <a:endParaRPr lang="en-US" sz="1300" dirty="0"/>
+          </a:p>
+        </p:txBody>
+      </p:sp>
+      <p:sp>
+        <p:nvSpPr>
+          <p:cNvPr id="17" name="Text 15"/>
+          <p:cNvSpPr/>
+          <p:nvPr/>
+        </p:nvSpPr>
+        <p:spPr>
+          <a:xfrm>
+            <a:off x="8074152" y="4023360"/>
+            <a:ext cx="2825496" cy="1097280"/>
           </a:xfrm>
           <a:prstGeom prst="rect">
             <a:avLst/>
@@ -8544,7 +8917,7 @@
               <a:buNone/>
             </a:pPr>
             <a:r>
-              <a:rPr lang="en-US" sz="1250" dirty="0">
+              <a:rPr lang="en-US" sz="1550" dirty="0">
                 <a:solidFill>
                   <a:srgbClr val="17364A"/>
                 </a:solidFill>
@@ -8554,7 +8927,7 @@
               </a:rPr>
               <a:t>Connect the concept to public health decisions, safeguards, documentation, or implementation work.</a:t>
             </a:r>
-            <a:endParaRPr lang="en-US" sz="1250" dirty="0"/>
+            <a:endParaRPr lang="en-US" sz="1550" dirty="0"/>
           </a:p>
         </p:txBody>
       </p:sp>
@@ -8751,7 +9124,7 @@
                 <a:ea typeface="Aptos" pitchFamily="34" charset="-122"/>
                 <a:cs typeface="Aptos" pitchFamily="34" charset="-120"/>
               </a:rPr>
-              <a:t>© Paula Soper</a:t>
+              <a:t>Â© Paula Soper</a:t>
             </a:r>
             <a:endParaRPr lang="en-US" sz="800" dirty="0"/>
           </a:p>
@@ -8765,8 +9138,47 @@
         </p:nvSpPr>
         <p:spPr>
           <a:xfrm>
+            <a:off x="11137392" y="6510528"/>
+            <a:ext cx="411480" cy="201168"/>
+          </a:xfrm>
+          <a:prstGeom prst="rect">
+            <a:avLst/>
+          </a:prstGeom>
+          <a:noFill/>
+          <a:ln/>
+        </p:spPr>
+        <p:txBody>
+          <a:bodyPr wrap="square" lIns="0" tIns="0" rIns="0" bIns="0" rtlCol="0" anchor="ctr"/>
+          <a:lstStyle/>
+          <a:p>
+            <a:pPr algn="r" indent="0" marL="0">
+              <a:buNone/>
+            </a:pPr>
+            <a:r>
+              <a:rPr lang="en-US" sz="900" dirty="0">
+                <a:solidFill>
+                  <a:srgbClr val="5F7181"/>
+                </a:solidFill>
+                <a:latin typeface="Aptos" pitchFamily="34" charset="0"/>
+                <a:ea typeface="Aptos" pitchFamily="34" charset="-122"/>
+                <a:cs typeface="Aptos" pitchFamily="34" charset="-120"/>
+              </a:rPr>
+              <a:t>2</a:t>
+            </a:r>
+            <a:endParaRPr lang="en-US" sz="900" dirty="0"/>
+          </a:p>
+        </p:txBody>
+      </p:sp>
+      <p:sp>
+        <p:nvSpPr>
+          <p:cNvPr id="8" name="Text 6"/>
+          <p:cNvSpPr/>
+          <p:nvPr/>
+        </p:nvSpPr>
+        <p:spPr>
+          <a:xfrm>
             <a:off x="640080" y="658368"/>
-            <a:ext cx="10881360" cy="566928"/>
+            <a:ext cx="10881360" cy="713232"/>
           </a:xfrm>
           <a:prstGeom prst="rect">
             <a:avLst/>
@@ -8784,7 +9196,7 @@
               <a:buNone/>
             </a:pPr>
             <a:r>
-              <a:rPr lang="en-US" sz="2700" b="1" dirty="0">
+              <a:rPr lang="en-US" sz="3400" b="1" dirty="0">
                 <a:solidFill>
                   <a:srgbClr val="003A63"/>
                 </a:solidFill>
@@ -8794,20 +9206,20 @@
               </a:rPr>
               <a:t>What this module helps you do</a:t>
             </a:r>
-            <a:endParaRPr lang="en-US" sz="2700" dirty="0"/>
-          </a:p>
-        </p:txBody>
-      </p:sp>
-      <p:sp>
-        <p:nvSpPr>
-          <p:cNvPr id="8" name="Text 6"/>
-          <p:cNvSpPr/>
-          <p:nvPr/>
-        </p:nvSpPr>
-        <p:spPr>
-          <a:xfrm>
-            <a:off x="868680" y="1417320"/>
-            <a:ext cx="6675120" cy="3291840"/>
+            <a:endParaRPr lang="en-US" sz="3400" dirty="0"/>
+          </a:p>
+        </p:txBody>
+      </p:sp>
+      <p:sp>
+        <p:nvSpPr>
+          <p:cNvPr id="9" name="Text 7"/>
+          <p:cNvSpPr/>
+          <p:nvPr/>
+        </p:nvSpPr>
+        <p:spPr>
+          <a:xfrm>
+            <a:off x="868680" y="1508760"/>
+            <a:ext cx="6446520" cy="2926080"/>
           </a:xfrm>
           <a:prstGeom prst="rect">
             <a:avLst/>
@@ -8822,7 +9234,7 @@
           <a:lstStyle/>
           <a:p>
             <a:r>
-              <a:rPr lang="en-US" sz="1700" dirty="0">
+              <a:rPr lang="en-US" sz="2100" dirty="0">
                 <a:solidFill>
                   <a:srgbClr val="17364A"/>
                 </a:solidFill>
@@ -8830,13 +9242,13 @@
                 <a:ea typeface="Aptos" pitchFamily="34" charset="-122"/>
                 <a:cs typeface="Aptos" pitchFamily="34" charset="-120"/>
               </a:rPr>
-              <a:t>AI adoption changes how people work, make decisions, document actions, communicate with partners, and understand their roles.</a:t>
-            </a:r>
-            <a:endParaRPr lang="en-US" sz="1700" dirty="0"/>
-          </a:p>
-          <a:p>
-            <a:r>
-              <a:rPr lang="en-US" sz="1700" dirty="0">
+              <a:t>AI adoption changes how people work, make decisions, document actions, communicate with partners, and understand.</a:t>
+            </a:r>
+            <a:endParaRPr lang="en-US" sz="2100" dirty="0"/>
+          </a:p>
+          <a:p>
+            <a:r>
+              <a:rPr lang="en-US" sz="2100" dirty="0">
                 <a:solidFill>
                   <a:srgbClr val="17364A"/>
                 </a:solidFill>
@@ -8846,11 +9258,11 @@
               </a:rPr>
               <a:t>Successful implementation requires change management, not just technical deployment.</a:t>
             </a:r>
-            <a:endParaRPr lang="en-US" sz="1700" dirty="0"/>
-          </a:p>
-          <a:p>
-            <a:r>
-              <a:rPr lang="en-US" sz="1700" dirty="0">
+            <a:endParaRPr lang="en-US" sz="2100" dirty="0"/>
+          </a:p>
+          <a:p>
+            <a:r>
+              <a:rPr lang="en-US" sz="2100" dirty="0">
                 <a:solidFill>
                   <a:srgbClr val="17364A"/>
                 </a:solidFill>
@@ -8858,29 +9270,15 @@
                 <a:ea typeface="Aptos" pitchFamily="34" charset="-122"/>
                 <a:cs typeface="Aptos" pitchFamily="34" charset="-120"/>
               </a:rPr>
-              <a:t>Staff need to understand why a tool is being introduced, how it affects their workflow, what they are responsible for reviewing, and how concerns.</a:t>
-            </a:r>
-            <a:endParaRPr lang="en-US" sz="1700" dirty="0"/>
-          </a:p>
-          <a:p>
-            <a:r>
-              <a:rPr lang="en-US" sz="1700" dirty="0">
-                <a:solidFill>
-                  <a:srgbClr val="17364A"/>
-                </a:solidFill>
-                <a:latin typeface="Aptos" pitchFamily="34" charset="0"/>
-                <a:ea typeface="Aptos" pitchFamily="34" charset="-122"/>
-                <a:cs typeface="Aptos" pitchFamily="34" charset="-120"/>
-              </a:rPr>
-              <a:t>This module helps leaders plan the organizational side of AI adoption.</a:t>
-            </a:r>
-            <a:endParaRPr lang="en-US" sz="1700" dirty="0"/>
-          </a:p>
-        </p:txBody>
-      </p:sp>
-      <p:sp>
-        <p:nvSpPr>
-          <p:cNvPr id="9" name="Shape 7"/>
+              <a:t>Staff need to understand why a tool is being introduced, how it affects their workflow, what they are responsible.</a:t>
+            </a:r>
+            <a:endParaRPr lang="en-US" sz="2100" dirty="0"/>
+          </a:p>
+        </p:txBody>
+      </p:sp>
+      <p:sp>
+        <p:nvSpPr>
+          <p:cNvPr id="10" name="Shape 8"/>
           <p:cNvSpPr/>
           <p:nvPr/>
         </p:nvSpPr>
@@ -8907,14 +9305,14 @@
       </p:sp>
       <p:sp>
         <p:nvSpPr>
-          <p:cNvPr id="10" name="Text 8"/>
+          <p:cNvPr id="11" name="Text 9"/>
           <p:cNvSpPr/>
           <p:nvPr/>
         </p:nvSpPr>
         <p:spPr>
           <a:xfrm>
             <a:off x="8074152" y="1563624"/>
-            <a:ext cx="2825496" cy="201168"/>
+            <a:ext cx="2825496" cy="256032"/>
           </a:xfrm>
           <a:prstGeom prst="rect">
             <a:avLst/>
@@ -8930,7 +9328,7 @@
               <a:buNone/>
             </a:pPr>
             <a:r>
-              <a:rPr lang="en-US" sz="950" b="1" dirty="0">
+              <a:rPr lang="en-US" sz="1300" b="1" dirty="0">
                 <a:solidFill>
                   <a:srgbClr val="0068B7"/>
                 </a:solidFill>
@@ -8940,20 +9338,20 @@
               </a:rPr>
               <a:t>Module details</a:t>
             </a:r>
-            <a:endParaRPr lang="en-US" sz="950" dirty="0"/>
-          </a:p>
-        </p:txBody>
-      </p:sp>
-      <p:sp>
-        <p:nvSpPr>
-          <p:cNvPr id="11" name="Text 9"/>
-          <p:cNvSpPr/>
-          <p:nvPr/>
-        </p:nvSpPr>
-        <p:spPr>
-          <a:xfrm>
-            <a:off x="8074152" y="1856232"/>
-            <a:ext cx="2825496" cy="1353312"/>
+            <a:endParaRPr lang="en-US" sz="1300" dirty="0"/>
+          </a:p>
+        </p:txBody>
+      </p:sp>
+      <p:sp>
+        <p:nvSpPr>
+          <p:cNvPr id="12" name="Text 10"/>
+          <p:cNvSpPr/>
+          <p:nvPr/>
+        </p:nvSpPr>
+        <p:spPr>
+          <a:xfrm>
+            <a:off x="8074152" y="1920240"/>
+            <a:ext cx="2825496" cy="1280160"/>
           </a:xfrm>
           <a:prstGeom prst="rect">
             <a:avLst/>
@@ -8971,7 +9369,7 @@
               <a:buNone/>
             </a:pPr>
             <a:r>
-              <a:rPr lang="en-US" sz="1250" dirty="0">
+              <a:rPr lang="en-US" sz="1550" dirty="0">
                 <a:solidFill>
                   <a:srgbClr val="17364A"/>
                 </a:solidFill>
@@ -8981,14 +9379,14 @@
               </a:rPr>
               <a:t>Level: advanced/leadership</a:t>
             </a:r>
-            <a:endParaRPr lang="en-US" sz="1250" dirty="0"/>
+            <a:endParaRPr lang="en-US" sz="1550" dirty="0"/>
           </a:p>
           <a:p>
             <a:pPr indent="0" marL="0">
               <a:buNone/>
             </a:pPr>
             <a:r>
-              <a:rPr lang="en-US" sz="1250" dirty="0">
+              <a:rPr lang="en-US" sz="1550" dirty="0">
                 <a:solidFill>
                   <a:srgbClr val="17364A"/>
                 </a:solidFill>
@@ -8998,14 +9396,14 @@
               </a:rPr>
               <a:t>Primary track: Public Health Executive Leadership Track</a:t>
             </a:r>
-            <a:endParaRPr lang="en-US" sz="1250" dirty="0"/>
+            <a:endParaRPr lang="en-US" sz="1550" dirty="0"/>
           </a:p>
           <a:p>
             <a:pPr indent="0" marL="0">
               <a:buNone/>
             </a:pPr>
             <a:r>
-              <a:rPr lang="en-US" sz="1250" dirty="0">
+              <a:rPr lang="en-US" sz="1550" dirty="0">
                 <a:solidFill>
                   <a:srgbClr val="17364A"/>
                 </a:solidFill>
@@ -9015,32 +9413,32 @@
               </a:rPr>
               <a:t>Appears in tracks: governance-security</a:t>
             </a:r>
-            <a:endParaRPr lang="en-US" sz="1250" dirty="0"/>
-          </a:p>
-        </p:txBody>
-      </p:sp>
-      <p:sp>
-        <p:nvSpPr>
-          <p:cNvPr id="12" name="Shape 10"/>
-          <p:cNvSpPr/>
-          <p:nvPr/>
-        </p:nvSpPr>
-        <p:spPr>
-          <a:xfrm>
-            <a:off x="7909560" y="3611880"/>
-            <a:ext cx="3154680" cy="1783080"/>
+            <a:endParaRPr lang="en-US" sz="1550" dirty="0"/>
+          </a:p>
+        </p:txBody>
+      </p:sp>
+      <p:sp>
+        <p:nvSpPr>
+          <p:cNvPr id="13" name="Shape 11"/>
+          <p:cNvSpPr/>
+          <p:nvPr/>
+        </p:nvSpPr>
+        <p:spPr>
+          <a:xfrm>
+            <a:off x="7635240" y="3730752"/>
+            <a:ext cx="1033272" cy="749808"/>
           </a:xfrm>
           <a:prstGeom prst="roundRect">
             <a:avLst>
-              <a:gd name="adj" fmla="val 6154"/>
+              <a:gd name="adj" fmla="val 14634"/>
             </a:avLst>
           </a:prstGeom>
           <a:solidFill>
-            <a:srgbClr val="EEF8ED"/>
+            <a:srgbClr val="0068B7"/>
           </a:solidFill>
           <a:ln w="12700">
             <a:solidFill>
-              <a:srgbClr val="B9D7E6"/>
+              <a:srgbClr val="0068B7"/>
             </a:solidFill>
             <a:prstDash val="solid"/>
           </a:ln>
@@ -9048,81 +9446,256 @@
       </p:sp>
       <p:sp>
         <p:nvSpPr>
-          <p:cNvPr id="13" name="Text 11"/>
-          <p:cNvSpPr/>
-          <p:nvPr/>
-        </p:nvSpPr>
-        <p:spPr>
-          <a:xfrm>
-            <a:off x="8074152" y="3758184"/>
-            <a:ext cx="2825496" cy="201168"/>
-          </a:xfrm>
-          <a:prstGeom prst="rect">
-            <a:avLst/>
-          </a:prstGeom>
-          <a:noFill/>
-          <a:ln/>
-        </p:spPr>
-        <p:txBody>
-          <a:bodyPr wrap="square" lIns="0" tIns="0" rIns="0" bIns="0" rtlCol="0" anchor="ctr"/>
-          <a:lstStyle/>
-          <a:p>
-            <a:pPr indent="0" marL="0">
-              <a:buNone/>
-            </a:pPr>
-            <a:r>
-              <a:rPr lang="en-US" sz="950" b="1" dirty="0">
-                <a:solidFill>
-                  <a:srgbClr val="0068B7"/>
-                </a:solidFill>
-                <a:latin typeface="Aptos" pitchFamily="34" charset="0"/>
-                <a:ea typeface="Aptos" pitchFamily="34" charset="-122"/>
-                <a:cs typeface="Aptos" pitchFamily="34" charset="-120"/>
-              </a:rPr>
-              <a:t>Learning approach</a:t>
-            </a:r>
-            <a:endParaRPr lang="en-US" sz="950" dirty="0"/>
-          </a:p>
-        </p:txBody>
-      </p:sp>
-      <p:sp>
-        <p:nvSpPr>
           <p:cNvPr id="14" name="Text 12"/>
           <p:cNvSpPr/>
           <p:nvPr/>
         </p:nvSpPr>
         <p:spPr>
           <a:xfrm>
-            <a:off x="8074152" y="4050792"/>
-            <a:ext cx="2825496" cy="1216152"/>
-          </a:xfrm>
-          <a:prstGeom prst="rect">
-            <a:avLst/>
-          </a:prstGeom>
-          <a:noFill/>
-          <a:ln/>
-        </p:spPr>
-        <p:txBody>
-          <a:bodyPr wrap="square" lIns="0" tIns="0" rIns="0" bIns="0" rtlCol="0" anchor="t">
+            <a:off x="7708392" y="3922776"/>
+            <a:ext cx="886968" cy="310896"/>
+          </a:xfrm>
+          <a:prstGeom prst="rect">
+            <a:avLst/>
+          </a:prstGeom>
+          <a:noFill/>
+          <a:ln/>
+        </p:spPr>
+        <p:txBody>
+          <a:bodyPr wrap="square" lIns="0" tIns="0" rIns="0" bIns="0" rtlCol="0" anchor="ctr">
             <a:normAutofit/>
           </a:bodyPr>
           <a:lstStyle/>
           <a:p>
-            <a:pPr indent="0" marL="0">
-              <a:buNone/>
-            </a:pPr>
-            <a:r>
-              <a:rPr lang="en-US" sz="1250" dirty="0">
-                <a:solidFill>
-                  <a:srgbClr val="17364A"/>
-                </a:solidFill>
-                <a:latin typeface="Aptos" pitchFamily="34" charset="0"/>
-                <a:ea typeface="Aptos" pitchFamily="34" charset="-122"/>
-                <a:cs typeface="Aptos" pitchFamily="34" charset="-120"/>
-              </a:rPr>
-              <a:t>Review the core ideas, complete the practical exercise, check your understanding, and use the related plays and tools to apply the lesson.</a:t>
-            </a:r>
-            <a:endParaRPr lang="en-US" sz="1250" dirty="0"/>
+            <a:pPr algn="ctr" indent="0" marL="0">
+              <a:buNone/>
+            </a:pPr>
+            <a:r>
+              <a:rPr lang="en-US" sz="1500" b="1" dirty="0">
+                <a:solidFill>
+                  <a:srgbClr val="FFFFFF"/>
+                </a:solidFill>
+                <a:latin typeface="Aptos" pitchFamily="34" charset="0"/>
+                <a:ea typeface="Aptos" pitchFamily="34" charset="-122"/>
+                <a:cs typeface="Aptos" pitchFamily="34" charset="-120"/>
+              </a:rPr>
+              <a:t>Learn</a:t>
+            </a:r>
+            <a:endParaRPr lang="en-US" sz="1500" dirty="0"/>
+          </a:p>
+        </p:txBody>
+      </p:sp>
+      <p:sp>
+        <p:nvSpPr>
+          <p:cNvPr id="15" name="Text 13"/>
+          <p:cNvSpPr/>
+          <p:nvPr/>
+        </p:nvSpPr>
+        <p:spPr>
+          <a:xfrm>
+            <a:off x="8695944" y="3941064"/>
+            <a:ext cx="201168" cy="256032"/>
+          </a:xfrm>
+          <a:prstGeom prst="rect">
+            <a:avLst/>
+          </a:prstGeom>
+          <a:noFill/>
+          <a:ln/>
+        </p:spPr>
+        <p:txBody>
+          <a:bodyPr wrap="square" lIns="0" tIns="0" rIns="0" bIns="0" rtlCol="0" anchor="ctr"/>
+          <a:lstStyle/>
+          <a:p>
+            <a:pPr algn="ctr" indent="0" marL="0">
+              <a:buNone/>
+            </a:pPr>
+            <a:r>
+              <a:rPr lang="en-US" sz="1800" b="1" dirty="0">
+                <a:solidFill>
+                  <a:srgbClr val="0068B7"/>
+                </a:solidFill>
+                <a:latin typeface="Aptos" pitchFamily="34" charset="0"/>
+                <a:ea typeface="Aptos" pitchFamily="34" charset="-122"/>
+                <a:cs typeface="Aptos" pitchFamily="34" charset="-120"/>
+              </a:rPr>
+              <a:t>â†’</a:t>
+            </a:r>
+            <a:endParaRPr lang="en-US" sz="1800" dirty="0"/>
+          </a:p>
+        </p:txBody>
+      </p:sp>
+      <p:sp>
+        <p:nvSpPr>
+          <p:cNvPr id="16" name="Shape 14"/>
+          <p:cNvSpPr/>
+          <p:nvPr/>
+        </p:nvSpPr>
+        <p:spPr>
+          <a:xfrm>
+            <a:off x="8924544" y="3730752"/>
+            <a:ext cx="1033272" cy="749808"/>
+          </a:xfrm>
+          <a:prstGeom prst="roundRect">
+            <a:avLst>
+              <a:gd name="adj" fmla="val 14634"/>
+            </a:avLst>
+          </a:prstGeom>
+          <a:solidFill>
+            <a:srgbClr val="2F8A28"/>
+          </a:solidFill>
+          <a:ln w="12700">
+            <a:solidFill>
+              <a:srgbClr val="2F8A28"/>
+            </a:solidFill>
+            <a:prstDash val="solid"/>
+          </a:ln>
+        </p:spPr>
+      </p:sp>
+      <p:sp>
+        <p:nvSpPr>
+          <p:cNvPr id="17" name="Text 15"/>
+          <p:cNvSpPr/>
+          <p:nvPr/>
+        </p:nvSpPr>
+        <p:spPr>
+          <a:xfrm>
+            <a:off x="8997696" y="3922776"/>
+            <a:ext cx="886968" cy="310896"/>
+          </a:xfrm>
+          <a:prstGeom prst="rect">
+            <a:avLst/>
+          </a:prstGeom>
+          <a:noFill/>
+          <a:ln/>
+        </p:spPr>
+        <p:txBody>
+          <a:bodyPr wrap="square" lIns="0" tIns="0" rIns="0" bIns="0" rtlCol="0" anchor="ctr">
+            <a:normAutofit/>
+          </a:bodyPr>
+          <a:lstStyle/>
+          <a:p>
+            <a:pPr algn="ctr" indent="0" marL="0">
+              <a:buNone/>
+            </a:pPr>
+            <a:r>
+              <a:rPr lang="en-US" sz="1500" b="1" dirty="0">
+                <a:solidFill>
+                  <a:srgbClr val="FFFFFF"/>
+                </a:solidFill>
+                <a:latin typeface="Aptos" pitchFamily="34" charset="0"/>
+                <a:ea typeface="Aptos" pitchFamily="34" charset="-122"/>
+                <a:cs typeface="Aptos" pitchFamily="34" charset="-120"/>
+              </a:rPr>
+              <a:t>Apply</a:t>
+            </a:r>
+            <a:endParaRPr lang="en-US" sz="1500" dirty="0"/>
+          </a:p>
+        </p:txBody>
+      </p:sp>
+      <p:sp>
+        <p:nvSpPr>
+          <p:cNvPr id="18" name="Text 16"/>
+          <p:cNvSpPr/>
+          <p:nvPr/>
+        </p:nvSpPr>
+        <p:spPr>
+          <a:xfrm>
+            <a:off x="9985248" y="3941064"/>
+            <a:ext cx="201168" cy="256032"/>
+          </a:xfrm>
+          <a:prstGeom prst="rect">
+            <a:avLst/>
+          </a:prstGeom>
+          <a:noFill/>
+          <a:ln/>
+        </p:spPr>
+        <p:txBody>
+          <a:bodyPr wrap="square" lIns="0" tIns="0" rIns="0" bIns="0" rtlCol="0" anchor="ctr"/>
+          <a:lstStyle/>
+          <a:p>
+            <a:pPr algn="ctr" indent="0" marL="0">
+              <a:buNone/>
+            </a:pPr>
+            <a:r>
+              <a:rPr lang="en-US" sz="1800" b="1" dirty="0">
+                <a:solidFill>
+                  <a:srgbClr val="0068B7"/>
+                </a:solidFill>
+                <a:latin typeface="Aptos" pitchFamily="34" charset="0"/>
+                <a:ea typeface="Aptos" pitchFamily="34" charset="-122"/>
+                <a:cs typeface="Aptos" pitchFamily="34" charset="-120"/>
+              </a:rPr>
+              <a:t>â†’</a:t>
+            </a:r>
+            <a:endParaRPr lang="en-US" sz="1800" dirty="0"/>
+          </a:p>
+        </p:txBody>
+      </p:sp>
+      <p:sp>
+        <p:nvSpPr>
+          <p:cNvPr id="19" name="Shape 17"/>
+          <p:cNvSpPr/>
+          <p:nvPr/>
+        </p:nvSpPr>
+        <p:spPr>
+          <a:xfrm>
+            <a:off x="10213848" y="3730752"/>
+            <a:ext cx="1033272" cy="749808"/>
+          </a:xfrm>
+          <a:prstGeom prst="roundRect">
+            <a:avLst>
+              <a:gd name="adj" fmla="val 14634"/>
+            </a:avLst>
+          </a:prstGeom>
+          <a:solidFill>
+            <a:srgbClr val="6A4CA3"/>
+          </a:solidFill>
+          <a:ln w="12700">
+            <a:solidFill>
+              <a:srgbClr val="6A4CA3"/>
+            </a:solidFill>
+            <a:prstDash val="solid"/>
+          </a:ln>
+        </p:spPr>
+      </p:sp>
+      <p:sp>
+        <p:nvSpPr>
+          <p:cNvPr id="20" name="Text 18"/>
+          <p:cNvSpPr/>
+          <p:nvPr/>
+        </p:nvSpPr>
+        <p:spPr>
+          <a:xfrm>
+            <a:off x="10287000" y="3922776"/>
+            <a:ext cx="886968" cy="310896"/>
+          </a:xfrm>
+          <a:prstGeom prst="rect">
+            <a:avLst/>
+          </a:prstGeom>
+          <a:noFill/>
+          <a:ln/>
+        </p:spPr>
+        <p:txBody>
+          <a:bodyPr wrap="square" lIns="0" tIns="0" rIns="0" bIns="0" rtlCol="0" anchor="ctr">
+            <a:normAutofit/>
+          </a:bodyPr>
+          <a:lstStyle/>
+          <a:p>
+            <a:pPr algn="ctr" indent="0" marL="0">
+              <a:buNone/>
+            </a:pPr>
+            <a:r>
+              <a:rPr lang="en-US" sz="1500" b="1" dirty="0">
+                <a:solidFill>
+                  <a:srgbClr val="FFFFFF"/>
+                </a:solidFill>
+                <a:latin typeface="Aptos" pitchFamily="34" charset="0"/>
+                <a:ea typeface="Aptos" pitchFamily="34" charset="-122"/>
+                <a:cs typeface="Aptos" pitchFamily="34" charset="-120"/>
+              </a:rPr>
+              <a:t>Document</a:t>
+            </a:r>
+            <a:endParaRPr lang="en-US" sz="1500" dirty="0"/>
           </a:p>
         </p:txBody>
       </p:sp>
@@ -9319,7 +9892,7 @@
                 <a:ea typeface="Aptos" pitchFamily="34" charset="-122"/>
                 <a:cs typeface="Aptos" pitchFamily="34" charset="-120"/>
               </a:rPr>
-              <a:t>© Paula Soper</a:t>
+              <a:t>Â© Paula Soper</a:t>
             </a:r>
             <a:endParaRPr lang="en-US" sz="800" dirty="0"/>
           </a:p>
@@ -9333,8 +9906,47 @@
         </p:nvSpPr>
         <p:spPr>
           <a:xfrm>
+            <a:off x="11137392" y="6510528"/>
+            <a:ext cx="411480" cy="201168"/>
+          </a:xfrm>
+          <a:prstGeom prst="rect">
+            <a:avLst/>
+          </a:prstGeom>
+          <a:noFill/>
+          <a:ln/>
+        </p:spPr>
+        <p:txBody>
+          <a:bodyPr wrap="square" lIns="0" tIns="0" rIns="0" bIns="0" rtlCol="0" anchor="ctr"/>
+          <a:lstStyle/>
+          <a:p>
+            <a:pPr algn="r" indent="0" marL="0">
+              <a:buNone/>
+            </a:pPr>
+            <a:r>
+              <a:rPr lang="en-US" sz="900" dirty="0">
+                <a:solidFill>
+                  <a:srgbClr val="5F7181"/>
+                </a:solidFill>
+                <a:latin typeface="Aptos" pitchFamily="34" charset="0"/>
+                <a:ea typeface="Aptos" pitchFamily="34" charset="-122"/>
+                <a:cs typeface="Aptos" pitchFamily="34" charset="-120"/>
+              </a:rPr>
+              <a:t>20</a:t>
+            </a:r>
+            <a:endParaRPr lang="en-US" sz="900" dirty="0"/>
+          </a:p>
+        </p:txBody>
+      </p:sp>
+      <p:sp>
+        <p:nvSpPr>
+          <p:cNvPr id="8" name="Text 6"/>
+          <p:cNvSpPr/>
+          <p:nvPr/>
+        </p:nvSpPr>
+        <p:spPr>
+          <a:xfrm>
             <a:off x="640080" y="658368"/>
-            <a:ext cx="10881360" cy="566928"/>
+            <a:ext cx="10881360" cy="713232"/>
           </a:xfrm>
           <a:prstGeom prst="rect">
             <a:avLst/>
@@ -9352,7 +9964,7 @@
               <a:buNone/>
             </a:pPr>
             <a:r>
-              <a:rPr lang="en-US" sz="2700" b="1" dirty="0">
+              <a:rPr lang="en-US" sz="3400" b="1" dirty="0">
                 <a:solidFill>
                   <a:srgbClr val="003A63"/>
                 </a:solidFill>
@@ -9362,20 +9974,20 @@
               </a:rPr>
               <a:t>References and Resources Continued</a:t>
             </a:r>
-            <a:endParaRPr lang="en-US" sz="2700" dirty="0"/>
-          </a:p>
-        </p:txBody>
-      </p:sp>
-      <p:sp>
-        <p:nvSpPr>
-          <p:cNvPr id="8" name="Text 6"/>
-          <p:cNvSpPr/>
-          <p:nvPr/>
-        </p:nvSpPr>
-        <p:spPr>
-          <a:xfrm>
-            <a:off x="868680" y="1417320"/>
-            <a:ext cx="6675120" cy="4434840"/>
+            <a:endParaRPr lang="en-US" sz="3400" dirty="0"/>
+          </a:p>
+        </p:txBody>
+      </p:sp>
+      <p:sp>
+        <p:nvSpPr>
+          <p:cNvPr id="9" name="Text 7"/>
+          <p:cNvSpPr/>
+          <p:nvPr/>
+        </p:nvSpPr>
+        <p:spPr>
+          <a:xfrm>
+            <a:off x="868680" y="1508760"/>
+            <a:ext cx="6537960" cy="4160520"/>
           </a:xfrm>
           <a:prstGeom prst="rect">
             <a:avLst/>
@@ -9390,7 +10002,7 @@
           <a:lstStyle/>
           <a:p>
             <a:r>
-              <a:rPr lang="en-US" sz="1700" dirty="0">
+              <a:rPr lang="en-US" sz="2100" dirty="0">
                 <a:solidFill>
                   <a:srgbClr val="17364A"/>
                 </a:solidFill>
@@ -9398,13 +10010,13 @@
                 <a:ea typeface="Aptos" pitchFamily="34" charset="-122"/>
                 <a:cs typeface="Aptos" pitchFamily="34" charset="-120"/>
               </a:rPr>
-              <a:t>OMB Memorandum M-24-10 on federal AI governance, risk management, and innovation, where relevant to public-sector governance.</a:t>
-            </a:r>
-            <a:endParaRPr lang="en-US" sz="1700" dirty="0"/>
-          </a:p>
-          <a:p>
-            <a:r>
-              <a:rPr lang="en-US" sz="1700" dirty="0">
+              <a:t>OMB Memorandum M-24-10 on federal AI governance, risk management, and innovation, where relevant to.</a:t>
+            </a:r>
+            <a:endParaRPr lang="en-US" sz="2100" dirty="0"/>
+          </a:p>
+          <a:p>
+            <a:r>
+              <a:rPr lang="en-US" sz="2100" dirty="0">
                 <a:solidFill>
                   <a:srgbClr val="17364A"/>
                 </a:solidFill>
@@ -9412,15 +10024,15 @@
                 <a:ea typeface="Aptos" pitchFamily="34" charset="-122"/>
                 <a:cs typeface="Aptos" pitchFamily="34" charset="-120"/>
               </a:rPr>
-              <a:t>Agency strategic plans, procurement policies, privacy policies, cybersecurity policies, records policies, and equity plans</a:t>
-            </a:r>
-            <a:endParaRPr lang="en-US" sz="1700" dirty="0"/>
-          </a:p>
-        </p:txBody>
-      </p:sp>
-      <p:sp>
-        <p:nvSpPr>
-          <p:cNvPr id="9" name="Shape 7"/>
+              <a:t>Agency strategic plans, procurement policies, privacy policies, cybersecurity policies, records.</a:t>
+            </a:r>
+            <a:endParaRPr lang="en-US" sz="2100" dirty="0"/>
+          </a:p>
+        </p:txBody>
+      </p:sp>
+      <p:sp>
+        <p:nvSpPr>
+          <p:cNvPr id="10" name="Shape 8"/>
           <p:cNvSpPr/>
           <p:nvPr/>
         </p:nvSpPr>
@@ -9447,14 +10059,14 @@
       </p:sp>
       <p:sp>
         <p:nvSpPr>
-          <p:cNvPr id="10" name="Text 8"/>
+          <p:cNvPr id="11" name="Text 9"/>
           <p:cNvSpPr/>
           <p:nvPr/>
         </p:nvSpPr>
         <p:spPr>
           <a:xfrm>
             <a:off x="8074152" y="1563624"/>
-            <a:ext cx="2825496" cy="201168"/>
+            <a:ext cx="2825496" cy="256032"/>
           </a:xfrm>
           <a:prstGeom prst="rect">
             <a:avLst/>
@@ -9470,7 +10082,7 @@
               <a:buNone/>
             </a:pPr>
             <a:r>
-              <a:rPr lang="en-US" sz="950" b="1" dirty="0">
+              <a:rPr lang="en-US" sz="1300" b="1" dirty="0">
                 <a:solidFill>
                   <a:srgbClr val="0068B7"/>
                 </a:solidFill>
@@ -9480,20 +10092,20 @@
               </a:rPr>
               <a:t>Key idea</a:t>
             </a:r>
-            <a:endParaRPr lang="en-US" sz="950" dirty="0"/>
-          </a:p>
-        </p:txBody>
-      </p:sp>
-      <p:sp>
-        <p:nvSpPr>
-          <p:cNvPr id="11" name="Text 9"/>
-          <p:cNvSpPr/>
-          <p:nvPr/>
-        </p:nvSpPr>
-        <p:spPr>
-          <a:xfrm>
-            <a:off x="8074152" y="1856232"/>
-            <a:ext cx="2825496" cy="1261872"/>
+            <a:endParaRPr lang="en-US" sz="1300" dirty="0"/>
+          </a:p>
+        </p:txBody>
+      </p:sp>
+      <p:sp>
+        <p:nvSpPr>
+          <p:cNvPr id="12" name="Text 10"/>
+          <p:cNvSpPr/>
+          <p:nvPr/>
+        </p:nvSpPr>
+        <p:spPr>
+          <a:xfrm>
+            <a:off x="8074152" y="1920240"/>
+            <a:ext cx="2825496" cy="1188720"/>
           </a:xfrm>
           <a:prstGeom prst="rect">
             <a:avLst/>
@@ -9511,7 +10123,7 @@
               <a:buNone/>
             </a:pPr>
             <a:r>
-              <a:rPr lang="en-US" sz="1250" dirty="0">
+              <a:rPr lang="en-US" sz="1550" dirty="0">
                 <a:solidFill>
                   <a:srgbClr val="17364A"/>
                 </a:solidFill>
@@ -9519,15 +10131,15 @@
                 <a:ea typeface="Aptos" pitchFamily="34" charset="-122"/>
                 <a:cs typeface="Aptos" pitchFamily="34" charset="-120"/>
               </a:rPr>
-              <a:t>OMB Memorandum M-24-10 on federal AI governance, risk management, and innovation, where relevant to public-sector governance.</a:t>
-            </a:r>
-            <a:endParaRPr lang="en-US" sz="1250" dirty="0"/>
-          </a:p>
-        </p:txBody>
-      </p:sp>
-      <p:sp>
-        <p:nvSpPr>
-          <p:cNvPr id="12" name="Shape 10"/>
+              <a:t>OMB Memorandum M-24-10 on federal AI governance, risk management, and innovation, where relevant to.</a:t>
+            </a:r>
+            <a:endParaRPr lang="en-US" sz="1550" dirty="0"/>
+          </a:p>
+        </p:txBody>
+      </p:sp>
+      <p:sp>
+        <p:nvSpPr>
+          <p:cNvPr id="13" name="Shape 11"/>
           <p:cNvSpPr/>
           <p:nvPr/>
         </p:nvSpPr>
@@ -9554,14 +10166,14 @@
       </p:sp>
       <p:sp>
         <p:nvSpPr>
-          <p:cNvPr id="13" name="Text 11"/>
+          <p:cNvPr id="14" name="Text 12"/>
           <p:cNvSpPr/>
           <p:nvPr/>
         </p:nvSpPr>
         <p:spPr>
           <a:xfrm>
             <a:off x="8074152" y="3666744"/>
-            <a:ext cx="2825496" cy="201168"/>
+            <a:ext cx="2825496" cy="256032"/>
           </a:xfrm>
           <a:prstGeom prst="rect">
             <a:avLst/>
@@ -9577,7 +10189,7 @@
               <a:buNone/>
             </a:pPr>
             <a:r>
-              <a:rPr lang="en-US" sz="950" b="1" dirty="0">
+              <a:rPr lang="en-US" sz="1300" b="1" dirty="0">
                 <a:solidFill>
                   <a:srgbClr val="0068B7"/>
                 </a:solidFill>
@@ -9587,20 +10199,20 @@
               </a:rPr>
               <a:t>Use this for</a:t>
             </a:r>
-            <a:endParaRPr lang="en-US" sz="950" dirty="0"/>
-          </a:p>
-        </p:txBody>
-      </p:sp>
-      <p:sp>
-        <p:nvSpPr>
-          <p:cNvPr id="14" name="Text 12"/>
-          <p:cNvSpPr/>
-          <p:nvPr/>
-        </p:nvSpPr>
-        <p:spPr>
-          <a:xfrm>
-            <a:off x="8074152" y="3959352"/>
-            <a:ext cx="2825496" cy="1170432"/>
+            <a:endParaRPr lang="en-US" sz="1300" dirty="0"/>
+          </a:p>
+        </p:txBody>
+      </p:sp>
+      <p:sp>
+        <p:nvSpPr>
+          <p:cNvPr id="15" name="Text 13"/>
+          <p:cNvSpPr/>
+          <p:nvPr/>
+        </p:nvSpPr>
+        <p:spPr>
+          <a:xfrm>
+            <a:off x="8074152" y="4023360"/>
+            <a:ext cx="2825496" cy="1097280"/>
           </a:xfrm>
           <a:prstGeom prst="rect">
             <a:avLst/>
@@ -9618,7 +10230,7 @@
               <a:buNone/>
             </a:pPr>
             <a:r>
-              <a:rPr lang="en-US" sz="1250" dirty="0">
+              <a:rPr lang="en-US" sz="1550" dirty="0">
                 <a:solidFill>
                   <a:srgbClr val="17364A"/>
                 </a:solidFill>
@@ -9628,7 +10240,7 @@
               </a:rPr>
               <a:t>Connect the concept to public health decisions, safeguards, documentation, or implementation work.</a:t>
             </a:r>
-            <a:endParaRPr lang="en-US" sz="1250" dirty="0"/>
+            <a:endParaRPr lang="en-US" sz="1550" dirty="0"/>
           </a:p>
         </p:txBody>
       </p:sp>
@@ -9825,7 +10437,7 @@
                 <a:ea typeface="Aptos" pitchFamily="34" charset="-122"/>
                 <a:cs typeface="Aptos" pitchFamily="34" charset="-120"/>
               </a:rPr>
-              <a:t>© Paula Soper</a:t>
+              <a:t>Â© Paula Soper</a:t>
             </a:r>
             <a:endParaRPr lang="en-US" sz="800" dirty="0"/>
           </a:p>
@@ -9839,8 +10451,47 @@
         </p:nvSpPr>
         <p:spPr>
           <a:xfrm>
+            <a:off x="11137392" y="6510528"/>
+            <a:ext cx="411480" cy="201168"/>
+          </a:xfrm>
+          <a:prstGeom prst="rect">
+            <a:avLst/>
+          </a:prstGeom>
+          <a:noFill/>
+          <a:ln/>
+        </p:spPr>
+        <p:txBody>
+          <a:bodyPr wrap="square" lIns="0" tIns="0" rIns="0" bIns="0" rtlCol="0" anchor="ctr"/>
+          <a:lstStyle/>
+          <a:p>
+            <a:pPr algn="r" indent="0" marL="0">
+              <a:buNone/>
+            </a:pPr>
+            <a:r>
+              <a:rPr lang="en-US" sz="900" dirty="0">
+                <a:solidFill>
+                  <a:srgbClr val="5F7181"/>
+                </a:solidFill>
+                <a:latin typeface="Aptos" pitchFamily="34" charset="0"/>
+                <a:ea typeface="Aptos" pitchFamily="34" charset="-122"/>
+                <a:cs typeface="Aptos" pitchFamily="34" charset="-120"/>
+              </a:rPr>
+              <a:t>3</a:t>
+            </a:r>
+            <a:endParaRPr lang="en-US" sz="900" dirty="0"/>
+          </a:p>
+        </p:txBody>
+      </p:sp>
+      <p:sp>
+        <p:nvSpPr>
+          <p:cNvPr id="8" name="Text 6"/>
+          <p:cNvSpPr/>
+          <p:nvPr/>
+        </p:nvSpPr>
+        <p:spPr>
+          <a:xfrm>
             <a:off x="640080" y="658368"/>
-            <a:ext cx="10881360" cy="566928"/>
+            <a:ext cx="10881360" cy="713232"/>
           </a:xfrm>
           <a:prstGeom prst="rect">
             <a:avLst/>
@@ -9858,7 +10509,7 @@
               <a:buNone/>
             </a:pPr>
             <a:r>
-              <a:rPr lang="en-US" sz="2700" b="1" dirty="0">
+              <a:rPr lang="en-US" sz="3400" b="1" dirty="0">
                 <a:solidFill>
                   <a:srgbClr val="003A63"/>
                 </a:solidFill>
@@ -9868,20 +10519,20 @@
               </a:rPr>
               <a:t>How this module connects to the playbook</a:t>
             </a:r>
-            <a:endParaRPr lang="en-US" sz="2700" dirty="0"/>
-          </a:p>
-        </p:txBody>
-      </p:sp>
-      <p:sp>
-        <p:nvSpPr>
-          <p:cNvPr id="8" name="Text 6"/>
-          <p:cNvSpPr/>
-          <p:nvPr/>
-        </p:nvSpPr>
-        <p:spPr>
-          <a:xfrm>
-            <a:off x="868680" y="1417320"/>
-            <a:ext cx="6903720" cy="4480560"/>
+            <a:endParaRPr lang="en-US" sz="3400" dirty="0"/>
+          </a:p>
+        </p:txBody>
+      </p:sp>
+      <p:sp>
+        <p:nvSpPr>
+          <p:cNvPr id="9" name="Text 7"/>
+          <p:cNvSpPr/>
+          <p:nvPr/>
+        </p:nvSpPr>
+        <p:spPr>
+          <a:xfrm>
+            <a:off x="868680" y="1508760"/>
+            <a:ext cx="6812280" cy="3977640"/>
           </a:xfrm>
           <a:prstGeom prst="rect">
             <a:avLst/>
@@ -9896,7 +10547,7 @@
           <a:lstStyle/>
           <a:p>
             <a:r>
-              <a:rPr lang="en-US" sz="1540" dirty="0">
+              <a:rPr lang="en-US" sz="1900" dirty="0">
                 <a:solidFill>
                   <a:srgbClr val="17364A"/>
                 </a:solidFill>
@@ -9904,13 +10555,13 @@
                 <a:ea typeface="Aptos" pitchFamily="34" charset="-122"/>
                 <a:cs typeface="Aptos" pitchFamily="34" charset="-120"/>
               </a:rPr>
-              <a:t>Play 11: Build and Deploy AI Solutions - This lesson informs Play 11 by helping learners connect the lesson topic to build and deploy.</a:t>
-            </a:r>
-            <a:endParaRPr lang="en-US" sz="1540" dirty="0"/>
-          </a:p>
-          <a:p>
-            <a:r>
-              <a:rPr lang="en-US" sz="1540" dirty="0">
+              <a:t>Play 11: Build and Deploy AI Solutions - This lesson informs Play 11 by helping learners connect the lesson.</a:t>
+            </a:r>
+            <a:endParaRPr lang="en-US" sz="1900" dirty="0"/>
+          </a:p>
+          <a:p>
+            <a:r>
+              <a:rPr lang="en-US" sz="1900" dirty="0">
                 <a:solidFill>
                   <a:srgbClr val="17364A"/>
                 </a:solidFill>
@@ -9918,13 +10569,13 @@
                 <a:ea typeface="Aptos" pitchFamily="34" charset="-122"/>
                 <a:cs typeface="Aptos" pitchFamily="34" charset="-120"/>
               </a:rPr>
-              <a:t>Play 2: Readiness Assessment - This lesson informs Play 2 by helping learners connect the lesson topic to readiness assessment work.</a:t>
-            </a:r>
-            <a:endParaRPr lang="en-US" sz="1540" dirty="0"/>
-          </a:p>
-          <a:p>
-            <a:r>
-              <a:rPr lang="en-US" sz="1540" dirty="0">
+              <a:t>Play 2: Readiness Assessment - This lesson informs Play 2 by helping learners connect the lesson topic to.</a:t>
+            </a:r>
+            <a:endParaRPr lang="en-US" sz="1900" dirty="0"/>
+          </a:p>
+          <a:p>
+            <a:r>
+              <a:rPr lang="en-US" sz="1900" dirty="0">
                 <a:solidFill>
                   <a:srgbClr val="17364A"/>
                 </a:solidFill>
@@ -9932,13 +10583,13 @@
                 <a:ea typeface="Aptos" pitchFamily="34" charset="-122"/>
                 <a:cs typeface="Aptos" pitchFamily="34" charset="-120"/>
               </a:rPr>
-              <a:t>Play 3: Establish AI Governance - This lesson informs Play 3 by helping learners connect the lesson topic to establish ai governance.</a:t>
-            </a:r>
-            <a:endParaRPr lang="en-US" sz="1540" dirty="0"/>
-          </a:p>
-          <a:p>
-            <a:r>
-              <a:rPr lang="en-US" sz="1540" dirty="0">
+              <a:t>Play 3: Establish AI Governance - This lesson informs Play 3 by helping learners connect the lesson topic to.</a:t>
+            </a:r>
+            <a:endParaRPr lang="en-US" sz="1900" dirty="0"/>
+          </a:p>
+          <a:p>
+            <a:r>
+              <a:rPr lang="en-US" sz="1900" dirty="0">
                 <a:solidFill>
                   <a:srgbClr val="17364A"/>
                 </a:solidFill>
@@ -9946,15 +10597,15 @@
                 <a:ea typeface="Aptos" pitchFamily="34" charset="-122"/>
                 <a:cs typeface="Aptos" pitchFamily="34" charset="-120"/>
               </a:rPr>
-              <a:t>Play 1: Vision &amp; Guardrails - This lesson informs Play 1 by helping learners connect the lesson topic to vision &amp; guardrails work in.</a:t>
-            </a:r>
-            <a:endParaRPr lang="en-US" sz="1540" dirty="0"/>
-          </a:p>
-        </p:txBody>
-      </p:sp>
-      <p:sp>
-        <p:nvSpPr>
-          <p:cNvPr id="9" name="Shape 7"/>
+              <a:t>Play 1: Vision &amp; Guardrails - This lesson informs Play 1 by helping learners connect the lesson topic to.</a:t>
+            </a:r>
+            <a:endParaRPr lang="en-US" sz="1900" dirty="0"/>
+          </a:p>
+        </p:txBody>
+      </p:sp>
+      <p:sp>
+        <p:nvSpPr>
+          <p:cNvPr id="10" name="Shape 8"/>
           <p:cNvSpPr/>
           <p:nvPr/>
         </p:nvSpPr>
@@ -9981,14 +10632,14 @@
       </p:sp>
       <p:sp>
         <p:nvSpPr>
-          <p:cNvPr id="10" name="Text 8"/>
+          <p:cNvPr id="11" name="Text 9"/>
           <p:cNvSpPr/>
           <p:nvPr/>
         </p:nvSpPr>
         <p:spPr>
           <a:xfrm>
             <a:off x="8211312" y="1563624"/>
-            <a:ext cx="2734056" cy="201168"/>
+            <a:ext cx="2734056" cy="256032"/>
           </a:xfrm>
           <a:prstGeom prst="rect">
             <a:avLst/>
@@ -10004,7 +10655,7 @@
               <a:buNone/>
             </a:pPr>
             <a:r>
-              <a:rPr lang="en-US" sz="950" b="1" dirty="0">
+              <a:rPr lang="en-US" sz="1300" b="1" dirty="0">
                 <a:solidFill>
                   <a:srgbClr val="0068B7"/>
                 </a:solidFill>
@@ -10014,20 +10665,20 @@
               </a:rPr>
               <a:t>Apply the lesson</a:t>
             </a:r>
-            <a:endParaRPr lang="en-US" sz="950" dirty="0"/>
-          </a:p>
-        </p:txBody>
-      </p:sp>
-      <p:sp>
-        <p:nvSpPr>
-          <p:cNvPr id="11" name="Text 9"/>
-          <p:cNvSpPr/>
-          <p:nvPr/>
-        </p:nvSpPr>
-        <p:spPr>
-          <a:xfrm>
-            <a:off x="8211312" y="1856232"/>
-            <a:ext cx="2734056" cy="1536192"/>
+            <a:endParaRPr lang="en-US" sz="1300" dirty="0"/>
+          </a:p>
+        </p:txBody>
+      </p:sp>
+      <p:sp>
+        <p:nvSpPr>
+          <p:cNvPr id="12" name="Text 10"/>
+          <p:cNvSpPr/>
+          <p:nvPr/>
+        </p:nvSpPr>
+        <p:spPr>
+          <a:xfrm>
+            <a:off x="8211312" y="1920240"/>
+            <a:ext cx="2734056" cy="1463040"/>
           </a:xfrm>
           <a:prstGeom prst="rect">
             <a:avLst/>
@@ -10045,7 +10696,7 @@
               <a:buNone/>
             </a:pPr>
             <a:r>
-              <a:rPr lang="en-US" sz="1250" dirty="0">
+              <a:rPr lang="en-US" sz="1550" dirty="0">
                 <a:solidFill>
                   <a:srgbClr val="17364A"/>
                 </a:solidFill>
@@ -10055,32 +10706,32 @@
               </a:rPr>
               <a:t>Use the related plays to identify decisions, participants, timing, approvals, and documentation needed for responsible implementation.</a:t>
             </a:r>
-            <a:endParaRPr lang="en-US" sz="1250" dirty="0"/>
-          </a:p>
-        </p:txBody>
-      </p:sp>
-      <p:sp>
-        <p:nvSpPr>
-          <p:cNvPr id="12" name="Shape 10"/>
-          <p:cNvSpPr/>
-          <p:nvPr/>
-        </p:nvSpPr>
-        <p:spPr>
-          <a:xfrm>
-            <a:off x="8046720" y="3794760"/>
-            <a:ext cx="3063240" cy="1508760"/>
+            <a:endParaRPr lang="en-US" sz="1550" dirty="0"/>
+          </a:p>
+        </p:txBody>
+      </p:sp>
+      <p:sp>
+        <p:nvSpPr>
+          <p:cNvPr id="13" name="Shape 11"/>
+          <p:cNvSpPr/>
+          <p:nvPr/>
+        </p:nvSpPr>
+        <p:spPr>
+          <a:xfrm>
+            <a:off x="7818120" y="3977640"/>
+            <a:ext cx="972312" cy="749808"/>
           </a:xfrm>
           <a:prstGeom prst="roundRect">
             <a:avLst>
-              <a:gd name="adj" fmla="val 7273"/>
+              <a:gd name="adj" fmla="val 14634"/>
             </a:avLst>
           </a:prstGeom>
           <a:solidFill>
-            <a:srgbClr val="FFF4D9"/>
+            <a:srgbClr val="0068B7"/>
           </a:solidFill>
           <a:ln w="12700">
             <a:solidFill>
-              <a:srgbClr val="B9D7E6"/>
+              <a:srgbClr val="0068B7"/>
             </a:solidFill>
             <a:prstDash val="solid"/>
           </a:ln>
@@ -10088,81 +10739,256 @@
       </p:sp>
       <p:sp>
         <p:nvSpPr>
-          <p:cNvPr id="13" name="Text 11"/>
-          <p:cNvSpPr/>
-          <p:nvPr/>
-        </p:nvSpPr>
-        <p:spPr>
-          <a:xfrm>
-            <a:off x="8211312" y="3941064"/>
-            <a:ext cx="2734056" cy="201168"/>
-          </a:xfrm>
-          <a:prstGeom prst="rect">
-            <a:avLst/>
-          </a:prstGeom>
-          <a:noFill/>
-          <a:ln/>
-        </p:spPr>
-        <p:txBody>
-          <a:bodyPr wrap="square" lIns="0" tIns="0" rIns="0" bIns="0" rtlCol="0" anchor="ctr"/>
-          <a:lstStyle/>
-          <a:p>
-            <a:pPr indent="0" marL="0">
-              <a:buNone/>
-            </a:pPr>
-            <a:r>
-              <a:rPr lang="en-US" sz="950" b="1" dirty="0">
-                <a:solidFill>
-                  <a:srgbClr val="0068B7"/>
-                </a:solidFill>
-                <a:latin typeface="Aptos" pitchFamily="34" charset="0"/>
-                <a:ea typeface="Aptos" pitchFamily="34" charset="-122"/>
-                <a:cs typeface="Aptos" pitchFamily="34" charset="-120"/>
-              </a:rPr>
-              <a:t>Keep in mind</a:t>
-            </a:r>
-            <a:endParaRPr lang="en-US" sz="950" dirty="0"/>
-          </a:p>
-        </p:txBody>
-      </p:sp>
-      <p:sp>
-        <p:nvSpPr>
           <p:cNvPr id="14" name="Text 12"/>
           <p:cNvSpPr/>
           <p:nvPr/>
         </p:nvSpPr>
         <p:spPr>
           <a:xfrm>
-            <a:off x="8211312" y="4233672"/>
-            <a:ext cx="2734056" cy="941832"/>
-          </a:xfrm>
-          <a:prstGeom prst="rect">
-            <a:avLst/>
-          </a:prstGeom>
-          <a:noFill/>
-          <a:ln/>
-        </p:spPr>
-        <p:txBody>
-          <a:bodyPr wrap="square" lIns="0" tIns="0" rIns="0" bIns="0" rtlCol="0" anchor="t">
+            <a:off x="7891272" y="4169664"/>
+            <a:ext cx="826008" cy="310896"/>
+          </a:xfrm>
+          <a:prstGeom prst="rect">
+            <a:avLst/>
+          </a:prstGeom>
+          <a:noFill/>
+          <a:ln/>
+        </p:spPr>
+        <p:txBody>
+          <a:bodyPr wrap="square" lIns="0" tIns="0" rIns="0" bIns="0" rtlCol="0" anchor="ctr">
             <a:normAutofit/>
           </a:bodyPr>
           <a:lstStyle/>
           <a:p>
-            <a:pPr indent="0" marL="0">
-              <a:buNone/>
-            </a:pPr>
-            <a:r>
-              <a:rPr lang="en-US" sz="1250" dirty="0">
-                <a:solidFill>
-                  <a:srgbClr val="17364A"/>
-                </a:solidFill>
-                <a:latin typeface="Aptos" pitchFamily="34" charset="0"/>
-                <a:ea typeface="Aptos" pitchFamily="34" charset="-122"/>
-                <a:cs typeface="Aptos" pitchFamily="34" charset="-120"/>
-              </a:rPr>
-              <a:t>The playbook connection helps turn training into agency work, not just individual knowledge.</a:t>
-            </a:r>
-            <a:endParaRPr lang="en-US" sz="1250" dirty="0"/>
+            <a:pPr algn="ctr" indent="0" marL="0">
+              <a:buNone/>
+            </a:pPr>
+            <a:r>
+              <a:rPr lang="en-US" sz="1500" b="1" dirty="0">
+                <a:solidFill>
+                  <a:srgbClr val="FFFFFF"/>
+                </a:solidFill>
+                <a:latin typeface="Aptos" pitchFamily="34" charset="0"/>
+                <a:ea typeface="Aptos" pitchFamily="34" charset="-122"/>
+                <a:cs typeface="Aptos" pitchFamily="34" charset="-120"/>
+              </a:rPr>
+              <a:t>Lesson</a:t>
+            </a:r>
+            <a:endParaRPr lang="en-US" sz="1500" dirty="0"/>
+          </a:p>
+        </p:txBody>
+      </p:sp>
+      <p:sp>
+        <p:nvSpPr>
+          <p:cNvPr id="15" name="Text 13"/>
+          <p:cNvSpPr/>
+          <p:nvPr/>
+        </p:nvSpPr>
+        <p:spPr>
+          <a:xfrm>
+            <a:off x="8817864" y="4187952"/>
+            <a:ext cx="201168" cy="256032"/>
+          </a:xfrm>
+          <a:prstGeom prst="rect">
+            <a:avLst/>
+          </a:prstGeom>
+          <a:noFill/>
+          <a:ln/>
+        </p:spPr>
+        <p:txBody>
+          <a:bodyPr wrap="square" lIns="0" tIns="0" rIns="0" bIns="0" rtlCol="0" anchor="ctr"/>
+          <a:lstStyle/>
+          <a:p>
+            <a:pPr algn="ctr" indent="0" marL="0">
+              <a:buNone/>
+            </a:pPr>
+            <a:r>
+              <a:rPr lang="en-US" sz="1800" b="1" dirty="0">
+                <a:solidFill>
+                  <a:srgbClr val="0068B7"/>
+                </a:solidFill>
+                <a:latin typeface="Aptos" pitchFamily="34" charset="0"/>
+                <a:ea typeface="Aptos" pitchFamily="34" charset="-122"/>
+                <a:cs typeface="Aptos" pitchFamily="34" charset="-120"/>
+              </a:rPr>
+              <a:t>â†’</a:t>
+            </a:r>
+            <a:endParaRPr lang="en-US" sz="1800" dirty="0"/>
+          </a:p>
+        </p:txBody>
+      </p:sp>
+      <p:sp>
+        <p:nvSpPr>
+          <p:cNvPr id="16" name="Shape 14"/>
+          <p:cNvSpPr/>
+          <p:nvPr/>
+        </p:nvSpPr>
+        <p:spPr>
+          <a:xfrm>
+            <a:off x="9046464" y="3977640"/>
+            <a:ext cx="972312" cy="749808"/>
+          </a:xfrm>
+          <a:prstGeom prst="roundRect">
+            <a:avLst>
+              <a:gd name="adj" fmla="val 14634"/>
+            </a:avLst>
+          </a:prstGeom>
+          <a:solidFill>
+            <a:srgbClr val="2F8A28"/>
+          </a:solidFill>
+          <a:ln w="12700">
+            <a:solidFill>
+              <a:srgbClr val="2F8A28"/>
+            </a:solidFill>
+            <a:prstDash val="solid"/>
+          </a:ln>
+        </p:spPr>
+      </p:sp>
+      <p:sp>
+        <p:nvSpPr>
+          <p:cNvPr id="17" name="Text 15"/>
+          <p:cNvSpPr/>
+          <p:nvPr/>
+        </p:nvSpPr>
+        <p:spPr>
+          <a:xfrm>
+            <a:off x="9119616" y="4169664"/>
+            <a:ext cx="826008" cy="310896"/>
+          </a:xfrm>
+          <a:prstGeom prst="rect">
+            <a:avLst/>
+          </a:prstGeom>
+          <a:noFill/>
+          <a:ln/>
+        </p:spPr>
+        <p:txBody>
+          <a:bodyPr wrap="square" lIns="0" tIns="0" rIns="0" bIns="0" rtlCol="0" anchor="ctr">
+            <a:normAutofit/>
+          </a:bodyPr>
+          <a:lstStyle/>
+          <a:p>
+            <a:pPr algn="ctr" indent="0" marL="0">
+              <a:buNone/>
+            </a:pPr>
+            <a:r>
+              <a:rPr lang="en-US" sz="1500" b="1" dirty="0">
+                <a:solidFill>
+                  <a:srgbClr val="FFFFFF"/>
+                </a:solidFill>
+                <a:latin typeface="Aptos" pitchFamily="34" charset="0"/>
+                <a:ea typeface="Aptos" pitchFamily="34" charset="-122"/>
+                <a:cs typeface="Aptos" pitchFamily="34" charset="-120"/>
+              </a:rPr>
+              <a:t>Plays</a:t>
+            </a:r>
+            <a:endParaRPr lang="en-US" sz="1500" dirty="0"/>
+          </a:p>
+        </p:txBody>
+      </p:sp>
+      <p:sp>
+        <p:nvSpPr>
+          <p:cNvPr id="18" name="Text 16"/>
+          <p:cNvSpPr/>
+          <p:nvPr/>
+        </p:nvSpPr>
+        <p:spPr>
+          <a:xfrm>
+            <a:off x="10046208" y="4187952"/>
+            <a:ext cx="201168" cy="256032"/>
+          </a:xfrm>
+          <a:prstGeom prst="rect">
+            <a:avLst/>
+          </a:prstGeom>
+          <a:noFill/>
+          <a:ln/>
+        </p:spPr>
+        <p:txBody>
+          <a:bodyPr wrap="square" lIns="0" tIns="0" rIns="0" bIns="0" rtlCol="0" anchor="ctr"/>
+          <a:lstStyle/>
+          <a:p>
+            <a:pPr algn="ctr" indent="0" marL="0">
+              <a:buNone/>
+            </a:pPr>
+            <a:r>
+              <a:rPr lang="en-US" sz="1800" b="1" dirty="0">
+                <a:solidFill>
+                  <a:srgbClr val="0068B7"/>
+                </a:solidFill>
+                <a:latin typeface="Aptos" pitchFamily="34" charset="0"/>
+                <a:ea typeface="Aptos" pitchFamily="34" charset="-122"/>
+                <a:cs typeface="Aptos" pitchFamily="34" charset="-120"/>
+              </a:rPr>
+              <a:t>â†’</a:t>
+            </a:r>
+            <a:endParaRPr lang="en-US" sz="1800" dirty="0"/>
+          </a:p>
+        </p:txBody>
+      </p:sp>
+      <p:sp>
+        <p:nvSpPr>
+          <p:cNvPr id="19" name="Shape 17"/>
+          <p:cNvSpPr/>
+          <p:nvPr/>
+        </p:nvSpPr>
+        <p:spPr>
+          <a:xfrm>
+            <a:off x="10274808" y="3977640"/>
+            <a:ext cx="972312" cy="749808"/>
+          </a:xfrm>
+          <a:prstGeom prst="roundRect">
+            <a:avLst>
+              <a:gd name="adj" fmla="val 14634"/>
+            </a:avLst>
+          </a:prstGeom>
+          <a:solidFill>
+            <a:srgbClr val="6A4CA3"/>
+          </a:solidFill>
+          <a:ln w="12700">
+            <a:solidFill>
+              <a:srgbClr val="6A4CA3"/>
+            </a:solidFill>
+            <a:prstDash val="solid"/>
+          </a:ln>
+        </p:spPr>
+      </p:sp>
+      <p:sp>
+        <p:nvSpPr>
+          <p:cNvPr id="20" name="Text 18"/>
+          <p:cNvSpPr/>
+          <p:nvPr/>
+        </p:nvSpPr>
+        <p:spPr>
+          <a:xfrm>
+            <a:off x="10347960" y="4169664"/>
+            <a:ext cx="826008" cy="310896"/>
+          </a:xfrm>
+          <a:prstGeom prst="rect">
+            <a:avLst/>
+          </a:prstGeom>
+          <a:noFill/>
+          <a:ln/>
+        </p:spPr>
+        <p:txBody>
+          <a:bodyPr wrap="square" lIns="0" tIns="0" rIns="0" bIns="0" rtlCol="0" anchor="ctr">
+            <a:normAutofit/>
+          </a:bodyPr>
+          <a:lstStyle/>
+          <a:p>
+            <a:pPr algn="ctr" indent="0" marL="0">
+              <a:buNone/>
+            </a:pPr>
+            <a:r>
+              <a:rPr lang="en-US" sz="1500" b="1" dirty="0">
+                <a:solidFill>
+                  <a:srgbClr val="FFFFFF"/>
+                </a:solidFill>
+                <a:latin typeface="Aptos" pitchFamily="34" charset="0"/>
+                <a:ea typeface="Aptos" pitchFamily="34" charset="-122"/>
+                <a:cs typeface="Aptos" pitchFamily="34" charset="-120"/>
+              </a:rPr>
+              <a:t>Action</a:t>
+            </a:r>
+            <a:endParaRPr lang="en-US" sz="1500" dirty="0"/>
           </a:p>
         </p:txBody>
       </p:sp>
@@ -10359,7 +11185,7 @@
                 <a:ea typeface="Aptos" pitchFamily="34" charset="-122"/>
                 <a:cs typeface="Aptos" pitchFamily="34" charset="-120"/>
               </a:rPr>
-              <a:t>© Paula Soper</a:t>
+              <a:t>Â© Paula Soper</a:t>
             </a:r>
             <a:endParaRPr lang="en-US" sz="800" dirty="0"/>
           </a:p>
@@ -10373,8 +11199,47 @@
         </p:nvSpPr>
         <p:spPr>
           <a:xfrm>
+            <a:off x="11137392" y="6510528"/>
+            <a:ext cx="411480" cy="201168"/>
+          </a:xfrm>
+          <a:prstGeom prst="rect">
+            <a:avLst/>
+          </a:prstGeom>
+          <a:noFill/>
+          <a:ln/>
+        </p:spPr>
+        <p:txBody>
+          <a:bodyPr wrap="square" lIns="0" tIns="0" rIns="0" bIns="0" rtlCol="0" anchor="ctr"/>
+          <a:lstStyle/>
+          <a:p>
+            <a:pPr algn="r" indent="0" marL="0">
+              <a:buNone/>
+            </a:pPr>
+            <a:r>
+              <a:rPr lang="en-US" sz="900" dirty="0">
+                <a:solidFill>
+                  <a:srgbClr val="5F7181"/>
+                </a:solidFill>
+                <a:latin typeface="Aptos" pitchFamily="34" charset="0"/>
+                <a:ea typeface="Aptos" pitchFamily="34" charset="-122"/>
+                <a:cs typeface="Aptos" pitchFamily="34" charset="-120"/>
+              </a:rPr>
+              <a:t>4</a:t>
+            </a:r>
+            <a:endParaRPr lang="en-US" sz="900" dirty="0"/>
+          </a:p>
+        </p:txBody>
+      </p:sp>
+      <p:sp>
+        <p:nvSpPr>
+          <p:cNvPr id="8" name="Text 6"/>
+          <p:cNvSpPr/>
+          <p:nvPr/>
+        </p:nvSpPr>
+        <p:spPr>
+          <a:xfrm>
             <a:off x="640080" y="658368"/>
-            <a:ext cx="10881360" cy="566928"/>
+            <a:ext cx="10881360" cy="713232"/>
           </a:xfrm>
           <a:prstGeom prst="rect">
             <a:avLst/>
@@ -10392,7 +11257,7 @@
               <a:buNone/>
             </a:pPr>
             <a:r>
-              <a:rPr lang="en-US" sz="2700" b="1" dirty="0">
+              <a:rPr lang="en-US" sz="3400" b="1" dirty="0">
                 <a:solidFill>
                   <a:srgbClr val="003A63"/>
                 </a:solidFill>
@@ -10402,20 +11267,20 @@
               </a:rPr>
               <a:t>Related toolkit resources</a:t>
             </a:r>
-            <a:endParaRPr lang="en-US" sz="2700" dirty="0"/>
-          </a:p>
-        </p:txBody>
-      </p:sp>
-      <p:sp>
-        <p:nvSpPr>
-          <p:cNvPr id="8" name="Text 6"/>
-          <p:cNvSpPr/>
-          <p:nvPr/>
-        </p:nvSpPr>
-        <p:spPr>
-          <a:xfrm>
-            <a:off x="868680" y="1417320"/>
-            <a:ext cx="6903720" cy="4480560"/>
+            <a:endParaRPr lang="en-US" sz="3400" dirty="0"/>
+          </a:p>
+        </p:txBody>
+      </p:sp>
+      <p:sp>
+        <p:nvSpPr>
+          <p:cNvPr id="9" name="Text 7"/>
+          <p:cNvSpPr/>
+          <p:nvPr/>
+        </p:nvSpPr>
+        <p:spPr>
+          <a:xfrm>
+            <a:off x="868680" y="1508760"/>
+            <a:ext cx="6812280" cy="3977640"/>
           </a:xfrm>
           <a:prstGeom prst="rect">
             <a:avLst/>
@@ -10430,7 +11295,7 @@
           <a:lstStyle/>
           <a:p>
             <a:r>
-              <a:rPr lang="en-US" sz="1460" dirty="0">
+              <a:rPr lang="en-US" sz="1850" dirty="0">
                 <a:solidFill>
                   <a:srgbClr val="17364A"/>
                 </a:solidFill>
@@ -10438,13 +11303,13 @@
                 <a:ea typeface="Aptos" pitchFamily="34" charset="-122"/>
                 <a:cs typeface="Aptos" pitchFamily="34" charset="-120"/>
               </a:rPr>
-              <a:t>Tool 4: AI Policy Landscape Scan (Worksheet) - Use AI Policy Landscape Scan to translate this lesson into a documented public health.</a:t>
-            </a:r>
-            <a:endParaRPr lang="en-US" sz="1460" dirty="0"/>
-          </a:p>
-          <a:p>
-            <a:r>
-              <a:rPr lang="en-US" sz="1460" dirty="0">
+              <a:t>Tool 4: AI Policy Landscape Scan (Worksheet) - Use AI Policy Landscape Scan to translate this lesson into a.</a:t>
+            </a:r>
+            <a:endParaRPr lang="en-US" sz="1850" dirty="0"/>
+          </a:p>
+          <a:p>
+            <a:r>
+              <a:rPr lang="en-US" sz="1850" dirty="0">
                 <a:solidFill>
                   <a:srgbClr val="17364A"/>
                 </a:solidFill>
@@ -10452,13 +11317,13 @@
                 <a:ea typeface="Aptos" pitchFamily="34" charset="-122"/>
                 <a:cs typeface="Aptos" pitchFamily="34" charset="-120"/>
               </a:rPr>
-              <a:t>Tool 5: AI Environmental and Resource Impact Review (Checklist) - Use AI Environmental and Resource Impact Review to translate this.</a:t>
-            </a:r>
-            <a:endParaRPr lang="en-US" sz="1460" dirty="0"/>
-          </a:p>
-          <a:p>
-            <a:r>
-              <a:rPr lang="en-US" sz="1460" dirty="0">
+              <a:t>Tool 5: AI Environmental and Resource Impact Review (Checklist) - Use AI Environmental and Resource Impact.</a:t>
+            </a:r>
+            <a:endParaRPr lang="en-US" sz="1850" dirty="0"/>
+          </a:p>
+          <a:p>
+            <a:r>
+              <a:rPr lang="en-US" sz="1850" dirty="0">
                 <a:solidFill>
                   <a:srgbClr val="17364A"/>
                 </a:solidFill>
@@ -10466,13 +11331,13 @@
                 <a:ea typeface="Aptos" pitchFamily="34" charset="-122"/>
                 <a:cs typeface="Aptos" pitchFamily="34" charset="-120"/>
               </a:rPr>
-              <a:t>Tool 6: Human-Centered AI Decision Rule Checklist (Checklist) - Use Human-Centered AI Decision Rule Checklist to translate this.</a:t>
-            </a:r>
-            <a:endParaRPr lang="en-US" sz="1460" dirty="0"/>
-          </a:p>
-          <a:p>
-            <a:r>
-              <a:rPr lang="en-US" sz="1460" dirty="0">
+              <a:t>Tool 6: Human-Centered AI Decision Rule Checklist (Checklist) - Use Human-Centered AI Decision Rule.</a:t>
+            </a:r>
+            <a:endParaRPr lang="en-US" sz="1850" dirty="0"/>
+          </a:p>
+          <a:p>
+            <a:r>
+              <a:rPr lang="en-US" sz="1850" dirty="0">
                 <a:solidFill>
                   <a:srgbClr val="17364A"/>
                 </a:solidFill>
@@ -10480,29 +11345,15 @@
                 <a:ea typeface="Aptos" pitchFamily="34" charset="-122"/>
                 <a:cs typeface="Aptos" pitchFamily="34" charset="-120"/>
               </a:rPr>
-              <a:t>Tool 8: AI Project Charter (Planning) - Use AI Project Charter to translate this lesson into a documented public health AI planning,.</a:t>
-            </a:r>
-            <a:endParaRPr lang="en-US" sz="1460" dirty="0"/>
-          </a:p>
-          <a:p>
-            <a:r>
-              <a:rPr lang="en-US" sz="1460" dirty="0">
-                <a:solidFill>
-                  <a:srgbClr val="17364A"/>
-                </a:solidFill>
-                <a:latin typeface="Aptos" pitchFamily="34" charset="0"/>
-                <a:ea typeface="Aptos" pitchFamily="34" charset="-122"/>
-                <a:cs typeface="Aptos" pitchFamily="34" charset="-120"/>
-              </a:rPr>
-              <a:t>Tool 9: Data Quality Assessment Checklist (Checklist) - Use this tool to complete or strengthen the practical exercise for the module.</a:t>
-            </a:r>
-            <a:endParaRPr lang="en-US" sz="1460" dirty="0"/>
-          </a:p>
-        </p:txBody>
-      </p:sp>
-      <p:sp>
-        <p:nvSpPr>
-          <p:cNvPr id="9" name="Shape 7"/>
+              <a:t>Tool 8: AI Project Charter (Planning) - Use AI Project Charter to translate this lesson into a documented.</a:t>
+            </a:r>
+            <a:endParaRPr lang="en-US" sz="1850" dirty="0"/>
+          </a:p>
+        </p:txBody>
+      </p:sp>
+      <p:sp>
+        <p:nvSpPr>
+          <p:cNvPr id="10" name="Shape 8"/>
           <p:cNvSpPr/>
           <p:nvPr/>
         </p:nvSpPr>
@@ -10529,14 +11380,14 @@
       </p:sp>
       <p:sp>
         <p:nvSpPr>
-          <p:cNvPr id="10" name="Text 8"/>
+          <p:cNvPr id="11" name="Text 9"/>
           <p:cNvSpPr/>
           <p:nvPr/>
         </p:nvSpPr>
         <p:spPr>
           <a:xfrm>
             <a:off x="8211312" y="1563624"/>
-            <a:ext cx="2734056" cy="201168"/>
+            <a:ext cx="2734056" cy="256032"/>
           </a:xfrm>
           <a:prstGeom prst="rect">
             <a:avLst/>
@@ -10552,7 +11403,7 @@
               <a:buNone/>
             </a:pPr>
             <a:r>
-              <a:rPr lang="en-US" sz="950" b="1" dirty="0">
+              <a:rPr lang="en-US" sz="1300" b="1" dirty="0">
                 <a:solidFill>
                   <a:srgbClr val="0068B7"/>
                 </a:solidFill>
@@ -10562,20 +11413,20 @@
               </a:rPr>
               <a:t>Use the tools</a:t>
             </a:r>
-            <a:endParaRPr lang="en-US" sz="950" dirty="0"/>
-          </a:p>
-        </p:txBody>
-      </p:sp>
-      <p:sp>
-        <p:nvSpPr>
-          <p:cNvPr id="11" name="Text 9"/>
-          <p:cNvSpPr/>
-          <p:nvPr/>
-        </p:nvSpPr>
-        <p:spPr>
-          <a:xfrm>
-            <a:off x="8211312" y="1856232"/>
-            <a:ext cx="2734056" cy="1536192"/>
+            <a:endParaRPr lang="en-US" sz="1300" dirty="0"/>
+          </a:p>
+        </p:txBody>
+      </p:sp>
+      <p:sp>
+        <p:nvSpPr>
+          <p:cNvPr id="12" name="Text 10"/>
+          <p:cNvSpPr/>
+          <p:nvPr/>
+        </p:nvSpPr>
+        <p:spPr>
+          <a:xfrm>
+            <a:off x="8211312" y="1920240"/>
+            <a:ext cx="2734056" cy="1463040"/>
           </a:xfrm>
           <a:prstGeom prst="rect">
             <a:avLst/>
@@ -10593,7 +11444,7 @@
               <a:buNone/>
             </a:pPr>
             <a:r>
-              <a:rPr lang="en-US" sz="1250" dirty="0">
+              <a:rPr lang="en-US" sz="1550" dirty="0">
                 <a:solidFill>
                   <a:srgbClr val="17364A"/>
                 </a:solidFill>
@@ -10603,32 +11454,32 @@
               </a:rPr>
               <a:t>Use linked tools when your department needs a structured worksheet, template, checklist, review process, or documentation artifact.</a:t>
             </a:r>
-            <a:endParaRPr lang="en-US" sz="1250" dirty="0"/>
-          </a:p>
-        </p:txBody>
-      </p:sp>
-      <p:sp>
-        <p:nvSpPr>
-          <p:cNvPr id="12" name="Shape 10"/>
-          <p:cNvSpPr/>
-          <p:nvPr/>
-        </p:nvSpPr>
-        <p:spPr>
-          <a:xfrm>
-            <a:off x="8046720" y="3794760"/>
-            <a:ext cx="3063240" cy="1508760"/>
+            <a:endParaRPr lang="en-US" sz="1550" dirty="0"/>
+          </a:p>
+        </p:txBody>
+      </p:sp>
+      <p:sp>
+        <p:nvSpPr>
+          <p:cNvPr id="13" name="Shape 11"/>
+          <p:cNvSpPr/>
+          <p:nvPr/>
+        </p:nvSpPr>
+        <p:spPr>
+          <a:xfrm>
+            <a:off x="7818120" y="3977640"/>
+            <a:ext cx="972312" cy="749808"/>
           </a:xfrm>
           <a:prstGeom prst="roundRect">
             <a:avLst>
-              <a:gd name="adj" fmla="val 7273"/>
+              <a:gd name="adj" fmla="val 14634"/>
             </a:avLst>
           </a:prstGeom>
           <a:solidFill>
-            <a:srgbClr val="EEF8ED"/>
+            <a:srgbClr val="0068B7"/>
           </a:solidFill>
           <a:ln w="12700">
             <a:solidFill>
-              <a:srgbClr val="B9D7E6"/>
+              <a:srgbClr val="0068B7"/>
             </a:solidFill>
             <a:prstDash val="solid"/>
           </a:ln>
@@ -10636,81 +11487,256 @@
       </p:sp>
       <p:sp>
         <p:nvSpPr>
-          <p:cNvPr id="13" name="Text 11"/>
-          <p:cNvSpPr/>
-          <p:nvPr/>
-        </p:nvSpPr>
-        <p:spPr>
-          <a:xfrm>
-            <a:off x="8211312" y="3941064"/>
-            <a:ext cx="2734056" cy="201168"/>
-          </a:xfrm>
-          <a:prstGeom prst="rect">
-            <a:avLst/>
-          </a:prstGeom>
-          <a:noFill/>
-          <a:ln/>
-        </p:spPr>
-        <p:txBody>
-          <a:bodyPr wrap="square" lIns="0" tIns="0" rIns="0" bIns="0" rtlCol="0" anchor="ctr"/>
-          <a:lstStyle/>
-          <a:p>
-            <a:pPr indent="0" marL="0">
-              <a:buNone/>
-            </a:pPr>
-            <a:r>
-              <a:rPr lang="en-US" sz="950" b="1" dirty="0">
-                <a:solidFill>
-                  <a:srgbClr val="0068B7"/>
-                </a:solidFill>
-                <a:latin typeface="Aptos" pitchFamily="34" charset="0"/>
-                <a:ea typeface="Aptos" pitchFamily="34" charset="-122"/>
-                <a:cs typeface="Aptos" pitchFamily="34" charset="-120"/>
-              </a:rPr>
-              <a:t>Avoid duplication</a:t>
-            </a:r>
-            <a:endParaRPr lang="en-US" sz="950" dirty="0"/>
-          </a:p>
-        </p:txBody>
-      </p:sp>
-      <p:sp>
-        <p:nvSpPr>
           <p:cNvPr id="14" name="Text 12"/>
           <p:cNvSpPr/>
           <p:nvPr/>
         </p:nvSpPr>
         <p:spPr>
           <a:xfrm>
-            <a:off x="8211312" y="4233672"/>
-            <a:ext cx="2734056" cy="941832"/>
-          </a:xfrm>
-          <a:prstGeom prst="rect">
-            <a:avLst/>
-          </a:prstGeom>
-          <a:noFill/>
-          <a:ln/>
-        </p:spPr>
-        <p:txBody>
-          <a:bodyPr wrap="square" lIns="0" tIns="0" rIns="0" bIns="0" rtlCol="0" anchor="t">
+            <a:off x="7891272" y="4169664"/>
+            <a:ext cx="826008" cy="310896"/>
+          </a:xfrm>
+          <a:prstGeom prst="rect">
+            <a:avLst/>
+          </a:prstGeom>
+          <a:noFill/>
+          <a:ln/>
+        </p:spPr>
+        <p:txBody>
+          <a:bodyPr wrap="square" lIns="0" tIns="0" rIns="0" bIns="0" rtlCol="0" anchor="ctr">
             <a:normAutofit/>
           </a:bodyPr>
           <a:lstStyle/>
           <a:p>
-            <a:pPr indent="0" marL="0">
-              <a:buNone/>
-            </a:pPr>
-            <a:r>
-              <a:rPr lang="en-US" sz="1250" dirty="0">
-                <a:solidFill>
-                  <a:srgbClr val="17364A"/>
-                </a:solidFill>
-                <a:latin typeface="Aptos" pitchFamily="34" charset="0"/>
-                <a:ea typeface="Aptos" pitchFamily="34" charset="-122"/>
-                <a:cs typeface="Aptos" pitchFamily="34" charset="-120"/>
-              </a:rPr>
-              <a:t>If your department already has a strong equivalent tool, adapt or use the existing process instead of recreating it.</a:t>
-            </a:r>
-            <a:endParaRPr lang="en-US" sz="1250" dirty="0"/>
+            <a:pPr algn="ctr" indent="0" marL="0">
+              <a:buNone/>
+            </a:pPr>
+            <a:r>
+              <a:rPr lang="en-US" sz="1500" b="1" dirty="0">
+                <a:solidFill>
+                  <a:srgbClr val="FFFFFF"/>
+                </a:solidFill>
+                <a:latin typeface="Aptos" pitchFamily="34" charset="0"/>
+                <a:ea typeface="Aptos" pitchFamily="34" charset="-122"/>
+                <a:cs typeface="Aptos" pitchFamily="34" charset="-120"/>
+              </a:rPr>
+              <a:t>Concept</a:t>
+            </a:r>
+            <a:endParaRPr lang="en-US" sz="1500" dirty="0"/>
+          </a:p>
+        </p:txBody>
+      </p:sp>
+      <p:sp>
+        <p:nvSpPr>
+          <p:cNvPr id="15" name="Text 13"/>
+          <p:cNvSpPr/>
+          <p:nvPr/>
+        </p:nvSpPr>
+        <p:spPr>
+          <a:xfrm>
+            <a:off x="8817864" y="4187952"/>
+            <a:ext cx="201168" cy="256032"/>
+          </a:xfrm>
+          <a:prstGeom prst="rect">
+            <a:avLst/>
+          </a:prstGeom>
+          <a:noFill/>
+          <a:ln/>
+        </p:spPr>
+        <p:txBody>
+          <a:bodyPr wrap="square" lIns="0" tIns="0" rIns="0" bIns="0" rtlCol="0" anchor="ctr"/>
+          <a:lstStyle/>
+          <a:p>
+            <a:pPr algn="ctr" indent="0" marL="0">
+              <a:buNone/>
+            </a:pPr>
+            <a:r>
+              <a:rPr lang="en-US" sz="1800" b="1" dirty="0">
+                <a:solidFill>
+                  <a:srgbClr val="0068B7"/>
+                </a:solidFill>
+                <a:latin typeface="Aptos" pitchFamily="34" charset="0"/>
+                <a:ea typeface="Aptos" pitchFamily="34" charset="-122"/>
+                <a:cs typeface="Aptos" pitchFamily="34" charset="-120"/>
+              </a:rPr>
+              <a:t>â†’</a:t>
+            </a:r>
+            <a:endParaRPr lang="en-US" sz="1800" dirty="0"/>
+          </a:p>
+        </p:txBody>
+      </p:sp>
+      <p:sp>
+        <p:nvSpPr>
+          <p:cNvPr id="16" name="Shape 14"/>
+          <p:cNvSpPr/>
+          <p:nvPr/>
+        </p:nvSpPr>
+        <p:spPr>
+          <a:xfrm>
+            <a:off x="9046464" y="3977640"/>
+            <a:ext cx="972312" cy="749808"/>
+          </a:xfrm>
+          <a:prstGeom prst="roundRect">
+            <a:avLst>
+              <a:gd name="adj" fmla="val 14634"/>
+            </a:avLst>
+          </a:prstGeom>
+          <a:solidFill>
+            <a:srgbClr val="2F8A28"/>
+          </a:solidFill>
+          <a:ln w="12700">
+            <a:solidFill>
+              <a:srgbClr val="2F8A28"/>
+            </a:solidFill>
+            <a:prstDash val="solid"/>
+          </a:ln>
+        </p:spPr>
+      </p:sp>
+      <p:sp>
+        <p:nvSpPr>
+          <p:cNvPr id="17" name="Text 15"/>
+          <p:cNvSpPr/>
+          <p:nvPr/>
+        </p:nvSpPr>
+        <p:spPr>
+          <a:xfrm>
+            <a:off x="9119616" y="4169664"/>
+            <a:ext cx="826008" cy="310896"/>
+          </a:xfrm>
+          <a:prstGeom prst="rect">
+            <a:avLst/>
+          </a:prstGeom>
+          <a:noFill/>
+          <a:ln/>
+        </p:spPr>
+        <p:txBody>
+          <a:bodyPr wrap="square" lIns="0" tIns="0" rIns="0" bIns="0" rtlCol="0" anchor="ctr">
+            <a:normAutofit/>
+          </a:bodyPr>
+          <a:lstStyle/>
+          <a:p>
+            <a:pPr algn="ctr" indent="0" marL="0">
+              <a:buNone/>
+            </a:pPr>
+            <a:r>
+              <a:rPr lang="en-US" sz="1500" b="1" dirty="0">
+                <a:solidFill>
+                  <a:srgbClr val="FFFFFF"/>
+                </a:solidFill>
+                <a:latin typeface="Aptos" pitchFamily="34" charset="0"/>
+                <a:ea typeface="Aptos" pitchFamily="34" charset="-122"/>
+                <a:cs typeface="Aptos" pitchFamily="34" charset="-120"/>
+              </a:rPr>
+              <a:t>Tool</a:t>
+            </a:r>
+            <a:endParaRPr lang="en-US" sz="1500" dirty="0"/>
+          </a:p>
+        </p:txBody>
+      </p:sp>
+      <p:sp>
+        <p:nvSpPr>
+          <p:cNvPr id="18" name="Text 16"/>
+          <p:cNvSpPr/>
+          <p:nvPr/>
+        </p:nvSpPr>
+        <p:spPr>
+          <a:xfrm>
+            <a:off x="10046208" y="4187952"/>
+            <a:ext cx="201168" cy="256032"/>
+          </a:xfrm>
+          <a:prstGeom prst="rect">
+            <a:avLst/>
+          </a:prstGeom>
+          <a:noFill/>
+          <a:ln/>
+        </p:spPr>
+        <p:txBody>
+          <a:bodyPr wrap="square" lIns="0" tIns="0" rIns="0" bIns="0" rtlCol="0" anchor="ctr"/>
+          <a:lstStyle/>
+          <a:p>
+            <a:pPr algn="ctr" indent="0" marL="0">
+              <a:buNone/>
+            </a:pPr>
+            <a:r>
+              <a:rPr lang="en-US" sz="1800" b="1" dirty="0">
+                <a:solidFill>
+                  <a:srgbClr val="0068B7"/>
+                </a:solidFill>
+                <a:latin typeface="Aptos" pitchFamily="34" charset="0"/>
+                <a:ea typeface="Aptos" pitchFamily="34" charset="-122"/>
+                <a:cs typeface="Aptos" pitchFamily="34" charset="-120"/>
+              </a:rPr>
+              <a:t>â†’</a:t>
+            </a:r>
+            <a:endParaRPr lang="en-US" sz="1800" dirty="0"/>
+          </a:p>
+        </p:txBody>
+      </p:sp>
+      <p:sp>
+        <p:nvSpPr>
+          <p:cNvPr id="19" name="Shape 17"/>
+          <p:cNvSpPr/>
+          <p:nvPr/>
+        </p:nvSpPr>
+        <p:spPr>
+          <a:xfrm>
+            <a:off x="10274808" y="3977640"/>
+            <a:ext cx="972312" cy="749808"/>
+          </a:xfrm>
+          <a:prstGeom prst="roundRect">
+            <a:avLst>
+              <a:gd name="adj" fmla="val 14634"/>
+            </a:avLst>
+          </a:prstGeom>
+          <a:solidFill>
+            <a:srgbClr val="D69A2D"/>
+          </a:solidFill>
+          <a:ln w="12700">
+            <a:solidFill>
+              <a:srgbClr val="D69A2D"/>
+            </a:solidFill>
+            <a:prstDash val="solid"/>
+          </a:ln>
+        </p:spPr>
+      </p:sp>
+      <p:sp>
+        <p:nvSpPr>
+          <p:cNvPr id="20" name="Text 18"/>
+          <p:cNvSpPr/>
+          <p:nvPr/>
+        </p:nvSpPr>
+        <p:spPr>
+          <a:xfrm>
+            <a:off x="10347960" y="4169664"/>
+            <a:ext cx="826008" cy="310896"/>
+          </a:xfrm>
+          <a:prstGeom prst="rect">
+            <a:avLst/>
+          </a:prstGeom>
+          <a:noFill/>
+          <a:ln/>
+        </p:spPr>
+        <p:txBody>
+          <a:bodyPr wrap="square" lIns="0" tIns="0" rIns="0" bIns="0" rtlCol="0" anchor="ctr">
+            <a:normAutofit/>
+          </a:bodyPr>
+          <a:lstStyle/>
+          <a:p>
+            <a:pPr algn="ctr" indent="0" marL="0">
+              <a:buNone/>
+            </a:pPr>
+            <a:r>
+              <a:rPr lang="en-US" sz="1500" b="1" dirty="0">
+                <a:solidFill>
+                  <a:srgbClr val="FFFFFF"/>
+                </a:solidFill>
+                <a:latin typeface="Aptos" pitchFamily="34" charset="0"/>
+                <a:ea typeface="Aptos" pitchFamily="34" charset="-122"/>
+                <a:cs typeface="Aptos" pitchFamily="34" charset="-120"/>
+              </a:rPr>
+              <a:t>Artifact</a:t>
+            </a:r>
+            <a:endParaRPr lang="en-US" sz="1500" dirty="0"/>
           </a:p>
         </p:txBody>
       </p:sp>
@@ -10907,7 +11933,7 @@
                 <a:ea typeface="Aptos" pitchFamily="34" charset="-122"/>
                 <a:cs typeface="Aptos" pitchFamily="34" charset="-120"/>
               </a:rPr>
-              <a:t>© Paula Soper</a:t>
+              <a:t>Â© Paula Soper</a:t>
             </a:r>
             <a:endParaRPr lang="en-US" sz="800" dirty="0"/>
           </a:p>
@@ -10915,7 +11941,46 @@
       </p:sp>
       <p:sp>
         <p:nvSpPr>
-          <p:cNvPr id="7" name="Shape 5"/>
+          <p:cNvPr id="7" name="Text 5"/>
+          <p:cNvSpPr/>
+          <p:nvPr/>
+        </p:nvSpPr>
+        <p:spPr>
+          <a:xfrm>
+            <a:off x="11137392" y="6510528"/>
+            <a:ext cx="411480" cy="201168"/>
+          </a:xfrm>
+          <a:prstGeom prst="rect">
+            <a:avLst/>
+          </a:prstGeom>
+          <a:noFill/>
+          <a:ln/>
+        </p:spPr>
+        <p:txBody>
+          <a:bodyPr wrap="square" lIns="0" tIns="0" rIns="0" bIns="0" rtlCol="0" anchor="ctr"/>
+          <a:lstStyle/>
+          <a:p>
+            <a:pPr algn="r" indent="0" marL="0">
+              <a:buNone/>
+            </a:pPr>
+            <a:r>
+              <a:rPr lang="en-US" sz="900" dirty="0">
+                <a:solidFill>
+                  <a:srgbClr val="5F7181"/>
+                </a:solidFill>
+                <a:latin typeface="Aptos" pitchFamily="34" charset="0"/>
+                <a:ea typeface="Aptos" pitchFamily="34" charset="-122"/>
+                <a:cs typeface="Aptos" pitchFamily="34" charset="-120"/>
+              </a:rPr>
+              <a:t>5</a:t>
+            </a:r>
+            <a:endParaRPr lang="en-US" sz="900" dirty="0"/>
+          </a:p>
+        </p:txBody>
+      </p:sp>
+      <p:sp>
+        <p:nvSpPr>
+          <p:cNvPr id="8" name="Shape 6"/>
           <p:cNvSpPr/>
           <p:nvPr/>
         </p:nvSpPr>
@@ -10940,7 +12005,7 @@
       </p:sp>
       <p:sp>
         <p:nvSpPr>
-          <p:cNvPr id="8" name="Text 6"/>
+          <p:cNvPr id="9" name="Text 7"/>
           <p:cNvSpPr/>
           <p:nvPr/>
         </p:nvSpPr>
@@ -10979,14 +12044,14 @@
       </p:sp>
       <p:sp>
         <p:nvSpPr>
-          <p:cNvPr id="9" name="Text 7"/>
+          <p:cNvPr id="10" name="Text 8"/>
           <p:cNvSpPr/>
           <p:nvPr/>
         </p:nvSpPr>
         <p:spPr>
           <a:xfrm>
             <a:off x="640080" y="621792"/>
-            <a:ext cx="10881360" cy="566928"/>
+            <a:ext cx="10881360" cy="713232"/>
           </a:xfrm>
           <a:prstGeom prst="rect">
             <a:avLst/>
@@ -11004,7 +12069,7 @@
               <a:buNone/>
             </a:pPr>
             <a:r>
-              <a:rPr lang="en-US" sz="2700" b="1" dirty="0">
+              <a:rPr lang="en-US" sz="3400" b="1" dirty="0">
                 <a:solidFill>
                   <a:srgbClr val="003A63"/>
                 </a:solidFill>
@@ -11014,20 +12079,20 @@
               </a:rPr>
               <a:t>Learning Objectives</a:t>
             </a:r>
-            <a:endParaRPr lang="en-US" sz="2700" dirty="0"/>
-          </a:p>
-        </p:txBody>
-      </p:sp>
-      <p:sp>
-        <p:nvSpPr>
-          <p:cNvPr id="10" name="Text 8"/>
-          <p:cNvSpPr/>
-          <p:nvPr/>
-        </p:nvSpPr>
-        <p:spPr>
-          <a:xfrm>
-            <a:off x="868680" y="1417320"/>
-            <a:ext cx="6675120" cy="4434840"/>
+            <a:endParaRPr lang="en-US" sz="3400" dirty="0"/>
+          </a:p>
+        </p:txBody>
+      </p:sp>
+      <p:sp>
+        <p:nvSpPr>
+          <p:cNvPr id="11" name="Text 9"/>
+          <p:cNvSpPr/>
+          <p:nvPr/>
+        </p:nvSpPr>
+        <p:spPr>
+          <a:xfrm>
+            <a:off x="868680" y="1508760"/>
+            <a:ext cx="6537960" cy="4160520"/>
           </a:xfrm>
           <a:prstGeom prst="rect">
             <a:avLst/>
@@ -11042,7 +12107,7 @@
           <a:lstStyle/>
           <a:p>
             <a:r>
-              <a:rPr lang="en-US" sz="1700" dirty="0">
+              <a:rPr lang="en-US" sz="2100" dirty="0">
                 <a:solidFill>
                   <a:srgbClr val="17364A"/>
                 </a:solidFill>
@@ -11052,11 +12117,11 @@
               </a:rPr>
               <a:t>Explain why AI implementation requires change management.</a:t>
             </a:r>
-            <a:endParaRPr lang="en-US" sz="1700" dirty="0"/>
-          </a:p>
-          <a:p>
-            <a:r>
-              <a:rPr lang="en-US" sz="1700" dirty="0">
+            <a:endParaRPr lang="en-US" sz="2100" dirty="0"/>
+          </a:p>
+          <a:p>
+            <a:r>
+              <a:rPr lang="en-US" sz="2100" dirty="0">
                 <a:solidFill>
                   <a:srgbClr val="17364A"/>
                 </a:solidFill>
@@ -11066,11 +12131,11 @@
               </a:rPr>
               <a:t>Identify stakeholders affected by an AI-supported workflow.</a:t>
             </a:r>
-            <a:endParaRPr lang="en-US" sz="1700" dirty="0"/>
-          </a:p>
-          <a:p>
-            <a:r>
-              <a:rPr lang="en-US" sz="1700" dirty="0">
+            <a:endParaRPr lang="en-US" sz="2100" dirty="0"/>
+          </a:p>
+          <a:p>
+            <a:r>
+              <a:rPr lang="en-US" sz="2100" dirty="0">
                 <a:solidFill>
                   <a:srgbClr val="17364A"/>
                 </a:solidFill>
@@ -11078,29 +12143,15 @@
                 <a:ea typeface="Aptos" pitchFamily="34" charset="-122"/>
                 <a:cs typeface="Aptos" pitchFamily="34" charset="-120"/>
               </a:rPr>
-              <a:t>Develop a change management plan that includes communication, training, workflow updates, feedback, and adoption measures.</a:t>
-            </a:r>
-            <a:endParaRPr lang="en-US" sz="1700" dirty="0"/>
-          </a:p>
-          <a:p>
-            <a:r>
-              <a:rPr lang="en-US" sz="1700" dirty="0">
-                <a:solidFill>
-                  <a:srgbClr val="17364A"/>
-                </a:solidFill>
-                <a:latin typeface="Aptos" pitchFamily="34" charset="0"/>
-                <a:ea typeface="Aptos" pitchFamily="34" charset="-122"/>
-                <a:cs typeface="Aptos" pitchFamily="34" charset="-120"/>
-              </a:rPr>
-              <a:t>Recognize staff concerns related to trust, workload, deskilling, surveillance, accountability, and job impact.</a:t>
-            </a:r>
-            <a:endParaRPr lang="en-US" sz="1700" dirty="0"/>
-          </a:p>
-        </p:txBody>
-      </p:sp>
-      <p:sp>
-        <p:nvSpPr>
-          <p:cNvPr id="11" name="Shape 9"/>
+              <a:t>Develop a change management plan that includes communication, training, workflow updates, feedback, and.</a:t>
+            </a:r>
+            <a:endParaRPr lang="en-US" sz="2100" dirty="0"/>
+          </a:p>
+        </p:txBody>
+      </p:sp>
+      <p:sp>
+        <p:nvSpPr>
+          <p:cNvPr id="12" name="Shape 10"/>
           <p:cNvSpPr/>
           <p:nvPr/>
         </p:nvSpPr>
@@ -11127,14 +12178,14 @@
       </p:sp>
       <p:sp>
         <p:nvSpPr>
-          <p:cNvPr id="12" name="Text 10"/>
+          <p:cNvPr id="13" name="Text 11"/>
           <p:cNvSpPr/>
           <p:nvPr/>
         </p:nvSpPr>
         <p:spPr>
           <a:xfrm>
             <a:off x="8074152" y="1563624"/>
-            <a:ext cx="2825496" cy="201168"/>
+            <a:ext cx="2825496" cy="256032"/>
           </a:xfrm>
           <a:prstGeom prst="rect">
             <a:avLst/>
@@ -11150,7 +12201,7 @@
               <a:buNone/>
             </a:pPr>
             <a:r>
-              <a:rPr lang="en-US" sz="950" b="1" dirty="0">
+              <a:rPr lang="en-US" sz="1300" b="1" dirty="0">
                 <a:solidFill>
                   <a:srgbClr val="0068B7"/>
                 </a:solidFill>
@@ -11160,20 +12211,20 @@
               </a:rPr>
               <a:t>Key idea</a:t>
             </a:r>
-            <a:endParaRPr lang="en-US" sz="950" dirty="0"/>
-          </a:p>
-        </p:txBody>
-      </p:sp>
-      <p:sp>
-        <p:nvSpPr>
-          <p:cNvPr id="13" name="Text 11"/>
-          <p:cNvSpPr/>
-          <p:nvPr/>
-        </p:nvSpPr>
-        <p:spPr>
-          <a:xfrm>
-            <a:off x="8074152" y="1856232"/>
-            <a:ext cx="2825496" cy="1261872"/>
+            <a:endParaRPr lang="en-US" sz="1300" dirty="0"/>
+          </a:p>
+        </p:txBody>
+      </p:sp>
+      <p:sp>
+        <p:nvSpPr>
+          <p:cNvPr id="14" name="Text 12"/>
+          <p:cNvSpPr/>
+          <p:nvPr/>
+        </p:nvSpPr>
+        <p:spPr>
+          <a:xfrm>
+            <a:off x="8074152" y="1920240"/>
+            <a:ext cx="2825496" cy="1188720"/>
           </a:xfrm>
           <a:prstGeom prst="rect">
             <a:avLst/>
@@ -11191,7 +12242,7 @@
               <a:buNone/>
             </a:pPr>
             <a:r>
-              <a:rPr lang="en-US" sz="1250" dirty="0">
+              <a:rPr lang="en-US" sz="1550" dirty="0">
                 <a:solidFill>
                   <a:srgbClr val="17364A"/>
                 </a:solidFill>
@@ -11201,13 +12252,13 @@
               </a:rPr>
               <a:t>Explain why AI implementation requires change management.</a:t>
             </a:r>
-            <a:endParaRPr lang="en-US" sz="1250" dirty="0"/>
-          </a:p>
-        </p:txBody>
-      </p:sp>
-      <p:sp>
-        <p:nvSpPr>
-          <p:cNvPr id="14" name="Shape 12"/>
+            <a:endParaRPr lang="en-US" sz="1550" dirty="0"/>
+          </a:p>
+        </p:txBody>
+      </p:sp>
+      <p:sp>
+        <p:nvSpPr>
+          <p:cNvPr id="15" name="Shape 13"/>
           <p:cNvSpPr/>
           <p:nvPr/>
         </p:nvSpPr>
@@ -11234,14 +12285,14 @@
       </p:sp>
       <p:sp>
         <p:nvSpPr>
-          <p:cNvPr id="15" name="Text 13"/>
+          <p:cNvPr id="16" name="Text 14"/>
           <p:cNvSpPr/>
           <p:nvPr/>
         </p:nvSpPr>
         <p:spPr>
           <a:xfrm>
             <a:off x="8074152" y="3666744"/>
-            <a:ext cx="2825496" cy="201168"/>
+            <a:ext cx="2825496" cy="256032"/>
           </a:xfrm>
           <a:prstGeom prst="rect">
             <a:avLst/>
@@ -11257,7 +12308,7 @@
               <a:buNone/>
             </a:pPr>
             <a:r>
-              <a:rPr lang="en-US" sz="950" b="1" dirty="0">
+              <a:rPr lang="en-US" sz="1300" b="1" dirty="0">
                 <a:solidFill>
                   <a:srgbClr val="0068B7"/>
                 </a:solidFill>
@@ -11267,20 +12318,20 @@
               </a:rPr>
               <a:t>Use this for</a:t>
             </a:r>
-            <a:endParaRPr lang="en-US" sz="950" dirty="0"/>
-          </a:p>
-        </p:txBody>
-      </p:sp>
-      <p:sp>
-        <p:nvSpPr>
-          <p:cNvPr id="16" name="Text 14"/>
-          <p:cNvSpPr/>
-          <p:nvPr/>
-        </p:nvSpPr>
-        <p:spPr>
-          <a:xfrm>
-            <a:off x="8074152" y="3959352"/>
-            <a:ext cx="2825496" cy="1170432"/>
+            <a:endParaRPr lang="en-US" sz="1300" dirty="0"/>
+          </a:p>
+        </p:txBody>
+      </p:sp>
+      <p:sp>
+        <p:nvSpPr>
+          <p:cNvPr id="17" name="Text 15"/>
+          <p:cNvSpPr/>
+          <p:nvPr/>
+        </p:nvSpPr>
+        <p:spPr>
+          <a:xfrm>
+            <a:off x="8074152" y="4023360"/>
+            <a:ext cx="2825496" cy="1097280"/>
           </a:xfrm>
           <a:prstGeom prst="rect">
             <a:avLst/>
@@ -11298,7 +12349,7 @@
               <a:buNone/>
             </a:pPr>
             <a:r>
-              <a:rPr lang="en-US" sz="1250" dirty="0">
+              <a:rPr lang="en-US" sz="1550" dirty="0">
                 <a:solidFill>
                   <a:srgbClr val="17364A"/>
                 </a:solidFill>
@@ -11308,7 +12359,7 @@
               </a:rPr>
               <a:t>Connect the concept to public health decisions, safeguards, documentation, or implementation work.</a:t>
             </a:r>
-            <a:endParaRPr lang="en-US" sz="1250" dirty="0"/>
+            <a:endParaRPr lang="en-US" sz="1550" dirty="0"/>
           </a:p>
         </p:txBody>
       </p:sp>
@@ -11505,7 +12556,7 @@
                 <a:ea typeface="Aptos" pitchFamily="34" charset="-122"/>
                 <a:cs typeface="Aptos" pitchFamily="34" charset="-120"/>
               </a:rPr>
-              <a:t>© Paula Soper</a:t>
+              <a:t>Â© Paula Soper</a:t>
             </a:r>
             <a:endParaRPr lang="en-US" sz="800" dirty="0"/>
           </a:p>
@@ -11513,7 +12564,46 @@
       </p:sp>
       <p:sp>
         <p:nvSpPr>
-          <p:cNvPr id="7" name="Shape 5"/>
+          <p:cNvPr id="7" name="Text 5"/>
+          <p:cNvSpPr/>
+          <p:nvPr/>
+        </p:nvSpPr>
+        <p:spPr>
+          <a:xfrm>
+            <a:off x="11137392" y="6510528"/>
+            <a:ext cx="411480" cy="201168"/>
+          </a:xfrm>
+          <a:prstGeom prst="rect">
+            <a:avLst/>
+          </a:prstGeom>
+          <a:noFill/>
+          <a:ln/>
+        </p:spPr>
+        <p:txBody>
+          <a:bodyPr wrap="square" lIns="0" tIns="0" rIns="0" bIns="0" rtlCol="0" anchor="ctr"/>
+          <a:lstStyle/>
+          <a:p>
+            <a:pPr algn="r" indent="0" marL="0">
+              <a:buNone/>
+            </a:pPr>
+            <a:r>
+              <a:rPr lang="en-US" sz="900" dirty="0">
+                <a:solidFill>
+                  <a:srgbClr val="5F7181"/>
+                </a:solidFill>
+                <a:latin typeface="Aptos" pitchFamily="34" charset="0"/>
+                <a:ea typeface="Aptos" pitchFamily="34" charset="-122"/>
+                <a:cs typeface="Aptos" pitchFamily="34" charset="-120"/>
+              </a:rPr>
+              <a:t>6</a:t>
+            </a:r>
+            <a:endParaRPr lang="en-US" sz="900" dirty="0"/>
+          </a:p>
+        </p:txBody>
+      </p:sp>
+      <p:sp>
+        <p:nvSpPr>
+          <p:cNvPr id="8" name="Shape 6"/>
           <p:cNvSpPr/>
           <p:nvPr/>
         </p:nvSpPr>
@@ -11538,7 +12628,7 @@
       </p:sp>
       <p:sp>
         <p:nvSpPr>
-          <p:cNvPr id="8" name="Text 6"/>
+          <p:cNvPr id="9" name="Text 7"/>
           <p:cNvSpPr/>
           <p:nvPr/>
         </p:nvSpPr>
@@ -11577,14 +12667,14 @@
       </p:sp>
       <p:sp>
         <p:nvSpPr>
-          <p:cNvPr id="9" name="Text 7"/>
+          <p:cNvPr id="10" name="Text 8"/>
           <p:cNvSpPr/>
           <p:nvPr/>
         </p:nvSpPr>
         <p:spPr>
           <a:xfrm>
             <a:off x="640080" y="621792"/>
-            <a:ext cx="10881360" cy="566928"/>
+            <a:ext cx="10881360" cy="713232"/>
           </a:xfrm>
           <a:prstGeom prst="rect">
             <a:avLst/>
@@ -11602,7 +12692,7 @@
               <a:buNone/>
             </a:pPr>
             <a:r>
-              <a:rPr lang="en-US" sz="2700" b="1" dirty="0">
+              <a:rPr lang="en-US" sz="3400" b="1" dirty="0">
                 <a:solidFill>
                   <a:srgbClr val="003A63"/>
                 </a:solidFill>
@@ -11612,20 +12702,20 @@
               </a:rPr>
               <a:t>Module Overview</a:t>
             </a:r>
-            <a:endParaRPr lang="en-US" sz="2700" dirty="0"/>
-          </a:p>
-        </p:txBody>
-      </p:sp>
-      <p:sp>
-        <p:nvSpPr>
-          <p:cNvPr id="10" name="Text 8"/>
-          <p:cNvSpPr/>
-          <p:nvPr/>
-        </p:nvSpPr>
-        <p:spPr>
-          <a:xfrm>
-            <a:off x="868680" y="1417320"/>
-            <a:ext cx="6675120" cy="4434840"/>
+            <a:endParaRPr lang="en-US" sz="3400" dirty="0"/>
+          </a:p>
+        </p:txBody>
+      </p:sp>
+      <p:sp>
+        <p:nvSpPr>
+          <p:cNvPr id="11" name="Text 9"/>
+          <p:cNvSpPr/>
+          <p:nvPr/>
+        </p:nvSpPr>
+        <p:spPr>
+          <a:xfrm>
+            <a:off x="868680" y="1508760"/>
+            <a:ext cx="6537960" cy="4160520"/>
           </a:xfrm>
           <a:prstGeom prst="rect">
             <a:avLst/>
@@ -11640,7 +12730,7 @@
           <a:lstStyle/>
           <a:p>
             <a:r>
-              <a:rPr lang="en-US" sz="1700" dirty="0">
+              <a:rPr lang="en-US" sz="2100" dirty="0">
                 <a:solidFill>
                   <a:srgbClr val="17364A"/>
                 </a:solidFill>
@@ -11648,13 +12738,13 @@
                 <a:ea typeface="Aptos" pitchFamily="34" charset="-122"/>
                 <a:cs typeface="Aptos" pitchFamily="34" charset="-120"/>
               </a:rPr>
-              <a:t>AI adoption changes how people work, make decisions, document actions, communicate with partners, and understand their roles.</a:t>
-            </a:r>
-            <a:endParaRPr lang="en-US" sz="1700" dirty="0"/>
-          </a:p>
-          <a:p>
-            <a:r>
-              <a:rPr lang="en-US" sz="1700" dirty="0">
+              <a:t>AI adoption changes how people work, make decisions, document actions, communicate with partners, and.</a:t>
+            </a:r>
+            <a:endParaRPr lang="en-US" sz="2100" dirty="0"/>
+          </a:p>
+          <a:p>
+            <a:r>
+              <a:rPr lang="en-US" sz="2100" dirty="0">
                 <a:solidFill>
                   <a:srgbClr val="17364A"/>
                 </a:solidFill>
@@ -11664,11 +12754,11 @@
               </a:rPr>
               <a:t>Successful implementation requires change management, not just technical deployment.</a:t>
             </a:r>
-            <a:endParaRPr lang="en-US" sz="1700" dirty="0"/>
-          </a:p>
-          <a:p>
-            <a:r>
-              <a:rPr lang="en-US" sz="1700" dirty="0">
+            <a:endParaRPr lang="en-US" sz="2100" dirty="0"/>
+          </a:p>
+          <a:p>
+            <a:r>
+              <a:rPr lang="en-US" sz="2100" dirty="0">
                 <a:solidFill>
                   <a:srgbClr val="17364A"/>
                 </a:solidFill>
@@ -11676,29 +12766,15 @@
                 <a:ea typeface="Aptos" pitchFamily="34" charset="-122"/>
                 <a:cs typeface="Aptos" pitchFamily="34" charset="-120"/>
               </a:rPr>
-              <a:t>Staff need to understand why a tool is being introduced, how it affects their workflow, what they are responsible for.</a:t>
-            </a:r>
-            <a:endParaRPr lang="en-US" sz="1700" dirty="0"/>
-          </a:p>
-          <a:p>
-            <a:r>
-              <a:rPr lang="en-US" sz="1700" dirty="0">
-                <a:solidFill>
-                  <a:srgbClr val="17364A"/>
-                </a:solidFill>
-                <a:latin typeface="Aptos" pitchFamily="34" charset="0"/>
-                <a:ea typeface="Aptos" pitchFamily="34" charset="-122"/>
-                <a:cs typeface="Aptos" pitchFamily="34" charset="-120"/>
-              </a:rPr>
-              <a:t>This module helps leaders plan the organizational side of AI adoption.</a:t>
-            </a:r>
-            <a:endParaRPr lang="en-US" sz="1700" dirty="0"/>
-          </a:p>
-        </p:txBody>
-      </p:sp>
-      <p:sp>
-        <p:nvSpPr>
-          <p:cNvPr id="11" name="Shape 9"/>
+              <a:t>Staff need to understand why a tool is being introduced, how it affects their workflow, what they are.</a:t>
+            </a:r>
+            <a:endParaRPr lang="en-US" sz="2100" dirty="0"/>
+          </a:p>
+        </p:txBody>
+      </p:sp>
+      <p:sp>
+        <p:nvSpPr>
+          <p:cNvPr id="12" name="Shape 10"/>
           <p:cNvSpPr/>
           <p:nvPr/>
         </p:nvSpPr>
@@ -11725,14 +12801,14 @@
       </p:sp>
       <p:sp>
         <p:nvSpPr>
-          <p:cNvPr id="12" name="Text 10"/>
+          <p:cNvPr id="13" name="Text 11"/>
           <p:cNvSpPr/>
           <p:nvPr/>
         </p:nvSpPr>
         <p:spPr>
           <a:xfrm>
             <a:off x="8074152" y="1563624"/>
-            <a:ext cx="2825496" cy="201168"/>
+            <a:ext cx="2825496" cy="256032"/>
           </a:xfrm>
           <a:prstGeom prst="rect">
             <a:avLst/>
@@ -11748,7 +12824,7 @@
               <a:buNone/>
             </a:pPr>
             <a:r>
-              <a:rPr lang="en-US" sz="950" b="1" dirty="0">
+              <a:rPr lang="en-US" sz="1300" b="1" dirty="0">
                 <a:solidFill>
                   <a:srgbClr val="0068B7"/>
                 </a:solidFill>
@@ -11758,20 +12834,20 @@
               </a:rPr>
               <a:t>Key idea</a:t>
             </a:r>
-            <a:endParaRPr lang="en-US" sz="950" dirty="0"/>
-          </a:p>
-        </p:txBody>
-      </p:sp>
-      <p:sp>
-        <p:nvSpPr>
-          <p:cNvPr id="13" name="Text 11"/>
-          <p:cNvSpPr/>
-          <p:nvPr/>
-        </p:nvSpPr>
-        <p:spPr>
-          <a:xfrm>
-            <a:off x="8074152" y="1856232"/>
-            <a:ext cx="2825496" cy="1261872"/>
+            <a:endParaRPr lang="en-US" sz="1300" dirty="0"/>
+          </a:p>
+        </p:txBody>
+      </p:sp>
+      <p:sp>
+        <p:nvSpPr>
+          <p:cNvPr id="14" name="Text 12"/>
+          <p:cNvSpPr/>
+          <p:nvPr/>
+        </p:nvSpPr>
+        <p:spPr>
+          <a:xfrm>
+            <a:off x="8074152" y="1920240"/>
+            <a:ext cx="2825496" cy="1188720"/>
           </a:xfrm>
           <a:prstGeom prst="rect">
             <a:avLst/>
@@ -11789,7 +12865,7 @@
               <a:buNone/>
             </a:pPr>
             <a:r>
-              <a:rPr lang="en-US" sz="1250" dirty="0">
+              <a:rPr lang="en-US" sz="1550" dirty="0">
                 <a:solidFill>
                   <a:srgbClr val="17364A"/>
                 </a:solidFill>
@@ -11797,15 +12873,15 @@
                 <a:ea typeface="Aptos" pitchFamily="34" charset="-122"/>
                 <a:cs typeface="Aptos" pitchFamily="34" charset="-120"/>
               </a:rPr>
-              <a:t>AI adoption changes how people work, make decisions, document actions, communicate with partners, and understand their roles.</a:t>
-            </a:r>
-            <a:endParaRPr lang="en-US" sz="1250" dirty="0"/>
-          </a:p>
-        </p:txBody>
-      </p:sp>
-      <p:sp>
-        <p:nvSpPr>
-          <p:cNvPr id="14" name="Shape 12"/>
+              <a:t>AI adoption changes how people work, make decisions, document actions, communicate with partners, and.</a:t>
+            </a:r>
+            <a:endParaRPr lang="en-US" sz="1550" dirty="0"/>
+          </a:p>
+        </p:txBody>
+      </p:sp>
+      <p:sp>
+        <p:nvSpPr>
+          <p:cNvPr id="15" name="Shape 13"/>
           <p:cNvSpPr/>
           <p:nvPr/>
         </p:nvSpPr>
@@ -11832,14 +12908,14 @@
       </p:sp>
       <p:sp>
         <p:nvSpPr>
-          <p:cNvPr id="15" name="Text 13"/>
+          <p:cNvPr id="16" name="Text 14"/>
           <p:cNvSpPr/>
           <p:nvPr/>
         </p:nvSpPr>
         <p:spPr>
           <a:xfrm>
             <a:off x="8074152" y="3666744"/>
-            <a:ext cx="2825496" cy="201168"/>
+            <a:ext cx="2825496" cy="256032"/>
           </a:xfrm>
           <a:prstGeom prst="rect">
             <a:avLst/>
@@ -11855,7 +12931,7 @@
               <a:buNone/>
             </a:pPr>
             <a:r>
-              <a:rPr lang="en-US" sz="950" b="1" dirty="0">
+              <a:rPr lang="en-US" sz="1300" b="1" dirty="0">
                 <a:solidFill>
                   <a:srgbClr val="0068B7"/>
                 </a:solidFill>
@@ -11865,20 +12941,20 @@
               </a:rPr>
               <a:t>Use this for</a:t>
             </a:r>
-            <a:endParaRPr lang="en-US" sz="950" dirty="0"/>
-          </a:p>
-        </p:txBody>
-      </p:sp>
-      <p:sp>
-        <p:nvSpPr>
-          <p:cNvPr id="16" name="Text 14"/>
-          <p:cNvSpPr/>
-          <p:nvPr/>
-        </p:nvSpPr>
-        <p:spPr>
-          <a:xfrm>
-            <a:off x="8074152" y="3959352"/>
-            <a:ext cx="2825496" cy="1170432"/>
+            <a:endParaRPr lang="en-US" sz="1300" dirty="0"/>
+          </a:p>
+        </p:txBody>
+      </p:sp>
+      <p:sp>
+        <p:nvSpPr>
+          <p:cNvPr id="17" name="Text 15"/>
+          <p:cNvSpPr/>
+          <p:nvPr/>
+        </p:nvSpPr>
+        <p:spPr>
+          <a:xfrm>
+            <a:off x="8074152" y="4023360"/>
+            <a:ext cx="2825496" cy="1097280"/>
           </a:xfrm>
           <a:prstGeom prst="rect">
             <a:avLst/>
@@ -11896,7 +12972,7 @@
               <a:buNone/>
             </a:pPr>
             <a:r>
-              <a:rPr lang="en-US" sz="1250" dirty="0">
+              <a:rPr lang="en-US" sz="1550" dirty="0">
                 <a:solidFill>
                   <a:srgbClr val="17364A"/>
                 </a:solidFill>
@@ -11906,7 +12982,7 @@
               </a:rPr>
               <a:t>Connect the concept to public health decisions, safeguards, documentation, or implementation work.</a:t>
             </a:r>
-            <a:endParaRPr lang="en-US" sz="1250" dirty="0"/>
+            <a:endParaRPr lang="en-US" sz="1550" dirty="0"/>
           </a:p>
         </p:txBody>
       </p:sp>
@@ -12103,7 +13179,7 @@
                 <a:ea typeface="Aptos" pitchFamily="34" charset="-122"/>
                 <a:cs typeface="Aptos" pitchFamily="34" charset="-120"/>
               </a:rPr>
-              <a:t>© Paula Soper</a:t>
+              <a:t>Â© Paula Soper</a:t>
             </a:r>
             <a:endParaRPr lang="en-US" sz="800" dirty="0"/>
           </a:p>
@@ -12111,7 +13187,46 @@
       </p:sp>
       <p:sp>
         <p:nvSpPr>
-          <p:cNvPr id="7" name="Shape 5"/>
+          <p:cNvPr id="7" name="Text 5"/>
+          <p:cNvSpPr/>
+          <p:nvPr/>
+        </p:nvSpPr>
+        <p:spPr>
+          <a:xfrm>
+            <a:off x="11137392" y="6510528"/>
+            <a:ext cx="411480" cy="201168"/>
+          </a:xfrm>
+          <a:prstGeom prst="rect">
+            <a:avLst/>
+          </a:prstGeom>
+          <a:noFill/>
+          <a:ln/>
+        </p:spPr>
+        <p:txBody>
+          <a:bodyPr wrap="square" lIns="0" tIns="0" rIns="0" bIns="0" rtlCol="0" anchor="ctr"/>
+          <a:lstStyle/>
+          <a:p>
+            <a:pPr algn="r" indent="0" marL="0">
+              <a:buNone/>
+            </a:pPr>
+            <a:r>
+              <a:rPr lang="en-US" sz="900" dirty="0">
+                <a:solidFill>
+                  <a:srgbClr val="5F7181"/>
+                </a:solidFill>
+                <a:latin typeface="Aptos" pitchFamily="34" charset="0"/>
+                <a:ea typeface="Aptos" pitchFamily="34" charset="-122"/>
+                <a:cs typeface="Aptos" pitchFamily="34" charset="-120"/>
+              </a:rPr>
+              <a:t>7</a:t>
+            </a:r>
+            <a:endParaRPr lang="en-US" sz="900" dirty="0"/>
+          </a:p>
+        </p:txBody>
+      </p:sp>
+      <p:sp>
+        <p:nvSpPr>
+          <p:cNvPr id="8" name="Shape 6"/>
           <p:cNvSpPr/>
           <p:nvPr/>
         </p:nvSpPr>
@@ -12136,7 +13251,7 @@
       </p:sp>
       <p:sp>
         <p:nvSpPr>
-          <p:cNvPr id="8" name="Text 6"/>
+          <p:cNvPr id="9" name="Text 7"/>
           <p:cNvSpPr/>
           <p:nvPr/>
         </p:nvSpPr>
@@ -12175,14 +13290,14 @@
       </p:sp>
       <p:sp>
         <p:nvSpPr>
-          <p:cNvPr id="9" name="Text 7"/>
+          <p:cNvPr id="10" name="Text 8"/>
           <p:cNvSpPr/>
           <p:nvPr/>
         </p:nvSpPr>
         <p:spPr>
           <a:xfrm>
             <a:off x="640080" y="621792"/>
-            <a:ext cx="10881360" cy="566928"/>
+            <a:ext cx="10881360" cy="713232"/>
           </a:xfrm>
           <a:prstGeom prst="rect">
             <a:avLst/>
@@ -12200,7 +13315,7 @@
               <a:buNone/>
             </a:pPr>
             <a:r>
-              <a:rPr lang="en-US" sz="2700" b="1" dirty="0">
+              <a:rPr lang="en-US" sz="3400" b="1" dirty="0">
                 <a:solidFill>
                   <a:srgbClr val="003A63"/>
                 </a:solidFill>
@@ -12210,20 +13325,20 @@
               </a:rPr>
               <a:t>Why This Topic Matters for Public Health AI</a:t>
             </a:r>
-            <a:endParaRPr lang="en-US" sz="2700" dirty="0"/>
-          </a:p>
-        </p:txBody>
-      </p:sp>
-      <p:sp>
-        <p:nvSpPr>
-          <p:cNvPr id="10" name="Text 8"/>
-          <p:cNvSpPr/>
-          <p:nvPr/>
-        </p:nvSpPr>
-        <p:spPr>
-          <a:xfrm>
-            <a:off x="868680" y="1417320"/>
-            <a:ext cx="6675120" cy="4434840"/>
+            <a:endParaRPr lang="en-US" sz="3400" dirty="0"/>
+          </a:p>
+        </p:txBody>
+      </p:sp>
+      <p:sp>
+        <p:nvSpPr>
+          <p:cNvPr id="11" name="Text 9"/>
+          <p:cNvSpPr/>
+          <p:nvPr/>
+        </p:nvSpPr>
+        <p:spPr>
+          <a:xfrm>
+            <a:off x="868680" y="1508760"/>
+            <a:ext cx="6537960" cy="4160520"/>
           </a:xfrm>
           <a:prstGeom prst="rect">
             <a:avLst/>
@@ -12238,7 +13353,7 @@
           <a:lstStyle/>
           <a:p>
             <a:r>
-              <a:rPr lang="en-US" sz="1700" dirty="0">
+              <a:rPr lang="en-US" sz="2100" dirty="0">
                 <a:solidFill>
                   <a:srgbClr val="17364A"/>
                 </a:solidFill>
@@ -12248,11 +13363,11 @@
               </a:rPr>
               <a:t>AI tools may fail even when the technology works because the organization is not ready to use them.</a:t>
             </a:r>
-            <a:endParaRPr lang="en-US" sz="1700" dirty="0"/>
-          </a:p>
-          <a:p>
-            <a:r>
-              <a:rPr lang="en-US" sz="1700" dirty="0">
+            <a:endParaRPr lang="en-US" sz="2100" dirty="0"/>
+          </a:p>
+          <a:p>
+            <a:r>
+              <a:rPr lang="en-US" sz="2100" dirty="0">
                 <a:solidFill>
                   <a:srgbClr val="17364A"/>
                 </a:solidFill>
@@ -12260,13 +13375,13 @@
                 <a:ea typeface="Aptos" pitchFamily="34" charset="-122"/>
                 <a:cs typeface="Aptos" pitchFamily="34" charset="-120"/>
               </a:rPr>
-              <a:t>Staff may not trust the output, may over-trust it, may not understand their review responsibilities, or may develop.</a:t>
-            </a:r>
-            <a:endParaRPr lang="en-US" sz="1700" dirty="0"/>
-          </a:p>
-          <a:p>
-            <a:r>
-              <a:rPr lang="en-US" sz="1700" dirty="0">
+              <a:t>Staff may not trust the output, may over-trust it, may not understand their review responsibilities, or.</a:t>
+            </a:r>
+            <a:endParaRPr lang="en-US" sz="2100" dirty="0"/>
+          </a:p>
+          <a:p>
+            <a:r>
+              <a:rPr lang="en-US" sz="2100" dirty="0">
                 <a:solidFill>
                   <a:srgbClr val="17364A"/>
                 </a:solidFill>
@@ -12276,27 +13391,13 @@
               </a:rPr>
               <a:t>Leaders may underestimate the time needed for training, workflow redesign, and user feedback.</a:t>
             </a:r>
-            <a:endParaRPr lang="en-US" sz="1700" dirty="0"/>
-          </a:p>
-          <a:p>
-            <a:r>
-              <a:rPr lang="en-US" sz="1700" dirty="0">
-                <a:solidFill>
-                  <a:srgbClr val="17364A"/>
-                </a:solidFill>
-                <a:latin typeface="Aptos" pitchFamily="34" charset="0"/>
-                <a:ea typeface="Aptos" pitchFamily="34" charset="-122"/>
-                <a:cs typeface="Aptos" pitchFamily="34" charset="-120"/>
-              </a:rPr>
-              <a:t>Change management is also an equity and workforce issue.</a:t>
-            </a:r>
-            <a:endParaRPr lang="en-US" sz="1700" dirty="0"/>
-          </a:p>
-        </p:txBody>
-      </p:sp>
-      <p:sp>
-        <p:nvSpPr>
-          <p:cNvPr id="11" name="Shape 9"/>
+            <a:endParaRPr lang="en-US" sz="2100" dirty="0"/>
+          </a:p>
+        </p:txBody>
+      </p:sp>
+      <p:sp>
+        <p:nvSpPr>
+          <p:cNvPr id="12" name="Shape 10"/>
           <p:cNvSpPr/>
           <p:nvPr/>
         </p:nvSpPr>
@@ -12323,14 +13424,14 @@
       </p:sp>
       <p:sp>
         <p:nvSpPr>
-          <p:cNvPr id="12" name="Text 10"/>
+          <p:cNvPr id="13" name="Text 11"/>
           <p:cNvSpPr/>
           <p:nvPr/>
         </p:nvSpPr>
         <p:spPr>
           <a:xfrm>
             <a:off x="8074152" y="1563624"/>
-            <a:ext cx="2825496" cy="201168"/>
+            <a:ext cx="2825496" cy="256032"/>
           </a:xfrm>
           <a:prstGeom prst="rect">
             <a:avLst/>
@@ -12346,7 +13447,7 @@
               <a:buNone/>
             </a:pPr>
             <a:r>
-              <a:rPr lang="en-US" sz="950" b="1" dirty="0">
+              <a:rPr lang="en-US" sz="1300" b="1" dirty="0">
                 <a:solidFill>
                   <a:srgbClr val="0068B7"/>
                 </a:solidFill>
@@ -12356,20 +13457,20 @@
               </a:rPr>
               <a:t>Key idea</a:t>
             </a:r>
-            <a:endParaRPr lang="en-US" sz="950" dirty="0"/>
-          </a:p>
-        </p:txBody>
-      </p:sp>
-      <p:sp>
-        <p:nvSpPr>
-          <p:cNvPr id="13" name="Text 11"/>
-          <p:cNvSpPr/>
-          <p:nvPr/>
-        </p:nvSpPr>
-        <p:spPr>
-          <a:xfrm>
-            <a:off x="8074152" y="1856232"/>
-            <a:ext cx="2825496" cy="1261872"/>
+            <a:endParaRPr lang="en-US" sz="1300" dirty="0"/>
+          </a:p>
+        </p:txBody>
+      </p:sp>
+      <p:sp>
+        <p:nvSpPr>
+          <p:cNvPr id="14" name="Text 12"/>
+          <p:cNvSpPr/>
+          <p:nvPr/>
+        </p:nvSpPr>
+        <p:spPr>
+          <a:xfrm>
+            <a:off x="8074152" y="1920240"/>
+            <a:ext cx="2825496" cy="1188720"/>
           </a:xfrm>
           <a:prstGeom prst="rect">
             <a:avLst/>
@@ -12387,7 +13488,7 @@
               <a:buNone/>
             </a:pPr>
             <a:r>
-              <a:rPr lang="en-US" sz="1250" dirty="0">
+              <a:rPr lang="en-US" sz="1550" dirty="0">
                 <a:solidFill>
                   <a:srgbClr val="17364A"/>
                 </a:solidFill>
@@ -12397,13 +13498,13 @@
               </a:rPr>
               <a:t>AI tools may fail even when the technology works because the organization is not ready to use them.</a:t>
             </a:r>
-            <a:endParaRPr lang="en-US" sz="1250" dirty="0"/>
-          </a:p>
-        </p:txBody>
-      </p:sp>
-      <p:sp>
-        <p:nvSpPr>
-          <p:cNvPr id="14" name="Shape 12"/>
+            <a:endParaRPr lang="en-US" sz="1550" dirty="0"/>
+          </a:p>
+        </p:txBody>
+      </p:sp>
+      <p:sp>
+        <p:nvSpPr>
+          <p:cNvPr id="15" name="Shape 13"/>
           <p:cNvSpPr/>
           <p:nvPr/>
         </p:nvSpPr>
@@ -12430,14 +13531,14 @@
       </p:sp>
       <p:sp>
         <p:nvSpPr>
-          <p:cNvPr id="15" name="Text 13"/>
+          <p:cNvPr id="16" name="Text 14"/>
           <p:cNvSpPr/>
           <p:nvPr/>
         </p:nvSpPr>
         <p:spPr>
           <a:xfrm>
             <a:off x="8074152" y="3666744"/>
-            <a:ext cx="2825496" cy="201168"/>
+            <a:ext cx="2825496" cy="256032"/>
           </a:xfrm>
           <a:prstGeom prst="rect">
             <a:avLst/>
@@ -12453,7 +13554,7 @@
               <a:buNone/>
             </a:pPr>
             <a:r>
-              <a:rPr lang="en-US" sz="950" b="1" dirty="0">
+              <a:rPr lang="en-US" sz="1300" b="1" dirty="0">
                 <a:solidFill>
                   <a:srgbClr val="0068B7"/>
                 </a:solidFill>
@@ -12463,20 +13564,20 @@
               </a:rPr>
               <a:t>Use this for</a:t>
             </a:r>
-            <a:endParaRPr lang="en-US" sz="950" dirty="0"/>
-          </a:p>
-        </p:txBody>
-      </p:sp>
-      <p:sp>
-        <p:nvSpPr>
-          <p:cNvPr id="16" name="Text 14"/>
-          <p:cNvSpPr/>
-          <p:nvPr/>
-        </p:nvSpPr>
-        <p:spPr>
-          <a:xfrm>
-            <a:off x="8074152" y="3959352"/>
-            <a:ext cx="2825496" cy="1170432"/>
+            <a:endParaRPr lang="en-US" sz="1300" dirty="0"/>
+          </a:p>
+        </p:txBody>
+      </p:sp>
+      <p:sp>
+        <p:nvSpPr>
+          <p:cNvPr id="17" name="Text 15"/>
+          <p:cNvSpPr/>
+          <p:nvPr/>
+        </p:nvSpPr>
+        <p:spPr>
+          <a:xfrm>
+            <a:off x="8074152" y="4023360"/>
+            <a:ext cx="2825496" cy="1097280"/>
           </a:xfrm>
           <a:prstGeom prst="rect">
             <a:avLst/>
@@ -12494,7 +13595,7 @@
               <a:buNone/>
             </a:pPr>
             <a:r>
-              <a:rPr lang="en-US" sz="1250" dirty="0">
+              <a:rPr lang="en-US" sz="1550" dirty="0">
                 <a:solidFill>
                   <a:srgbClr val="17364A"/>
                 </a:solidFill>
@@ -12504,7 +13605,7 @@
               </a:rPr>
               <a:t>Connect the concept to public health decisions, safeguards, documentation, or implementation work.</a:t>
             </a:r>
-            <a:endParaRPr lang="en-US" sz="1250" dirty="0"/>
+            <a:endParaRPr lang="en-US" sz="1550" dirty="0"/>
           </a:p>
         </p:txBody>
       </p:sp>
@@ -12701,7 +13802,7 @@
                 <a:ea typeface="Aptos" pitchFamily="34" charset="-122"/>
                 <a:cs typeface="Aptos" pitchFamily="34" charset="-120"/>
               </a:rPr>
-              <a:t>© Paula Soper</a:t>
+              <a:t>Â© Paula Soper</a:t>
             </a:r>
             <a:endParaRPr lang="en-US" sz="800" dirty="0"/>
           </a:p>
@@ -12709,7 +13810,46 @@
       </p:sp>
       <p:sp>
         <p:nvSpPr>
-          <p:cNvPr id="7" name="Shape 5"/>
+          <p:cNvPr id="7" name="Text 5"/>
+          <p:cNvSpPr/>
+          <p:nvPr/>
+        </p:nvSpPr>
+        <p:spPr>
+          <a:xfrm>
+            <a:off x="11137392" y="6510528"/>
+            <a:ext cx="411480" cy="201168"/>
+          </a:xfrm>
+          <a:prstGeom prst="rect">
+            <a:avLst/>
+          </a:prstGeom>
+          <a:noFill/>
+          <a:ln/>
+        </p:spPr>
+        <p:txBody>
+          <a:bodyPr wrap="square" lIns="0" tIns="0" rIns="0" bIns="0" rtlCol="0" anchor="ctr"/>
+          <a:lstStyle/>
+          <a:p>
+            <a:pPr algn="r" indent="0" marL="0">
+              <a:buNone/>
+            </a:pPr>
+            <a:r>
+              <a:rPr lang="en-US" sz="900" dirty="0">
+                <a:solidFill>
+                  <a:srgbClr val="5F7181"/>
+                </a:solidFill>
+                <a:latin typeface="Aptos" pitchFamily="34" charset="0"/>
+                <a:ea typeface="Aptos" pitchFamily="34" charset="-122"/>
+                <a:cs typeface="Aptos" pitchFamily="34" charset="-120"/>
+              </a:rPr>
+              <a:t>8</a:t>
+            </a:r>
+            <a:endParaRPr lang="en-US" sz="900" dirty="0"/>
+          </a:p>
+        </p:txBody>
+      </p:sp>
+      <p:sp>
+        <p:nvSpPr>
+          <p:cNvPr id="8" name="Shape 6"/>
           <p:cNvSpPr/>
           <p:nvPr/>
         </p:nvSpPr>
@@ -12734,7 +13874,7 @@
       </p:sp>
       <p:sp>
         <p:nvSpPr>
-          <p:cNvPr id="8" name="Text 6"/>
+          <p:cNvPr id="9" name="Text 7"/>
           <p:cNvSpPr/>
           <p:nvPr/>
         </p:nvSpPr>
@@ -12773,14 +13913,14 @@
       </p:sp>
       <p:sp>
         <p:nvSpPr>
-          <p:cNvPr id="9" name="Text 7"/>
+          <p:cNvPr id="10" name="Text 8"/>
           <p:cNvSpPr/>
           <p:nvPr/>
         </p:nvSpPr>
         <p:spPr>
           <a:xfrm>
             <a:off x="640080" y="621792"/>
-            <a:ext cx="10881360" cy="566928"/>
+            <a:ext cx="10881360" cy="713232"/>
           </a:xfrm>
           <a:prstGeom prst="rect">
             <a:avLst/>
@@ -12798,7 +13938,7 @@
               <a:buNone/>
             </a:pPr>
             <a:r>
-              <a:rPr lang="en-US" sz="2700" b="1" dirty="0">
+              <a:rPr lang="en-US" sz="3400" b="1" dirty="0">
                 <a:solidFill>
                   <a:srgbClr val="003A63"/>
                 </a:solidFill>
@@ -12808,20 +13948,20 @@
               </a:rPr>
               <a:t>Public Health Example</a:t>
             </a:r>
-            <a:endParaRPr lang="en-US" sz="2700" dirty="0"/>
-          </a:p>
-        </p:txBody>
-      </p:sp>
-      <p:sp>
-        <p:nvSpPr>
-          <p:cNvPr id="10" name="Text 8"/>
-          <p:cNvSpPr/>
-          <p:nvPr/>
-        </p:nvSpPr>
-        <p:spPr>
-          <a:xfrm>
-            <a:off x="868680" y="1417320"/>
-            <a:ext cx="6675120" cy="4434840"/>
+            <a:endParaRPr lang="en-US" sz="3400" dirty="0"/>
+          </a:p>
+        </p:txBody>
+      </p:sp>
+      <p:sp>
+        <p:nvSpPr>
+          <p:cNvPr id="11" name="Text 9"/>
+          <p:cNvSpPr/>
+          <p:nvPr/>
+        </p:nvSpPr>
+        <p:spPr>
+          <a:xfrm>
+            <a:off x="868680" y="1508760"/>
+            <a:ext cx="6537960" cy="4160520"/>
           </a:xfrm>
           <a:prstGeom prst="rect">
             <a:avLst/>
@@ -12836,7 +13976,7 @@
           <a:lstStyle/>
           <a:p>
             <a:r>
-              <a:rPr lang="en-US" sz="1700" dirty="0">
+              <a:rPr lang="en-US" sz="2100" dirty="0">
                 <a:solidFill>
                   <a:srgbClr val="17364A"/>
                 </a:solidFill>
@@ -12846,11 +13986,11 @@
               </a:rPr>
               <a:t>A health department launches an AI assistant to help staff find internal policies and program guidance.</a:t>
             </a:r>
-            <a:endParaRPr lang="en-US" sz="1700" dirty="0"/>
-          </a:p>
-          <a:p>
-            <a:r>
-              <a:rPr lang="en-US" sz="1700" dirty="0">
+            <a:endParaRPr lang="en-US" sz="2100" dirty="0"/>
+          </a:p>
+          <a:p>
+            <a:r>
+              <a:rPr lang="en-US" sz="2100" dirty="0">
                 <a:solidFill>
                   <a:srgbClr val="17364A"/>
                 </a:solidFill>
@@ -12858,13 +13998,13 @@
                 <a:ea typeface="Aptos" pitchFamily="34" charset="-122"/>
                 <a:cs typeface="Aptos" pitchFamily="34" charset="-120"/>
               </a:rPr>
-              <a:t>The tool is technically functional, but staff do not use it because they are unsure whether answers are official, whether.</a:t>
-            </a:r>
-            <a:endParaRPr lang="en-US" sz="1700" dirty="0"/>
-          </a:p>
-          <a:p>
-            <a:r>
-              <a:rPr lang="en-US" sz="1700" dirty="0">
+              <a:t>The tool is technically functional, but staff do not use it because they are unsure whether answers are.</a:t>
+            </a:r>
+            <a:endParaRPr lang="en-US" sz="2100" dirty="0"/>
+          </a:p>
+          <a:p>
+            <a:r>
+              <a:rPr lang="en-US" sz="2100" dirty="0">
                 <a:solidFill>
                   <a:srgbClr val="17364A"/>
                 </a:solidFill>
@@ -12874,27 +14014,13 @@
               </a:rPr>
               <a:t>Some staff worry that the tool will be used to judge their productivity.</a:t>
             </a:r>
-            <a:endParaRPr lang="en-US" sz="1700" dirty="0"/>
-          </a:p>
-          <a:p>
-            <a:r>
-              <a:rPr lang="en-US" sz="1700" dirty="0">
-                <a:solidFill>
-                  <a:srgbClr val="17364A"/>
-                </a:solidFill>
-                <a:latin typeface="Aptos" pitchFamily="34" charset="0"/>
-                <a:ea typeface="Aptos" pitchFamily="34" charset="-122"/>
-                <a:cs typeface="Aptos" pitchFamily="34" charset="-120"/>
-              </a:rPr>
-              <a:t>A change management plan addresses these concerns directly.</a:t>
-            </a:r>
-            <a:endParaRPr lang="en-US" sz="1700" dirty="0"/>
-          </a:p>
-        </p:txBody>
-      </p:sp>
-      <p:sp>
-        <p:nvSpPr>
-          <p:cNvPr id="11" name="Shape 9"/>
+            <a:endParaRPr lang="en-US" sz="2100" dirty="0"/>
+          </a:p>
+        </p:txBody>
+      </p:sp>
+      <p:sp>
+        <p:nvSpPr>
+          <p:cNvPr id="12" name="Shape 10"/>
           <p:cNvSpPr/>
           <p:nvPr/>
         </p:nvSpPr>
@@ -12921,14 +14047,14 @@
       </p:sp>
       <p:sp>
         <p:nvSpPr>
-          <p:cNvPr id="12" name="Text 10"/>
+          <p:cNvPr id="13" name="Text 11"/>
           <p:cNvSpPr/>
           <p:nvPr/>
         </p:nvSpPr>
         <p:spPr>
           <a:xfrm>
             <a:off x="8074152" y="1563624"/>
-            <a:ext cx="2825496" cy="201168"/>
+            <a:ext cx="2825496" cy="256032"/>
           </a:xfrm>
           <a:prstGeom prst="rect">
             <a:avLst/>
@@ -12944,7 +14070,7 @@
               <a:buNone/>
             </a:pPr>
             <a:r>
-              <a:rPr lang="en-US" sz="950" b="1" dirty="0">
+              <a:rPr lang="en-US" sz="1300" b="1" dirty="0">
                 <a:solidFill>
                   <a:srgbClr val="0068B7"/>
                 </a:solidFill>
@@ -12954,20 +14080,20 @@
               </a:rPr>
               <a:t>Key idea</a:t>
             </a:r>
-            <a:endParaRPr lang="en-US" sz="950" dirty="0"/>
-          </a:p>
-        </p:txBody>
-      </p:sp>
-      <p:sp>
-        <p:nvSpPr>
-          <p:cNvPr id="13" name="Text 11"/>
-          <p:cNvSpPr/>
-          <p:nvPr/>
-        </p:nvSpPr>
-        <p:spPr>
-          <a:xfrm>
-            <a:off x="8074152" y="1856232"/>
-            <a:ext cx="2825496" cy="1261872"/>
+            <a:endParaRPr lang="en-US" sz="1300" dirty="0"/>
+          </a:p>
+        </p:txBody>
+      </p:sp>
+      <p:sp>
+        <p:nvSpPr>
+          <p:cNvPr id="14" name="Text 12"/>
+          <p:cNvSpPr/>
+          <p:nvPr/>
+        </p:nvSpPr>
+        <p:spPr>
+          <a:xfrm>
+            <a:off x="8074152" y="1920240"/>
+            <a:ext cx="2825496" cy="1188720"/>
           </a:xfrm>
           <a:prstGeom prst="rect">
             <a:avLst/>
@@ -12985,7 +14111,7 @@
               <a:buNone/>
             </a:pPr>
             <a:r>
-              <a:rPr lang="en-US" sz="1250" dirty="0">
+              <a:rPr lang="en-US" sz="1550" dirty="0">
                 <a:solidFill>
                   <a:srgbClr val="17364A"/>
                 </a:solidFill>
@@ -12995,13 +14121,13 @@
               </a:rPr>
               <a:t>A health department launches an AI assistant to help staff find internal policies and program guidance.</a:t>
             </a:r>
-            <a:endParaRPr lang="en-US" sz="1250" dirty="0"/>
-          </a:p>
-        </p:txBody>
-      </p:sp>
-      <p:sp>
-        <p:nvSpPr>
-          <p:cNvPr id="14" name="Shape 12"/>
+            <a:endParaRPr lang="en-US" sz="1550" dirty="0"/>
+          </a:p>
+        </p:txBody>
+      </p:sp>
+      <p:sp>
+        <p:nvSpPr>
+          <p:cNvPr id="15" name="Shape 13"/>
           <p:cNvSpPr/>
           <p:nvPr/>
         </p:nvSpPr>
@@ -13028,14 +14154,14 @@
       </p:sp>
       <p:sp>
         <p:nvSpPr>
-          <p:cNvPr id="15" name="Text 13"/>
+          <p:cNvPr id="16" name="Text 14"/>
           <p:cNvSpPr/>
           <p:nvPr/>
         </p:nvSpPr>
         <p:spPr>
           <a:xfrm>
             <a:off x="8074152" y="3666744"/>
-            <a:ext cx="2825496" cy="201168"/>
+            <a:ext cx="2825496" cy="256032"/>
           </a:xfrm>
           <a:prstGeom prst="rect">
             <a:avLst/>
@@ -13051,7 +14177,7 @@
               <a:buNone/>
             </a:pPr>
             <a:r>
-              <a:rPr lang="en-US" sz="950" b="1" dirty="0">
+              <a:rPr lang="en-US" sz="1300" b="1" dirty="0">
                 <a:solidFill>
                   <a:srgbClr val="0068B7"/>
                 </a:solidFill>
@@ -13061,20 +14187,20 @@
               </a:rPr>
               <a:t>Use this for</a:t>
             </a:r>
-            <a:endParaRPr lang="en-US" sz="950" dirty="0"/>
-          </a:p>
-        </p:txBody>
-      </p:sp>
-      <p:sp>
-        <p:nvSpPr>
-          <p:cNvPr id="16" name="Text 14"/>
-          <p:cNvSpPr/>
-          <p:nvPr/>
-        </p:nvSpPr>
-        <p:spPr>
-          <a:xfrm>
-            <a:off x="8074152" y="3959352"/>
-            <a:ext cx="2825496" cy="1170432"/>
+            <a:endParaRPr lang="en-US" sz="1300" dirty="0"/>
+          </a:p>
+        </p:txBody>
+      </p:sp>
+      <p:sp>
+        <p:nvSpPr>
+          <p:cNvPr id="17" name="Text 15"/>
+          <p:cNvSpPr/>
+          <p:nvPr/>
+        </p:nvSpPr>
+        <p:spPr>
+          <a:xfrm>
+            <a:off x="8074152" y="4023360"/>
+            <a:ext cx="2825496" cy="1097280"/>
           </a:xfrm>
           <a:prstGeom prst="rect">
             <a:avLst/>
@@ -13092,7 +14218,7 @@
               <a:buNone/>
             </a:pPr>
             <a:r>
-              <a:rPr lang="en-US" sz="1250" dirty="0">
+              <a:rPr lang="en-US" sz="1550" dirty="0">
                 <a:solidFill>
                   <a:srgbClr val="17364A"/>
                 </a:solidFill>
@@ -13102,7 +14228,7 @@
               </a:rPr>
               <a:t>Connect the concept to public health decisions, safeguards, documentation, or implementation work.</a:t>
             </a:r>
-            <a:endParaRPr lang="en-US" sz="1250" dirty="0"/>
+            <a:endParaRPr lang="en-US" sz="1550" dirty="0"/>
           </a:p>
         </p:txBody>
       </p:sp>
@@ -13299,7 +14425,7 @@
                 <a:ea typeface="Aptos" pitchFamily="34" charset="-122"/>
                 <a:cs typeface="Aptos" pitchFamily="34" charset="-120"/>
               </a:rPr>
-              <a:t>© Paula Soper</a:t>
+              <a:t>Â© Paula Soper</a:t>
             </a:r>
             <a:endParaRPr lang="en-US" sz="800" dirty="0"/>
           </a:p>
@@ -13307,7 +14433,46 @@
       </p:sp>
       <p:sp>
         <p:nvSpPr>
-          <p:cNvPr id="7" name="Shape 5"/>
+          <p:cNvPr id="7" name="Text 5"/>
+          <p:cNvSpPr/>
+          <p:nvPr/>
+        </p:nvSpPr>
+        <p:spPr>
+          <a:xfrm>
+            <a:off x="11137392" y="6510528"/>
+            <a:ext cx="411480" cy="201168"/>
+          </a:xfrm>
+          <a:prstGeom prst="rect">
+            <a:avLst/>
+          </a:prstGeom>
+          <a:noFill/>
+          <a:ln/>
+        </p:spPr>
+        <p:txBody>
+          <a:bodyPr wrap="square" lIns="0" tIns="0" rIns="0" bIns="0" rtlCol="0" anchor="ctr"/>
+          <a:lstStyle/>
+          <a:p>
+            <a:pPr algn="r" indent="0" marL="0">
+              <a:buNone/>
+            </a:pPr>
+            <a:r>
+              <a:rPr lang="en-US" sz="900" dirty="0">
+                <a:solidFill>
+                  <a:srgbClr val="5F7181"/>
+                </a:solidFill>
+                <a:latin typeface="Aptos" pitchFamily="34" charset="0"/>
+                <a:ea typeface="Aptos" pitchFamily="34" charset="-122"/>
+                <a:cs typeface="Aptos" pitchFamily="34" charset="-120"/>
+              </a:rPr>
+              <a:t>9</a:t>
+            </a:r>
+            <a:endParaRPr lang="en-US" sz="900" dirty="0"/>
+          </a:p>
+        </p:txBody>
+      </p:sp>
+      <p:sp>
+        <p:nvSpPr>
+          <p:cNvPr id="8" name="Shape 6"/>
           <p:cNvSpPr/>
           <p:nvPr/>
         </p:nvSpPr>
@@ -13332,7 +14497,7 @@
       </p:sp>
       <p:sp>
         <p:nvSpPr>
-          <p:cNvPr id="8" name="Text 6"/>
+          <p:cNvPr id="9" name="Text 7"/>
           <p:cNvSpPr/>
           <p:nvPr/>
         </p:nvSpPr>
@@ -13371,14 +14536,14 @@
       </p:sp>
       <p:sp>
         <p:nvSpPr>
-          <p:cNvPr id="9" name="Text 7"/>
+          <p:cNvPr id="10" name="Text 8"/>
           <p:cNvSpPr/>
           <p:nvPr/>
         </p:nvSpPr>
         <p:spPr>
           <a:xfrm>
             <a:off x="640080" y="621792"/>
-            <a:ext cx="10881360" cy="566928"/>
+            <a:ext cx="10881360" cy="713232"/>
           </a:xfrm>
           <a:prstGeom prst="rect">
             <a:avLst/>
@@ -13396,7 +14561,7 @@
               <a:buNone/>
             </a:pPr>
             <a:r>
-              <a:rPr lang="en-US" sz="2700" b="1" dirty="0">
+              <a:rPr lang="en-US" sz="3400" b="1" dirty="0">
                 <a:solidFill>
                   <a:srgbClr val="003A63"/>
                 </a:solidFill>
@@ -13406,20 +14571,20 @@
               </a:rPr>
               <a:t>Technical and Governance Deep Dive</a:t>
             </a:r>
-            <a:endParaRPr lang="en-US" sz="2700" dirty="0"/>
-          </a:p>
-        </p:txBody>
-      </p:sp>
-      <p:sp>
-        <p:nvSpPr>
-          <p:cNvPr id="10" name="Text 8"/>
-          <p:cNvSpPr/>
-          <p:nvPr/>
-        </p:nvSpPr>
-        <p:spPr>
-          <a:xfrm>
-            <a:off x="868680" y="1417320"/>
-            <a:ext cx="6675120" cy="4434840"/>
+            <a:endParaRPr lang="en-US" sz="3400" dirty="0"/>
+          </a:p>
+        </p:txBody>
+      </p:sp>
+      <p:sp>
+        <p:nvSpPr>
+          <p:cNvPr id="11" name="Text 9"/>
+          <p:cNvSpPr/>
+          <p:nvPr/>
+        </p:nvSpPr>
+        <p:spPr>
+          <a:xfrm>
+            <a:off x="868680" y="1508760"/>
+            <a:ext cx="6537960" cy="4160520"/>
           </a:xfrm>
           <a:prstGeom prst="rect">
             <a:avLst/>
@@ -13434,7 +14599,7 @@
           <a:lstStyle/>
           <a:p>
             <a:r>
-              <a:rPr lang="en-US" sz="1700" dirty="0">
+              <a:rPr lang="en-US" sz="2100" dirty="0">
                 <a:solidFill>
                   <a:srgbClr val="17364A"/>
                 </a:solidFill>
@@ -13444,11 +14609,11 @@
               </a:rPr>
               <a:t>AI change management should begin before procurement or configuration.</a:t>
             </a:r>
-            <a:endParaRPr lang="en-US" sz="1700" dirty="0"/>
-          </a:p>
-          <a:p>
-            <a:r>
-              <a:rPr lang="en-US" sz="1700" dirty="0">
+            <a:endParaRPr lang="en-US" sz="2100" dirty="0"/>
+          </a:p>
+          <a:p>
+            <a:r>
+              <a:rPr lang="en-US" sz="2100" dirty="0">
                 <a:solidFill>
                   <a:srgbClr val="17364A"/>
                 </a:solidFill>
@@ -13456,13 +14621,13 @@
                 <a:ea typeface="Aptos" pitchFamily="34" charset="-122"/>
                 <a:cs typeface="Aptos" pitchFamily="34" charset="-120"/>
               </a:rPr>
-              <a:t>Leaders should identify who will be affected, what pain points the tool is supposed to address, which workflows will.</a:t>
-            </a:r>
-            <a:endParaRPr lang="en-US" sz="1700" dirty="0"/>
-          </a:p>
-          <a:p>
-            <a:r>
-              <a:rPr lang="en-US" sz="1700" dirty="0">
+              <a:t>Leaders should identify who will be affected, what pain points the tool is supposed to address, which.</a:t>
+            </a:r>
+            <a:endParaRPr lang="en-US" sz="2100" dirty="0"/>
+          </a:p>
+          <a:p>
+            <a:r>
+              <a:rPr lang="en-US" sz="2100" dirty="0">
                 <a:solidFill>
                   <a:srgbClr val="17364A"/>
                 </a:solidFill>
@@ -13470,29 +14635,15 @@
                 <a:ea typeface="Aptos" pitchFamily="34" charset="-122"/>
                 <a:cs typeface="Aptos" pitchFamily="34" charset="-120"/>
               </a:rPr>
-              <a:t>Stakeholder engagement should include frontline users, supervisors, program leaders, IT, privacy, legal, communications,.</a:t>
-            </a:r>
-            <a:endParaRPr lang="en-US" sz="1700" dirty="0"/>
-          </a:p>
-          <a:p>
-            <a:r>
-              <a:rPr lang="en-US" sz="1700" dirty="0">
-                <a:solidFill>
-                  <a:srgbClr val="17364A"/>
-                </a:solidFill>
-                <a:latin typeface="Aptos" pitchFamily="34" charset="0"/>
-                <a:ea typeface="Aptos" pitchFamily="34" charset="-122"/>
-                <a:cs typeface="Aptos" pitchFamily="34" charset="-120"/>
-              </a:rPr>
-              <a:t>The communication plan should be specific.</a:t>
-            </a:r>
-            <a:endParaRPr lang="en-US" sz="1700" dirty="0"/>
-          </a:p>
-        </p:txBody>
-      </p:sp>
-      <p:sp>
-        <p:nvSpPr>
-          <p:cNvPr id="11" name="Shape 9"/>
+              <a:t>Stakeholder engagement should include frontline users, supervisors, program leaders, IT, privacy,.</a:t>
+            </a:r>
+            <a:endParaRPr lang="en-US" sz="2100" dirty="0"/>
+          </a:p>
+        </p:txBody>
+      </p:sp>
+      <p:sp>
+        <p:nvSpPr>
+          <p:cNvPr id="12" name="Shape 10"/>
           <p:cNvSpPr/>
           <p:nvPr/>
         </p:nvSpPr>
@@ -13519,14 +14670,14 @@
       </p:sp>
       <p:sp>
         <p:nvSpPr>
-          <p:cNvPr id="12" name="Text 10"/>
+          <p:cNvPr id="13" name="Text 11"/>
           <p:cNvSpPr/>
           <p:nvPr/>
         </p:nvSpPr>
         <p:spPr>
           <a:xfrm>
             <a:off x="8074152" y="1563624"/>
-            <a:ext cx="2825496" cy="201168"/>
+            <a:ext cx="2825496" cy="256032"/>
           </a:xfrm>
           <a:prstGeom prst="rect">
             <a:avLst/>
@@ -13542,7 +14693,7 @@
               <a:buNone/>
             </a:pPr>
             <a:r>
-              <a:rPr lang="en-US" sz="950" b="1" dirty="0">
+              <a:rPr lang="en-US" sz="1300" b="1" dirty="0">
                 <a:solidFill>
                   <a:srgbClr val="0068B7"/>
                 </a:solidFill>
@@ -13552,20 +14703,20 @@
               </a:rPr>
               <a:t>Key idea</a:t>
             </a:r>
-            <a:endParaRPr lang="en-US" sz="950" dirty="0"/>
-          </a:p>
-        </p:txBody>
-      </p:sp>
-      <p:sp>
-        <p:nvSpPr>
-          <p:cNvPr id="13" name="Text 11"/>
-          <p:cNvSpPr/>
-          <p:nvPr/>
-        </p:nvSpPr>
-        <p:spPr>
-          <a:xfrm>
-            <a:off x="8074152" y="1856232"/>
-            <a:ext cx="2825496" cy="1261872"/>
+            <a:endParaRPr lang="en-US" sz="1300" dirty="0"/>
+          </a:p>
+        </p:txBody>
+      </p:sp>
+      <p:sp>
+        <p:nvSpPr>
+          <p:cNvPr id="14" name="Text 12"/>
+          <p:cNvSpPr/>
+          <p:nvPr/>
+        </p:nvSpPr>
+        <p:spPr>
+          <a:xfrm>
+            <a:off x="8074152" y="1920240"/>
+            <a:ext cx="2825496" cy="1188720"/>
           </a:xfrm>
           <a:prstGeom prst="rect">
             <a:avLst/>
@@ -13583,7 +14734,7 @@
               <a:buNone/>
             </a:pPr>
             <a:r>
-              <a:rPr lang="en-US" sz="1250" dirty="0">
+              <a:rPr lang="en-US" sz="1550" dirty="0">
                 <a:solidFill>
                   <a:srgbClr val="17364A"/>
                 </a:solidFill>
@@ -13593,13 +14744,13 @@
               </a:rPr>
               <a:t>AI change management should begin before procurement or configuration.</a:t>
             </a:r>
-            <a:endParaRPr lang="en-US" sz="1250" dirty="0"/>
-          </a:p>
-        </p:txBody>
-      </p:sp>
-      <p:sp>
-        <p:nvSpPr>
-          <p:cNvPr id="14" name="Shape 12"/>
+            <a:endParaRPr lang="en-US" sz="1550" dirty="0"/>
+          </a:p>
+        </p:txBody>
+      </p:sp>
+      <p:sp>
+        <p:nvSpPr>
+          <p:cNvPr id="15" name="Shape 13"/>
           <p:cNvSpPr/>
           <p:nvPr/>
         </p:nvSpPr>
@@ -13626,14 +14777,14 @@
       </p:sp>
       <p:sp>
         <p:nvSpPr>
-          <p:cNvPr id="15" name="Text 13"/>
+          <p:cNvPr id="16" name="Text 14"/>
           <p:cNvSpPr/>
           <p:nvPr/>
         </p:nvSpPr>
         <p:spPr>
           <a:xfrm>
             <a:off x="8074152" y="3666744"/>
-            <a:ext cx="2825496" cy="201168"/>
+            <a:ext cx="2825496" cy="256032"/>
           </a:xfrm>
           <a:prstGeom prst="rect">
             <a:avLst/>
@@ -13649,7 +14800,7 @@
               <a:buNone/>
             </a:pPr>
             <a:r>
-              <a:rPr lang="en-US" sz="950" b="1" dirty="0">
+              <a:rPr lang="en-US" sz="1300" b="1" dirty="0">
                 <a:solidFill>
                   <a:srgbClr val="0068B7"/>
                 </a:solidFill>
@@ -13659,20 +14810,20 @@
               </a:rPr>
               <a:t>Use this for</a:t>
             </a:r>
-            <a:endParaRPr lang="en-US" sz="950" dirty="0"/>
-          </a:p>
-        </p:txBody>
-      </p:sp>
-      <p:sp>
-        <p:nvSpPr>
-          <p:cNvPr id="16" name="Text 14"/>
-          <p:cNvSpPr/>
-          <p:nvPr/>
-        </p:nvSpPr>
-        <p:spPr>
-          <a:xfrm>
-            <a:off x="8074152" y="3959352"/>
-            <a:ext cx="2825496" cy="1170432"/>
+            <a:endParaRPr lang="en-US" sz="1300" dirty="0"/>
+          </a:p>
+        </p:txBody>
+      </p:sp>
+      <p:sp>
+        <p:nvSpPr>
+          <p:cNvPr id="17" name="Text 15"/>
+          <p:cNvSpPr/>
+          <p:nvPr/>
+        </p:nvSpPr>
+        <p:spPr>
+          <a:xfrm>
+            <a:off x="8074152" y="4023360"/>
+            <a:ext cx="2825496" cy="1097280"/>
           </a:xfrm>
           <a:prstGeom prst="rect">
             <a:avLst/>
@@ -13690,7 +14841,7 @@
               <a:buNone/>
             </a:pPr>
             <a:r>
-              <a:rPr lang="en-US" sz="1250" dirty="0">
+              <a:rPr lang="en-US" sz="1550" dirty="0">
                 <a:solidFill>
                   <a:srgbClr val="17364A"/>
                 </a:solidFill>
@@ -13700,7 +14851,7 @@
               </a:rPr>
               <a:t>Connect the concept to public health decisions, safeguards, documentation, or implementation work.</a:t>
             </a:r>
-            <a:endParaRPr lang="en-US" sz="1250" dirty="0"/>
+            <a:endParaRPr lang="en-US" sz="1550" dirty="0"/>
           </a:p>
         </p:txBody>
       </p:sp>
